--- a/docs/presentation/cryptoflow.pptx
+++ b/docs/presentation/cryptoflow.pptx
@@ -5,30 +5,29 @@
     <p:sldMasterId id="2147483660" r:id="rId56"/>
   </p:sldMasterIdLst>
   <p:notesMasterIdLst>
-    <p:notesMasterId r:id="rId75"/>
+    <p:notesMasterId r:id="rId74"/>
   </p:notesMasterIdLst>
   <p:handoutMasterIdLst>
-    <p:handoutMasterId r:id="rId76"/>
+    <p:handoutMasterId r:id="rId75"/>
   </p:handoutMasterIdLst>
   <p:sldIdLst>
     <p:sldId id="256" r:id="rId57"/>
     <p:sldId id="257" r:id="rId58"/>
     <p:sldId id="258" r:id="rId59"/>
-    <p:sldId id="259" r:id="rId60"/>
-    <p:sldId id="260" r:id="rId61"/>
-    <p:sldId id="261" r:id="rId62"/>
-    <p:sldId id="262" r:id="rId63"/>
-    <p:sldId id="263" r:id="rId64"/>
-    <p:sldId id="264" r:id="rId65"/>
-    <p:sldId id="265" r:id="rId66"/>
-    <p:sldId id="266" r:id="rId67"/>
-    <p:sldId id="267" r:id="rId68"/>
-    <p:sldId id="268" r:id="rId69"/>
-    <p:sldId id="269" r:id="rId70"/>
-    <p:sldId id="270" r:id="rId71"/>
-    <p:sldId id="271" r:id="rId72"/>
-    <p:sldId id="272" r:id="rId73"/>
-    <p:sldId id="273" r:id="rId74"/>
+    <p:sldId id="274" r:id="rId60"/>
+    <p:sldId id="259" r:id="rId61"/>
+    <p:sldId id="262" r:id="rId62"/>
+    <p:sldId id="263" r:id="rId63"/>
+    <p:sldId id="264" r:id="rId64"/>
+    <p:sldId id="265" r:id="rId65"/>
+    <p:sldId id="266" r:id="rId66"/>
+    <p:sldId id="267" r:id="rId67"/>
+    <p:sldId id="269" r:id="rId68"/>
+    <p:sldId id="270" r:id="rId69"/>
+    <p:sldId id="275" r:id="rId70"/>
+    <p:sldId id="271" r:id="rId71"/>
+    <p:sldId id="272" r:id="rId72"/>
+    <p:sldId id="273" r:id="rId73"/>
   </p:sldIdLst>
   <p:sldSz cx="9144000" cy="5143500" type="screen16x9"/>
   <p:notesSz cx="6858000" cy="9144000"/>
@@ -152,9 +151,508 @@
 <file path=ppt/revisionInfo.xml><?xml version="1.0" encoding="utf-8"?>
 <p1510:revInfo xmlns:a="http://schemas.openxmlformats.org/drawingml/2006/main" xmlns:r="http://schemas.openxmlformats.org/officeDocument/2006/relationships" xmlns:p1510="http://schemas.microsoft.com/office/powerpoint/2015/10/main">
   <p1510:revLst>
-    <p1510:client id="{724153FF-106B-724B-B9D7-549C31D8F797}" v="1" dt="2026-04-10T12:22:08.536"/>
+    <p1510:client id="{B0A1087C-1C87-F64B-8F02-62FA3A69F4E0}" v="1300" dt="2026-04-12T17:37:10.045"/>
+    <p1510:client id="{E5D7D1B7-876E-1386-33E6-EA420D72BC46}" v="1" dt="2026-04-12T15:24:01.910"/>
   </p1510:revLst>
 </p1510:revInfo>
+</file>
+
+<file path=ppt/changesInfos/changesInfo1.xml><?xml version="1.0" encoding="utf-8"?>
+<pc:chgInfo xmlns:a="http://schemas.openxmlformats.org/drawingml/2006/main" xmlns:r="http://schemas.openxmlformats.org/officeDocument/2006/relationships" xmlns:ac="http://schemas.microsoft.com/office/drawing/2013/main/command" xmlns:pc="http://schemas.microsoft.com/office/powerpoint/2013/main/command">
+  <pc:docChgLst>
+    <pc:chgData name="Theodosiadis, Ioannis" userId="S::ioannis.theodosiadis@student.unisg.ch::3e5ab6a3-7003-4a3e-bd62-affcd0d9d0ec" providerId="AD" clId="Web-{E5D7D1B7-876E-1386-33E6-EA420D72BC46}"/>
+    <pc:docChg chg="sldOrd">
+      <pc:chgData name="Theodosiadis, Ioannis" userId="S::ioannis.theodosiadis@student.unisg.ch::3e5ab6a3-7003-4a3e-bd62-affcd0d9d0ec" providerId="AD" clId="Web-{E5D7D1B7-876E-1386-33E6-EA420D72BC46}" dt="2026-04-12T15:24:01.910" v="0"/>
+      <pc:docMkLst>
+        <pc:docMk/>
+      </pc:docMkLst>
+      <pc:sldChg chg="ord">
+        <pc:chgData name="Theodosiadis, Ioannis" userId="S::ioannis.theodosiadis@student.unisg.ch::3e5ab6a3-7003-4a3e-bd62-affcd0d9d0ec" providerId="AD" clId="Web-{E5D7D1B7-876E-1386-33E6-EA420D72BC46}" dt="2026-04-12T15:24:01.910" v="0"/>
+        <pc:sldMkLst>
+          <pc:docMk/>
+          <pc:sldMk cId="3410646215" sldId="274"/>
+        </pc:sldMkLst>
+      </pc:sldChg>
+    </pc:docChg>
+  </pc:docChgLst>
+  <pc:docChgLst>
+    <pc:chgData name="Gabriele, Cyril" userId="1be75a10-e39f-4032-8195-d4e5b0ea0b62" providerId="ADAL" clId="{B0A1087C-1C87-F64B-8F02-62FA3A69F4E0}"/>
+    <pc:docChg chg="undo custSel addSld delSld modSld">
+      <pc:chgData name="Gabriele, Cyril" userId="1be75a10-e39f-4032-8195-d4e5b0ea0b62" providerId="ADAL" clId="{B0A1087C-1C87-F64B-8F02-62FA3A69F4E0}" dt="2026-04-12T17:37:10.045" v="1305" actId="207"/>
+      <pc:docMkLst>
+        <pc:docMk/>
+      </pc:docMkLst>
+      <pc:sldChg chg="modSp mod">
+        <pc:chgData name="Gabriele, Cyril" userId="1be75a10-e39f-4032-8195-d4e5b0ea0b62" providerId="ADAL" clId="{B0A1087C-1C87-F64B-8F02-62FA3A69F4E0}" dt="2026-04-12T15:50:43.032" v="420" actId="207"/>
+        <pc:sldMkLst>
+          <pc:docMk/>
+          <pc:sldMk cId="0" sldId="256"/>
+        </pc:sldMkLst>
+        <pc:spChg chg="mod">
+          <ac:chgData name="Gabriele, Cyril" userId="1be75a10-e39f-4032-8195-d4e5b0ea0b62" providerId="ADAL" clId="{B0A1087C-1C87-F64B-8F02-62FA3A69F4E0}" dt="2026-04-12T15:50:43.032" v="420" actId="207"/>
+          <ac:spMkLst>
+            <pc:docMk/>
+            <pc:sldMk cId="0" sldId="256"/>
+            <ac:spMk id="3" creationId="{00000000-0000-0000-0000-000000000000}"/>
+          </ac:spMkLst>
+        </pc:spChg>
+      </pc:sldChg>
+      <pc:sldChg chg="addSp delSp modSp mod">
+        <pc:chgData name="Gabriele, Cyril" userId="1be75a10-e39f-4032-8195-d4e5b0ea0b62" providerId="ADAL" clId="{B0A1087C-1C87-F64B-8F02-62FA3A69F4E0}" dt="2026-04-12T16:21:28.192" v="790" actId="113"/>
+        <pc:sldMkLst>
+          <pc:docMk/>
+          <pc:sldMk cId="0" sldId="257"/>
+        </pc:sldMkLst>
+        <pc:spChg chg="mod">
+          <ac:chgData name="Gabriele, Cyril" userId="1be75a10-e39f-4032-8195-d4e5b0ea0b62" providerId="ADAL" clId="{B0A1087C-1C87-F64B-8F02-62FA3A69F4E0}" dt="2026-04-12T16:21:28.192" v="790" actId="113"/>
+          <ac:spMkLst>
+            <pc:docMk/>
+            <pc:sldMk cId="0" sldId="257"/>
+            <ac:spMk id="2" creationId="{00000000-0000-0000-0000-000000000000}"/>
+          </ac:spMkLst>
+        </pc:spChg>
+        <pc:spChg chg="mod">
+          <ac:chgData name="Gabriele, Cyril" userId="1be75a10-e39f-4032-8195-d4e5b0ea0b62" providerId="ADAL" clId="{B0A1087C-1C87-F64B-8F02-62FA3A69F4E0}" dt="2026-04-12T15:47:29.580" v="405" actId="1076"/>
+          <ac:spMkLst>
+            <pc:docMk/>
+            <pc:sldMk cId="0" sldId="257"/>
+            <ac:spMk id="3" creationId="{00000000-0000-0000-0000-000000000000}"/>
+          </ac:spMkLst>
+        </pc:spChg>
+        <pc:spChg chg="add del mod">
+          <ac:chgData name="Gabriele, Cyril" userId="1be75a10-e39f-4032-8195-d4e5b0ea0b62" providerId="ADAL" clId="{B0A1087C-1C87-F64B-8F02-62FA3A69F4E0}" dt="2026-04-12T15:50:04.199" v="415"/>
+          <ac:spMkLst>
+            <pc:docMk/>
+            <pc:sldMk cId="0" sldId="257"/>
+            <ac:spMk id="4" creationId="{82F7E517-7B99-745D-B957-32F7CC0E8A98}"/>
+          </ac:spMkLst>
+        </pc:spChg>
+        <pc:spChg chg="add del mod">
+          <ac:chgData name="Gabriele, Cyril" userId="1be75a10-e39f-4032-8195-d4e5b0ea0b62" providerId="ADAL" clId="{B0A1087C-1C87-F64B-8F02-62FA3A69F4E0}" dt="2026-04-12T15:50:04.199" v="413"/>
+          <ac:spMkLst>
+            <pc:docMk/>
+            <pc:sldMk cId="0" sldId="257"/>
+            <ac:spMk id="5" creationId="{2F784B29-1FDD-E94C-EA11-B1436FDA66D2}"/>
+          </ac:spMkLst>
+        </pc:spChg>
+        <pc:spChg chg="add del mod">
+          <ac:chgData name="Gabriele, Cyril" userId="1be75a10-e39f-4032-8195-d4e5b0ea0b62" providerId="ADAL" clId="{B0A1087C-1C87-F64B-8F02-62FA3A69F4E0}" dt="2026-04-12T15:50:03.976" v="411"/>
+          <ac:spMkLst>
+            <pc:docMk/>
+            <pc:sldMk cId="0" sldId="257"/>
+            <ac:spMk id="7" creationId="{94F25265-D12F-4DEE-082D-7954606B1CB8}"/>
+          </ac:spMkLst>
+        </pc:spChg>
+        <pc:spChg chg="add del mod">
+          <ac:chgData name="Gabriele, Cyril" userId="1be75a10-e39f-4032-8195-d4e5b0ea0b62" providerId="ADAL" clId="{B0A1087C-1C87-F64B-8F02-62FA3A69F4E0}" dt="2026-04-12T15:50:04.685" v="417"/>
+          <ac:spMkLst>
+            <pc:docMk/>
+            <pc:sldMk cId="0" sldId="257"/>
+            <ac:spMk id="8" creationId="{D6ABCC4C-3B69-2D5F-5711-00F46605743F}"/>
+          </ac:spMkLst>
+        </pc:spChg>
+      </pc:sldChg>
+      <pc:sldChg chg="modSp mod">
+        <pc:chgData name="Gabriele, Cyril" userId="1be75a10-e39f-4032-8195-d4e5b0ea0b62" providerId="ADAL" clId="{B0A1087C-1C87-F64B-8F02-62FA3A69F4E0}" dt="2026-04-12T16:23:17.114" v="817" actId="108"/>
+        <pc:sldMkLst>
+          <pc:docMk/>
+          <pc:sldMk cId="0" sldId="258"/>
+        </pc:sldMkLst>
+        <pc:spChg chg="mod">
+          <ac:chgData name="Gabriele, Cyril" userId="1be75a10-e39f-4032-8195-d4e5b0ea0b62" providerId="ADAL" clId="{B0A1087C-1C87-F64B-8F02-62FA3A69F4E0}" dt="2026-04-12T16:21:23.540" v="788" actId="20577"/>
+          <ac:spMkLst>
+            <pc:docMk/>
+            <pc:sldMk cId="0" sldId="258"/>
+            <ac:spMk id="2" creationId="{00000000-0000-0000-0000-000000000000}"/>
+          </ac:spMkLst>
+        </pc:spChg>
+        <pc:spChg chg="mod">
+          <ac:chgData name="Gabriele, Cyril" userId="1be75a10-e39f-4032-8195-d4e5b0ea0b62" providerId="ADAL" clId="{B0A1087C-1C87-F64B-8F02-62FA3A69F4E0}" dt="2026-04-12T16:23:17.114" v="817" actId="108"/>
+          <ac:spMkLst>
+            <pc:docMk/>
+            <pc:sldMk cId="0" sldId="258"/>
+            <ac:spMk id="3" creationId="{00000000-0000-0000-0000-000000000000}"/>
+          </ac:spMkLst>
+        </pc:spChg>
+      </pc:sldChg>
+      <pc:sldChg chg="addSp delSp modSp mod">
+        <pc:chgData name="Gabriele, Cyril" userId="1be75a10-e39f-4032-8195-d4e5b0ea0b62" providerId="ADAL" clId="{B0A1087C-1C87-F64B-8F02-62FA3A69F4E0}" dt="2026-04-12T16:21:08.896" v="781" actId="207"/>
+        <pc:sldMkLst>
+          <pc:docMk/>
+          <pc:sldMk cId="0" sldId="259"/>
+        </pc:sldMkLst>
+        <pc:spChg chg="mod">
+          <ac:chgData name="Gabriele, Cyril" userId="1be75a10-e39f-4032-8195-d4e5b0ea0b62" providerId="ADAL" clId="{B0A1087C-1C87-F64B-8F02-62FA3A69F4E0}" dt="2026-04-12T16:21:08.896" v="781" actId="207"/>
+          <ac:spMkLst>
+            <pc:docMk/>
+            <pc:sldMk cId="0" sldId="259"/>
+            <ac:spMk id="2" creationId="{00000000-0000-0000-0000-000000000000}"/>
+          </ac:spMkLst>
+        </pc:spChg>
+        <pc:spChg chg="mod">
+          <ac:chgData name="Gabriele, Cyril" userId="1be75a10-e39f-4032-8195-d4e5b0ea0b62" providerId="ADAL" clId="{B0A1087C-1C87-F64B-8F02-62FA3A69F4E0}" dt="2026-04-12T16:11:33.200" v="583" actId="20577"/>
+          <ac:spMkLst>
+            <pc:docMk/>
+            <pc:sldMk cId="0" sldId="259"/>
+            <ac:spMk id="3" creationId="{00000000-0000-0000-0000-000000000000}"/>
+          </ac:spMkLst>
+        </pc:spChg>
+        <pc:spChg chg="add del mod">
+          <ac:chgData name="Gabriele, Cyril" userId="1be75a10-e39f-4032-8195-d4e5b0ea0b62" providerId="ADAL" clId="{B0A1087C-1C87-F64B-8F02-62FA3A69F4E0}" dt="2026-04-12T15:31:15.894" v="245"/>
+          <ac:spMkLst>
+            <pc:docMk/>
+            <pc:sldMk cId="0" sldId="259"/>
+            <ac:spMk id="5" creationId="{32C34B0F-AE5D-94DF-0528-CCAF6CB7E46B}"/>
+          </ac:spMkLst>
+        </pc:spChg>
+        <pc:spChg chg="add mod">
+          <ac:chgData name="Gabriele, Cyril" userId="1be75a10-e39f-4032-8195-d4e5b0ea0b62" providerId="ADAL" clId="{B0A1087C-1C87-F64B-8F02-62FA3A69F4E0}" dt="2026-04-12T16:04:18.992" v="508" actId="571"/>
+          <ac:spMkLst>
+            <pc:docMk/>
+            <pc:sldMk cId="0" sldId="259"/>
+            <ac:spMk id="7" creationId="{01747B22-E7C6-BB49-1488-E3AFB53DEC4D}"/>
+          </ac:spMkLst>
+        </pc:spChg>
+        <pc:picChg chg="mod">
+          <ac:chgData name="Gabriele, Cyril" userId="1be75a10-e39f-4032-8195-d4e5b0ea0b62" providerId="ADAL" clId="{B0A1087C-1C87-F64B-8F02-62FA3A69F4E0}" dt="2026-04-12T16:04:13.861" v="506" actId="1076"/>
+          <ac:picMkLst>
+            <pc:docMk/>
+            <pc:sldMk cId="0" sldId="259"/>
+            <ac:picMk id="4" creationId="{00000000-0000-0000-0000-000000000000}"/>
+          </ac:picMkLst>
+        </pc:picChg>
+      </pc:sldChg>
+      <pc:sldChg chg="del">
+        <pc:chgData name="Gabriele, Cyril" userId="1be75a10-e39f-4032-8195-d4e5b0ea0b62" providerId="ADAL" clId="{B0A1087C-1C87-F64B-8F02-62FA3A69F4E0}" dt="2026-04-12T15:21:30.350" v="0" actId="2696"/>
+        <pc:sldMkLst>
+          <pc:docMk/>
+          <pc:sldMk cId="0" sldId="260"/>
+        </pc:sldMkLst>
+      </pc:sldChg>
+      <pc:sldChg chg="del">
+        <pc:chgData name="Gabriele, Cyril" userId="1be75a10-e39f-4032-8195-d4e5b0ea0b62" providerId="ADAL" clId="{B0A1087C-1C87-F64B-8F02-62FA3A69F4E0}" dt="2026-04-12T15:21:30.350" v="0" actId="2696"/>
+        <pc:sldMkLst>
+          <pc:docMk/>
+          <pc:sldMk cId="0" sldId="261"/>
+        </pc:sldMkLst>
+      </pc:sldChg>
+      <pc:sldChg chg="modSp mod">
+        <pc:chgData name="Gabriele, Cyril" userId="1be75a10-e39f-4032-8195-d4e5b0ea0b62" providerId="ADAL" clId="{B0A1087C-1C87-F64B-8F02-62FA3A69F4E0}" dt="2026-04-12T16:21:04.344" v="779" actId="113"/>
+        <pc:sldMkLst>
+          <pc:docMk/>
+          <pc:sldMk cId="0" sldId="262"/>
+        </pc:sldMkLst>
+        <pc:spChg chg="mod">
+          <ac:chgData name="Gabriele, Cyril" userId="1be75a10-e39f-4032-8195-d4e5b0ea0b62" providerId="ADAL" clId="{B0A1087C-1C87-F64B-8F02-62FA3A69F4E0}" dt="2026-04-12T16:21:04.344" v="779" actId="113"/>
+          <ac:spMkLst>
+            <pc:docMk/>
+            <pc:sldMk cId="0" sldId="262"/>
+            <ac:spMk id="2" creationId="{00000000-0000-0000-0000-000000000000}"/>
+          </ac:spMkLst>
+        </pc:spChg>
+        <pc:spChg chg="mod">
+          <ac:chgData name="Gabriele, Cyril" userId="1be75a10-e39f-4032-8195-d4e5b0ea0b62" providerId="ADAL" clId="{B0A1087C-1C87-F64B-8F02-62FA3A69F4E0}" dt="2026-04-12T16:20:25.108" v="761" actId="404"/>
+          <ac:spMkLst>
+            <pc:docMk/>
+            <pc:sldMk cId="0" sldId="262"/>
+            <ac:spMk id="3" creationId="{00000000-0000-0000-0000-000000000000}"/>
+          </ac:spMkLst>
+        </pc:spChg>
+      </pc:sldChg>
+      <pc:sldChg chg="modSp mod">
+        <pc:chgData name="Gabriele, Cyril" userId="1be75a10-e39f-4032-8195-d4e5b0ea0b62" providerId="ADAL" clId="{B0A1087C-1C87-F64B-8F02-62FA3A69F4E0}" dt="2026-04-12T16:20:55.836" v="777" actId="113"/>
+        <pc:sldMkLst>
+          <pc:docMk/>
+          <pc:sldMk cId="0" sldId="263"/>
+        </pc:sldMkLst>
+        <pc:spChg chg="mod">
+          <ac:chgData name="Gabriele, Cyril" userId="1be75a10-e39f-4032-8195-d4e5b0ea0b62" providerId="ADAL" clId="{B0A1087C-1C87-F64B-8F02-62FA3A69F4E0}" dt="2026-04-12T16:20:55.836" v="777" actId="113"/>
+          <ac:spMkLst>
+            <pc:docMk/>
+            <pc:sldMk cId="0" sldId="263"/>
+            <ac:spMk id="2" creationId="{00000000-0000-0000-0000-000000000000}"/>
+          </ac:spMkLst>
+        </pc:spChg>
+        <pc:spChg chg="mod">
+          <ac:chgData name="Gabriele, Cyril" userId="1be75a10-e39f-4032-8195-d4e5b0ea0b62" providerId="ADAL" clId="{B0A1087C-1C87-F64B-8F02-62FA3A69F4E0}" dt="2026-04-12T16:19:41.590" v="747" actId="20577"/>
+          <ac:spMkLst>
+            <pc:docMk/>
+            <pc:sldMk cId="0" sldId="263"/>
+            <ac:spMk id="3" creationId="{00000000-0000-0000-0000-000000000000}"/>
+          </ac:spMkLst>
+        </pc:spChg>
+      </pc:sldChg>
+      <pc:sldChg chg="delSp modSp mod modNotesTx">
+        <pc:chgData name="Gabriele, Cyril" userId="1be75a10-e39f-4032-8195-d4e5b0ea0b62" providerId="ADAL" clId="{B0A1087C-1C87-F64B-8F02-62FA3A69F4E0}" dt="2026-04-12T16:20:47.134" v="772" actId="20577"/>
+        <pc:sldMkLst>
+          <pc:docMk/>
+          <pc:sldMk cId="0" sldId="264"/>
+        </pc:sldMkLst>
+        <pc:spChg chg="mod">
+          <ac:chgData name="Gabriele, Cyril" userId="1be75a10-e39f-4032-8195-d4e5b0ea0b62" providerId="ADAL" clId="{B0A1087C-1C87-F64B-8F02-62FA3A69F4E0}" dt="2026-04-12T16:20:47.134" v="772" actId="20577"/>
+          <ac:spMkLst>
+            <pc:docMk/>
+            <pc:sldMk cId="0" sldId="264"/>
+            <ac:spMk id="2" creationId="{00000000-0000-0000-0000-000000000000}"/>
+          </ac:spMkLst>
+        </pc:spChg>
+        <pc:spChg chg="del mod">
+          <ac:chgData name="Gabriele, Cyril" userId="1be75a10-e39f-4032-8195-d4e5b0ea0b62" providerId="ADAL" clId="{B0A1087C-1C87-F64B-8F02-62FA3A69F4E0}" dt="2026-04-12T16:16:52.921" v="651" actId="478"/>
+          <ac:spMkLst>
+            <pc:docMk/>
+            <pc:sldMk cId="0" sldId="264"/>
+            <ac:spMk id="3" creationId="{00000000-0000-0000-0000-000000000000}"/>
+          </ac:spMkLst>
+        </pc:spChg>
+        <pc:picChg chg="mod">
+          <ac:chgData name="Gabriele, Cyril" userId="1be75a10-e39f-4032-8195-d4e5b0ea0b62" providerId="ADAL" clId="{B0A1087C-1C87-F64B-8F02-62FA3A69F4E0}" dt="2026-04-12T16:17:02.932" v="654" actId="1076"/>
+          <ac:picMkLst>
+            <pc:docMk/>
+            <pc:sldMk cId="0" sldId="264"/>
+            <ac:picMk id="4" creationId="{00000000-0000-0000-0000-000000000000}"/>
+          </ac:picMkLst>
+        </pc:picChg>
+      </pc:sldChg>
+      <pc:sldChg chg="modSp mod modNotesTx">
+        <pc:chgData name="Gabriele, Cyril" userId="1be75a10-e39f-4032-8195-d4e5b0ea0b62" providerId="ADAL" clId="{B0A1087C-1C87-F64B-8F02-62FA3A69F4E0}" dt="2026-04-12T16:24:28.375" v="859" actId="207"/>
+        <pc:sldMkLst>
+          <pc:docMk/>
+          <pc:sldMk cId="0" sldId="265"/>
+        </pc:sldMkLst>
+        <pc:spChg chg="mod">
+          <ac:chgData name="Gabriele, Cyril" userId="1be75a10-e39f-4032-8195-d4e5b0ea0b62" providerId="ADAL" clId="{B0A1087C-1C87-F64B-8F02-62FA3A69F4E0}" dt="2026-04-12T16:21:44.201" v="797" actId="207"/>
+          <ac:spMkLst>
+            <pc:docMk/>
+            <pc:sldMk cId="0" sldId="265"/>
+            <ac:spMk id="2" creationId="{00000000-0000-0000-0000-000000000000}"/>
+          </ac:spMkLst>
+        </pc:spChg>
+        <pc:spChg chg="mod">
+          <ac:chgData name="Gabriele, Cyril" userId="1be75a10-e39f-4032-8195-d4e5b0ea0b62" providerId="ADAL" clId="{B0A1087C-1C87-F64B-8F02-62FA3A69F4E0}" dt="2026-04-12T16:24:28.375" v="859" actId="207"/>
+          <ac:spMkLst>
+            <pc:docMk/>
+            <pc:sldMk cId="0" sldId="265"/>
+            <ac:spMk id="3" creationId="{00000000-0000-0000-0000-000000000000}"/>
+          </ac:spMkLst>
+        </pc:spChg>
+      </pc:sldChg>
+      <pc:sldChg chg="addSp delSp modSp mod modAnim modNotesTx">
+        <pc:chgData name="Gabriele, Cyril" userId="1be75a10-e39f-4032-8195-d4e5b0ea0b62" providerId="ADAL" clId="{B0A1087C-1C87-F64B-8F02-62FA3A69F4E0}" dt="2026-04-12T17:30:57.474" v="1235"/>
+        <pc:sldMkLst>
+          <pc:docMk/>
+          <pc:sldMk cId="0" sldId="266"/>
+        </pc:sldMkLst>
+        <pc:spChg chg="mod">
+          <ac:chgData name="Gabriele, Cyril" userId="1be75a10-e39f-4032-8195-d4e5b0ea0b62" providerId="ADAL" clId="{B0A1087C-1C87-F64B-8F02-62FA3A69F4E0}" dt="2026-04-12T16:26:12.766" v="916" actId="20577"/>
+          <ac:spMkLst>
+            <pc:docMk/>
+            <pc:sldMk cId="0" sldId="266"/>
+            <ac:spMk id="2" creationId="{00000000-0000-0000-0000-000000000000}"/>
+          </ac:spMkLst>
+        </pc:spChg>
+        <pc:spChg chg="mod">
+          <ac:chgData name="Gabriele, Cyril" userId="1be75a10-e39f-4032-8195-d4e5b0ea0b62" providerId="ADAL" clId="{B0A1087C-1C87-F64B-8F02-62FA3A69F4E0}" dt="2026-04-12T16:30:24.016" v="993" actId="5793"/>
+          <ac:spMkLst>
+            <pc:docMk/>
+            <pc:sldMk cId="0" sldId="266"/>
+            <ac:spMk id="3" creationId="{00000000-0000-0000-0000-000000000000}"/>
+          </ac:spMkLst>
+        </pc:spChg>
+        <pc:spChg chg="add del mod">
+          <ac:chgData name="Gabriele, Cyril" userId="1be75a10-e39f-4032-8195-d4e5b0ea0b62" providerId="ADAL" clId="{B0A1087C-1C87-F64B-8F02-62FA3A69F4E0}" dt="2026-04-12T16:28:02.531" v="951" actId="478"/>
+          <ac:spMkLst>
+            <pc:docMk/>
+            <pc:sldMk cId="0" sldId="266"/>
+            <ac:spMk id="5" creationId="{6059272D-4E14-A6D8-D546-6DF8D5901240}"/>
+          </ac:spMkLst>
+        </pc:spChg>
+        <pc:spChg chg="add mod">
+          <ac:chgData name="Gabriele, Cyril" userId="1be75a10-e39f-4032-8195-d4e5b0ea0b62" providerId="ADAL" clId="{B0A1087C-1C87-F64B-8F02-62FA3A69F4E0}" dt="2026-04-12T16:30:16.710" v="988" actId="113"/>
+          <ac:spMkLst>
+            <pc:docMk/>
+            <pc:sldMk cId="0" sldId="266"/>
+            <ac:spMk id="6" creationId="{F1B45157-86E2-C7EA-4A8F-2D6A17FBCD74}"/>
+          </ac:spMkLst>
+        </pc:spChg>
+        <pc:spChg chg="add mod">
+          <ac:chgData name="Gabriele, Cyril" userId="1be75a10-e39f-4032-8195-d4e5b0ea0b62" providerId="ADAL" clId="{B0A1087C-1C87-F64B-8F02-62FA3A69F4E0}" dt="2026-04-12T16:30:17.743" v="989" actId="113"/>
+          <ac:spMkLst>
+            <pc:docMk/>
+            <pc:sldMk cId="0" sldId="266"/>
+            <ac:spMk id="7" creationId="{7E152D5C-2A61-DCBA-A6B7-B73DEC5DFCB6}"/>
+          </ac:spMkLst>
+        </pc:spChg>
+        <pc:spChg chg="add mod">
+          <ac:chgData name="Gabriele, Cyril" userId="1be75a10-e39f-4032-8195-d4e5b0ea0b62" providerId="ADAL" clId="{B0A1087C-1C87-F64B-8F02-62FA3A69F4E0}" dt="2026-04-12T17:30:50.164" v="1234" actId="1076"/>
+          <ac:spMkLst>
+            <pc:docMk/>
+            <pc:sldMk cId="0" sldId="266"/>
+            <ac:spMk id="11" creationId="{718393B8-F7CE-7EAF-6DAC-912914279752}"/>
+          </ac:spMkLst>
+        </pc:spChg>
+        <pc:cxnChg chg="add mod">
+          <ac:chgData name="Gabriele, Cyril" userId="1be75a10-e39f-4032-8195-d4e5b0ea0b62" providerId="ADAL" clId="{B0A1087C-1C87-F64B-8F02-62FA3A69F4E0}" dt="2026-04-12T16:31:54.672" v="1053" actId="1076"/>
+          <ac:cxnSpMkLst>
+            <pc:docMk/>
+            <pc:sldMk cId="0" sldId="266"/>
+            <ac:cxnSpMk id="9" creationId="{5F819B6F-172D-5ED2-B0FC-A7606433C241}"/>
+          </ac:cxnSpMkLst>
+        </pc:cxnChg>
+      </pc:sldChg>
+      <pc:sldChg chg="delSp modSp mod modNotesTx">
+        <pc:chgData name="Gabriele, Cyril" userId="1be75a10-e39f-4032-8195-d4e5b0ea0b62" providerId="ADAL" clId="{B0A1087C-1C87-F64B-8F02-62FA3A69F4E0}" dt="2026-04-12T16:32:28.631" v="1063" actId="1076"/>
+        <pc:sldMkLst>
+          <pc:docMk/>
+          <pc:sldMk cId="0" sldId="267"/>
+        </pc:sldMkLst>
+        <pc:spChg chg="mod">
+          <ac:chgData name="Gabriele, Cyril" userId="1be75a10-e39f-4032-8195-d4e5b0ea0b62" providerId="ADAL" clId="{B0A1087C-1C87-F64B-8F02-62FA3A69F4E0}" dt="2026-04-12T16:17:33.393" v="664" actId="113"/>
+          <ac:spMkLst>
+            <pc:docMk/>
+            <pc:sldMk cId="0" sldId="267"/>
+            <ac:spMk id="2" creationId="{00000000-0000-0000-0000-000000000000}"/>
+          </ac:spMkLst>
+        </pc:spChg>
+        <pc:spChg chg="del mod">
+          <ac:chgData name="Gabriele, Cyril" userId="1be75a10-e39f-4032-8195-d4e5b0ea0b62" providerId="ADAL" clId="{B0A1087C-1C87-F64B-8F02-62FA3A69F4E0}" dt="2026-04-12T16:32:11.571" v="1058" actId="478"/>
+          <ac:spMkLst>
+            <pc:docMk/>
+            <pc:sldMk cId="0" sldId="267"/>
+            <ac:spMk id="3" creationId="{00000000-0000-0000-0000-000000000000}"/>
+          </ac:spMkLst>
+        </pc:spChg>
+        <pc:picChg chg="mod">
+          <ac:chgData name="Gabriele, Cyril" userId="1be75a10-e39f-4032-8195-d4e5b0ea0b62" providerId="ADAL" clId="{B0A1087C-1C87-F64B-8F02-62FA3A69F4E0}" dt="2026-04-12T16:32:28.631" v="1063" actId="1076"/>
+          <ac:picMkLst>
+            <pc:docMk/>
+            <pc:sldMk cId="0" sldId="267"/>
+            <ac:picMk id="4" creationId="{00000000-0000-0000-0000-000000000000}"/>
+          </ac:picMkLst>
+        </pc:picChg>
+      </pc:sldChg>
+      <pc:sldChg chg="modSp del mod modNotesTx">
+        <pc:chgData name="Gabriele, Cyril" userId="1be75a10-e39f-4032-8195-d4e5b0ea0b62" providerId="ADAL" clId="{B0A1087C-1C87-F64B-8F02-62FA3A69F4E0}" dt="2026-04-12T15:29:10.937" v="148" actId="2696"/>
+        <pc:sldMkLst>
+          <pc:docMk/>
+          <pc:sldMk cId="0" sldId="268"/>
+        </pc:sldMkLst>
+        <pc:spChg chg="mod">
+          <ac:chgData name="Gabriele, Cyril" userId="1be75a10-e39f-4032-8195-d4e5b0ea0b62" providerId="ADAL" clId="{B0A1087C-1C87-F64B-8F02-62FA3A69F4E0}" dt="2026-04-12T15:29:08.082" v="147" actId="21"/>
+          <ac:spMkLst>
+            <pc:docMk/>
+            <pc:sldMk cId="0" sldId="268"/>
+            <ac:spMk id="3" creationId="{00000000-0000-0000-0000-000000000000}"/>
+          </ac:spMkLst>
+        </pc:spChg>
+      </pc:sldChg>
+      <pc:sldChg chg="modSp mod modNotesTx">
+        <pc:chgData name="Gabriele, Cyril" userId="1be75a10-e39f-4032-8195-d4e5b0ea0b62" providerId="ADAL" clId="{B0A1087C-1C87-F64B-8F02-62FA3A69F4E0}" dt="2026-04-12T17:36:51.656" v="1301" actId="207"/>
+        <pc:sldMkLst>
+          <pc:docMk/>
+          <pc:sldMk cId="0" sldId="269"/>
+        </pc:sldMkLst>
+        <pc:spChg chg="mod">
+          <ac:chgData name="Gabriele, Cyril" userId="1be75a10-e39f-4032-8195-d4e5b0ea0b62" providerId="ADAL" clId="{B0A1087C-1C87-F64B-8F02-62FA3A69F4E0}" dt="2026-04-12T17:36:28.508" v="1296" actId="207"/>
+          <ac:spMkLst>
+            <pc:docMk/>
+            <pc:sldMk cId="0" sldId="269"/>
+            <ac:spMk id="2" creationId="{00000000-0000-0000-0000-000000000000}"/>
+          </ac:spMkLst>
+        </pc:spChg>
+        <pc:spChg chg="mod">
+          <ac:chgData name="Gabriele, Cyril" userId="1be75a10-e39f-4032-8195-d4e5b0ea0b62" providerId="ADAL" clId="{B0A1087C-1C87-F64B-8F02-62FA3A69F4E0}" dt="2026-04-12T17:36:51.656" v="1301" actId="207"/>
+          <ac:spMkLst>
+            <pc:docMk/>
+            <pc:sldMk cId="0" sldId="269"/>
+            <ac:spMk id="3" creationId="{00000000-0000-0000-0000-000000000000}"/>
+          </ac:spMkLst>
+        </pc:spChg>
+      </pc:sldChg>
+      <pc:sldChg chg="modSp mod">
+        <pc:chgData name="Gabriele, Cyril" userId="1be75a10-e39f-4032-8195-d4e5b0ea0b62" providerId="ADAL" clId="{B0A1087C-1C87-F64B-8F02-62FA3A69F4E0}" dt="2026-04-12T17:37:10.045" v="1305" actId="207"/>
+        <pc:sldMkLst>
+          <pc:docMk/>
+          <pc:sldMk cId="0" sldId="270"/>
+        </pc:sldMkLst>
+        <pc:spChg chg="mod">
+          <ac:chgData name="Gabriele, Cyril" userId="1be75a10-e39f-4032-8195-d4e5b0ea0b62" providerId="ADAL" clId="{B0A1087C-1C87-F64B-8F02-62FA3A69F4E0}" dt="2026-04-12T17:01:38.590" v="1102" actId="207"/>
+          <ac:spMkLst>
+            <pc:docMk/>
+            <pc:sldMk cId="0" sldId="270"/>
+            <ac:spMk id="2" creationId="{00000000-0000-0000-0000-000000000000}"/>
+          </ac:spMkLst>
+        </pc:spChg>
+        <pc:spChg chg="mod">
+          <ac:chgData name="Gabriele, Cyril" userId="1be75a10-e39f-4032-8195-d4e5b0ea0b62" providerId="ADAL" clId="{B0A1087C-1C87-F64B-8F02-62FA3A69F4E0}" dt="2026-04-12T17:37:10.045" v="1305" actId="207"/>
+          <ac:spMkLst>
+            <pc:docMk/>
+            <pc:sldMk cId="0" sldId="270"/>
+            <ac:spMk id="3" creationId="{00000000-0000-0000-0000-000000000000}"/>
+          </ac:spMkLst>
+        </pc:spChg>
+      </pc:sldChg>
+      <pc:sldChg chg="add del mod modShow">
+        <pc:chgData name="Gabriele, Cyril" userId="1be75a10-e39f-4032-8195-d4e5b0ea0b62" providerId="ADAL" clId="{B0A1087C-1C87-F64B-8F02-62FA3A69F4E0}" dt="2026-04-12T17:27:02.962" v="1158" actId="729"/>
+        <pc:sldMkLst>
+          <pc:docMk/>
+          <pc:sldMk cId="0" sldId="271"/>
+        </pc:sldMkLst>
+      </pc:sldChg>
+      <pc:sldChg chg="mod modShow">
+        <pc:chgData name="Gabriele, Cyril" userId="1be75a10-e39f-4032-8195-d4e5b0ea0b62" providerId="ADAL" clId="{B0A1087C-1C87-F64B-8F02-62FA3A69F4E0}" dt="2026-04-12T17:01:01.135" v="1065" actId="729"/>
+        <pc:sldMkLst>
+          <pc:docMk/>
+          <pc:sldMk cId="0" sldId="272"/>
+        </pc:sldMkLst>
+      </pc:sldChg>
+      <pc:sldChg chg="mod modShow">
+        <pc:chgData name="Gabriele, Cyril" userId="1be75a10-e39f-4032-8195-d4e5b0ea0b62" providerId="ADAL" clId="{B0A1087C-1C87-F64B-8F02-62FA3A69F4E0}" dt="2026-04-12T17:00:58.150" v="1064" actId="729"/>
+        <pc:sldMkLst>
+          <pc:docMk/>
+          <pc:sldMk cId="0" sldId="273"/>
+        </pc:sldMkLst>
+      </pc:sldChg>
+      <pc:sldChg chg="modSp mod modNotesTx">
+        <pc:chgData name="Gabriele, Cyril" userId="1be75a10-e39f-4032-8195-d4e5b0ea0b62" providerId="ADAL" clId="{B0A1087C-1C87-F64B-8F02-62FA3A69F4E0}" dt="2026-04-12T16:21:14.753" v="783" actId="207"/>
+        <pc:sldMkLst>
+          <pc:docMk/>
+          <pc:sldMk cId="3410646215" sldId="274"/>
+        </pc:sldMkLst>
+        <pc:spChg chg="mod">
+          <ac:chgData name="Gabriele, Cyril" userId="1be75a10-e39f-4032-8195-d4e5b0ea0b62" providerId="ADAL" clId="{B0A1087C-1C87-F64B-8F02-62FA3A69F4E0}" dt="2026-04-12T16:21:14.753" v="783" actId="207"/>
+          <ac:spMkLst>
+            <pc:docMk/>
+            <pc:sldMk cId="3410646215" sldId="274"/>
+            <ac:spMk id="2" creationId="{00000000-0000-0000-0000-000000000000}"/>
+          </ac:spMkLst>
+        </pc:spChg>
+      </pc:sldChg>
+      <pc:sldChg chg="delSp modSp new mod">
+        <pc:chgData name="Gabriele, Cyril" userId="1be75a10-e39f-4032-8195-d4e5b0ea0b62" providerId="ADAL" clId="{B0A1087C-1C87-F64B-8F02-62FA3A69F4E0}" dt="2026-04-12T17:01:24.971" v="1090" actId="113"/>
+        <pc:sldMkLst>
+          <pc:docMk/>
+          <pc:sldMk cId="2996261185" sldId="275"/>
+        </pc:sldMkLst>
+        <pc:spChg chg="mod">
+          <ac:chgData name="Gabriele, Cyril" userId="1be75a10-e39f-4032-8195-d4e5b0ea0b62" providerId="ADAL" clId="{B0A1087C-1C87-F64B-8F02-62FA3A69F4E0}" dt="2026-04-12T17:01:24.971" v="1090" actId="113"/>
+          <ac:spMkLst>
+            <pc:docMk/>
+            <pc:sldMk cId="2996261185" sldId="275"/>
+            <ac:spMk id="2" creationId="{DE1E6F96-6669-1625-A966-127287BEE127}"/>
+          </ac:spMkLst>
+        </pc:spChg>
+        <pc:spChg chg="del">
+          <ac:chgData name="Gabriele, Cyril" userId="1be75a10-e39f-4032-8195-d4e5b0ea0b62" providerId="ADAL" clId="{B0A1087C-1C87-F64B-8F02-62FA3A69F4E0}" dt="2026-04-12T17:01:10.488" v="1067" actId="478"/>
+          <ac:spMkLst>
+            <pc:docMk/>
+            <pc:sldMk cId="2996261185" sldId="275"/>
+            <ac:spMk id="3" creationId="{7F22B2E9-A9E3-8FDB-134A-8EE4FC4D819B}"/>
+          </ac:spMkLst>
+        </pc:spChg>
+      </pc:sldChg>
+    </pc:docChg>
+  </pc:docChgLst>
+</pc:chgInfo>
 </file>
 
 <file path=ppt/handoutMasters/handoutMaster1.xml><?xml version="1.0" encoding="utf-8"?>
@@ -251,7 +749,7 @@
           <a:p>
             <a:fld id="{2BF4C96F-5C6D-48ED-8D42-B768302B23AD}" type="datetimeFigureOut">
               <a:rPr lang="de-CH" smtClean="0"/>
-              <a:t>12.04.26</a:t>
+              <a:t>12.04.2026</a:t>
             </a:fld>
             <a:endParaRPr lang="de-CH"/>
           </a:p>
@@ -428,7 +926,7 @@
           <a:p>
             <a:fld id="{736D3A44-FA09-4C0A-99A6-1BA009890161}" type="datetimeFigureOut">
               <a:rPr lang="de-CH" smtClean="0"/>
-              <a:t>12.04.26</a:t>
+              <a:t>12.04.2026</a:t>
             </a:fld>
             <a:endParaRPr lang="de-CH"/>
           </a:p>
@@ -741,23 +1239,20 @@
           <a:lstStyle/>
           <a:p>
             <a:r>
-              <a:rPr dirty="0"/>
               <a:t>Open confidently. We built </a:t>
             </a:r>
             <a:r>
-              <a:rPr dirty="0" err="1"/>
+              <a:rPr err="1"/>
               <a:t>CryptoFlow</a:t>
             </a:r>
             <a:r>
-              <a:rPr dirty="0"/>
               <a:t> to exercise the full set of EDPO lecture concepts end to end: two communication channels, five microservices, two saga patterns. This slide is just the name card </a:t>
             </a:r>
             <a:r>
-              <a:rPr lang="en-US" dirty="0"/>
+              <a:rPr lang="en-US"/>
               <a:t>-</a:t>
             </a:r>
             <a:r>
-              <a:rPr dirty="0"/>
               <a:t> keep it to ten seconds.</a:t>
             </a:r>
           </a:p>
@@ -828,16 +1323,14 @@
           <a:lstStyle/>
           <a:p>
             <a:r>
-              <a:rPr dirty="0"/>
-              <a:t>This is where theory meets implementation. The flag-driven pattern is subtle but essential </a:t>
-            </a:r>
-            <a:r>
-              <a:rPr lang="en-US" dirty="0"/>
-              <a:t>-</a:t>
-            </a:r>
-            <a:r>
-              <a:rPr dirty="0"/>
-              <a:t> without it, the BPMN gateway branches become unreachable. The compensation events use ECST so no synchronous callback is needed.</a:t>
+              <a:t>This was an ADR-driven </a:t>
+            </a:r>
+            <a:r>
+              <a:rPr lang="de-CH"/>
+              <a:t>(ADR10) </a:t>
+            </a:r>
+            <a:r>
+              <a:t>decision mid-project. The original design violated bounded context boundaries. The dedicated service is the most important structural consequence of applying the saga pattern correctly.</a:t>
             </a:r>
           </a:p>
         </p:txBody>
@@ -907,8 +1400,64 @@
           <a:lstStyle/>
           <a:p>
             <a:r>
-              <a:t>This was an ADR-driven decision mid-project. The original design violated bounded context boundaries. The dedicated service is the most important structural consequence of applying the saga pattern correctly.</a:t>
-            </a:r>
+              <a:rPr lang="de-CH"/>
+              <a:t>Ioannis:</a:t>
+            </a:r>
+          </a:p>
+          <a:p>
+            <a:r>
+              <a:t>Key distinction from onboarding: the approval is terminal in the trading context. Portfolio propagation is a downstream consequence, not a saga step. This is exactly the Fairy Tale Saga trade-off: synchronous within the context, eventual across contexts.</a:t>
+            </a:r>
+            <a:br>
+              <a:rPr lang="de-CH"/>
+            </a:br>
+            <a:br>
+              <a:rPr lang="de-CH"/>
+            </a:br>
+            <a:r>
+              <a:rPr lang="en-US" sz="1200"/>
+              <a:t>order-processing-worker validates user locally, creates PENDING </a:t>
+            </a:r>
+            <a:r>
+              <a:rPr lang="en-US" sz="1200" err="1"/>
+              <a:t>tx</a:t>
+            </a:r>
+            <a:endParaRPr lang="en-US" sz="1200"/>
+          </a:p>
+          <a:p>
+            <a:r>
+              <a:rPr lang="en-US" sz="1200"/>
+              <a:t>Event-based gateway: price match vs. 1-min timeout</a:t>
+            </a:r>
+          </a:p>
+          <a:p>
+            <a:r>
+              <a:rPr lang="en-US" sz="1200" err="1"/>
+              <a:t>approveOrderWorker</a:t>
+            </a:r>
+            <a:r>
+              <a:rPr lang="en-US" sz="1200"/>
+              <a:t> writes APPROVED + outbox row in one transaction</a:t>
+            </a:r>
+          </a:p>
+          <a:p>
+            <a:r>
+              <a:rPr lang="en-US" sz="1200" err="1"/>
+              <a:t>publishOrderApprovedWorker</a:t>
+            </a:r>
+            <a:r>
+              <a:rPr lang="en-US" sz="1200"/>
+              <a:t> publishes to Kafka → email</a:t>
+            </a:r>
+          </a:p>
+          <a:p>
+            <a:r>
+              <a:rPr lang="en-US" sz="1200"/>
+              <a:t>Portfolio update happens independently via Kafka</a:t>
+            </a:r>
+          </a:p>
+          <a:p>
+            <a:endParaRPr/>
           </a:p>
         </p:txBody>
       </p:sp>
@@ -977,8 +1526,135 @@
           <a:lstStyle/>
           <a:p>
             <a:r>
-              <a:t>Key distinction from onboarding: the approval is terminal in the trading context. Portfolio propagation is a downstream consequence, not a saga step. This is exactly the Fairy Tale Saga trade-off: synchronous within the context, eventual across contexts.</a:t>
-            </a:r>
+              <a:t>This is a focused use of CQRS: the write model stays in user-service, the trading context keeps only the projection it needs. Log compaction ensures the read-model survives cold starts.</a:t>
+            </a:r>
+            <a:endParaRPr lang="de-CH"/>
+          </a:p>
+          <a:p>
+            <a:endParaRPr lang="en-US"/>
+          </a:p>
+          <a:p>
+            <a:pPr marL="0" marR="0" lvl="0" indent="0" algn="l" defTabSz="914400" rtl="0" eaLnBrk="1" fontAlgn="auto" latinLnBrk="0" hangingPunct="1">
+              <a:lnSpc>
+                <a:spcPct val="100000"/>
+              </a:lnSpc>
+              <a:spcBef>
+                <a:spcPts val="0"/>
+              </a:spcBef>
+              <a:spcAft>
+                <a:spcPts val="0"/>
+              </a:spcAft>
+              <a:buClrTx/>
+              <a:buSzTx/>
+              <a:buFontTx/>
+              <a:buNone/>
+              <a:tabLst/>
+              <a:defRPr/>
+            </a:pPr>
+            <a:r>
+              <a:rPr lang="en-US"/>
+              <a:t>details: </a:t>
+            </a:r>
+            <a:br>
+              <a:rPr lang="en-US"/>
+            </a:br>
+            <a:r>
+              <a:rPr lang="en-US"/>
+              <a:t>- </a:t>
+            </a:r>
+            <a:r>
+              <a:rPr lang="en-US" sz="1200"/>
+              <a:t>Idempotent Consumer (ADR-0016)</a:t>
+            </a:r>
+          </a:p>
+          <a:p>
+            <a:pPr marL="0" marR="0" lvl="0" indent="0" algn="l" defTabSz="914400" rtl="0" eaLnBrk="1" fontAlgn="auto" latinLnBrk="0" hangingPunct="1">
+              <a:lnSpc>
+                <a:spcPct val="100000"/>
+              </a:lnSpc>
+              <a:spcBef>
+                <a:spcPts val="0"/>
+              </a:spcBef>
+              <a:spcAft>
+                <a:spcPts val="0"/>
+              </a:spcAft>
+              <a:buClrTx/>
+              <a:buSzTx/>
+              <a:buFontTx/>
+              <a:buNone/>
+              <a:tabLst/>
+              <a:defRPr/>
+            </a:pPr>
+            <a:r>
+              <a:rPr lang="en-US" sz="1200"/>
+              <a:t>- Transactional Outbox (ADR-0014)</a:t>
+            </a:r>
+          </a:p>
+          <a:p>
+            <a:pPr marL="171450" marR="0" lvl="0" indent="-171450" algn="l" defTabSz="914400" rtl="0" eaLnBrk="1" fontAlgn="auto" latinLnBrk="0" hangingPunct="1">
+              <a:lnSpc>
+                <a:spcPct val="100000"/>
+              </a:lnSpc>
+              <a:spcBef>
+                <a:spcPts val="0"/>
+              </a:spcBef>
+              <a:spcAft>
+                <a:spcPts val="0"/>
+              </a:spcAft>
+              <a:buClrTx/>
+              <a:buSzTx/>
+              <a:buFontTx/>
+              <a:buChar char="-"/>
+              <a:tabLst/>
+              <a:defRPr/>
+            </a:pPr>
+            <a:r>
+              <a:rPr lang="en-US" sz="1200"/>
+              <a:t>Human Escalation (ADR-0018)</a:t>
+            </a:r>
+          </a:p>
+          <a:p>
+            <a:pPr marL="171450" marR="0" lvl="0" indent="-171450" algn="l" defTabSz="914400" rtl="0" eaLnBrk="1" fontAlgn="auto" latinLnBrk="0" hangingPunct="1">
+              <a:lnSpc>
+                <a:spcPct val="100000"/>
+              </a:lnSpc>
+              <a:spcBef>
+                <a:spcPts val="0"/>
+              </a:spcBef>
+              <a:spcAft>
+                <a:spcPts val="0"/>
+              </a:spcAft>
+              <a:buClrTx/>
+              <a:buSzTx/>
+              <a:buFontTx/>
+              <a:buChar char="-"/>
+              <a:tabLst/>
+              <a:defRPr/>
+            </a:pPr>
+            <a:endParaRPr lang="en-US" sz="1200"/>
+          </a:p>
+          <a:p>
+            <a:pPr marL="0" marR="0" lvl="0" indent="0" algn="l" defTabSz="914400" rtl="0" eaLnBrk="1" fontAlgn="auto" latinLnBrk="0" hangingPunct="1">
+              <a:lnSpc>
+                <a:spcPct val="100000"/>
+              </a:lnSpc>
+              <a:spcBef>
+                <a:spcPts val="0"/>
+              </a:spcBef>
+              <a:spcAft>
+                <a:spcPts val="0"/>
+              </a:spcAft>
+              <a:buClrTx/>
+              <a:buSzTx/>
+              <a:buFontTx/>
+              <a:buNone/>
+              <a:tabLst/>
+              <a:defRPr/>
+            </a:pPr>
+            <a:endParaRPr lang="en-US" sz="1200"/>
+          </a:p>
+          <a:p>
+            <a:endParaRPr/>
           </a:p>
         </p:txBody>
       </p:sp>
@@ -1047,16 +1723,7 @@
           <a:lstStyle/>
           <a:p>
             <a:r>
-              <a:rPr dirty="0"/>
-              <a:t>These three patterns form a chain: the outbox guarantees the event is published, the idempotent consumer guarantees it's applied exactly once, and human escalation handles the cases that automated retries cannot fix. The idempotency bug was discovered accidentally during integration </a:t>
-            </a:r>
-            <a:r>
-              <a:rPr lang="en-US" dirty="0"/>
-              <a:t>-</a:t>
-            </a:r>
-            <a:r>
-              <a:rPr dirty="0"/>
-              <a:t> a real validation of the pattern's necessity.</a:t>
+              <a:t>Be honest about the challenges. The key message: the patterns work, but applying them requires many more decisions than the theory suggests. ADRs were essential for keeping those decisions traceable.</a:t>
             </a:r>
           </a:p>
         </p:txBody>
@@ -1126,7 +1793,21 @@
           <a:lstStyle/>
           <a:p>
             <a:r>
-              <a:t>This is a focused use of CQRS: the write model stays in user-service, the trading context keeps only the projection it needs. Log compaction ensures the read-model survives cold starts.</a:t>
+              <a:t>Keep the demo tight </a:t>
+            </a:r>
+            <a:r>
+              <a:rPr lang="en-US"/>
+              <a:t>-</a:t>
+            </a:r>
+            <a:r>
+              <a:t> 2-3 minutes max. Have the Docker Compose stack running before the presentation starts. If something breaks live, switch to Operate to show the instance state </a:t>
+            </a:r>
+            <a:r>
+              <a:rPr lang="en-US"/>
+              <a:t>-</a:t>
+            </a:r>
+            <a:r>
+              <a:t> that's still a valid demo of observability.</a:t>
             </a:r>
           </a:p>
         </p:txBody>
@@ -1196,7 +1877,7 @@
           <a:lstStyle/>
           <a:p>
             <a:r>
-              <a:t>Be honest about the challenges. The key message: the patterns work, but applying them requires many more decisions than the theory suggests. ADRs were essential for keeping those decisions traceable.</a:t>
+              <a:t>This is the wrap-up. Reiterate the most distinctive architectural choices. Then open for Q&amp;A.</a:t>
             </a:r>
           </a:p>
         </p:txBody>
@@ -1266,163 +1947,6 @@
           <a:lstStyle/>
           <a:p>
             <a:r>
-              <a:rPr dirty="0"/>
-              <a:t>Keep the demo tight </a:t>
-            </a:r>
-            <a:r>
-              <a:rPr lang="en-US" dirty="0"/>
-              <a:t>-</a:t>
-            </a:r>
-            <a:r>
-              <a:rPr dirty="0"/>
-              <a:t> 2-3 minutes max. Have the Docker Compose stack running before the presentation starts. If something breaks live, switch to Operate to show the instance state </a:t>
-            </a:r>
-            <a:r>
-              <a:rPr lang="en-US" dirty="0"/>
-              <a:t>-</a:t>
-            </a:r>
-            <a:r>
-              <a:rPr dirty="0"/>
-              <a:t> that's still a valid demo of observability.</a:t>
-            </a:r>
-          </a:p>
-        </p:txBody>
-      </p:sp>
-      <p:sp>
-        <p:nvSpPr>
-          <p:cNvPr id="4" name="Slide Number Placeholder 3"/>
-          <p:cNvSpPr>
-            <a:spLocks noGrp="1"/>
-          </p:cNvSpPr>
-          <p:nvPr>
-            <p:ph type="sldNum" sz="quarter" idx="5"/>
-          </p:nvPr>
-        </p:nvSpPr>
-        <p:spPr/>
-      </p:sp>
-    </p:spTree>
-  </p:cSld>
-  <p:clrMapOvr>
-    <a:masterClrMapping/>
-  </p:clrMapOvr>
-</p:notes>
-</file>
-
-<file path=ppt/notesSlides/notesSlide17.xml><?xml version="1.0" encoding="utf-8"?>
-<p:notes xmlns:a="http://schemas.openxmlformats.org/drawingml/2006/main" xmlns:r="http://schemas.openxmlformats.org/officeDocument/2006/relationships" xmlns:p="http://schemas.openxmlformats.org/presentationml/2006/main">
-  <p:cSld>
-    <p:spTree>
-      <p:nvGrpSpPr>
-        <p:cNvPr id="1" name=""/>
-        <p:cNvGrpSpPr/>
-        <p:nvPr/>
-      </p:nvGrpSpPr>
-      <p:grpSpPr>
-        <a:xfrm>
-          <a:off x="0" y="0"/>
-          <a:ext cx="0" cy="0"/>
-          <a:chOff x="0" y="0"/>
-          <a:chExt cx="0" cy="0"/>
-        </a:xfrm>
-      </p:grpSpPr>
-      <p:sp>
-        <p:nvSpPr>
-          <p:cNvPr id="2" name="Slide Image Placeholder 1"/>
-          <p:cNvSpPr>
-            <a:spLocks noGrp="1" noRot="1" noChangeAspect="1"/>
-          </p:cNvSpPr>
-          <p:nvPr>
-            <p:ph type="sldImg" idx="2"/>
-          </p:nvPr>
-        </p:nvSpPr>
-        <p:spPr/>
-      </p:sp>
-      <p:sp>
-        <p:nvSpPr>
-          <p:cNvPr id="3" name="Notes Placeholder 2"/>
-          <p:cNvSpPr>
-            <a:spLocks noGrp="1"/>
-          </p:cNvSpPr>
-          <p:nvPr>
-            <p:ph type="body" sz="quarter" idx="3"/>
-          </p:nvPr>
-        </p:nvSpPr>
-        <p:spPr/>
-        <p:txBody>
-          <a:bodyPr/>
-          <a:lstStyle/>
-          <a:p>
-            <a:r>
-              <a:t>This is the wrap-up. Reiterate the most distinctive architectural choices. Then open for Q&amp;A.</a:t>
-            </a:r>
-          </a:p>
-        </p:txBody>
-      </p:sp>
-      <p:sp>
-        <p:nvSpPr>
-          <p:cNvPr id="4" name="Slide Number Placeholder 3"/>
-          <p:cNvSpPr>
-            <a:spLocks noGrp="1"/>
-          </p:cNvSpPr>
-          <p:nvPr>
-            <p:ph type="sldNum" sz="quarter" idx="5"/>
-          </p:nvPr>
-        </p:nvSpPr>
-        <p:spPr/>
-      </p:sp>
-    </p:spTree>
-  </p:cSld>
-  <p:clrMapOvr>
-    <a:masterClrMapping/>
-  </p:clrMapOvr>
-</p:notes>
-</file>
-
-<file path=ppt/notesSlides/notesSlide18.xml><?xml version="1.0" encoding="utf-8"?>
-<p:notes xmlns:a="http://schemas.openxmlformats.org/drawingml/2006/main" xmlns:r="http://schemas.openxmlformats.org/officeDocument/2006/relationships" xmlns:p="http://schemas.openxmlformats.org/presentationml/2006/main">
-  <p:cSld>
-    <p:spTree>
-      <p:nvGrpSpPr>
-        <p:cNvPr id="1" name=""/>
-        <p:cNvGrpSpPr/>
-        <p:nvPr/>
-      </p:nvGrpSpPr>
-      <p:grpSpPr>
-        <a:xfrm>
-          <a:off x="0" y="0"/>
-          <a:ext cx="0" cy="0"/>
-          <a:chOff x="0" y="0"/>
-          <a:chExt cx="0" cy="0"/>
-        </a:xfrm>
-      </p:grpSpPr>
-      <p:sp>
-        <p:nvSpPr>
-          <p:cNvPr id="2" name="Slide Image Placeholder 1"/>
-          <p:cNvSpPr>
-            <a:spLocks noGrp="1" noRot="1" noChangeAspect="1"/>
-          </p:cNvSpPr>
-          <p:nvPr>
-            <p:ph type="sldImg" idx="2"/>
-          </p:nvPr>
-        </p:nvSpPr>
-        <p:spPr/>
-      </p:sp>
-      <p:sp>
-        <p:nvSpPr>
-          <p:cNvPr id="3" name="Notes Placeholder 2"/>
-          <p:cNvSpPr>
-            <a:spLocks noGrp="1"/>
-          </p:cNvSpPr>
-          <p:nvPr>
-            <p:ph type="body" sz="quarter" idx="3"/>
-          </p:nvPr>
-        </p:nvSpPr>
-        <p:spPr/>
-        <p:txBody>
-          <a:bodyPr/>
-          <a:lstStyle/>
-          <a:p>
-            <a:r>
               <a:t>Open the floor. If the audience is quiet, prime the pump with the first backup topic yourself.</a:t>
             </a:r>
           </a:p>
@@ -1493,15 +2017,13 @@
           <a:lstStyle/>
           <a:p>
             <a:r>
-              <a:rPr dirty="0"/>
               <a:t>Keep this brief. The point is that we chose a domain rich enough to require multiple bounded contexts, long-running processes, and eventual consistency </a:t>
             </a:r>
             <a:r>
-              <a:rPr lang="en-US" dirty="0"/>
+              <a:rPr lang="en-US"/>
               <a:t>-</a:t>
             </a:r>
             <a:r>
-              <a:rPr dirty="0"/>
               <a:t> all things we wanted to demonstrate.</a:t>
             </a:r>
           </a:p>
@@ -1642,8 +2164,10 @@
           <a:lstStyle/>
           <a:p>
             <a:r>
-              <a:t>This is the 30-second mental model. Two channels, five services, no shared databases. Everything else in the presentation builds on this.</a:t>
-            </a:r>
+              <a:rPr lang="de-CH"/>
+              <a:t>Ioannis</a:t>
+            </a:r>
+            <a:endParaRPr/>
           </a:p>
         </p:txBody>
       </p:sp>
@@ -1660,6 +2184,11 @@
         <p:spPr/>
       </p:sp>
     </p:spTree>
+    <p:extLst>
+      <p:ext uri="{BB962C8B-B14F-4D97-AF65-F5344CB8AC3E}">
+        <p14:creationId xmlns:p14="http://schemas.microsoft.com/office/powerpoint/2010/main" val="245742331"/>
+      </p:ext>
+    </p:extLst>
   </p:cSld>
   <p:clrMapOvr>
     <a:masterClrMapping/>
@@ -1712,16 +2241,7 @@
           <a:lstStyle/>
           <a:p>
             <a:r>
-              <a:rPr dirty="0"/>
-              <a:t>We won't deep-dive into event-driven architecture here </a:t>
-            </a:r>
-            <a:r>
-              <a:rPr lang="en-US" dirty="0"/>
-              <a:t>-</a:t>
-            </a:r>
-            <a:r>
-              <a:rPr dirty="0"/>
-              <a:t> that's the focus of the next presentation. The key takeaway: services communicate through published facts, not remote commands. ECST lets each service maintain its own local view without querying others.</a:t>
+              <a:t>This is the 30-second mental model. Two channels, five services, no shared databases. Everything else in the presentation builds on this.</a:t>
             </a:r>
           </a:p>
         </p:txBody>
@@ -1791,16 +2311,21 @@
           <a:lstStyle/>
           <a:p>
             <a:r>
-              <a:rPr dirty="0"/>
-              <a:t>Show the producer/consumer log snippets briefly. The main insight: durability is not a Kafka default </a:t>
-            </a:r>
-            <a:r>
-              <a:rPr lang="en-US" dirty="0"/>
+              <a:t>This is not a generic 'Camunda 8 is better' argument. These are project-specific reasons. The partitioned log matters because </a:t>
+            </a:r>
+            <a:r>
+              <a:rPr err="1"/>
+              <a:t>placeOrder</a:t>
+            </a:r>
+            <a:r>
+              <a:t> has a non-deterministic wait </a:t>
+            </a:r>
+            <a:r>
+              <a:rPr lang="en-US"/>
               <a:t>-</a:t>
             </a:r>
             <a:r>
-              <a:rPr dirty="0"/>
-              <a:t> it requires explicit configuration. Our single-broker dev setup means acks=all is equivalent to acks=1 locally; we accept this as a conscious dev-environment trade-off.</a:t>
+              <a:t> many orders can be open simultaneously. The connector templates matter because our flows include email notifications.</a:t>
             </a:r>
           </a:p>
         </p:txBody>
@@ -1870,24 +2395,7 @@
           <a:lstStyle/>
           <a:p>
             <a:r>
-              <a:rPr dirty="0"/>
-              <a:t>This is not a generic 'Camunda 8 is better' argument. These are project-specific reasons. The partitioned log matters because </a:t>
-            </a:r>
-            <a:r>
-              <a:rPr dirty="0" err="1"/>
-              <a:t>placeOrder</a:t>
-            </a:r>
-            <a:r>
-              <a:rPr dirty="0"/>
-              <a:t> has a non-deterministic wait </a:t>
-            </a:r>
-            <a:r>
-              <a:rPr lang="en-US" dirty="0"/>
-              <a:t>-</a:t>
-            </a:r>
-            <a:r>
-              <a:rPr dirty="0"/>
-              <a:t> many orders can be open simultaneously. The connector templates matter because our flows include email notifications.</a:t>
+              <a:t>This was one of the most instructive decisions. The wait semantics dictated the coupling model, which dictated the saga style. A deterministic wait with cross-context scope → Parallel. A non-deterministic wait within one context → Fairy Tale.</a:t>
             </a:r>
           </a:p>
         </p:txBody>
@@ -1957,8 +2465,81 @@
           <a:lstStyle/>
           <a:p>
             <a:r>
-              <a:t>This was one of the most instructive decisions. The wait semantics dictated the coupling model, which dictated the saga style. A deterministic wait with cross-context scope → Parallel. A non-deterministic wait within one context → Fairy Tale.</a:t>
-            </a:r>
+              <a:t>Point to the BPMN diagram as you walk through. Emphasize: three services participate but only one (onboarding-service) owns the BPMN. The workers are stateless </a:t>
+            </a:r>
+            <a:r>
+              <a:rPr lang="en-US"/>
+              <a:t>-</a:t>
+            </a:r>
+            <a:r>
+              <a:t> they execute local transactions and report back</a:t>
+            </a:r>
+            <a:r>
+              <a:rPr lang="de-CH"/>
+              <a:t>: </a:t>
+            </a:r>
+            <a:br>
+              <a:rPr lang="de-CH"/>
+            </a:br>
+            <a:br>
+              <a:rPr lang="de-CH"/>
+            </a:br>
+            <a:r>
+              <a:rPr lang="en-US" sz="1200" err="1"/>
+              <a:t>prepareUserWorker</a:t>
+            </a:r>
+            <a:r>
+              <a:rPr lang="en-US" sz="1200"/>
+              <a:t>: generates </a:t>
+            </a:r>
+            <a:r>
+              <a:rPr lang="en-US" sz="1200" err="1"/>
+              <a:t>userId</a:t>
+            </a:r>
+            <a:r>
+              <a:rPr lang="en-US" sz="1200"/>
+              <a:t>, PENDING link</a:t>
+            </a:r>
+          </a:p>
+          <a:p>
+            <a:r>
+              <a:rPr lang="en-US" sz="1200"/>
+              <a:t>Camunda email connector sends confirmation</a:t>
+            </a:r>
+          </a:p>
+          <a:p>
+            <a:r>
+              <a:rPr lang="en-US" sz="1200"/>
+              <a:t>Event-based gateway: click vs. 1-min timeout</a:t>
+            </a:r>
+          </a:p>
+          <a:p>
+            <a:r>
+              <a:rPr lang="en-US" sz="1200"/>
+              <a:t>Parallel fan-out: </a:t>
+            </a:r>
+            <a:r>
+              <a:rPr lang="en-US" sz="1200" err="1"/>
+              <a:t>userCreationWorker</a:t>
+            </a:r>
+            <a:r>
+              <a:rPr lang="en-US" sz="1200"/>
+              <a:t> + </a:t>
+            </a:r>
+            <a:r>
+              <a:rPr lang="en-US" sz="1200" err="1"/>
+              <a:t>portfolioCreationWorker</a:t>
+            </a:r>
+            <a:endParaRPr lang="en-US" sz="1200"/>
+          </a:p>
+          <a:p>
+            <a:r>
+              <a:rPr lang="en-US" sz="1200"/>
+              <a:t>Both must succeed → process completes</a:t>
+            </a:r>
+          </a:p>
+          <a:p>
+            <a:endParaRPr/>
           </a:p>
         </p:txBody>
       </p:sp>
@@ -2027,17 +2608,49 @@
           <a:lstStyle/>
           <a:p>
             <a:r>
-              <a:rPr dirty="0"/>
-              <a:t>Point to the BPMN diagram as you walk through. Emphasize: three services participate but only one (onboarding-service) owns the BPMN. The workers are stateless </a:t>
-            </a:r>
-            <a:r>
-              <a:rPr lang="en-US" dirty="0"/>
+              <a:t>This is where theory meets implementation. The flag-driven pattern is subtle but essential </a:t>
+            </a:r>
+            <a:r>
+              <a:rPr lang="en-US"/>
               <a:t>-</a:t>
             </a:r>
             <a:r>
-              <a:rPr dirty="0"/>
-              <a:t> they execute local transactions and report back.</a:t>
-            </a:r>
+              <a:t> without it, the BPMN gateway branches become unreachable. The compensation events use ECST so no synchronous callback is needed.</a:t>
+            </a:r>
+            <a:endParaRPr lang="de-CH"/>
+          </a:p>
+          <a:p>
+            <a:endParaRPr lang="en-US"/>
+          </a:p>
+          <a:p>
+            <a:pPr marL="0" marR="0" lvl="0" indent="0" algn="l" defTabSz="914400" rtl="0" eaLnBrk="1" fontAlgn="auto" latinLnBrk="0" hangingPunct="1">
+              <a:lnSpc>
+                <a:spcPct val="100000"/>
+              </a:lnSpc>
+              <a:spcBef>
+                <a:spcPts val="0"/>
+              </a:spcBef>
+              <a:spcAft>
+                <a:spcPts val="0"/>
+              </a:spcAft>
+              <a:buClrTx/>
+              <a:buSzTx/>
+              <a:buFontTx/>
+              <a:buNone/>
+              <a:tabLst/>
+              <a:defRPr/>
+            </a:pPr>
+            <a:r>
+              <a:rPr lang="en-US"/>
+              <a:t>- </a:t>
+            </a:r>
+            <a:r>
+              <a:rPr lang="en-US" sz="1200"/>
+              <a:t>Flag-driven completion details in: ADR-0012</a:t>
+            </a:r>
+          </a:p>
+          <a:p>
+            <a:endParaRPr/>
           </a:p>
         </p:txBody>
       </p:sp>
@@ -2256,7 +2869,7 @@
           <a:p>
             <a:pPr algn="r"/>
             <a:r>
-              <a:rPr lang="en-GB" sz="1000" dirty="0">
+              <a:rPr lang="en-GB" sz="1000">
                 <a:solidFill>
                   <a:schemeClr val="bg2"/>
                 </a:solidFill>
@@ -2264,7 +2877,7 @@
               <a:t>From </a:t>
             </a:r>
             <a:r>
-              <a:rPr lang="en-GB" sz="1000" dirty="0" err="1">
+              <a:rPr lang="en-GB" sz="1000" err="1">
                 <a:solidFill>
                   <a:schemeClr val="bg2"/>
                 </a:solidFill>
@@ -2272,7 +2885,7 @@
               <a:t>insight</a:t>
             </a:r>
             <a:r>
-              <a:rPr lang="en-GB" sz="1000" dirty="0">
+              <a:rPr lang="en-GB" sz="1000">
                 <a:solidFill>
                   <a:schemeClr val="bg2"/>
                 </a:solidFill>
@@ -2280,7 +2893,7 @@
               <a:t> </a:t>
             </a:r>
             <a:r>
-              <a:rPr lang="en-GB" sz="1000" dirty="0" err="1">
+              <a:rPr lang="en-GB" sz="1000" err="1">
                 <a:solidFill>
                   <a:schemeClr val="bg2"/>
                 </a:solidFill>
@@ -2288,7 +2901,7 @@
               <a:t>to</a:t>
             </a:r>
             <a:r>
-              <a:rPr lang="en-GB" sz="1000" dirty="0">
+              <a:rPr lang="en-GB" sz="1000">
                 <a:solidFill>
                   <a:schemeClr val="bg2"/>
                 </a:solidFill>
@@ -2296,7 +2909,7 @@
               <a:t> </a:t>
             </a:r>
             <a:r>
-              <a:rPr lang="en-GB" sz="1000" dirty="0" err="1">
+              <a:rPr lang="en-GB" sz="1000" err="1">
                 <a:solidFill>
                   <a:schemeClr val="bg2"/>
                 </a:solidFill>
@@ -2304,7 +2917,7 @@
               <a:t>impact</a:t>
             </a:r>
             <a:r>
-              <a:rPr lang="en-GB" sz="1000" dirty="0">
+              <a:rPr lang="en-GB" sz="1000">
                 <a:solidFill>
                   <a:schemeClr val="bg2"/>
                 </a:solidFill>
@@ -2374,7 +2987,7 @@
           </a:lstStyle>
           <a:p>
             <a:r>
-              <a:rPr lang="en-GB" dirty="0"/>
+              <a:rPr lang="en-GB"/>
               <a:t>Click to edit Master title style</a:t>
             </a:r>
           </a:p>
@@ -2447,39 +3060,35 @@
           <a:p>
             <a:pPr lvl="0"/>
             <a:r>
-              <a:rPr lang="en-GB" dirty="0"/>
+              <a:rPr lang="en-GB"/>
               <a:t>Click to edit Master text styles</a:t>
             </a:r>
-            <a:endParaRPr lang="en-GB"/>
           </a:p>
           <a:p>
             <a:pPr lvl="1"/>
             <a:r>
-              <a:rPr lang="en-GB" dirty="0"/>
+              <a:rPr lang="en-GB"/>
               <a:t>Second level</a:t>
             </a:r>
-            <a:endParaRPr lang="en-GB"/>
           </a:p>
           <a:p>
             <a:pPr lvl="2"/>
             <a:r>
-              <a:rPr lang="en-GB" dirty="0"/>
+              <a:rPr lang="en-GB"/>
               <a:t>Third level</a:t>
             </a:r>
-            <a:endParaRPr lang="en-GB"/>
           </a:p>
           <a:p>
             <a:pPr lvl="3"/>
             <a:r>
-              <a:rPr lang="en-GB" dirty="0"/>
+              <a:rPr lang="en-GB"/>
               <a:t>Fourth level</a:t>
             </a:r>
-            <a:endParaRPr lang="en-GB"/>
           </a:p>
           <a:p>
             <a:pPr lvl="4"/>
             <a:r>
-              <a:rPr lang="en-GB" dirty="0"/>
+              <a:rPr lang="en-GB"/>
               <a:t>Fifth level</a:t>
             </a:r>
           </a:p>
@@ -2880,7 +3489,7 @@
           <a:p>
             <a:pPr algn="l"/>
             <a:r>
-              <a:rPr lang="en-GB" sz="800" dirty="0">
+              <a:rPr lang="en-GB" sz="800">
                 <a:solidFill>
                   <a:schemeClr val="tx1"/>
                 </a:solidFill>
@@ -2960,7 +3569,7 @@
           <a:lstStyle/>
           <a:p>
             <a:pPr algn="l"/>
-            <a:endParaRPr lang="en-GB" sz="800" dirty="0">
+            <a:endParaRPr lang="en-GB" sz="800">
               <a:solidFill>
                 <a:schemeClr val="tx1"/>
               </a:solidFill>
@@ -3015,7 +3624,7 @@
           <a:p>
             <a:pPr algn="l"/>
             <a:r>
-              <a:rPr lang="en-GB" sz="800" u="none" dirty="0">
+              <a:rPr lang="en-GB" sz="800" u="none">
                 <a:solidFill>
                   <a:schemeClr val="tx1"/>
                 </a:solidFill>
@@ -3185,7 +3794,6 @@
               <a:rPr lang="en-GB"/>
               <a:t>Click to edit Master title style</a:t>
             </a:r>
-            <a:endParaRPr lang="en-GB" dirty="0"/>
           </a:p>
         </p:txBody>
       </p:sp>
@@ -3265,7 +3873,7 @@
           <a:p>
             <a:pPr algn="l"/>
             <a:r>
-              <a:rPr lang="en-GB" sz="800" dirty="0">
+              <a:rPr lang="en-GB" sz="800">
                 <a:solidFill>
                   <a:schemeClr val="tx1"/>
                 </a:solidFill>
@@ -3345,7 +3953,7 @@
           <a:lstStyle/>
           <a:p>
             <a:pPr algn="l"/>
-            <a:endParaRPr lang="en-GB" sz="800" dirty="0">
+            <a:endParaRPr lang="en-GB" sz="800">
               <a:solidFill>
                 <a:schemeClr val="tx1"/>
               </a:solidFill>
@@ -3400,7 +4008,7 @@
           <a:p>
             <a:pPr algn="l"/>
             <a:r>
-              <a:rPr lang="en-GB" sz="800" u="none" dirty="0">
+              <a:rPr lang="en-GB" sz="800" u="none">
                 <a:solidFill>
                   <a:schemeClr val="tx1"/>
                 </a:solidFill>
@@ -3607,10 +4215,9 @@
           <a:p>
             <a:pPr lvl="0"/>
             <a:r>
-              <a:rPr lang="en-GB" dirty="0"/>
+              <a:rPr lang="en-GB"/>
               <a:t>Click to edit Master text styles</a:t>
             </a:r>
-            <a:endParaRPr lang="en-GB"/>
           </a:p>
         </p:txBody>
       </p:sp>
@@ -3807,10 +4414,9 @@
           <a:p>
             <a:pPr lvl="0"/>
             <a:r>
-              <a:rPr lang="en-GB" dirty="0"/>
+              <a:rPr lang="en-GB"/>
               <a:t>Click to edit Master text styles</a:t>
             </a:r>
-            <a:endParaRPr lang="en-GB"/>
           </a:p>
         </p:txBody>
       </p:sp>
@@ -3959,7 +4565,6 @@
               <a:rPr lang="en-GB"/>
               <a:t>Click to edit Master title style</a:t>
             </a:r>
-            <a:endParaRPr lang="en-GB" dirty="0"/>
           </a:p>
         </p:txBody>
       </p:sp>
@@ -4078,7 +4683,6 @@
               <a:rPr lang="en-GB"/>
               <a:t>Click to edit Master title style</a:t>
             </a:r>
-            <a:endParaRPr lang="en-GB" dirty="0"/>
           </a:p>
         </p:txBody>
       </p:sp>
@@ -4214,7 +4818,6 @@
               <a:rPr lang="en-GB"/>
               <a:t>Click to edit Master title style</a:t>
             </a:r>
-            <a:endParaRPr lang="en-GB" dirty="0"/>
           </a:p>
         </p:txBody>
       </p:sp>
@@ -4737,7 +5340,7 @@
               </a:lnSpc>
             </a:pPr>
             <a:r>
-              <a:rPr lang="en-GB" sz="1000" dirty="0">
+              <a:rPr lang="en-GB" sz="1000">
                 <a:solidFill>
                   <a:schemeClr val="tx1"/>
                 </a:solidFill>
@@ -4941,7 +5544,7 @@
           <a:p>
             <a:pPr algn="l"/>
             <a:r>
-              <a:rPr lang="en-GB" sz="800" dirty="0">
+              <a:rPr lang="en-GB" sz="800">
                 <a:solidFill>
                   <a:schemeClr val="tx1"/>
                 </a:solidFill>
@@ -5019,7 +5622,7 @@
           <a:p>
             <a:pPr algn="l"/>
             <a:r>
-              <a:rPr lang="en-GB" sz="1000" dirty="0">
+              <a:rPr lang="en-GB" sz="1000">
                 <a:solidFill>
                   <a:schemeClr val="tx1"/>
                 </a:solidFill>
@@ -5027,7 +5630,7 @@
               <a:t>From </a:t>
             </a:r>
             <a:r>
-              <a:rPr lang="en-GB" sz="1000" dirty="0" err="1">
+              <a:rPr lang="en-GB" sz="1000" err="1">
                 <a:solidFill>
                   <a:schemeClr val="tx1"/>
                 </a:solidFill>
@@ -5035,7 +5638,7 @@
               <a:t>insight</a:t>
             </a:r>
             <a:r>
-              <a:rPr lang="en-GB" sz="1000" dirty="0">
+              <a:rPr lang="en-GB" sz="1000">
                 <a:solidFill>
                   <a:schemeClr val="tx1"/>
                 </a:solidFill>
@@ -5043,7 +5646,7 @@
               <a:t> </a:t>
             </a:r>
             <a:r>
-              <a:rPr lang="en-GB" sz="1000" dirty="0" err="1">
+              <a:rPr lang="en-GB" sz="1000" err="1">
                 <a:solidFill>
                   <a:schemeClr val="tx1"/>
                 </a:solidFill>
@@ -5051,7 +5654,7 @@
               <a:t>to</a:t>
             </a:r>
             <a:r>
-              <a:rPr lang="en-GB" sz="1000" dirty="0">
+              <a:rPr lang="en-GB" sz="1000">
                 <a:solidFill>
                   <a:schemeClr val="tx1"/>
                 </a:solidFill>
@@ -5059,7 +5662,7 @@
               <a:t> </a:t>
             </a:r>
             <a:r>
-              <a:rPr lang="en-GB" sz="1000" dirty="0" err="1">
+              <a:rPr lang="en-GB" sz="1000" err="1">
                 <a:solidFill>
                   <a:schemeClr val="tx1"/>
                 </a:solidFill>
@@ -5067,7 +5670,7 @@
               <a:t>impact</a:t>
             </a:r>
             <a:r>
-              <a:rPr lang="en-GB" sz="1000" dirty="0">
+              <a:rPr lang="en-GB" sz="1000">
                 <a:solidFill>
                   <a:schemeClr val="tx1"/>
                 </a:solidFill>
@@ -5170,7 +5773,7 @@
           </a:lstStyle>
           <a:p>
             <a:r>
-              <a:rPr lang="en-GB" dirty="0"/>
+              <a:rPr lang="en-GB"/>
               <a:t>Click to edit Master title style</a:t>
             </a:r>
           </a:p>
@@ -5243,30 +5846,27 @@
           <a:p>
             <a:pPr lvl="0"/>
             <a:r>
-              <a:rPr lang="en-GB" dirty="0"/>
+              <a:rPr lang="en-GB"/>
               <a:t>Click to edit Master text styles</a:t>
             </a:r>
+          </a:p>
+          <a:p>
+            <a:pPr lvl="1"/>
+            <a:r>
+              <a:rPr lang="en-GB"/>
+              <a:t>Second level</a:t>
+            </a:r>
+          </a:p>
+          <a:p>
+            <a:pPr lvl="2"/>
+            <a:r>
+              <a:rPr lang="en-GB"/>
+              <a:t>Third level</a:t>
+            </a:r>
+          </a:p>
+          <a:p>
+            <a:pPr lvl="3"/>
             <a:endParaRPr lang="en-GB"/>
-          </a:p>
-          <a:p>
-            <a:pPr lvl="1"/>
-            <a:r>
-              <a:rPr lang="en-GB" dirty="0"/>
-              <a:t>Second level</a:t>
-            </a:r>
-            <a:endParaRPr lang="en-GB"/>
-          </a:p>
-          <a:p>
-            <a:pPr lvl="2"/>
-            <a:r>
-              <a:rPr lang="en-GB" dirty="0"/>
-              <a:t>Third level</a:t>
-            </a:r>
-            <a:endParaRPr lang="en-GB"/>
-          </a:p>
-          <a:p>
-            <a:pPr lvl="3"/>
-            <a:endParaRPr lang="en-GB" dirty="0"/>
           </a:p>
         </p:txBody>
       </p:sp>
@@ -5471,7 +6071,7 @@
           <a:p>
             <a:pPr algn="l"/>
             <a:r>
-              <a:rPr lang="en-GB" sz="800" dirty="0">
+              <a:rPr lang="en-GB" sz="800">
                 <a:solidFill>
                   <a:schemeClr val="tx1"/>
                 </a:solidFill>
@@ -5704,7 +6304,7 @@
           <a:p>
             <a:pPr algn="r"/>
             <a:r>
-              <a:rPr lang="en-GB" sz="1000" dirty="0">
+              <a:rPr lang="en-GB" sz="1000">
                 <a:solidFill>
                   <a:schemeClr val="tx1"/>
                 </a:solidFill>
@@ -5712,7 +6312,7 @@
               <a:t>From </a:t>
             </a:r>
             <a:r>
-              <a:rPr lang="en-GB" sz="1000" dirty="0" err="1">
+              <a:rPr lang="en-GB" sz="1000" err="1">
                 <a:solidFill>
                   <a:schemeClr val="tx1"/>
                 </a:solidFill>
@@ -5720,7 +6320,7 @@
               <a:t>insight</a:t>
             </a:r>
             <a:r>
-              <a:rPr lang="en-GB" sz="1000" dirty="0">
+              <a:rPr lang="en-GB" sz="1000">
                 <a:solidFill>
                   <a:schemeClr val="tx1"/>
                 </a:solidFill>
@@ -5728,7 +6328,7 @@
               <a:t> </a:t>
             </a:r>
             <a:r>
-              <a:rPr lang="en-GB" sz="1000" dirty="0" err="1">
+              <a:rPr lang="en-GB" sz="1000" err="1">
                 <a:solidFill>
                   <a:schemeClr val="tx1"/>
                 </a:solidFill>
@@ -5736,7 +6336,7 @@
               <a:t>to</a:t>
             </a:r>
             <a:r>
-              <a:rPr lang="en-GB" sz="1000" dirty="0">
+              <a:rPr lang="en-GB" sz="1000">
                 <a:solidFill>
                   <a:schemeClr val="tx1"/>
                 </a:solidFill>
@@ -5744,7 +6344,7 @@
               <a:t> </a:t>
             </a:r>
             <a:r>
-              <a:rPr lang="en-GB" sz="1000" dirty="0" err="1">
+              <a:rPr lang="en-GB" sz="1000" err="1">
                 <a:solidFill>
                   <a:schemeClr val="tx1"/>
                 </a:solidFill>
@@ -5752,7 +6352,7 @@
               <a:t>impact</a:t>
             </a:r>
             <a:r>
-              <a:rPr lang="en-GB" sz="1000" dirty="0">
+              <a:rPr lang="en-GB" sz="1000">
                 <a:solidFill>
                   <a:schemeClr val="tx1"/>
                 </a:solidFill>
@@ -5822,7 +6422,7 @@
           </a:lstStyle>
           <a:p>
             <a:r>
-              <a:rPr lang="en-GB" dirty="0"/>
+              <a:rPr lang="en-GB"/>
               <a:t>Click to edit Master title style</a:t>
             </a:r>
           </a:p>
@@ -5895,30 +6495,27 @@
           <a:p>
             <a:pPr lvl="0"/>
             <a:r>
-              <a:rPr lang="en-GB" dirty="0"/>
+              <a:rPr lang="en-GB"/>
               <a:t>Click to edit Master text styles</a:t>
             </a:r>
+          </a:p>
+          <a:p>
+            <a:pPr lvl="1"/>
+            <a:r>
+              <a:rPr lang="en-GB"/>
+              <a:t>Second level</a:t>
+            </a:r>
+          </a:p>
+          <a:p>
+            <a:pPr lvl="2"/>
+            <a:r>
+              <a:rPr lang="en-GB"/>
+              <a:t>Third level</a:t>
+            </a:r>
+          </a:p>
+          <a:p>
+            <a:pPr lvl="3"/>
             <a:endParaRPr lang="en-GB"/>
-          </a:p>
-          <a:p>
-            <a:pPr lvl="1"/>
-            <a:r>
-              <a:rPr lang="en-GB" dirty="0"/>
-              <a:t>Second level</a:t>
-            </a:r>
-            <a:endParaRPr lang="en-GB"/>
-          </a:p>
-          <a:p>
-            <a:pPr lvl="2"/>
-            <a:r>
-              <a:rPr lang="en-GB" dirty="0"/>
-              <a:t>Third level</a:t>
-            </a:r>
-            <a:endParaRPr lang="en-GB"/>
-          </a:p>
-          <a:p>
-            <a:pPr lvl="3"/>
-            <a:endParaRPr lang="en-GB" dirty="0"/>
           </a:p>
         </p:txBody>
       </p:sp>
@@ -6098,7 +6695,7 @@
           <a:bodyPr/>
           <a:lstStyle/>
           <a:p>
-            <a:endParaRPr lang="en-GB" dirty="0"/>
+            <a:endParaRPr lang="en-GB"/>
           </a:p>
         </p:txBody>
       </p:sp>
@@ -6308,7 +6905,7 @@
           </a:lstStyle>
           <a:p>
             <a:r>
-              <a:rPr lang="en-GB" dirty="0"/>
+              <a:rPr lang="en-GB"/>
               <a:t>Click to edit Master title style</a:t>
             </a:r>
           </a:p>
@@ -6398,106 +6995,97 @@
           <a:p>
             <a:pPr lvl="0"/>
             <a:r>
-              <a:rPr lang="en-GB" dirty="0"/>
+              <a:rPr lang="en-GB"/>
               <a:t>Click to edit Master text styles</a:t>
             </a:r>
-            <a:endParaRPr lang="en-GB"/>
           </a:p>
           <a:p>
             <a:pPr lvl="1"/>
             <a:r>
-              <a:rPr lang="en-GB" dirty="0" err="1"/>
+              <a:rPr lang="en-GB" err="1"/>
               <a:t>Zweite</a:t>
             </a:r>
             <a:r>
-              <a:rPr lang="en-GB" dirty="0"/>
+              <a:rPr lang="en-GB"/>
               <a:t> Ebene</a:t>
             </a:r>
-            <a:endParaRPr lang="en-GB"/>
           </a:p>
           <a:p>
             <a:pPr lvl="2"/>
             <a:r>
-              <a:rPr lang="en-GB" dirty="0" err="1"/>
+              <a:rPr lang="en-GB" err="1"/>
               <a:t>Dritte</a:t>
             </a:r>
             <a:r>
-              <a:rPr lang="en-GB" dirty="0"/>
+              <a:rPr lang="en-GB"/>
               <a:t> Ebene</a:t>
             </a:r>
-            <a:endParaRPr lang="en-GB"/>
           </a:p>
           <a:p>
             <a:pPr lvl="3"/>
             <a:r>
-              <a:rPr lang="en-GB" dirty="0" err="1"/>
+              <a:rPr lang="en-GB" err="1"/>
               <a:t>Vierte</a:t>
             </a:r>
             <a:r>
-              <a:rPr lang="en-GB" dirty="0"/>
+              <a:rPr lang="en-GB"/>
               <a:t> Ebene</a:t>
             </a:r>
-            <a:endParaRPr lang="en-GB"/>
           </a:p>
           <a:p>
             <a:pPr lvl="4"/>
             <a:r>
-              <a:rPr lang="en-GB" dirty="0" err="1"/>
+              <a:rPr lang="en-GB" err="1"/>
               <a:t>Fünfte</a:t>
             </a:r>
             <a:r>
-              <a:rPr lang="en-GB" dirty="0"/>
+              <a:rPr lang="en-GB"/>
               <a:t> Ebene</a:t>
             </a:r>
-            <a:endParaRPr lang="en-GB"/>
           </a:p>
           <a:p>
             <a:pPr lvl="5"/>
             <a:r>
-              <a:rPr lang="en-GB" dirty="0" err="1"/>
+              <a:rPr lang="en-GB" err="1"/>
               <a:t>Sechste</a:t>
             </a:r>
             <a:r>
-              <a:rPr lang="en-GB" dirty="0"/>
+              <a:rPr lang="en-GB"/>
               <a:t> Ebene</a:t>
             </a:r>
-            <a:endParaRPr lang="en-GB"/>
           </a:p>
           <a:p>
             <a:pPr lvl="6"/>
             <a:r>
-              <a:rPr lang="en-GB" dirty="0" err="1"/>
+              <a:rPr lang="en-GB" err="1"/>
               <a:t>Siebte</a:t>
             </a:r>
             <a:r>
-              <a:rPr lang="en-GB" dirty="0"/>
+              <a:rPr lang="en-GB"/>
               <a:t> Ebene</a:t>
             </a:r>
-            <a:endParaRPr lang="en-GB"/>
           </a:p>
           <a:p>
             <a:pPr lvl="7"/>
             <a:r>
-              <a:rPr lang="en-GB" dirty="0" err="1"/>
+              <a:rPr lang="en-GB" err="1"/>
               <a:t>Achte</a:t>
             </a:r>
             <a:r>
-              <a:rPr lang="en-GB" dirty="0"/>
+              <a:rPr lang="en-GB"/>
               <a:t> Ebene</a:t>
             </a:r>
-            <a:endParaRPr lang="en-GB"/>
           </a:p>
           <a:p>
             <a:pPr lvl="8"/>
             <a:r>
-              <a:rPr lang="en-GB" dirty="0" err="1"/>
+              <a:rPr lang="en-GB" err="1"/>
               <a:t>Neunte</a:t>
             </a:r>
             <a:r>
-              <a:rPr lang="en-GB" dirty="0"/>
+              <a:rPr lang="en-GB"/>
               <a:t> Ebene</a:t>
             </a:r>
-            <a:endParaRPr lang="en-GB"/>
           </a:p>
         </p:txBody>
       </p:sp>
@@ -6527,7 +7115,7 @@
               <a:pPr/>
               <a:t>‹#›</a:t>
             </a:fld>
-            <a:endParaRPr lang="en-GB" dirty="0"/>
+            <a:endParaRPr lang="en-GB"/>
           </a:p>
         </p:txBody>
       </p:sp>
@@ -6578,7 +7166,7 @@
           <a:p>
             <a:pPr algn="l"/>
             <a:r>
-              <a:rPr lang="en-GB" sz="800" dirty="0">
+              <a:rPr lang="en-GB" sz="800">
                 <a:solidFill>
                   <a:schemeClr val="tx1"/>
                 </a:solidFill>
@@ -6634,7 +7222,7 @@
           <a:lstStyle/>
           <a:p>
             <a:pPr algn="l"/>
-            <a:endParaRPr lang="en-GB" sz="800" dirty="0">
+            <a:endParaRPr lang="en-GB" sz="800">
               <a:solidFill>
                 <a:schemeClr val="tx1"/>
               </a:solidFill>
@@ -6713,7 +7301,7 @@
           <a:p>
             <a:pPr algn="l"/>
             <a:r>
-              <a:rPr lang="en-GB" sz="800" u="none" dirty="0">
+              <a:rPr lang="en-GB" sz="800" u="none">
                 <a:solidFill>
                   <a:schemeClr val="tx1"/>
                 </a:solidFill>
@@ -6807,7 +7395,6 @@
               <a:rPr lang="en-GB"/>
               <a:t>Click to edit Master title style</a:t>
             </a:r>
-            <a:endParaRPr lang="en-GB" dirty="0"/>
           </a:p>
         </p:txBody>
       </p:sp>
@@ -7158,7 +7745,6 @@
               <a:rPr lang="en-GB"/>
               <a:t>Click to edit Master title style</a:t>
             </a:r>
-            <a:endParaRPr lang="en-GB" dirty="0"/>
           </a:p>
         </p:txBody>
       </p:sp>
@@ -7480,39 +8066,35 @@
           <a:p>
             <a:pPr lvl="0"/>
             <a:r>
-              <a:rPr lang="en-GB" dirty="0"/>
+              <a:rPr lang="en-GB"/>
               <a:t>Click to edit Master text styles</a:t>
             </a:r>
-            <a:endParaRPr lang="en-GB"/>
           </a:p>
           <a:p>
             <a:pPr lvl="1"/>
             <a:r>
-              <a:rPr lang="en-GB" dirty="0"/>
+              <a:rPr lang="en-GB"/>
               <a:t>Second level</a:t>
             </a:r>
-            <a:endParaRPr lang="en-GB"/>
           </a:p>
           <a:p>
             <a:pPr lvl="2"/>
             <a:r>
-              <a:rPr lang="en-GB" dirty="0"/>
+              <a:rPr lang="en-GB"/>
               <a:t>Third level</a:t>
             </a:r>
-            <a:endParaRPr lang="en-GB"/>
           </a:p>
           <a:p>
             <a:pPr lvl="3"/>
             <a:r>
-              <a:rPr lang="en-GB" dirty="0"/>
+              <a:rPr lang="en-GB"/>
               <a:t>Fourth level</a:t>
             </a:r>
-            <a:endParaRPr lang="en-GB"/>
           </a:p>
           <a:p>
             <a:pPr lvl="4"/>
             <a:r>
-              <a:rPr lang="en-GB" dirty="0"/>
+              <a:rPr lang="en-GB"/>
               <a:t>Fifth level</a:t>
             </a:r>
           </a:p>
@@ -7579,7 +8161,6 @@
               <a:rPr lang="en-GB"/>
               <a:t>Fifth level</a:t>
             </a:r>
-            <a:endParaRPr lang="en-GB" dirty="0"/>
           </a:p>
         </p:txBody>
       </p:sp>
@@ -7609,7 +8190,7 @@
               <a:pPr/>
               <a:t>‹#›</a:t>
             </a:fld>
-            <a:endParaRPr lang="en-GB" dirty="0"/>
+            <a:endParaRPr lang="en-GB"/>
           </a:p>
         </p:txBody>
       </p:sp>
@@ -7660,7 +8241,7 @@
           <a:p>
             <a:pPr algn="l"/>
             <a:r>
-              <a:rPr lang="en-GB" sz="800" dirty="0">
+              <a:rPr lang="en-GB" sz="800">
                 <a:solidFill>
                   <a:schemeClr val="tx1"/>
                 </a:solidFill>
@@ -7740,7 +8321,7 @@
           <a:lstStyle/>
           <a:p>
             <a:pPr algn="l"/>
-            <a:endParaRPr lang="en-GB" sz="800" dirty="0">
+            <a:endParaRPr lang="en-GB" sz="800">
               <a:solidFill>
                 <a:schemeClr val="tx1"/>
               </a:solidFill>
@@ -7795,7 +8376,7 @@
           <a:p>
             <a:pPr algn="l"/>
             <a:r>
-              <a:rPr lang="en-GB" sz="800" u="none" dirty="0">
+              <a:rPr lang="en-GB" sz="800" u="none">
                 <a:solidFill>
                   <a:schemeClr val="tx1"/>
                 </a:solidFill>
@@ -7965,7 +8546,6 @@
               <a:rPr lang="en-GB"/>
               <a:t>Click to edit Master title style</a:t>
             </a:r>
-            <a:endParaRPr lang="en-GB" dirty="0"/>
           </a:p>
         </p:txBody>
       </p:sp>
@@ -7994,39 +8574,35 @@
           <a:p>
             <a:pPr lvl="0"/>
             <a:r>
-              <a:rPr lang="en-GB" dirty="0"/>
+              <a:rPr lang="en-GB"/>
               <a:t>Click to edit Master text styles</a:t>
             </a:r>
-            <a:endParaRPr lang="en-GB"/>
           </a:p>
           <a:p>
             <a:pPr lvl="1"/>
             <a:r>
-              <a:rPr lang="en-GB" dirty="0"/>
+              <a:rPr lang="en-GB"/>
               <a:t>Second level</a:t>
             </a:r>
-            <a:endParaRPr lang="en-GB"/>
           </a:p>
           <a:p>
             <a:pPr lvl="2"/>
             <a:r>
-              <a:rPr lang="en-GB" dirty="0"/>
+              <a:rPr lang="en-GB"/>
               <a:t>Third level</a:t>
             </a:r>
-            <a:endParaRPr lang="en-GB"/>
           </a:p>
           <a:p>
             <a:pPr lvl="3"/>
             <a:r>
-              <a:rPr lang="en-GB" dirty="0"/>
+              <a:rPr lang="en-GB"/>
               <a:t>Fourth level</a:t>
             </a:r>
-            <a:endParaRPr lang="en-GB"/>
           </a:p>
           <a:p>
             <a:pPr lvl="4"/>
             <a:r>
-              <a:rPr lang="en-GB" dirty="0"/>
+              <a:rPr lang="en-GB"/>
               <a:t>Fifth level</a:t>
             </a:r>
           </a:p>
@@ -8071,7 +8647,7 @@
               <a:pPr/>
               <a:t>‹#›</a:t>
             </a:fld>
-            <a:endParaRPr lang="en-GB" dirty="0"/>
+            <a:endParaRPr lang="en-GB"/>
           </a:p>
         </p:txBody>
       </p:sp>
@@ -8122,7 +8698,7 @@
           <a:p>
             <a:pPr algn="l"/>
             <a:r>
-              <a:rPr lang="en-GB" sz="800" dirty="0">
+              <a:rPr lang="en-GB" sz="800">
                 <a:solidFill>
                   <a:schemeClr val="tx1"/>
                 </a:solidFill>
@@ -8202,7 +8778,7 @@
           <a:lstStyle/>
           <a:p>
             <a:pPr algn="l"/>
-            <a:endParaRPr lang="en-GB" sz="800" dirty="0">
+            <a:endParaRPr lang="en-GB" sz="800">
               <a:solidFill>
                 <a:schemeClr val="tx1"/>
               </a:solidFill>
@@ -8257,7 +8833,7 @@
           <a:p>
             <a:pPr algn="l"/>
             <a:r>
-              <a:rPr lang="en-GB" sz="800" u="none" dirty="0">
+              <a:rPr lang="en-GB" sz="800" u="none">
                 <a:solidFill>
                   <a:schemeClr val="tx1"/>
                 </a:solidFill>
@@ -8572,7 +9148,7 @@
           <a:p>
             <a:pPr algn="l"/>
             <a:r>
-              <a:rPr lang="en-GB" sz="800" dirty="0">
+              <a:rPr lang="en-GB" sz="800">
                 <a:solidFill>
                   <a:schemeClr val="tx1"/>
                 </a:solidFill>
@@ -8652,7 +9228,7 @@
           <a:lstStyle/>
           <a:p>
             <a:pPr algn="l"/>
-            <a:endParaRPr lang="en-GB" sz="800" dirty="0">
+            <a:endParaRPr lang="en-GB" sz="800">
               <a:solidFill>
                 <a:schemeClr val="tx1"/>
               </a:solidFill>
@@ -8707,7 +9283,7 @@
           <a:p>
             <a:pPr algn="l"/>
             <a:r>
-              <a:rPr lang="en-GB" sz="800" u="none" dirty="0">
+              <a:rPr lang="en-GB" sz="800" u="none">
                 <a:solidFill>
                   <a:schemeClr val="tx1"/>
                 </a:solidFill>
@@ -8787,7 +9363,6 @@
               <a:rPr lang="en-GB"/>
               <a:t>Click to edit Master title style</a:t>
             </a:r>
-            <a:endParaRPr lang="en-GB" dirty="0"/>
           </a:p>
         </p:txBody>
       </p:sp>
@@ -8824,39 +9399,35 @@
           <a:p>
             <a:pPr lvl="0"/>
             <a:r>
-              <a:rPr lang="en-GB" dirty="0"/>
+              <a:rPr lang="en-GB"/>
               <a:t>Click to edit Master text styles</a:t>
             </a:r>
-            <a:endParaRPr lang="en-GB"/>
           </a:p>
           <a:p>
             <a:pPr lvl="1"/>
             <a:r>
-              <a:rPr lang="en-GB" dirty="0"/>
+              <a:rPr lang="en-GB"/>
               <a:t>Second level</a:t>
             </a:r>
-            <a:endParaRPr lang="en-GB"/>
           </a:p>
           <a:p>
             <a:pPr lvl="2"/>
             <a:r>
-              <a:rPr lang="en-GB" dirty="0"/>
+              <a:rPr lang="en-GB"/>
               <a:t>Third level</a:t>
             </a:r>
-            <a:endParaRPr lang="en-GB"/>
           </a:p>
           <a:p>
             <a:pPr lvl="3"/>
             <a:r>
-              <a:rPr lang="en-GB" dirty="0"/>
+              <a:rPr lang="en-GB"/>
               <a:t>Fourth level</a:t>
             </a:r>
-            <a:endParaRPr lang="en-GB"/>
           </a:p>
           <a:p>
             <a:pPr lvl="4"/>
             <a:r>
-              <a:rPr lang="en-GB" dirty="0"/>
+              <a:rPr lang="en-GB"/>
               <a:t>Fifth level</a:t>
             </a:r>
           </a:p>
@@ -8903,7 +9474,7 @@
               <a:rPr lang="en-GB" smtClean="0"/>
               <a:t>12 April 2026</a:t>
             </a:fld>
-            <a:endParaRPr lang="en-GB" dirty="0"/>
+            <a:endParaRPr lang="en-GB"/>
           </a:p>
         </p:txBody>
       </p:sp>
@@ -8948,7 +9519,6 @@
               <a:rPr lang="en-GB"/>
               <a:t>Corporate Design - Power Point Master</a:t>
             </a:r>
-            <a:endParaRPr lang="en-GB" dirty="0"/>
           </a:p>
         </p:txBody>
       </p:sp>
@@ -8994,7 +9564,7 @@
               <a:pPr/>
               <a:t>‹#›</a:t>
             </a:fld>
-            <a:endParaRPr lang="en-GB" dirty="0"/>
+            <a:endParaRPr lang="en-GB"/>
           </a:p>
         </p:txBody>
       </p:sp>
@@ -9456,21 +10026,19 @@
           <a:lstStyle/>
           <a:p>
             <a:r>
-              <a:rPr dirty="0"/>
               <a:t>EDPO Project FS26</a:t>
             </a:r>
           </a:p>
           <a:p>
             <a:r>
-              <a:rPr dirty="0" err="1"/>
+              <a:rPr err="1"/>
               <a:t>St.Gallen</a:t>
             </a:r>
             <a:r>
-              <a:rPr dirty="0"/>
               <a:t>  |</a:t>
             </a:r>
             <a:r>
-              <a:rPr lang="de-DE" dirty="0"/>
+              <a:rPr lang="de-DE"/>
               <a:t>  Ioannis Theodosiadis &amp; Cyril Gabriele</a:t>
             </a:r>
           </a:p>
@@ -9514,7 +10082,7 @@
               <a:pPr algn="ctr"/>
               <a:t>1</a:t>
             </a:fld>
-            <a:endParaRPr lang="de-DE" sz="1200" dirty="0">
+            <a:endParaRPr lang="de-DE" sz="1200">
               <a:solidFill>
                 <a:schemeClr val="bg1"/>
               </a:solidFill>
@@ -9550,7 +10118,7 @@
           </a:bodyPr>
           <a:lstStyle/>
           <a:p>
-            <a:endParaRPr lang="de-DE" dirty="0"/>
+            <a:endParaRPr lang="de-DE"/>
           </a:p>
         </p:txBody>
       </p:sp>
@@ -9595,16 +10163,24 @@
           <a:lstStyle/>
           <a:p>
             <a:r>
-              <a:rPr dirty="0"/>
-              <a:t>Onboarding </a:t>
-            </a:r>
-            <a:r>
-              <a:rPr lang="en-US" dirty="0"/>
-              <a:t>-</a:t>
-            </a:r>
-            <a:r>
-              <a:rPr dirty="0"/>
-              <a:t> Compensation &amp; Flag-Driven Completion</a:t>
+              <a:rPr lang="de-CH"/>
+              <a:t>Onboarding: </a:t>
+            </a:r>
+            <a:r>
+              <a:rPr lang="de-CH" b="1">
+                <a:solidFill>
+                  <a:srgbClr val="00802E"/>
+                </a:solidFill>
+              </a:rPr>
+              <a:t>Individual</a:t>
+            </a:r>
+            <a:r>
+              <a:rPr b="1">
+                <a:solidFill>
+                  <a:srgbClr val="00802E"/>
+                </a:solidFill>
+              </a:rPr>
+              <a:t> Service</a:t>
             </a:r>
           </a:p>
         </p:txBody>
@@ -9619,119 +10195,27 @@
             <p:ph idx="1"/>
           </p:nvPr>
         </p:nvSpPr>
-        <p:spPr/>
+        <p:spPr>
+          <a:xfrm>
+            <a:off x="358775" y="1276352"/>
+            <a:ext cx="8426450" cy="314054"/>
+          </a:xfrm>
+        </p:spPr>
         <p:txBody>
           <a:bodyPr wrap="square"/>
           <a:lstStyle/>
           <a:p>
-            <a:r>
-              <a:rPr sz="1400" dirty="0"/>
-              <a:t>Challenge: one creation succeeds, the other fails </a:t>
-            </a:r>
-            <a:r>
-              <a:rPr lang="en-US" sz="1400" dirty="0"/>
-              <a:t>-</a:t>
-            </a:r>
-            <a:r>
-              <a:rPr sz="1400" dirty="0"/>
-              <a:t> what now?</a:t>
-            </a:r>
-          </a:p>
-          <a:p>
-            <a:r>
-              <a:rPr sz="1400" dirty="0"/>
-              <a:t>Flag-driven completion (ADR-0012)</a:t>
-            </a:r>
-          </a:p>
-          <a:p>
-            <a:pPr lvl="1"/>
-            <a:r>
-              <a:rPr sz="1200" dirty="0"/>
-              <a:t>Workers always complete </a:t>
-            </a:r>
-            <a:r>
-              <a:rPr sz="1200" dirty="0" err="1"/>
-              <a:t>Zeebe</a:t>
-            </a:r>
-            <a:r>
-              <a:rPr sz="1200" dirty="0"/>
-              <a:t> jobs, report outcome via flags</a:t>
-            </a:r>
-          </a:p>
-          <a:p>
-            <a:pPr lvl="1"/>
-            <a:r>
-              <a:rPr sz="1200" dirty="0" err="1"/>
-              <a:t>isUserCreated</a:t>
-            </a:r>
-            <a:r>
-              <a:rPr sz="1200" dirty="0"/>
-              <a:t> / </a:t>
-            </a:r>
-            <a:r>
-              <a:rPr sz="1200" dirty="0" err="1"/>
-              <a:t>isPortfolioCreated</a:t>
-            </a:r>
-            <a:r>
-              <a:rPr sz="1200" dirty="0"/>
-              <a:t> drive gateway branches</a:t>
-            </a:r>
-          </a:p>
-          <a:p>
-            <a:pPr lvl="1"/>
-            <a:r>
-              <a:rPr sz="1200" dirty="0"/>
-              <a:t>BPMN errors would short-circuit and bypass compensation gateways</a:t>
-            </a:r>
-          </a:p>
-          <a:p>
-            <a:r>
-              <a:rPr sz="1400" dirty="0"/>
-              <a:t>Compensation (ADR-0011)</a:t>
-            </a:r>
-          </a:p>
-          <a:p>
-            <a:pPr lvl="1"/>
-            <a:r>
-              <a:rPr sz="1200" dirty="0"/>
-              <a:t>Exclusive gateways inspect flags → compensation handlers</a:t>
-            </a:r>
-          </a:p>
-          <a:p>
-            <a:pPr lvl="1"/>
-            <a:r>
-              <a:rPr sz="1200" dirty="0"/>
-              <a:t>Delete local entity + publish compensation request for peer</a:t>
-            </a:r>
-          </a:p>
-          <a:p>
-            <a:pPr lvl="1"/>
-            <a:r>
-              <a:rPr sz="1200" dirty="0"/>
-              <a:t>User/Portfolio </a:t>
-            </a:r>
-            <a:r>
-              <a:rPr sz="1200" dirty="0" err="1"/>
-              <a:t>CompensationRequestedEvent</a:t>
-            </a:r>
-            <a:r>
-              <a:rPr sz="1200" dirty="0"/>
-              <a:t> carries full payload</a:t>
-            </a:r>
-          </a:p>
-          <a:p>
-            <a:pPr lvl="1"/>
-            <a:r>
-              <a:rPr sz="1200" dirty="0"/>
-              <a:t>Idempotent deletes </a:t>
-            </a:r>
-            <a:r>
-              <a:rPr lang="en-US" sz="1200" dirty="0"/>
-              <a:t>-</a:t>
-            </a:r>
-            <a:r>
-              <a:rPr sz="1200" dirty="0"/>
-              <a:t> safe under at-least-once delivery</a:t>
+            <a:pPr marL="285750" indent="-285750">
+              <a:buFont typeface="Arial" panose="020B0604020202020204" pitchFamily="34" charset="0"/>
+              <a:buChar char="•"/>
+            </a:pPr>
+            <a:r>
+              <a:rPr sz="1600"/>
+              <a:t>Originally the BPMN lived inside user-service</a:t>
+            </a:r>
+            <a:r>
+              <a:rPr lang="de-CH" sz="1600"/>
+              <a:t>…</a:t>
             </a:r>
           </a:p>
         </p:txBody>
@@ -9741,7 +10225,7 @@
           <p:cNvPr id="4" name="Textfeld 3">
             <a:extLst>
               <a:ext uri="{FF2B5EF4-FFF2-40B4-BE49-F238E27FC236}">
-                <a16:creationId xmlns:a16="http://schemas.microsoft.com/office/drawing/2014/main" id="{2C390B98-05F1-67DB-E21C-1A9B3D890325}"/>
+                <a16:creationId xmlns:a16="http://schemas.microsoft.com/office/drawing/2014/main" id="{9AE1938E-0CBB-32EA-E95C-6E86B75B40DA}"/>
               </a:ext>
             </a:extLst>
           </p:cNvPr>
@@ -9774,11 +10258,251 @@
               <a:pPr algn="ctr"/>
               <a:t>10</a:t>
             </a:fld>
-            <a:endParaRPr lang="de-DE" sz="1200" dirty="0">
+            <a:endParaRPr lang="de-DE" sz="1200">
               <a:solidFill>
                 <a:schemeClr val="bg1"/>
               </a:solidFill>
             </a:endParaRPr>
+          </a:p>
+        </p:txBody>
+      </p:sp>
+      <p:sp>
+        <p:nvSpPr>
+          <p:cNvPr id="6" name="TextBox 5">
+            <a:extLst>
+              <a:ext uri="{FF2B5EF4-FFF2-40B4-BE49-F238E27FC236}">
+                <a16:creationId xmlns:a16="http://schemas.microsoft.com/office/drawing/2014/main" id="{F1B45157-86E2-C7EA-4A8F-2D6A17FBCD74}"/>
+              </a:ext>
+            </a:extLst>
+          </p:cNvPr>
+          <p:cNvSpPr txBox="1"/>
+          <p:nvPr/>
+        </p:nvSpPr>
+        <p:spPr>
+          <a:xfrm>
+            <a:off x="640701" y="1740753"/>
+            <a:ext cx="3643431" cy="1700466"/>
+          </a:xfrm>
+          <a:prstGeom prst="rect">
+            <a:avLst/>
+          </a:prstGeom>
+          <a:noFill/>
+        </p:spPr>
+        <p:txBody>
+          <a:bodyPr wrap="square" rtlCol="0">
+            <a:spAutoFit/>
+          </a:bodyPr>
+          <a:lstStyle/>
+          <a:p>
+            <a:r>
+              <a:rPr lang="en-US" sz="1600" b="1">
+                <a:solidFill>
+                  <a:srgbClr val="FF0000"/>
+                </a:solidFill>
+              </a:rPr>
+              <a:t>Problem</a:t>
+            </a:r>
+            <a:r>
+              <a:rPr lang="en-US" sz="1600"/>
+              <a:t>: </a:t>
+            </a:r>
+          </a:p>
+          <a:p>
+            <a:r>
+              <a:rPr lang="en-US" sz="1600"/>
+              <a:t>orchestrator coordinates work across two bounded contexts</a:t>
+            </a:r>
+          </a:p>
+          <a:p>
+            <a:endParaRPr lang="en-US" sz="1600"/>
+          </a:p>
+          <a:p>
+            <a:pPr marL="285750" indent="-285750">
+              <a:buFont typeface="Arial" panose="020B0604020202020204" pitchFamily="34" charset="0"/>
+              <a:buChar char="•"/>
+            </a:pPr>
+            <a:r>
+              <a:rPr lang="en-US"/>
+              <a:t>Coupling + mixed responsibilities violates DDD boundaries</a:t>
+            </a:r>
+          </a:p>
+          <a:p>
+            <a:endParaRPr lang="en-US"/>
+          </a:p>
+        </p:txBody>
+      </p:sp>
+      <p:sp>
+        <p:nvSpPr>
+          <p:cNvPr id="7" name="TextBox 6">
+            <a:extLst>
+              <a:ext uri="{FF2B5EF4-FFF2-40B4-BE49-F238E27FC236}">
+                <a16:creationId xmlns:a16="http://schemas.microsoft.com/office/drawing/2014/main" id="{7E152D5C-2A61-DCBA-A6B7-B73DEC5DFCB6}"/>
+              </a:ext>
+            </a:extLst>
+          </p:cNvPr>
+          <p:cNvSpPr txBox="1"/>
+          <p:nvPr/>
+        </p:nvSpPr>
+        <p:spPr>
+          <a:xfrm>
+            <a:off x="4859867" y="1728906"/>
+            <a:ext cx="3643431" cy="2577629"/>
+          </a:xfrm>
+          <a:prstGeom prst="rect">
+            <a:avLst/>
+          </a:prstGeom>
+          <a:noFill/>
+        </p:spPr>
+        <p:txBody>
+          <a:bodyPr wrap="square" rtlCol="0">
+            <a:spAutoFit/>
+          </a:bodyPr>
+          <a:lstStyle/>
+          <a:p>
+            <a:r>
+              <a:rPr lang="en-US" sz="1600" b="1">
+                <a:solidFill>
+                  <a:srgbClr val="00802E"/>
+                </a:solidFill>
+              </a:rPr>
+              <a:t>Solution</a:t>
+            </a:r>
+            <a:r>
+              <a:rPr lang="en-US" sz="1600"/>
+              <a:t>: </a:t>
+            </a:r>
+          </a:p>
+          <a:p>
+            <a:r>
+              <a:rPr lang="en-US" sz="1600"/>
+              <a:t>extract into a dedicated onboarding-service</a:t>
+            </a:r>
+          </a:p>
+          <a:p>
+            <a:endParaRPr lang="en-US" sz="1600"/>
+          </a:p>
+          <a:p>
+            <a:pPr marL="285750" indent="-285750">
+              <a:buFont typeface="Arial" panose="020B0604020202020204" pitchFamily="34" charset="0"/>
+              <a:buChar char="•"/>
+            </a:pPr>
+            <a:r>
+              <a:rPr lang="en-US" sz="1400"/>
+              <a:t>Owns the BPMN process and </a:t>
+            </a:r>
+            <a:r>
+              <a:rPr lang="en-US" sz="1400" err="1"/>
+              <a:t>Zeebe</a:t>
+            </a:r>
+            <a:r>
+              <a:rPr lang="en-US" sz="1400"/>
+              <a:t> deployment</a:t>
+            </a:r>
+          </a:p>
+          <a:p>
+            <a:pPr marL="285750" indent="-285750">
+              <a:buFont typeface="Arial" panose="020B0604020202020204" pitchFamily="34" charset="0"/>
+              <a:buChar char="•"/>
+            </a:pPr>
+            <a:r>
+              <a:rPr lang="en-US" sz="1400"/>
+              <a:t>No persistent business data - workflow state lives in </a:t>
+            </a:r>
+            <a:r>
+              <a:rPr lang="en-US" sz="1400" err="1"/>
+              <a:t>Zeebe</a:t>
+            </a:r>
+            <a:endParaRPr lang="en-US" sz="1400"/>
+          </a:p>
+          <a:p>
+            <a:pPr marL="285750" indent="-285750">
+              <a:buFont typeface="Arial" panose="020B0604020202020204" pitchFamily="34" charset="0"/>
+              <a:buChar char="•"/>
+            </a:pPr>
+            <a:r>
+              <a:rPr lang="en-US" sz="1400"/>
+              <a:t>User and portfolio services keep their domain autonomy</a:t>
+            </a:r>
+          </a:p>
+          <a:p>
+            <a:endParaRPr lang="en-US"/>
+          </a:p>
+        </p:txBody>
+      </p:sp>
+      <p:cxnSp>
+        <p:nvCxnSpPr>
+          <p:cNvPr id="9" name="Straight Connector 8">
+            <a:extLst>
+              <a:ext uri="{FF2B5EF4-FFF2-40B4-BE49-F238E27FC236}">
+                <a16:creationId xmlns:a16="http://schemas.microsoft.com/office/drawing/2014/main" id="{5F819B6F-172D-5ED2-B0FC-A7606433C241}"/>
+              </a:ext>
+            </a:extLst>
+          </p:cNvPr>
+          <p:cNvCxnSpPr>
+            <a:cxnSpLocks/>
+          </p:cNvCxnSpPr>
+          <p:nvPr/>
+        </p:nvCxnSpPr>
+        <p:spPr>
+          <a:xfrm>
+            <a:off x="4521227" y="1800020"/>
+            <a:ext cx="0" cy="2213180"/>
+          </a:xfrm>
+          <a:prstGeom prst="line">
+            <a:avLst/>
+          </a:prstGeom>
+        </p:spPr>
+        <p:style>
+          <a:lnRef idx="1">
+            <a:schemeClr val="dk1"/>
+          </a:lnRef>
+          <a:fillRef idx="0">
+            <a:schemeClr val="dk1"/>
+          </a:fillRef>
+          <a:effectRef idx="0">
+            <a:schemeClr val="dk1"/>
+          </a:effectRef>
+          <a:fontRef idx="minor">
+            <a:schemeClr val="tx1"/>
+          </a:fontRef>
+        </p:style>
+      </p:cxnSp>
+      <p:sp>
+        <p:nvSpPr>
+          <p:cNvPr id="11" name="TextBox 10">
+            <a:extLst>
+              <a:ext uri="{FF2B5EF4-FFF2-40B4-BE49-F238E27FC236}">
+                <a16:creationId xmlns:a16="http://schemas.microsoft.com/office/drawing/2014/main" id="{718393B8-F7CE-7EAF-6DAC-912914279752}"/>
+              </a:ext>
+            </a:extLst>
+          </p:cNvPr>
+          <p:cNvSpPr txBox="1"/>
+          <p:nvPr/>
+        </p:nvSpPr>
+        <p:spPr>
+          <a:xfrm>
+            <a:off x="358775" y="4158888"/>
+            <a:ext cx="8324904" cy="300082"/>
+          </a:xfrm>
+          <a:prstGeom prst="rect">
+            <a:avLst/>
+          </a:prstGeom>
+          <a:noFill/>
+        </p:spPr>
+        <p:txBody>
+          <a:bodyPr wrap="square" rtlCol="0">
+            <a:spAutoFit/>
+          </a:bodyPr>
+          <a:lstStyle/>
+          <a:p>
+            <a:r>
+              <a:rPr lang="en-US" b="1"/>
+              <a:t>trade-off</a:t>
+            </a:r>
+            <a:r>
+              <a:rPr lang="en-US"/>
+              <a:t>: 1 extra service but clean separation</a:t>
+            </a:r>
           </a:p>
         </p:txBody>
       </p:sp>
@@ -9787,6 +10511,84 @@
   <p:clrMapOvr>
     <a:masterClrMapping/>
   </p:clrMapOvr>
+  <p:timing>
+    <p:tnLst>
+      <p:par>
+        <p:cTn id="1" dur="indefinite" restart="never" nodeType="tmRoot">
+          <p:childTnLst>
+            <p:seq concurrent="1" nextAc="seek">
+              <p:cTn id="2" dur="indefinite" nodeType="mainSeq">
+                <p:childTnLst>
+                  <p:par>
+                    <p:cTn id="3" fill="hold">
+                      <p:stCondLst>
+                        <p:cond delay="indefinite"/>
+                      </p:stCondLst>
+                      <p:childTnLst>
+                        <p:par>
+                          <p:cTn id="4" fill="hold">
+                            <p:stCondLst>
+                              <p:cond delay="0"/>
+                            </p:stCondLst>
+                            <p:childTnLst>
+                              <p:par>
+                                <p:cTn id="5" presetID="1" presetClass="entr" presetSubtype="0" fill="hold" grpId="0" nodeType="clickEffect">
+                                  <p:stCondLst>
+                                    <p:cond delay="0"/>
+                                  </p:stCondLst>
+                                  <p:childTnLst>
+                                    <p:set>
+                                      <p:cBhvr>
+                                        <p:cTn id="6" dur="1" fill="hold">
+                                          <p:stCondLst>
+                                            <p:cond delay="0"/>
+                                          </p:stCondLst>
+                                        </p:cTn>
+                                        <p:tgtEl>
+                                          <p:spTgt spid="11"/>
+                                        </p:tgtEl>
+                                        <p:attrNameLst>
+                                          <p:attrName>style.visibility</p:attrName>
+                                        </p:attrNameLst>
+                                      </p:cBhvr>
+                                      <p:to>
+                                        <p:strVal val="visible"/>
+                                      </p:to>
+                                    </p:set>
+                                  </p:childTnLst>
+                                </p:cTn>
+                              </p:par>
+                            </p:childTnLst>
+                          </p:cTn>
+                        </p:par>
+                      </p:childTnLst>
+                    </p:cTn>
+                  </p:par>
+                </p:childTnLst>
+              </p:cTn>
+              <p:prevCondLst>
+                <p:cond evt="onPrev" delay="0">
+                  <p:tgtEl>
+                    <p:sldTgt/>
+                  </p:tgtEl>
+                </p:cond>
+              </p:prevCondLst>
+              <p:nextCondLst>
+                <p:cond evt="onNext" delay="0">
+                  <p:tgtEl>
+                    <p:sldTgt/>
+                  </p:tgtEl>
+                </p:cond>
+              </p:nextCondLst>
+            </p:seq>
+          </p:childTnLst>
+        </p:cTn>
+      </p:par>
+    </p:tnLst>
+    <p:bldLst>
+      <p:bldP spid="11" grpId="0"/>
+    </p:bldLst>
+  </p:timing>
 </p:sld>
 </file>
 
@@ -9823,106 +10625,56 @@
           <a:lstStyle/>
           <a:p>
             <a:r>
-              <a:t>Dedicated Onboarding Service (ADR-0010)</a:t>
-            </a:r>
-          </a:p>
-        </p:txBody>
-      </p:sp>
-      <p:sp>
-        <p:nvSpPr>
-          <p:cNvPr id="3" name="Content Placeholder 2"/>
-          <p:cNvSpPr>
-            <a:spLocks noGrp="1"/>
-          </p:cNvSpPr>
-          <p:nvPr>
-            <p:ph idx="1"/>
-          </p:nvPr>
-        </p:nvSpPr>
-        <p:spPr/>
-        <p:txBody>
-          <a:bodyPr wrap="square"/>
-          <a:lstStyle/>
-          <a:p>
-            <a:r>
-              <a:rPr sz="1600" dirty="0"/>
-              <a:t>Originally the BPMN lived inside user-service</a:t>
-            </a:r>
-          </a:p>
-          <a:p>
-            <a:r>
-              <a:rPr sz="1600" dirty="0"/>
-              <a:t>Problem: orchestrator coordinates work across two bounded contexts</a:t>
-            </a:r>
-          </a:p>
-          <a:p>
-            <a:pPr lvl="1"/>
-            <a:r>
-              <a:rPr sz="1400" dirty="0"/>
-              <a:t>Coupling + mixed responsibilities violates DDD boundaries</a:t>
-            </a:r>
-          </a:p>
-          <a:p>
-            <a:r>
-              <a:rPr sz="1600" dirty="0"/>
-              <a:t>Solution: extract into a dedicated onboarding-service</a:t>
-            </a:r>
-          </a:p>
-          <a:p>
-            <a:pPr lvl="1"/>
-            <a:r>
-              <a:rPr sz="1400" dirty="0"/>
-              <a:t>Owns the BPMN process and </a:t>
-            </a:r>
-            <a:r>
-              <a:rPr sz="1400" dirty="0" err="1"/>
-              <a:t>Zeebe</a:t>
-            </a:r>
-            <a:r>
-              <a:rPr sz="1400" dirty="0"/>
-              <a:t> deployment</a:t>
-            </a:r>
-          </a:p>
-          <a:p>
-            <a:pPr lvl="1"/>
-            <a:r>
-              <a:rPr sz="1400" dirty="0"/>
-              <a:t>No persistent business data </a:t>
-            </a:r>
-            <a:r>
-              <a:rPr lang="en-US" sz="1400" dirty="0"/>
+              <a:t>Place Order Process </a:t>
+            </a:r>
+            <a:r>
+              <a:rPr lang="en-US"/>
               <a:t>-</a:t>
             </a:r>
             <a:r>
-              <a:rPr sz="1400" dirty="0"/>
-              <a:t> workflow state lives in </a:t>
-            </a:r>
-            <a:r>
-              <a:rPr sz="1400" dirty="0" err="1"/>
-              <a:t>Zeebe</a:t>
-            </a:r>
-            <a:endParaRPr sz="1400" dirty="0"/>
-          </a:p>
-          <a:p>
-            <a:pPr lvl="1"/>
-            <a:r>
-              <a:rPr sz="1400" dirty="0"/>
-              <a:t>User and portfolio services keep their domain autonomy</a:t>
-            </a:r>
-          </a:p>
-          <a:p>
-            <a:r>
-              <a:rPr sz="1600" dirty="0"/>
-              <a:t>Trade-off: 5 services instead of 4, but clean separation</a:t>
-            </a:r>
-          </a:p>
-        </p:txBody>
-      </p:sp>
-      <p:sp>
-        <p:nvSpPr>
-          <p:cNvPr id="4" name="Textfeld 3">
+              <a:t> </a:t>
+            </a:r>
+            <a:r>
+              <a:rPr b="1">
+                <a:solidFill>
+                  <a:srgbClr val="00802E"/>
+                </a:solidFill>
+              </a:rPr>
+              <a:t>Fairy Tale Saga</a:t>
+            </a:r>
+          </a:p>
+        </p:txBody>
+      </p:sp>
+      <p:pic>
+        <p:nvPicPr>
+          <p:cNvPr id="4" name="Picture 3" descr="placeOrder-bpmn.png"/>
+          <p:cNvPicPr>
+            <a:picLocks noChangeAspect="1"/>
+          </p:cNvPicPr>
+          <p:nvPr/>
+        </p:nvPicPr>
+        <p:blipFill>
+          <a:blip r:embed="rId3"/>
+          <a:stretch>
+            <a:fillRect/>
+          </a:stretch>
+        </p:blipFill>
+        <p:spPr>
+          <a:xfrm>
+            <a:off x="1375323" y="985900"/>
+            <a:ext cx="6393354" cy="3603033"/>
+          </a:xfrm>
+          <a:prstGeom prst="rect">
+            <a:avLst/>
+          </a:prstGeom>
+        </p:spPr>
+      </p:pic>
+      <p:sp>
+        <p:nvSpPr>
+          <p:cNvPr id="5" name="Textfeld 4">
             <a:extLst>
               <a:ext uri="{FF2B5EF4-FFF2-40B4-BE49-F238E27FC236}">
-                <a16:creationId xmlns:a16="http://schemas.microsoft.com/office/drawing/2014/main" id="{9AE1938E-0CBB-32EA-E95C-6E86B75B40DA}"/>
+                <a16:creationId xmlns:a16="http://schemas.microsoft.com/office/drawing/2014/main" id="{9A05AC79-D9E8-B3DA-FB71-161FC3A5D6B0}"/>
               </a:ext>
             </a:extLst>
           </p:cNvPr>
@@ -9955,7 +10707,7 @@
               <a:pPr algn="ctr"/>
               <a:t>11</a:t>
             </a:fld>
-            <a:endParaRPr lang="de-DE" sz="1200" dirty="0">
+            <a:endParaRPr lang="de-DE" sz="1200">
               <a:solidFill>
                 <a:schemeClr val="bg1"/>
               </a:solidFill>
@@ -10004,17 +10756,22 @@
           <a:lstStyle/>
           <a:p>
             <a:r>
-              <a:rPr dirty="0"/>
-              <a:t>Place Order Process </a:t>
-            </a:r>
-            <a:r>
-              <a:rPr lang="en-US" dirty="0"/>
-              <a:t>-</a:t>
-            </a:r>
-            <a:r>
-              <a:rPr dirty="0"/>
-              <a:t> Fairy Tale Saga</a:t>
-            </a:r>
+              <a:rPr lang="de-CH"/>
+              <a:t>Architecture Details: </a:t>
+            </a:r>
+            <a:r>
+              <a:rPr lang="de-CH" b="1">
+                <a:solidFill>
+                  <a:srgbClr val="00802E"/>
+                </a:solidFill>
+              </a:rPr>
+              <a:t>Additional Patterns</a:t>
+            </a:r>
+            <a:endParaRPr b="1">
+              <a:solidFill>
+                <a:srgbClr val="00802E"/>
+              </a:solidFill>
+            </a:endParaRPr>
           </a:p>
         </p:txBody>
       </p:sp>
@@ -10025,75 +10782,178 @@
             <a:spLocks noGrp="1"/>
           </p:cNvSpPr>
           <p:nvPr>
-            <p:ph sz="half" idx="1"/>
+            <p:ph idx="1"/>
           </p:nvPr>
         </p:nvSpPr>
         <p:spPr/>
         <p:txBody>
-          <a:bodyPr wrap="square"/>
+          <a:bodyPr wrap="square">
+            <a:normAutofit/>
+          </a:bodyPr>
           <a:lstStyle/>
           <a:p>
-            <a:r>
-              <a:rPr sz="1400"/>
-              <a:t>order-processing-worker validates user locally, creates PENDING tx</a:t>
-            </a:r>
-          </a:p>
-          <a:p>
-            <a:r>
-              <a:rPr sz="1400"/>
-              <a:t>Event-based gateway: price match vs. 1-min timeout</a:t>
-            </a:r>
-          </a:p>
-          <a:p>
-            <a:r>
-              <a:rPr sz="1400"/>
-              <a:t>approveOrderWorker writes APPROVED + outbox row in one transaction</a:t>
-            </a:r>
-          </a:p>
-          <a:p>
-            <a:r>
-              <a:rPr sz="1400"/>
-              <a:t>publishOrderApprovedWorker publishes to Kafka → email</a:t>
-            </a:r>
-          </a:p>
-          <a:p>
-            <a:r>
-              <a:rPr sz="1400"/>
-              <a:t>Portfolio update happens independently via Kafka</a:t>
-            </a:r>
-          </a:p>
-        </p:txBody>
-      </p:sp>
-      <p:pic>
-        <p:nvPicPr>
-          <p:cNvPr id="4" name="Picture 3" descr="placeOrder-bpmn.png"/>
-          <p:cNvPicPr>
-            <a:picLocks noChangeAspect="1"/>
-          </p:cNvPicPr>
-          <p:nvPr/>
-        </p:nvPicPr>
-        <p:blipFill>
-          <a:blip r:embed="rId3"/>
-          <a:stretch>
-            <a:fillRect/>
-          </a:stretch>
-        </p:blipFill>
-        <p:spPr>
-          <a:xfrm>
-            <a:off x="4528457" y="1276349"/>
-            <a:ext cx="4471082" cy="2519719"/>
-          </a:xfrm>
-          <a:prstGeom prst="rect">
-            <a:avLst/>
-          </a:prstGeom>
-        </p:spPr>
-      </p:pic>
-      <p:sp>
-        <p:nvSpPr>
-          <p:cNvPr id="5" name="Textfeld 4">
+            <a:pPr marL="285750" indent="-285750">
+              <a:buFont typeface="Arial" panose="020B0604020202020204" pitchFamily="34" charset="0"/>
+              <a:buChar char="•"/>
+            </a:pPr>
+            <a:r>
+              <a:rPr lang="en-US" sz="1400" b="1">
+                <a:solidFill>
+                  <a:srgbClr val="00802E"/>
+                </a:solidFill>
+              </a:rPr>
+              <a:t>Idempotent Consumer</a:t>
+            </a:r>
+          </a:p>
+          <a:p>
+            <a:pPr marL="465750" lvl="1" indent="-285750">
+              <a:buFont typeface="Arial" panose="020B0604020202020204" pitchFamily="34" charset="0"/>
+              <a:buChar char="•"/>
+            </a:pPr>
+            <a:r>
+              <a:rPr lang="en-US" sz="1200" err="1"/>
+              <a:t>processed_transaction</a:t>
+            </a:r>
+            <a:r>
+              <a:rPr lang="en-US" sz="1200"/>
+              <a:t> UNIQUE constraint on </a:t>
+            </a:r>
+            <a:r>
+              <a:rPr lang="en-US" sz="1200" err="1"/>
+              <a:t>transactionId</a:t>
+            </a:r>
+            <a:endParaRPr lang="en-US" sz="1200"/>
+          </a:p>
+          <a:p>
+            <a:pPr marL="465750" lvl="1" indent="-285750">
+              <a:buFont typeface="Arial" panose="020B0604020202020204" pitchFamily="34" charset="0"/>
+              <a:buChar char="•"/>
+            </a:pPr>
+            <a:r>
+              <a:rPr lang="en-US" sz="1200"/>
+              <a:t>found during integration: 2 BTC order → 4 BTC in portfolio</a:t>
+            </a:r>
+          </a:p>
+          <a:p>
+            <a:pPr lvl="1" indent="0">
+              <a:buNone/>
+            </a:pPr>
+            <a:endParaRPr lang="en-US" sz="1200"/>
+          </a:p>
+          <a:p>
+            <a:pPr marL="285750" indent="-285750">
+              <a:buFont typeface="Arial" panose="020B0604020202020204" pitchFamily="34" charset="0"/>
+              <a:buChar char="•"/>
+            </a:pPr>
+            <a:r>
+              <a:rPr lang="en-US" sz="1600" b="1">
+                <a:solidFill>
+                  <a:srgbClr val="00802E"/>
+                </a:solidFill>
+              </a:rPr>
+              <a:t>ECST</a:t>
+            </a:r>
+            <a:r>
+              <a:rPr lang="en-US" sz="1600"/>
+              <a:t>: event carried state transfer for compensation in Onboarding</a:t>
+            </a:r>
+          </a:p>
+          <a:p>
+            <a:endParaRPr lang="en-US" sz="1600"/>
+          </a:p>
+          <a:p>
+            <a:pPr marL="285750" indent="-285750">
+              <a:buFont typeface="Arial" panose="020B0604020202020204" pitchFamily="34" charset="0"/>
+              <a:buChar char="•"/>
+            </a:pPr>
+            <a:r>
+              <a:rPr lang="en-US" sz="1400" b="1">
+                <a:solidFill>
+                  <a:srgbClr val="00802E"/>
+                </a:solidFill>
+              </a:rPr>
+              <a:t>Transactional Outbox </a:t>
+            </a:r>
+          </a:p>
+          <a:p>
+            <a:pPr marL="465750" lvl="1" indent="-285750">
+              <a:buFont typeface="Arial" panose="020B0604020202020204" pitchFamily="34" charset="0"/>
+              <a:buChar char="•"/>
+            </a:pPr>
+            <a:r>
+              <a:rPr lang="en-US" sz="1200"/>
+              <a:t>Approval + outbox row in one DB transaction</a:t>
+            </a:r>
+          </a:p>
+          <a:p>
+            <a:pPr marL="465750" lvl="1" indent="-285750">
+              <a:buFont typeface="Arial" panose="020B0604020202020204" pitchFamily="34" charset="0"/>
+              <a:buChar char="•"/>
+            </a:pPr>
+            <a:r>
+              <a:rPr lang="en-US" sz="1200"/>
+              <a:t>Scheduler republishes stale rows after crashes</a:t>
+            </a:r>
+          </a:p>
+          <a:p>
+            <a:pPr lvl="1" indent="0">
+              <a:buNone/>
+            </a:pPr>
+            <a:endParaRPr lang="en-US" sz="1200"/>
+          </a:p>
+          <a:p>
+            <a:pPr marL="285750" indent="-285750">
+              <a:buFont typeface="Arial" panose="020B0604020202020204" pitchFamily="34" charset="0"/>
+              <a:buChar char="•"/>
+            </a:pPr>
+            <a:r>
+              <a:rPr lang="en-US" sz="1400" b="1">
+                <a:solidFill>
+                  <a:srgbClr val="00802E"/>
+                </a:solidFill>
+              </a:rPr>
+              <a:t>Human Escalation </a:t>
+            </a:r>
+          </a:p>
+          <a:p>
+            <a:pPr marL="465750" lvl="1" indent="-285750">
+              <a:buFont typeface="Arial" panose="020B0604020202020204" pitchFamily="34" charset="0"/>
+              <a:buChar char="•"/>
+            </a:pPr>
+            <a:r>
+              <a:rPr lang="en-US" sz="1200"/>
+              <a:t>Deterministic failures throw typed BPMN errors</a:t>
+            </a:r>
+          </a:p>
+          <a:p>
+            <a:pPr marL="465750" lvl="1" indent="-285750">
+              <a:buFont typeface="Arial" panose="020B0604020202020204" pitchFamily="34" charset="0"/>
+              <a:buChar char="•"/>
+            </a:pPr>
+            <a:r>
+              <a:rPr lang="en-US" sz="1200"/>
+              <a:t>Boundary events route to ops user task in </a:t>
+            </a:r>
+            <a:r>
+              <a:rPr lang="en-US" sz="1200" err="1"/>
+              <a:t>Tasklist</a:t>
+            </a:r>
+            <a:endParaRPr lang="en-US" sz="1200"/>
+          </a:p>
+          <a:p>
+            <a:endParaRPr lang="en-US" sz="1600"/>
+          </a:p>
+          <a:p>
+            <a:endParaRPr lang="en-US" sz="1600"/>
+          </a:p>
+        </p:txBody>
+      </p:sp>
+      <p:sp>
+        <p:nvSpPr>
+          <p:cNvPr id="4" name="Textfeld 3">
             <a:extLst>
               <a:ext uri="{FF2B5EF4-FFF2-40B4-BE49-F238E27FC236}">
-                <a16:creationId xmlns:a16="http://schemas.microsoft.com/office/drawing/2014/main" id="{9A05AC79-D9E8-B3DA-FB71-161FC3A5D6B0}"/>
+                <a16:creationId xmlns:a16="http://schemas.microsoft.com/office/drawing/2014/main" id="{15D86EF3-1989-7F06-D86E-E2E063AB4E85}"/>
               </a:ext>
             </a:extLst>
           </p:cNvPr>
@@ -10126,7 +10986,7 @@
               <a:pPr algn="ctr"/>
               <a:t>12</a:t>
             </a:fld>
-            <a:endParaRPr lang="de-DE" sz="1200" dirty="0">
+            <a:endParaRPr lang="de-DE" sz="1200">
               <a:solidFill>
                 <a:schemeClr val="bg1"/>
               </a:solidFill>
@@ -10175,7 +11035,20 @@
           <a:lstStyle/>
           <a:p>
             <a:r>
-              <a:t>Reliability Patterns in the Trading Flow</a:t>
+              <a:rPr lang="de-CH" err="1"/>
+              <a:t>Insights</a:t>
+            </a:r>
+            <a:r>
+              <a:rPr lang="de-CH"/>
+              <a:t>: </a:t>
+            </a:r>
+            <a:r>
+              <a:rPr b="1">
+                <a:solidFill>
+                  <a:srgbClr val="00802E"/>
+                </a:solidFill>
+              </a:rPr>
+              <a:t>Challenges &amp; Lessons Learned</a:t>
             </a:r>
           </a:p>
         </p:txBody>
@@ -10195,70 +11068,150 @@
           <a:bodyPr wrap="square"/>
           <a:lstStyle/>
           <a:p>
-            <a:r>
-              <a:rPr sz="1400"/>
-              <a:t>Three patterns protecting the order execution path</a:t>
-            </a:r>
-          </a:p>
-          <a:p>
-            <a:r>
-              <a:rPr sz="1400"/>
-              <a:t>Transactional Outbox (ADR-0014)</a:t>
-            </a:r>
-          </a:p>
-          <a:p>
-            <a:pPr lvl="1"/>
-            <a:r>
-              <a:rPr sz="1200"/>
-              <a:t>Approval + outbox row in one DB transaction</a:t>
-            </a:r>
-          </a:p>
-          <a:p>
-            <a:pPr lvl="1"/>
-            <a:r>
-              <a:rPr sz="1200"/>
-              <a:t>Scheduler republishes stale rows after crashes</a:t>
-            </a:r>
-          </a:p>
-          <a:p>
-            <a:r>
-              <a:rPr sz="1400"/>
-              <a:t>Idempotent Consumer (ADR-0016)</a:t>
-            </a:r>
-          </a:p>
-          <a:p>
-            <a:pPr lvl="1"/>
-            <a:r>
-              <a:rPr sz="1200"/>
-              <a:t>processed_transaction UNIQUE constraint on transactionId</a:t>
-            </a:r>
-          </a:p>
-          <a:p>
-            <a:pPr lvl="1"/>
-            <a:r>
-              <a:rPr sz="1200"/>
-              <a:t>Found during integration: 2 BTC order → 4 BTC in portfolio</a:t>
-            </a:r>
-          </a:p>
-          <a:p>
-            <a:r>
-              <a:rPr sz="1400"/>
-              <a:t>Human Escalation (ADR-0018)</a:t>
-            </a:r>
-          </a:p>
-          <a:p>
-            <a:pPr lvl="1"/>
-            <a:r>
-              <a:rPr sz="1200"/>
-              <a:t>Deterministic failures throw typed BPMN errors</a:t>
-            </a:r>
-          </a:p>
-          <a:p>
-            <a:pPr lvl="1"/>
-            <a:r>
-              <a:rPr sz="1200"/>
-              <a:t>Boundary events route to ops user task in Tasklist</a:t>
-            </a:r>
+            <a:pPr marL="285750" indent="-285750">
+              <a:buFont typeface="Arial" panose="020B0604020202020204" pitchFamily="34" charset="0"/>
+              <a:buChar char="•"/>
+            </a:pPr>
+            <a:r>
+              <a:rPr sz="1600"/>
+              <a:t>BPMN </a:t>
+            </a:r>
+            <a:r>
+              <a:rPr sz="1600">
+                <a:solidFill>
+                  <a:srgbClr val="00802E"/>
+                </a:solidFill>
+              </a:rPr>
+              <a:t>learning curve</a:t>
+            </a:r>
+            <a:r>
+              <a:rPr lang="de-CH" sz="1600"/>
+              <a:t>: </a:t>
+            </a:r>
+          </a:p>
+          <a:p>
+            <a:pPr marL="465750" lvl="1" indent="-285750">
+              <a:buFont typeface="Arial" panose="020B0604020202020204" pitchFamily="34" charset="0"/>
+              <a:buChar char="•"/>
+            </a:pPr>
+            <a:r>
+              <a:t>demanding upfront, reduced implementation effort after</a:t>
+            </a:r>
+            <a:endParaRPr lang="de-CH"/>
+          </a:p>
+          <a:p>
+            <a:pPr marL="285750" indent="-285750">
+              <a:buFont typeface="Arial" panose="020B0604020202020204" pitchFamily="34" charset="0"/>
+              <a:buChar char="•"/>
+            </a:pPr>
+            <a:endParaRPr sz="1600"/>
+          </a:p>
+          <a:p>
+            <a:pPr marL="285750" indent="-285750">
+              <a:buFont typeface="Arial" panose="020B0604020202020204" pitchFamily="34" charset="0"/>
+              <a:buChar char="•"/>
+            </a:pPr>
+            <a:r>
+              <a:rPr sz="1600"/>
+              <a:t>Concepts </a:t>
+            </a:r>
+            <a:r>
+              <a:rPr sz="1600">
+                <a:solidFill>
+                  <a:srgbClr val="00802E"/>
+                </a:solidFill>
+              </a:rPr>
+              <a:t>intuitive in theory, complex in practice</a:t>
+            </a:r>
+            <a:r>
+              <a:rPr lang="de-CH" sz="1600"/>
+              <a:t>:</a:t>
+            </a:r>
+          </a:p>
+          <a:p>
+            <a:pPr marL="465750" lvl="1" indent="-285750">
+              <a:buFont typeface="Arial" panose="020B0604020202020204" pitchFamily="34" charset="0"/>
+              <a:buChar char="•"/>
+            </a:pPr>
+            <a:r>
+              <a:t>Orchestration, compensation, ECST multiply downstream decisions</a:t>
+            </a:r>
+            <a:endParaRPr lang="de-CH"/>
+          </a:p>
+          <a:p>
+            <a:pPr marL="465750" lvl="1" indent="-285750">
+              <a:buFont typeface="Arial" panose="020B0604020202020204" pitchFamily="34" charset="0"/>
+              <a:buChar char="•"/>
+            </a:pPr>
+            <a:endParaRPr/>
+          </a:p>
+          <a:p>
+            <a:pPr marL="285750" indent="-285750">
+              <a:buFont typeface="Arial" panose="020B0604020202020204" pitchFamily="34" charset="0"/>
+              <a:buChar char="•"/>
+            </a:pPr>
+            <a:r>
+              <a:rPr sz="1600"/>
+              <a:t>Saga selection </a:t>
+            </a:r>
+            <a:r>
+              <a:rPr sz="1600">
+                <a:solidFill>
+                  <a:srgbClr val="00802E"/>
+                </a:solidFill>
+              </a:rPr>
+              <a:t>only became clear by analyzing </a:t>
+            </a:r>
+            <a:r>
+              <a:rPr sz="1600"/>
+              <a:t>the nature of the wait</a:t>
+            </a:r>
+            <a:endParaRPr lang="de-CH" sz="1600"/>
+          </a:p>
+          <a:p>
+            <a:pPr marL="285750" indent="-285750">
+              <a:buFont typeface="Arial" panose="020B0604020202020204" pitchFamily="34" charset="0"/>
+              <a:buChar char="•"/>
+            </a:pPr>
+            <a:endParaRPr sz="1600"/>
+          </a:p>
+          <a:p>
+            <a:pPr marL="285750" indent="-285750">
+              <a:buFont typeface="Arial" panose="020B0604020202020204" pitchFamily="34" charset="0"/>
+              <a:buChar char="•"/>
+            </a:pPr>
+            <a:r>
+              <a:rPr sz="1600"/>
+              <a:t>Integration </a:t>
+            </a:r>
+            <a:r>
+              <a:rPr sz="1600">
+                <a:solidFill>
+                  <a:srgbClr val="00802E"/>
+                </a:solidFill>
+              </a:rPr>
+              <a:t>issues surface late</a:t>
+            </a:r>
+            <a:r>
+              <a:rPr lang="de-CH" sz="1600"/>
+              <a:t>:</a:t>
+            </a:r>
+          </a:p>
+          <a:p>
+            <a:pPr marL="465750" lvl="1" indent="-285750">
+              <a:buFont typeface="Arial" panose="020B0604020202020204" pitchFamily="34" charset="0"/>
+              <a:buChar char="•"/>
+            </a:pPr>
+            <a:r>
+              <a:t>deserialization, correlation keys, payloads</a:t>
+            </a:r>
+            <a:endParaRPr lang="de-CH"/>
+          </a:p>
+          <a:p>
+            <a:pPr lvl="1" indent="0">
+              <a:buNone/>
+            </a:pPr>
+            <a:endParaRPr sz="1600"/>
           </a:p>
         </p:txBody>
       </p:sp>
@@ -10267,7 +11220,7 @@
           <p:cNvPr id="4" name="Textfeld 3">
             <a:extLst>
               <a:ext uri="{FF2B5EF4-FFF2-40B4-BE49-F238E27FC236}">
-                <a16:creationId xmlns:a16="http://schemas.microsoft.com/office/drawing/2014/main" id="{DD711C73-225F-58AA-721A-D45C8418DB0C}"/>
+                <a16:creationId xmlns:a16="http://schemas.microsoft.com/office/drawing/2014/main" id="{FD08F9B4-479F-F458-3E95-06A1BC79B8C1}"/>
               </a:ext>
             </a:extLst>
           </p:cNvPr>
@@ -10300,7 +11253,7 @@
               <a:pPr algn="ctr"/>
               <a:t>13</a:t>
             </a:fld>
-            <a:endParaRPr lang="de-DE" sz="1200" dirty="0">
+            <a:endParaRPr lang="de-DE" sz="1200">
               <a:solidFill>
                 <a:schemeClr val="bg1"/>
               </a:solidFill>
@@ -10335,7 +11288,13 @@
       </p:grpSpPr>
       <p:sp>
         <p:nvSpPr>
-          <p:cNvPr id="2" name="Title 1"/>
+          <p:cNvPr id="2" name="Title 1">
+            <a:extLst>
+              <a:ext uri="{FF2B5EF4-FFF2-40B4-BE49-F238E27FC236}">
+                <a16:creationId xmlns:a16="http://schemas.microsoft.com/office/drawing/2014/main" id="{DE1E6F96-6669-1625-A966-127287BEE127}"/>
+              </a:ext>
+            </a:extLst>
+          </p:cNvPr>
           <p:cNvSpPr>
             <a:spLocks noGrp="1"/>
           </p:cNvSpPr>
@@ -10343,150 +11302,64 @@
             <p:ph type="title"/>
           </p:nvPr>
         </p:nvSpPr>
-        <p:spPr/>
+        <p:spPr>
+          <a:xfrm>
+            <a:off x="358775" y="2266919"/>
+            <a:ext cx="8426450" cy="609662"/>
+          </a:xfrm>
+        </p:spPr>
         <p:txBody>
           <a:bodyPr/>
           <a:lstStyle/>
           <a:p>
-            <a:r>
-              <a:t>Replicated Read-Model for Autonomous Validation</a:t>
-            </a:r>
-          </a:p>
-        </p:txBody>
-      </p:sp>
-      <p:sp>
-        <p:nvSpPr>
-          <p:cNvPr id="3" name="Content Placeholder 2"/>
-          <p:cNvSpPr>
-            <a:spLocks noGrp="1"/>
-          </p:cNvSpPr>
-          <p:nvPr>
-            <p:ph idx="1"/>
-          </p:nvPr>
-        </p:nvSpPr>
-        <p:spPr/>
-        <p:txBody>
-          <a:bodyPr wrap="square"/>
-          <a:lstStyle/>
-          <a:p>
-            <a:r>
-              <a:rPr sz="1600" dirty="0"/>
-              <a:t>Problem: reject orders from unconfirmed users without calling user-service</a:t>
-            </a:r>
-          </a:p>
-          <a:p>
-            <a:r>
-              <a:rPr sz="1600" dirty="0"/>
-              <a:t>Solution (ADR-0017): transaction-service keeps its own table of confirmed users</a:t>
-            </a:r>
-          </a:p>
-          <a:p>
-            <a:pPr lvl="1"/>
-            <a:r>
-              <a:rPr sz="1400" dirty="0"/>
-              <a:t>user-service publishes </a:t>
-            </a:r>
-            <a:r>
-              <a:rPr sz="1400" dirty="0" err="1"/>
-              <a:t>UserConfirmedEvent</a:t>
-            </a:r>
-            <a:r>
-              <a:rPr sz="1400" dirty="0"/>
-              <a:t> to a log-compacted topic</a:t>
-            </a:r>
-          </a:p>
-          <a:p>
-            <a:pPr lvl="1"/>
-            <a:r>
-              <a:rPr sz="1400" dirty="0"/>
-              <a:t>transaction-service consumes and </a:t>
-            </a:r>
-            <a:r>
-              <a:rPr sz="1400" dirty="0" err="1"/>
-              <a:t>upserts</a:t>
-            </a:r>
-            <a:r>
-              <a:rPr sz="1400" dirty="0"/>
-              <a:t> into local DB</a:t>
-            </a:r>
-          </a:p>
-          <a:p>
-            <a:pPr lvl="1"/>
-            <a:r>
-              <a:rPr sz="1400" dirty="0"/>
-              <a:t>Order validation = local read, sub-millisecond, no network call</a:t>
-            </a:r>
-          </a:p>
-          <a:p>
-            <a:r>
-              <a:rPr sz="1600" dirty="0"/>
-              <a:t>Trade-off: brief eventual consistency window</a:t>
-            </a:r>
-          </a:p>
-          <a:p>
-            <a:pPr lvl="1"/>
-            <a:r>
-              <a:rPr sz="1400" dirty="0"/>
-              <a:t>Acceptable </a:t>
-            </a:r>
-            <a:r>
-              <a:rPr lang="en-US" sz="1400" dirty="0"/>
-              <a:t>-</a:t>
-            </a:r>
-            <a:r>
-              <a:rPr sz="1400" dirty="0"/>
-              <a:t> a newly confirmed user won't place an order immediately</a:t>
-            </a:r>
-          </a:p>
-        </p:txBody>
-      </p:sp>
-      <p:sp>
-        <p:nvSpPr>
-          <p:cNvPr id="4" name="Textfeld 3">
+            <a:pPr algn="ctr"/>
+            <a:r>
+              <a:rPr lang="en-US" b="1">
+                <a:solidFill>
+                  <a:srgbClr val="00802E"/>
+                </a:solidFill>
+              </a:rPr>
+              <a:t>Demonstration</a:t>
+            </a:r>
+          </a:p>
+        </p:txBody>
+      </p:sp>
+      <p:sp>
+        <p:nvSpPr>
+          <p:cNvPr id="4" name="Slide Number Placeholder 3">
             <a:extLst>
               <a:ext uri="{FF2B5EF4-FFF2-40B4-BE49-F238E27FC236}">
-                <a16:creationId xmlns:a16="http://schemas.microsoft.com/office/drawing/2014/main" id="{15D86EF3-1989-7F06-D86E-E2E063AB4E85}"/>
+                <a16:creationId xmlns:a16="http://schemas.microsoft.com/office/drawing/2014/main" id="{F29099E5-CEB2-12DF-32D9-6AEF073823DA}"/>
               </a:ext>
             </a:extLst>
           </p:cNvPr>
-          <p:cNvSpPr txBox="1"/>
-          <p:nvPr/>
-        </p:nvSpPr>
-        <p:spPr>
-          <a:xfrm>
-            <a:off x="8503298" y="4702629"/>
-            <a:ext cx="360784" cy="261610"/>
-          </a:xfrm>
-          <a:prstGeom prst="rect">
-            <a:avLst/>
-          </a:prstGeom>
-          <a:noFill/>
-        </p:spPr>
-        <p:txBody>
-          <a:bodyPr wrap="square" rtlCol="0">
-            <a:spAutoFit/>
-          </a:bodyPr>
+          <p:cNvSpPr>
+            <a:spLocks noGrp="1"/>
+          </p:cNvSpPr>
+          <p:nvPr>
+            <p:ph type="sldNum" sz="quarter" idx="12"/>
+          </p:nvPr>
+        </p:nvSpPr>
+        <p:spPr/>
+        <p:txBody>
+          <a:bodyPr/>
           <a:lstStyle/>
           <a:p>
-            <a:pPr algn="ctr"/>
-            <a:fld id="{7C7D4858-ADAF-A34F-A87D-0D5A348A4697}" type="slidenum">
-              <a:rPr lang="de-DE" sz="1100" smtClean="0">
-                <a:solidFill>
-                  <a:schemeClr val="bg1"/>
-                </a:solidFill>
-              </a:rPr>
-              <a:pPr algn="ctr"/>
+            <a:fld id="{7559FC98-AF75-4A00-A03C-DF9FEBF6BCB9}" type="slidenum">
+              <a:rPr lang="en-GB" smtClean="0"/>
+              <a:pPr/>
               <a:t>14</a:t>
             </a:fld>
-            <a:endParaRPr lang="de-DE" sz="1200" dirty="0">
-              <a:solidFill>
-                <a:schemeClr val="bg1"/>
-              </a:solidFill>
-            </a:endParaRPr>
+            <a:endParaRPr lang="en-GB"/>
           </a:p>
         </p:txBody>
       </p:sp>
     </p:spTree>
+    <p:extLst>
+      <p:ext uri="{BB962C8B-B14F-4D97-AF65-F5344CB8AC3E}">
+        <p14:creationId xmlns:p14="http://schemas.microsoft.com/office/powerpoint/2010/main" val="2996261185"/>
+      </p:ext>
+    </p:extLst>
   </p:cSld>
   <p:clrMapOvr>
     <a:masterClrMapping/>
@@ -10495,7 +11368,7 @@
 </file>
 
 <file path=ppt/slides/slide15.xml><?xml version="1.0" encoding="utf-8"?>
-<p:sld xmlns:a="http://schemas.openxmlformats.org/drawingml/2006/main" xmlns:r="http://schemas.openxmlformats.org/officeDocument/2006/relationships" xmlns:p="http://schemas.openxmlformats.org/presentationml/2006/main">
+<p:sld xmlns:a="http://schemas.openxmlformats.org/drawingml/2006/main" xmlns:r="http://schemas.openxmlformats.org/officeDocument/2006/relationships" xmlns:p="http://schemas.openxmlformats.org/presentationml/2006/main" show="0">
   <p:cSld>
     <p:spTree>
       <p:nvGrpSpPr>
@@ -10527,7 +11400,7 @@
           <a:lstStyle/>
           <a:p>
             <a:r>
-              <a:t>Challenges &amp; Lessons Learned</a:t>
+              <a:t>Live Demo</a:t>
             </a:r>
           </a:p>
         </p:txBody>
@@ -10548,73 +11421,82 @@
           <a:lstStyle/>
           <a:p>
             <a:r>
-              <a:rPr sz="1600" dirty="0"/>
-              <a:t>BPMN learning curve </a:t>
-            </a:r>
-            <a:r>
-              <a:rPr lang="en-US" sz="1600" dirty="0"/>
+              <a:rPr sz="1400"/>
+              <a:t>Demo 1 </a:t>
+            </a:r>
+            <a:r>
+              <a:rPr lang="en-US" sz="1400"/>
               <a:t>-</a:t>
             </a:r>
             <a:r>
-              <a:rPr sz="1600" dirty="0"/>
-              <a:t> demanding upfront, reduced implementation effort after</a:t>
-            </a:r>
-          </a:p>
-          <a:p>
-            <a:r>
-              <a:rPr sz="1600" dirty="0"/>
-              <a:t>Concepts intuitive in theory, complex in practice</a:t>
+              <a:rPr sz="1400"/>
+              <a:t> Happy-path onboarding</a:t>
             </a:r>
           </a:p>
           <a:p>
             <a:pPr lvl="1"/>
             <a:r>
-              <a:rPr sz="1400" dirty="0"/>
-              <a:t>Orchestration, compensation, ECST multiply downstream decisions</a:t>
-            </a:r>
-          </a:p>
-          <a:p>
-            <a:r>
-              <a:rPr sz="1600" dirty="0"/>
-              <a:t>Saga selection only became clear by analyzing the nature of the wait</a:t>
-            </a:r>
-          </a:p>
-          <a:p>
-            <a:r>
-              <a:rPr sz="1600" dirty="0"/>
-              <a:t>Integration issues surface late </a:t>
-            </a:r>
-            <a:r>
-              <a:rPr lang="en-US" sz="1600" dirty="0"/>
+              <a:rPr sz="1200" err="1"/>
+              <a:t>Tasklist</a:t>
+            </a:r>
+            <a:r>
+              <a:rPr sz="1200"/>
+              <a:t> form → confirmation email → click → user + portfolio created</a:t>
+            </a:r>
+          </a:p>
+          <a:p>
+            <a:pPr lvl="1"/>
+            <a:r>
+              <a:rPr sz="1200"/>
+              <a:t>Camunda Operate shows the completed process instance</a:t>
+            </a:r>
+          </a:p>
+          <a:p>
+            <a:r>
+              <a:rPr sz="1400"/>
+              <a:t>Demo 2 </a:t>
+            </a:r>
+            <a:r>
+              <a:rPr lang="en-US" sz="1400"/>
               <a:t>-</a:t>
             </a:r>
             <a:r>
-              <a:rPr sz="1600" dirty="0"/>
-              <a:t> deserialization, correlation keys, payloads</a:t>
-            </a:r>
-          </a:p>
-          <a:p>
-            <a:r>
-              <a:rPr sz="1600" dirty="0"/>
-              <a:t>Two people, five services </a:t>
-            </a:r>
-            <a:r>
-              <a:rPr lang="en-US" sz="1600" dirty="0"/>
-              <a:t>-</a:t>
-            </a:r>
-            <a:r>
-              <a:rPr sz="1600" dirty="0"/>
-              <a:t> ambitious scope, ADR-0010 added overhead</a:t>
-            </a:r>
-          </a:p>
-        </p:txBody>
-      </p:sp>
-      <p:sp>
-        <p:nvSpPr>
-          <p:cNvPr id="4" name="Textfeld 3">
+              <a:rPr sz="1400"/>
+              <a:t> Happy-path order placement</a:t>
+            </a:r>
+          </a:p>
+          <a:p>
+            <a:pPr lvl="1"/>
+            <a:r>
+              <a:rPr sz="1200" err="1"/>
+              <a:t>Tasklist</a:t>
+            </a:r>
+            <a:r>
+              <a:rPr sz="1200"/>
+              <a:t> order → price match → APPROVED → portfolio updated</a:t>
+            </a:r>
+          </a:p>
+          <a:p>
+            <a:pPr lvl="1"/>
+            <a:r>
+              <a:rPr sz="1200"/>
+              <a:t>Notification email received</a:t>
+            </a:r>
+          </a:p>
+          <a:p>
+            <a:r>
+              <a:rPr sz="1400"/>
+              <a:t>Optional if time permits: timeout scenario, Kafka UI, Operate history</a:t>
+            </a:r>
+          </a:p>
+        </p:txBody>
+      </p:sp>
+      <p:sp>
+        <p:nvSpPr>
+          <p:cNvPr id="5" name="Textfeld 4">
             <a:extLst>
               <a:ext uri="{FF2B5EF4-FFF2-40B4-BE49-F238E27FC236}">
-                <a16:creationId xmlns:a16="http://schemas.microsoft.com/office/drawing/2014/main" id="{FD08F9B4-479F-F458-3E95-06A1BC79B8C1}"/>
+                <a16:creationId xmlns:a16="http://schemas.microsoft.com/office/drawing/2014/main" id="{51056A29-2586-9181-9FD7-30844C24EAEA}"/>
               </a:ext>
             </a:extLst>
           </p:cNvPr>
@@ -10647,7 +11529,7 @@
               <a:pPr algn="ctr"/>
               <a:t>15</a:t>
             </a:fld>
-            <a:endParaRPr lang="de-DE" sz="1200" dirty="0">
+            <a:endParaRPr lang="de-DE" sz="1200">
               <a:solidFill>
                 <a:schemeClr val="bg1"/>
               </a:solidFill>
@@ -10664,7 +11546,7 @@
 </file>
 
 <file path=ppt/slides/slide16.xml><?xml version="1.0" encoding="utf-8"?>
-<p:sld xmlns:a="http://schemas.openxmlformats.org/drawingml/2006/main" xmlns:r="http://schemas.openxmlformats.org/officeDocument/2006/relationships" xmlns:p="http://schemas.openxmlformats.org/presentationml/2006/main">
+<p:sld xmlns:a="http://schemas.openxmlformats.org/drawingml/2006/main" xmlns:r="http://schemas.openxmlformats.org/officeDocument/2006/relationships" xmlns:p="http://schemas.openxmlformats.org/presentationml/2006/main" show="0">
   <p:cSld>
     <p:spTree>
       <p:nvGrpSpPr>
@@ -10696,7 +11578,7 @@
           <a:lstStyle/>
           <a:p>
             <a:r>
-              <a:t>Live Demo</a:t>
+              <a:t>Summary &amp; Key Takeaways</a:t>
             </a:r>
           </a:p>
         </p:txBody>
@@ -10717,72 +11599,38 @@
           <a:lstStyle/>
           <a:p>
             <a:r>
-              <a:rPr sz="1400" dirty="0"/>
-              <a:t>Demo 1 </a:t>
-            </a:r>
-            <a:r>
-              <a:rPr lang="en-US" sz="1400" dirty="0"/>
-              <a:t>-</a:t>
-            </a:r>
-            <a:r>
-              <a:rPr sz="1400" dirty="0"/>
-              <a:t> Happy-path onboarding</a:t>
-            </a:r>
-          </a:p>
-          <a:p>
-            <a:pPr lvl="1"/>
-            <a:r>
-              <a:rPr sz="1200" dirty="0" err="1"/>
-              <a:t>Tasklist</a:t>
-            </a:r>
-            <a:r>
-              <a:rPr sz="1200" dirty="0"/>
-              <a:t> form → confirmation email → click → user + portfolio created</a:t>
-            </a:r>
-          </a:p>
-          <a:p>
-            <a:pPr lvl="1"/>
-            <a:r>
-              <a:rPr sz="1200" dirty="0"/>
-              <a:t>Camunda Operate shows the completed process instance</a:t>
-            </a:r>
-          </a:p>
-          <a:p>
-            <a:r>
-              <a:rPr sz="1400" dirty="0"/>
-              <a:t>Demo 2 </a:t>
-            </a:r>
-            <a:r>
-              <a:rPr lang="en-US" sz="1400" dirty="0"/>
-              <a:t>-</a:t>
-            </a:r>
-            <a:r>
-              <a:rPr sz="1400" dirty="0"/>
-              <a:t> Happy-path order placement</a:t>
-            </a:r>
-          </a:p>
-          <a:p>
-            <a:pPr lvl="1"/>
-            <a:r>
-              <a:rPr sz="1200" dirty="0" err="1"/>
-              <a:t>Tasklist</a:t>
-            </a:r>
-            <a:r>
-              <a:rPr sz="1200" dirty="0"/>
-              <a:t> order → price match → APPROVED → portfolio updated</a:t>
-            </a:r>
-          </a:p>
-          <a:p>
-            <a:pPr lvl="1"/>
-            <a:r>
-              <a:rPr sz="1200" dirty="0"/>
-              <a:t>Notification email received</a:t>
-            </a:r>
-          </a:p>
-          <a:p>
-            <a:r>
-              <a:rPr sz="1400" dirty="0"/>
-              <a:t>Optional if time permits: timeout scenario, Kafka UI, Operate history</a:t>
+              <a:rPr sz="1600"/>
+              <a:t>5 microservices, 2 channels (Kafka + Zeebe), 11 EDPO concepts implemented</a:t>
+            </a:r>
+          </a:p>
+          <a:p>
+            <a:r>
+              <a:rPr sz="1600"/>
+              <a:t>Two saga patterns chosen by wait semantics, not by preference</a:t>
+            </a:r>
+          </a:p>
+          <a:p>
+            <a:r>
+              <a:rPr sz="1600"/>
+              <a:t>Flag-driven completion keeps compensation paths reachable</a:t>
+            </a:r>
+          </a:p>
+          <a:p>
+            <a:r>
+              <a:rPr sz="1600"/>
+              <a:t>Transactional outbox + idempotent consumer + human escalation as a chain</a:t>
+            </a:r>
+          </a:p>
+          <a:p>
+            <a:r>
+              <a:rPr sz="1600"/>
+              <a:t>Dedicated orchestration service preserves bounded context autonomy</a:t>
+            </a:r>
+          </a:p>
+          <a:p>
+            <a:r>
+              <a:rPr sz="1600"/>
+              <a:t>20 ADRs documenting every architectural decision with rationale</a:t>
             </a:r>
           </a:p>
         </p:txBody>
@@ -10792,7 +11640,7 @@
           <p:cNvPr id="5" name="Textfeld 4">
             <a:extLst>
               <a:ext uri="{FF2B5EF4-FFF2-40B4-BE49-F238E27FC236}">
-                <a16:creationId xmlns:a16="http://schemas.microsoft.com/office/drawing/2014/main" id="{51056A29-2586-9181-9FD7-30844C24EAEA}"/>
+                <a16:creationId xmlns:a16="http://schemas.microsoft.com/office/drawing/2014/main" id="{E0A2AB02-C761-949F-F123-BE55FF0DA7F5}"/>
               </a:ext>
             </a:extLst>
           </p:cNvPr>
@@ -10825,7 +11673,7 @@
               <a:pPr algn="ctr"/>
               <a:t>16</a:t>
             </a:fld>
-            <a:endParaRPr lang="de-DE" sz="1200" dirty="0">
+            <a:endParaRPr lang="de-DE" sz="1200">
               <a:solidFill>
                 <a:schemeClr val="bg1"/>
               </a:solidFill>
@@ -10842,7 +11690,7 @@
 </file>
 
 <file path=ppt/slides/slide17.xml><?xml version="1.0" encoding="utf-8"?>
-<p:sld xmlns:a="http://schemas.openxmlformats.org/drawingml/2006/main" xmlns:r="http://schemas.openxmlformats.org/officeDocument/2006/relationships" xmlns:p="http://schemas.openxmlformats.org/presentationml/2006/main">
+<p:sld xmlns:a="http://schemas.openxmlformats.org/drawingml/2006/main" xmlns:r="http://schemas.openxmlformats.org/officeDocument/2006/relationships" xmlns:p="http://schemas.openxmlformats.org/presentationml/2006/main" show="0">
   <p:cSld>
     <p:spTree>
       <p:nvGrpSpPr>
@@ -10874,59 +11722,60 @@
           <a:lstStyle/>
           <a:p>
             <a:r>
-              <a:t>Summary &amp; Key Takeaways</a:t>
-            </a:r>
-          </a:p>
-        </p:txBody>
-      </p:sp>
-      <p:sp>
-        <p:nvSpPr>
-          <p:cNvPr id="3" name="Content Placeholder 2"/>
-          <p:cNvSpPr>
-            <a:spLocks noGrp="1"/>
-          </p:cNvSpPr>
-          <p:nvPr>
-            <p:ph idx="1"/>
-          </p:nvPr>
-        </p:nvSpPr>
-        <p:spPr/>
-        <p:txBody>
-          <a:bodyPr wrap="square"/>
+              <a:t>Questions?</a:t>
+            </a:r>
+          </a:p>
+        </p:txBody>
+      </p:sp>
+      <p:sp>
+        <p:nvSpPr>
+          <p:cNvPr id="3" name="TextBox 2"/>
+          <p:cNvSpPr txBox="1"/>
+          <p:nvPr/>
+        </p:nvSpPr>
+        <p:spPr>
+          <a:xfrm>
+            <a:off x="365760" y="2011680"/>
+            <a:ext cx="8412480" cy="2560320"/>
+          </a:xfrm>
+          <a:prstGeom prst="rect">
+            <a:avLst/>
+          </a:prstGeom>
+          <a:noFill/>
+        </p:spPr>
+        <p:txBody>
+          <a:bodyPr wrap="square">
+            <a:spAutoFit/>
+          </a:bodyPr>
           <a:lstStyle/>
           <a:p>
             <a:r>
+              <a:rPr sz="1800" b="1"/>
+              <a:t>Anticipated backup topics</a:t>
+            </a:r>
+          </a:p>
+          <a:p>
+            <a:r>
               <a:rPr sz="1600"/>
-              <a:t>5 microservices, 2 channels (Kafka + Zeebe), 11 EDPO concepts implemented</a:t>
+              <a:t>•  Why orchestration rather than choreography?</a:t>
             </a:r>
           </a:p>
           <a:p>
             <a:r>
               <a:rPr sz="1600"/>
-              <a:t>Two saga patterns chosen by wait semantics, not by preference</a:t>
+              <a:t>•  Why JSON over Avro for Kafka serialization?</a:t>
             </a:r>
           </a:p>
           <a:p>
             <a:r>
               <a:rPr sz="1600"/>
-              <a:t>Flag-driven completion keeps compensation paths reachable</a:t>
+              <a:t>•  How would you scale this to production?</a:t>
             </a:r>
           </a:p>
           <a:p>
             <a:r>
               <a:rPr sz="1600"/>
-              <a:t>Transactional outbox + idempotent consumer + human escalation as a chain</a:t>
-            </a:r>
-          </a:p>
-          <a:p>
-            <a:r>
-              <a:rPr sz="1600"/>
-              <a:t>Dedicated orchestration service preserves bounded context autonomy</a:t>
-            </a:r>
-          </a:p>
-          <a:p>
-            <a:r>
-              <a:rPr sz="1600"/>
-              <a:t>20 ADRs documenting every architectural decision with rationale</a:t>
+              <a:t>•  What would you do differently next time?</a:t>
             </a:r>
           </a:p>
         </p:txBody>
@@ -10936,7 +11785,7 @@
           <p:cNvPr id="5" name="Textfeld 4">
             <a:extLst>
               <a:ext uri="{FF2B5EF4-FFF2-40B4-BE49-F238E27FC236}">
-                <a16:creationId xmlns:a16="http://schemas.microsoft.com/office/drawing/2014/main" id="{E0A2AB02-C761-949F-F123-BE55FF0DA7F5}"/>
+                <a16:creationId xmlns:a16="http://schemas.microsoft.com/office/drawing/2014/main" id="{EA8403D8-2381-78D9-E4E4-121C9437F6C6}"/>
               </a:ext>
             </a:extLst>
           </p:cNvPr>
@@ -10969,152 +11818,7 @@
               <a:pPr algn="ctr"/>
               <a:t>17</a:t>
             </a:fld>
-            <a:endParaRPr lang="de-DE" sz="1200" dirty="0">
-              <a:solidFill>
-                <a:schemeClr val="bg1"/>
-              </a:solidFill>
-            </a:endParaRPr>
-          </a:p>
-        </p:txBody>
-      </p:sp>
-    </p:spTree>
-  </p:cSld>
-  <p:clrMapOvr>
-    <a:masterClrMapping/>
-  </p:clrMapOvr>
-</p:sld>
-</file>
-
-<file path=ppt/slides/slide18.xml><?xml version="1.0" encoding="utf-8"?>
-<p:sld xmlns:a="http://schemas.openxmlformats.org/drawingml/2006/main" xmlns:r="http://schemas.openxmlformats.org/officeDocument/2006/relationships" xmlns:p="http://schemas.openxmlformats.org/presentationml/2006/main">
-  <p:cSld>
-    <p:spTree>
-      <p:nvGrpSpPr>
-        <p:cNvPr id="1" name=""/>
-        <p:cNvGrpSpPr/>
-        <p:nvPr/>
-      </p:nvGrpSpPr>
-      <p:grpSpPr>
-        <a:xfrm>
-          <a:off x="0" y="0"/>
-          <a:ext cx="0" cy="0"/>
-          <a:chOff x="0" y="0"/>
-          <a:chExt cx="0" cy="0"/>
-        </a:xfrm>
-      </p:grpSpPr>
-      <p:sp>
-        <p:nvSpPr>
-          <p:cNvPr id="2" name="Title 1"/>
-          <p:cNvSpPr>
-            <a:spLocks noGrp="1"/>
-          </p:cNvSpPr>
-          <p:nvPr>
-            <p:ph type="title"/>
-          </p:nvPr>
-        </p:nvSpPr>
-        <p:spPr/>
-        <p:txBody>
-          <a:bodyPr/>
-          <a:lstStyle/>
-          <a:p>
-            <a:r>
-              <a:t>Questions?</a:t>
-            </a:r>
-          </a:p>
-        </p:txBody>
-      </p:sp>
-      <p:sp>
-        <p:nvSpPr>
-          <p:cNvPr id="3" name="TextBox 2"/>
-          <p:cNvSpPr txBox="1"/>
-          <p:nvPr/>
-        </p:nvSpPr>
-        <p:spPr>
-          <a:xfrm>
-            <a:off x="365760" y="2011680"/>
-            <a:ext cx="8412480" cy="2560320"/>
-          </a:xfrm>
-          <a:prstGeom prst="rect">
-            <a:avLst/>
-          </a:prstGeom>
-          <a:noFill/>
-        </p:spPr>
-        <p:txBody>
-          <a:bodyPr wrap="square">
-            <a:spAutoFit/>
-          </a:bodyPr>
-          <a:lstStyle/>
-          <a:p>
-            <a:r>
-              <a:rPr sz="1800" b="1"/>
-              <a:t>Anticipated backup topics</a:t>
-            </a:r>
-          </a:p>
-          <a:p>
-            <a:r>
-              <a:rPr sz="1600"/>
-              <a:t>•  Why orchestration rather than choreography?</a:t>
-            </a:r>
-          </a:p>
-          <a:p>
-            <a:r>
-              <a:rPr sz="1600"/>
-              <a:t>•  Why JSON over Avro for Kafka serialization?</a:t>
-            </a:r>
-          </a:p>
-          <a:p>
-            <a:r>
-              <a:rPr sz="1600"/>
-              <a:t>•  How would you scale this to production?</a:t>
-            </a:r>
-          </a:p>
-          <a:p>
-            <a:r>
-              <a:rPr sz="1600"/>
-              <a:t>•  What would you do differently next time?</a:t>
-            </a:r>
-          </a:p>
-        </p:txBody>
-      </p:sp>
-      <p:sp>
-        <p:nvSpPr>
-          <p:cNvPr id="5" name="Textfeld 4">
-            <a:extLst>
-              <a:ext uri="{FF2B5EF4-FFF2-40B4-BE49-F238E27FC236}">
-                <a16:creationId xmlns:a16="http://schemas.microsoft.com/office/drawing/2014/main" id="{EA8403D8-2381-78D9-E4E4-121C9437F6C6}"/>
-              </a:ext>
-            </a:extLst>
-          </p:cNvPr>
-          <p:cNvSpPr txBox="1"/>
-          <p:nvPr/>
-        </p:nvSpPr>
-        <p:spPr>
-          <a:xfrm>
-            <a:off x="8503298" y="4702629"/>
-            <a:ext cx="360784" cy="261610"/>
-          </a:xfrm>
-          <a:prstGeom prst="rect">
-            <a:avLst/>
-          </a:prstGeom>
-          <a:noFill/>
-        </p:spPr>
-        <p:txBody>
-          <a:bodyPr wrap="square" rtlCol="0">
-            <a:spAutoFit/>
-          </a:bodyPr>
-          <a:lstStyle/>
-          <a:p>
-            <a:pPr algn="ctr"/>
-            <a:fld id="{7C7D4858-ADAF-A34F-A87D-0D5A348A4697}" type="slidenum">
-              <a:rPr lang="de-DE" sz="1100" smtClean="0">
-                <a:solidFill>
-                  <a:schemeClr val="bg1"/>
-                </a:solidFill>
-              </a:rPr>
-              <a:pPr algn="ctr"/>
-              <a:t>18</a:t>
-            </a:fld>
-            <a:endParaRPr lang="de-DE" sz="1200" dirty="0">
+            <a:endParaRPr lang="de-DE" sz="1200">
               <a:solidFill>
                 <a:schemeClr val="bg1"/>
               </a:solidFill>
@@ -11163,7 +11867,28 @@
           <a:lstStyle/>
           <a:p>
             <a:r>
-              <a:t>What is CryptoFlow?</a:t>
+              <a:rPr b="1">
+                <a:solidFill>
+                  <a:srgbClr val="00802E"/>
+                </a:solidFill>
+              </a:rPr>
+              <a:t>What is </a:t>
+            </a:r>
+            <a:r>
+              <a:rPr b="1" err="1">
+                <a:solidFill>
+                  <a:srgbClr val="00802E"/>
+                </a:solidFill>
+              </a:rPr>
+              <a:t>CryptoFlow</a:t>
+            </a:r>
+            <a:r>
+              <a:rPr b="1">
+                <a:solidFill>
+                  <a:srgbClr val="00802E"/>
+                </a:solidFill>
+              </a:rPr>
+              <a:t>?</a:t>
             </a:r>
           </a:p>
         </p:txBody>
@@ -11178,35 +11903,65 @@
             <p:ph idx="1"/>
           </p:nvPr>
         </p:nvSpPr>
-        <p:spPr/>
+        <p:spPr>
+          <a:xfrm>
+            <a:off x="358775" y="2060135"/>
+            <a:ext cx="8426450" cy="1023230"/>
+          </a:xfrm>
+        </p:spPr>
         <p:txBody>
           <a:bodyPr wrap="square"/>
           <a:lstStyle/>
           <a:p>
             <a:r>
-              <a:rPr sz="2000" dirty="0"/>
-              <a:t>Crypto portfolio simulation platform </a:t>
-            </a:r>
-            <a:r>
-              <a:rPr lang="en-US" sz="2000" dirty="0"/>
-              <a:t>-</a:t>
-            </a:r>
-            <a:r>
-              <a:rPr sz="2000" dirty="0"/>
-              <a:t> not a production exchange</a:t>
-            </a:r>
-          </a:p>
-          <a:p>
-            <a:r>
-              <a:rPr sz="2000" dirty="0"/>
-              <a:t>Users register, observe live market prices, manage portfolios, place simulated trades</a:t>
-            </a:r>
-          </a:p>
-          <a:p>
-            <a:r>
-              <a:rPr sz="2000" dirty="0"/>
-              <a:t>Case study for applying EDPO concepts in one coherent end-to-end system</a:t>
-            </a:r>
+              <a:rPr lang="de-CH" sz="2000" err="1"/>
+              <a:t>CryptoFlow</a:t>
+            </a:r>
+            <a:r>
+              <a:rPr lang="de-CH" sz="2000"/>
+              <a:t> </a:t>
+            </a:r>
+            <a:r>
+              <a:rPr lang="de-CH" sz="2000" err="1"/>
+              <a:t>is</a:t>
+            </a:r>
+            <a:r>
+              <a:rPr lang="de-CH" sz="2000"/>
+              <a:t> a</a:t>
+            </a:r>
+            <a:r>
+              <a:rPr sz="2000"/>
+              <a:t> portfolio simulation platform </a:t>
+            </a:r>
+            <a:r>
+              <a:rPr lang="de-CH" sz="2000" err="1"/>
+              <a:t>for</a:t>
+            </a:r>
+            <a:r>
+              <a:rPr lang="de-CH" sz="2000"/>
+              <a:t> </a:t>
+            </a:r>
+            <a:r>
+              <a:rPr lang="en-US" sz="2000"/>
+              <a:t>crypto currencies designed to apply as much patterns from the lecture as possible. </a:t>
+            </a:r>
+            <a:r>
+              <a:rPr sz="2000"/>
+              <a:t>Users register, observe live market prices, manage portfolios</a:t>
+            </a:r>
+            <a:r>
+              <a:rPr lang="de-CH" sz="2000"/>
+              <a:t> and </a:t>
+            </a:r>
+            <a:r>
+              <a:rPr sz="2000"/>
+              <a:t>place simulated trade</a:t>
+            </a:r>
+            <a:r>
+              <a:rPr lang="de-CH" sz="2000"/>
+              <a:t>s.</a:t>
+            </a:r>
+            <a:endParaRPr sz="2000"/>
           </a:p>
         </p:txBody>
       </p:sp>
@@ -11248,7 +12003,7 @@
               <a:pPr algn="ctr"/>
               <a:t>2</a:t>
             </a:fld>
-            <a:endParaRPr lang="de-DE" sz="1200" dirty="0">
+            <a:endParaRPr lang="de-DE" sz="1200">
               <a:solidFill>
                 <a:schemeClr val="bg1"/>
               </a:solidFill>
@@ -11321,16 +12076,22 @@
           <a:lstStyle/>
           <a:p>
             <a:r>
-              <a:rPr dirty="0"/>
-              <a:t>Domain </a:t>
-            </a:r>
-            <a:r>
-              <a:rPr lang="de-CH" dirty="0"/>
-              <a:t>-</a:t>
-            </a:r>
-            <a:r>
-              <a:rPr dirty="0"/>
-              <a:t> Five Bounded Contexts</a:t>
+              <a:t>Domain</a:t>
+            </a:r>
+            <a:r>
+              <a:rPr lang="de-CH"/>
+              <a:t>:</a:t>
+            </a:r>
+            <a:r>
+              <a:t> </a:t>
+            </a:r>
+            <a:r>
+              <a:rPr b="1">
+                <a:solidFill>
+                  <a:srgbClr val="00802E"/>
+                </a:solidFill>
+              </a:rPr>
+              <a:t>Five Bounded Contexts</a:t>
             </a:r>
           </a:p>
         </p:txBody>
@@ -11347,97 +12108,150 @@
         </p:nvSpPr>
         <p:spPr/>
         <p:txBody>
-          <a:bodyPr wrap="square"/>
+          <a:bodyPr wrap="square">
+            <a:normAutofit/>
+          </a:bodyPr>
           <a:lstStyle/>
           <a:p>
-            <a:r>
-              <a:rPr sz="1600" dirty="0"/>
-              <a:t>Market Data </a:t>
-            </a:r>
-            <a:r>
-              <a:rPr lang="en-US" sz="1600" dirty="0"/>
-              <a:t>-</a:t>
-            </a:r>
-            <a:r>
-              <a:rPr sz="1600" dirty="0"/>
-              <a:t> upstream price feed</a:t>
-            </a:r>
-          </a:p>
-          <a:p>
-            <a:r>
-              <a:rPr sz="1600" dirty="0"/>
-              <a:t>Portfolio </a:t>
-            </a:r>
-            <a:r>
-              <a:rPr lang="en-US" sz="1600" dirty="0"/>
-              <a:t>-</a:t>
-            </a:r>
-            <a:r>
-              <a:rPr sz="1600" dirty="0"/>
-              <a:t> holdings &amp; valuation</a:t>
-            </a:r>
-          </a:p>
-          <a:p>
-            <a:r>
-              <a:rPr sz="1600" dirty="0"/>
-              <a:t>Trading </a:t>
-            </a:r>
-            <a:r>
-              <a:rPr lang="en-US" sz="1600" dirty="0"/>
-              <a:t>-</a:t>
-            </a:r>
-            <a:r>
-              <a:rPr sz="1600" dirty="0"/>
-              <a:t> order lifecycle</a:t>
-            </a:r>
-          </a:p>
-          <a:p>
-            <a:r>
-              <a:rPr sz="1600" dirty="0"/>
-              <a:t>User Identity </a:t>
-            </a:r>
-            <a:r>
-              <a:rPr lang="en-US" sz="1600" dirty="0"/>
-              <a:t>-</a:t>
-            </a:r>
-            <a:r>
-              <a:rPr sz="1600" dirty="0"/>
-              <a:t> accounts &amp; confirmation</a:t>
-            </a:r>
-          </a:p>
-          <a:p>
-            <a:r>
-              <a:rPr sz="1600" dirty="0"/>
-              <a:t>Onboarding </a:t>
-            </a:r>
-            <a:r>
-              <a:rPr lang="en-US" sz="1600" dirty="0"/>
-              <a:t>-</a:t>
-            </a:r>
-            <a:r>
-              <a:rPr sz="1600" dirty="0"/>
-              <a:t> saga orchestrator</a:t>
-            </a:r>
-          </a:p>
-          <a:p>
-            <a:pPr lvl="1"/>
-            <a:r>
-              <a:rPr sz="1400" dirty="0"/>
-              <a:t>Upstream/downstream relationships</a:t>
-            </a:r>
-          </a:p>
-          <a:p>
-            <a:pPr lvl="1"/>
-            <a:r>
-              <a:rPr sz="1400" dirty="0"/>
-              <a:t>Partnership: User ↔ Portfolio (compensation)</a:t>
-            </a:r>
-          </a:p>
-          <a:p>
-            <a:pPr lvl="1"/>
-            <a:r>
-              <a:rPr sz="1400" dirty="0"/>
-              <a:t>Shared kernel: shared-events module</a:t>
+            <a:pPr marL="285750" indent="-285750">
+              <a:buFont typeface="Arial" panose="020B0604020202020204" pitchFamily="34" charset="0"/>
+              <a:buChar char="•"/>
+            </a:pPr>
+            <a:r>
+              <a:rPr sz="1600" b="1">
+                <a:solidFill>
+                  <a:srgbClr val="00802E"/>
+                </a:solidFill>
+              </a:rPr>
+              <a:t>Market Data</a:t>
+            </a:r>
+            <a:r>
+              <a:rPr lang="de-CH" sz="1600"/>
+              <a:t>:</a:t>
+            </a:r>
+            <a:r>
+              <a:rPr sz="1600"/>
+              <a:t> </a:t>
+            </a:r>
+            <a:endParaRPr lang="en-US" sz="1600"/>
+          </a:p>
+          <a:p>
+            <a:pPr marL="465750" lvl="1" indent="-285750">
+              <a:buFont typeface="Arial" panose="020B0604020202020204" pitchFamily="34" charset="0"/>
+              <a:buChar char="•"/>
+            </a:pPr>
+            <a:r>
+              <a:t>upstream price feed</a:t>
+            </a:r>
+          </a:p>
+          <a:p>
+            <a:pPr marL="285750" indent="-285750">
+              <a:buFont typeface="Arial" panose="020B0604020202020204" pitchFamily="34" charset="0"/>
+              <a:buChar char="•"/>
+            </a:pPr>
+            <a:r>
+              <a:rPr sz="1600" b="1">
+                <a:solidFill>
+                  <a:srgbClr val="00802E"/>
+                </a:solidFill>
+              </a:rPr>
+              <a:t>Portfolio</a:t>
+            </a:r>
+            <a:r>
+              <a:rPr lang="de-CH" sz="1600"/>
+              <a:t>: </a:t>
+            </a:r>
+          </a:p>
+          <a:p>
+            <a:pPr marL="465750" lvl="1" indent="-285750">
+              <a:buFont typeface="Arial" panose="020B0604020202020204" pitchFamily="34" charset="0"/>
+              <a:buChar char="•"/>
+            </a:pPr>
+            <a:r>
+              <a:t>holdings &amp; valuation</a:t>
+            </a:r>
+          </a:p>
+          <a:p>
+            <a:pPr marL="285750" indent="-285750">
+              <a:buFont typeface="Arial" panose="020B0604020202020204" pitchFamily="34" charset="0"/>
+              <a:buChar char="•"/>
+            </a:pPr>
+            <a:r>
+              <a:rPr sz="1600" b="1">
+                <a:solidFill>
+                  <a:srgbClr val="00802E"/>
+                </a:solidFill>
+              </a:rPr>
+              <a:t>Trading</a:t>
+            </a:r>
+            <a:r>
+              <a:rPr lang="de-CH" sz="1600"/>
+              <a:t>: </a:t>
+            </a:r>
+          </a:p>
+          <a:p>
+            <a:pPr marL="465750" lvl="1" indent="-285750">
+              <a:buFont typeface="Arial" panose="020B0604020202020204" pitchFamily="34" charset="0"/>
+              <a:buChar char="•"/>
+            </a:pPr>
+            <a:r>
+              <a:t>order lifecycle</a:t>
+            </a:r>
+          </a:p>
+          <a:p>
+            <a:pPr marL="285750" indent="-285750">
+              <a:buFont typeface="Arial" panose="020B0604020202020204" pitchFamily="34" charset="0"/>
+              <a:buChar char="•"/>
+            </a:pPr>
+            <a:r>
+              <a:rPr sz="1600" b="1">
+                <a:solidFill>
+                  <a:srgbClr val="00802E"/>
+                </a:solidFill>
+              </a:rPr>
+              <a:t>User</a:t>
+            </a:r>
+            <a:r>
+              <a:rPr lang="de-CH" sz="1600"/>
+              <a:t>: </a:t>
+            </a:r>
+          </a:p>
+          <a:p>
+            <a:pPr marL="465750" lvl="1" indent="-285750">
+              <a:buFont typeface="Arial" panose="020B0604020202020204" pitchFamily="34" charset="0"/>
+              <a:buChar char="•"/>
+            </a:pPr>
+            <a:r>
+              <a:t>accounts &amp; confirmation</a:t>
+            </a:r>
+            <a:endParaRPr lang="de-CH"/>
+          </a:p>
+          <a:p>
+            <a:pPr marL="285750" indent="-285750">
+              <a:buFont typeface="Arial" panose="020B0604020202020204" pitchFamily="34" charset="0"/>
+              <a:buChar char="•"/>
+            </a:pPr>
+            <a:r>
+              <a:rPr lang="en-US" sz="1600" b="1">
+                <a:solidFill>
+                  <a:srgbClr val="00802E"/>
+                </a:solidFill>
+              </a:rPr>
+              <a:t>Onboarding</a:t>
+            </a:r>
+            <a:r>
+              <a:rPr lang="de-CH" sz="1400"/>
+              <a:t>: </a:t>
+            </a:r>
+          </a:p>
+          <a:p>
+            <a:pPr marL="465750" lvl="1" indent="-285750">
+              <a:buFont typeface="Arial" panose="020B0604020202020204" pitchFamily="34" charset="0"/>
+              <a:buChar char="•"/>
+            </a:pPr>
+            <a:r>
+              <a:rPr lang="en-US"/>
+              <a:t>saga orchestrator</a:t>
             </a:r>
           </a:p>
         </p:txBody>
@@ -11480,7 +12294,7 @@
               <a:pPr algn="ctr"/>
               <a:t>3</a:t>
             </a:fld>
-            <a:endParaRPr lang="de-DE" sz="1200" dirty="0">
+            <a:endParaRPr lang="de-DE" sz="1200">
               <a:solidFill>
                 <a:schemeClr val="bg1"/>
               </a:solidFill>
@@ -11529,88 +12343,45 @@
           <a:lstStyle/>
           <a:p>
             <a:r>
-              <a:t>Architecture Overview</a:t>
-            </a:r>
-          </a:p>
-        </p:txBody>
-      </p:sp>
-      <p:sp>
-        <p:nvSpPr>
-          <p:cNvPr id="3" name="Content Placeholder 2"/>
-          <p:cNvSpPr>
-            <a:spLocks noGrp="1"/>
-          </p:cNvSpPr>
-          <p:nvPr>
-            <p:ph sz="half" idx="1"/>
-          </p:nvPr>
-        </p:nvSpPr>
-        <p:spPr/>
-        <p:txBody>
-          <a:bodyPr wrap="square"/>
-          <a:lstStyle/>
-          <a:p>
-            <a:r>
-              <a:rPr sz="1600"/>
-              <a:t>5 Spring Boot microservices in Docker Compose</a:t>
-            </a:r>
-          </a:p>
-          <a:p>
-            <a:r>
-              <a:rPr sz="1600"/>
-              <a:t>Two communication channels: Kafka + Zeebe</a:t>
-            </a:r>
-          </a:p>
-          <a:p>
-            <a:r>
-              <a:rPr sz="1600"/>
-              <a:t>No synchronous inter-service calls for domain ops</a:t>
-            </a:r>
-          </a:p>
-          <a:p>
-            <a:r>
-              <a:rPr sz="1600"/>
-              <a:t>REST only for external clients</a:t>
-            </a:r>
-          </a:p>
-          <a:p>
-            <a:r>
-              <a:rPr sz="1600"/>
-              <a:t>Database-per-service (3× PostgreSQL)</a:t>
-            </a:r>
-          </a:p>
-          <a:p>
-            <a:pPr lvl="1"/>
-            <a:r>
-              <a:rPr sz="1400"/>
-              <a:t>Market Data and Onboarding are stateless</a:t>
-            </a:r>
-          </a:p>
-        </p:txBody>
-      </p:sp>
-      <p:pic>
-        <p:nvPicPr>
-          <p:cNvPr id="4" name="Picture 3" descr="deployment-overview.png"/>
-          <p:cNvPicPr>
-            <a:picLocks noChangeAspect="1"/>
-          </p:cNvPicPr>
-          <p:nvPr/>
-        </p:nvPicPr>
-        <p:blipFill>
-          <a:blip r:embed="rId3"/>
-          <a:stretch>
-            <a:fillRect/>
-          </a:stretch>
-        </p:blipFill>
-        <p:spPr>
-          <a:xfrm>
-            <a:off x="4328413" y="1586204"/>
-            <a:ext cx="4674525" cy="2233173"/>
-          </a:xfrm>
-          <a:prstGeom prst="rect">
-            <a:avLst/>
-          </a:prstGeom>
-        </p:spPr>
-      </p:pic>
+              <a:rPr lang="de-CH" b="1">
+                <a:solidFill>
+                  <a:srgbClr val="00802E"/>
+                </a:solidFill>
+              </a:rPr>
+              <a:t>Non-</a:t>
+            </a:r>
+            <a:r>
+              <a:rPr lang="de-CH" b="1" err="1">
+                <a:solidFill>
+                  <a:srgbClr val="00802E"/>
+                </a:solidFill>
+              </a:rPr>
+              <a:t>Functional</a:t>
+            </a:r>
+            <a:r>
+              <a:rPr lang="de-CH" b="1">
+                <a:solidFill>
+                  <a:srgbClr val="00802E"/>
+                </a:solidFill>
+              </a:rPr>
+              <a:t> </a:t>
+            </a:r>
+            <a:r>
+              <a:rPr lang="de-CH" b="1" err="1">
+                <a:solidFill>
+                  <a:srgbClr val="00802E"/>
+                </a:solidFill>
+              </a:rPr>
+              <a:t>Requirements</a:t>
+            </a:r>
+            <a:endParaRPr b="1">
+              <a:solidFill>
+                <a:srgbClr val="00802E"/>
+              </a:solidFill>
+            </a:endParaRPr>
+          </a:p>
+        </p:txBody>
+      </p:sp>
       <p:sp>
         <p:nvSpPr>
           <p:cNvPr id="6" name="Textfeld 5">
@@ -11649,7 +12420,7 @@
               <a:pPr algn="ctr"/>
               <a:t>4</a:t>
             </a:fld>
-            <a:endParaRPr lang="de-DE" sz="1200" dirty="0">
+            <a:endParaRPr lang="de-DE" sz="1200">
               <a:solidFill>
                 <a:schemeClr val="bg1"/>
               </a:solidFill>
@@ -11657,7 +12428,42 @@
           </a:p>
         </p:txBody>
       </p:sp>
+      <p:sp>
+        <p:nvSpPr>
+          <p:cNvPr id="7" name="Content Placeholder 6">
+            <a:extLst>
+              <a:ext uri="{FF2B5EF4-FFF2-40B4-BE49-F238E27FC236}">
+                <a16:creationId xmlns:a16="http://schemas.microsoft.com/office/drawing/2014/main" id="{FFEC9FEF-08AE-EFBD-0A20-22A2B916E1D0}"/>
+              </a:ext>
+            </a:extLst>
+          </p:cNvPr>
+          <p:cNvSpPr>
+            <a:spLocks noGrp="1"/>
+          </p:cNvSpPr>
+          <p:nvPr>
+            <p:ph sz="half" idx="1"/>
+          </p:nvPr>
+        </p:nvSpPr>
+        <p:spPr>
+          <a:xfrm>
+            <a:off x="358775" y="1276349"/>
+            <a:ext cx="8426449" cy="3203576"/>
+          </a:xfrm>
+        </p:spPr>
+        <p:txBody>
+          <a:bodyPr/>
+          <a:lstStyle/>
+          <a:p>
+            <a:endParaRPr lang="en-US"/>
+          </a:p>
+        </p:txBody>
+      </p:sp>
     </p:spTree>
+    <p:extLst>
+      <p:ext uri="{BB962C8B-B14F-4D97-AF65-F5344CB8AC3E}">
+        <p14:creationId xmlns:p14="http://schemas.microsoft.com/office/powerpoint/2010/main" val="3410646215"/>
+      </p:ext>
+    </p:extLst>
   </p:cSld>
   <p:clrMapOvr>
     <a:masterClrMapping/>
@@ -11698,7 +12504,12 @@
           <a:lstStyle/>
           <a:p>
             <a:r>
-              <a:t>Event-Driven Communication (High Level)</a:t>
+              <a:rPr b="1">
+                <a:solidFill>
+                  <a:srgbClr val="00802E"/>
+                </a:solidFill>
+              </a:rPr>
+              <a:t>Architecture Overview</a:t>
             </a:r>
           </a:p>
         </p:txBody>
@@ -11710,52 +12521,150 @@
             <a:spLocks noGrp="1"/>
           </p:cNvSpPr>
           <p:nvPr>
-            <p:ph idx="1"/>
+            <p:ph sz="half" idx="1"/>
           </p:nvPr>
         </p:nvSpPr>
-        <p:spPr/>
+        <p:spPr>
+          <a:xfrm>
+            <a:off x="358775" y="1319755"/>
+            <a:ext cx="3647616" cy="2503989"/>
+          </a:xfrm>
+        </p:spPr>
         <p:txBody>
           <a:bodyPr wrap="square"/>
           <a:lstStyle/>
           <a:p>
-            <a:r>
-              <a:rPr sz="1800"/>
-              <a:t>Kafka as the sole inter-service event bus (ADR-0001)</a:t>
-            </a:r>
-          </a:p>
-          <a:p>
-            <a:r>
-              <a:rPr sz="1800"/>
-              <a:t>6 topics: price ticks, approved orders, user confirmations, compensation (×2), DLT</a:t>
-            </a:r>
-          </a:p>
-          <a:p>
-            <a:r>
-              <a:rPr sz="1800"/>
-              <a:t>Event-Carried State Transfer in 4 places</a:t>
-            </a:r>
-          </a:p>
-          <a:p>
-            <a:pPr lvl="1"/>
+            <a:pPr marL="285750" indent="-285750">
+              <a:buFont typeface="Arial" panose="020B0604020202020204" pitchFamily="34" charset="0"/>
+              <a:buChar char="•"/>
+            </a:pPr>
             <a:r>
               <a:rPr sz="1600"/>
-              <a:t>Price cache, portfolio updates, compensation events, replicated user validation</a:t>
-            </a:r>
-          </a:p>
-          <a:p>
-            <a:r>
-              <a:rPr sz="1800"/>
-              <a:t>Key config: acks=all, auto.offset.reset=earliest, manual commit, DLT after 3 attempts</a:t>
-            </a:r>
-          </a:p>
-        </p:txBody>
-      </p:sp>
-      <p:sp>
-        <p:nvSpPr>
-          <p:cNvPr id="5" name="Textfeld 4">
+              <a:t>Two communication channels: </a:t>
+            </a:r>
+            <a:endParaRPr lang="de-CH" sz="1600"/>
+          </a:p>
+          <a:p>
+            <a:pPr marL="465750" lvl="1" indent="-285750">
+              <a:buFont typeface="Arial" panose="020B0604020202020204" pitchFamily="34" charset="0"/>
+              <a:buChar char="•"/>
+            </a:pPr>
+            <a:r>
+              <a:t>Kafka + </a:t>
+            </a:r>
+            <a:r>
+              <a:rPr err="1"/>
+              <a:t>Zeebe</a:t>
+            </a:r>
+            <a:endParaRPr lang="de-CH"/>
+          </a:p>
+          <a:p>
+            <a:pPr marL="285750" indent="-285750">
+              <a:buFont typeface="Arial" panose="020B0604020202020204" pitchFamily="34" charset="0"/>
+              <a:buChar char="•"/>
+            </a:pPr>
+            <a:endParaRPr sz="1600"/>
+          </a:p>
+          <a:p>
+            <a:pPr marL="285750" indent="-285750">
+              <a:buFont typeface="Arial" panose="020B0604020202020204" pitchFamily="34" charset="0"/>
+              <a:buChar char="•"/>
+            </a:pPr>
+            <a:r>
+              <a:rPr sz="1600"/>
+              <a:t>No synchronous inter-service calls</a:t>
+            </a:r>
+            <a:endParaRPr lang="de-CH" sz="1600"/>
+          </a:p>
+          <a:p>
+            <a:endParaRPr sz="1600"/>
+          </a:p>
+          <a:p>
+            <a:pPr marL="285750" indent="-285750">
+              <a:buFont typeface="Arial" panose="020B0604020202020204" pitchFamily="34" charset="0"/>
+              <a:buChar char="•"/>
+            </a:pPr>
+            <a:r>
+              <a:rPr sz="1600"/>
+              <a:t>REST only for external clients</a:t>
+            </a:r>
+            <a:endParaRPr lang="de-CH" sz="1600"/>
+          </a:p>
+          <a:p>
+            <a:pPr marL="285750" indent="-285750">
+              <a:buFont typeface="Arial" panose="020B0604020202020204" pitchFamily="34" charset="0"/>
+              <a:buChar char="•"/>
+            </a:pPr>
+            <a:endParaRPr sz="1600"/>
+          </a:p>
+          <a:p>
+            <a:pPr marL="285750" indent="-285750">
+              <a:buFont typeface="Arial" panose="020B0604020202020204" pitchFamily="34" charset="0"/>
+              <a:buChar char="•"/>
+            </a:pPr>
+            <a:r>
+              <a:rPr sz="1600"/>
+              <a:t>Database-per-service</a:t>
+            </a:r>
+            <a:r>
+              <a:rPr lang="de-CH" sz="1600"/>
+              <a:t> </a:t>
+            </a:r>
+            <a:r>
+              <a:rPr lang="de-CH" sz="1600" err="1"/>
+              <a:t>where</a:t>
+            </a:r>
+            <a:r>
+              <a:rPr lang="de-CH" sz="1600"/>
+              <a:t> </a:t>
+            </a:r>
+            <a:r>
+              <a:rPr lang="de-CH" sz="1600" err="1"/>
+              <a:t>needed</a:t>
+            </a:r>
+            <a:endParaRPr lang="de-CH" sz="1600"/>
+          </a:p>
+          <a:p>
+            <a:pPr marL="465750" lvl="1" indent="-285750">
+              <a:buFont typeface="Arial" panose="020B0604020202020204" pitchFamily="34" charset="0"/>
+              <a:buChar char="•"/>
+            </a:pPr>
+            <a:r>
+              <a:t>Market Data and Onboarding are stateless</a:t>
+            </a:r>
+          </a:p>
+        </p:txBody>
+      </p:sp>
+      <p:pic>
+        <p:nvPicPr>
+          <p:cNvPr id="4" name="Picture 3" descr="deployment-overview.png"/>
+          <p:cNvPicPr>
+            <a:picLocks noChangeAspect="1"/>
+          </p:cNvPicPr>
+          <p:nvPr/>
+        </p:nvPicPr>
+        <p:blipFill>
+          <a:blip r:embed="rId3"/>
+          <a:stretch>
+            <a:fillRect/>
+          </a:stretch>
+        </p:blipFill>
+        <p:spPr>
+          <a:xfrm>
+            <a:off x="4006392" y="1319755"/>
+            <a:ext cx="5059684" cy="2417176"/>
+          </a:xfrm>
+          <a:prstGeom prst="rect">
+            <a:avLst/>
+          </a:prstGeom>
+        </p:spPr>
+      </p:pic>
+      <p:sp>
+        <p:nvSpPr>
+          <p:cNvPr id="6" name="Textfeld 5">
             <a:extLst>
               <a:ext uri="{FF2B5EF4-FFF2-40B4-BE49-F238E27FC236}">
-                <a16:creationId xmlns:a16="http://schemas.microsoft.com/office/drawing/2014/main" id="{5C3952B6-AC9F-B8FA-A1F9-A98C7D7E351B}"/>
+                <a16:creationId xmlns:a16="http://schemas.microsoft.com/office/drawing/2014/main" id="{682696F7-4BE1-94C6-E9AF-66845B9A5CA9}"/>
               </a:ext>
             </a:extLst>
           </p:cNvPr>
@@ -11788,7 +12697,7 @@
               <a:pPr algn="ctr"/>
               <a:t>5</a:t>
             </a:fld>
-            <a:endParaRPr lang="de-DE" sz="1200" dirty="0">
+            <a:endParaRPr lang="de-DE" sz="1200">
               <a:solidFill>
                 <a:schemeClr val="bg1"/>
               </a:solidFill>
@@ -11837,16 +12746,36 @@
           <a:lstStyle/>
           <a:p>
             <a:r>
-              <a:rPr dirty="0"/>
-              <a:t>Kafka Experiments </a:t>
-            </a:r>
-            <a:r>
-              <a:rPr lang="en-US" dirty="0"/>
-              <a:t>-</a:t>
-            </a:r>
-            <a:r>
-              <a:rPr dirty="0"/>
-              <a:t> Assignment 1 (Summary)</a:t>
+              <a:rPr b="1">
+                <a:solidFill>
+                  <a:srgbClr val="00802E"/>
+                </a:solidFill>
+              </a:rPr>
+              <a:t>Why Camunda 8 </a:t>
+            </a:r>
+            <a:r>
+              <a:rPr lang="de-CH" b="1">
+                <a:solidFill>
+                  <a:srgbClr val="00802E"/>
+                </a:solidFill>
+              </a:rPr>
+              <a:t>/ </a:t>
+            </a:r>
+            <a:r>
+              <a:rPr b="1" err="1">
+                <a:solidFill>
+                  <a:srgbClr val="00802E"/>
+                </a:solidFill>
+              </a:rPr>
+              <a:t>Zeebe</a:t>
+            </a:r>
+            <a:r>
+              <a:rPr b="1">
+                <a:solidFill>
+                  <a:srgbClr val="00802E"/>
+                </a:solidFill>
+              </a:rPr>
+              <a:t>?</a:t>
             </a:r>
           </a:p>
         </p:txBody>
@@ -11866,81 +12795,198 @@
           <a:bodyPr wrap="square"/>
           <a:lstStyle/>
           <a:p>
-            <a:r>
-              <a:rPr sz="1600" dirty="0"/>
-              <a:t>Four experiments on multi-broker clusters validating Kafka reliability</a:t>
-            </a:r>
-          </a:p>
-          <a:p>
-            <a:r>
-              <a:rPr sz="1600" dirty="0"/>
-              <a:t>acks=0: </a:t>
-            </a:r>
-            <a:r>
-              <a:rPr sz="1600" dirty="0" err="1"/>
-              <a:t>eventID</a:t>
-            </a:r>
-            <a:r>
-              <a:rPr sz="1600" dirty="0"/>
-              <a:t>=76 permanently lost </a:t>
-            </a:r>
-            <a:r>
-              <a:rPr lang="en-US" sz="1600" dirty="0"/>
+            <a:pPr marL="285750" indent="-285750">
+              <a:buFont typeface="Arial" panose="020B0604020202020204" pitchFamily="34" charset="0"/>
+              <a:buChar char="•"/>
+            </a:pPr>
+            <a:r>
+              <a:rPr sz="1400"/>
+              <a:t>Two workflows need durable waiting states</a:t>
+            </a:r>
+            <a:r>
+              <a:rPr lang="de-CH" sz="1400"/>
+              <a:t>:</a:t>
+            </a:r>
+          </a:p>
+          <a:p>
+            <a:pPr marL="465750" lvl="1" indent="-285750">
+              <a:buFont typeface="Arial" panose="020B0604020202020204" pitchFamily="34" charset="0"/>
+              <a:buChar char="•"/>
+            </a:pPr>
+            <a:r>
+              <a:rPr sz="1200"/>
+              <a:t>onboarding and </a:t>
+            </a:r>
+            <a:endParaRPr lang="de-CH" sz="1200"/>
+          </a:p>
+          <a:p>
+            <a:pPr marL="465750" lvl="1" indent="-285750">
+              <a:buFont typeface="Arial" panose="020B0604020202020204" pitchFamily="34" charset="0"/>
+              <a:buChar char="•"/>
+            </a:pPr>
+            <a:r>
+              <a:rPr sz="1200"/>
+              <a:t>order placement</a:t>
+            </a:r>
+            <a:endParaRPr lang="de-CH" sz="1200"/>
+          </a:p>
+          <a:p>
+            <a:pPr marL="285750" indent="-285750">
+              <a:buFont typeface="Arial" panose="020B0604020202020204" pitchFamily="34" charset="0"/>
+              <a:buChar char="•"/>
+            </a:pPr>
+            <a:endParaRPr sz="1400"/>
+          </a:p>
+          <a:p>
+            <a:pPr marL="285750" indent="-285750">
+              <a:buFont typeface="Arial" panose="020B0604020202020204" pitchFamily="34" charset="0"/>
+              <a:buChar char="•"/>
+            </a:pPr>
+            <a:r>
+              <a:rPr sz="1400"/>
+              <a:t>Why not Camunda 7 / </a:t>
+            </a:r>
+            <a:r>
+              <a:rPr sz="1400" err="1"/>
+              <a:t>Operaton</a:t>
+            </a:r>
+            <a:r>
+              <a:rPr sz="1400"/>
+              <a:t>?</a:t>
+            </a:r>
+            <a:endParaRPr lang="de-CH"/>
+          </a:p>
+          <a:p>
+            <a:pPr marL="465750" lvl="1" indent="-285750">
+              <a:buFont typeface="Arial" panose="020B0604020202020204" pitchFamily="34" charset="0"/>
+              <a:buChar char="•"/>
+            </a:pPr>
+            <a:r>
+              <a:rPr sz="1200"/>
+              <a:t>Embedded engine stores process state in the application DB</a:t>
+            </a:r>
+            <a:endParaRPr lang="de-CH" sz="1200"/>
+          </a:p>
+          <a:p>
+            <a:pPr marL="465750" lvl="1" indent="-285750">
+              <a:buFont typeface="Arial" panose="020B0604020202020204" pitchFamily="34" charset="0"/>
+              <a:buChar char="•"/>
+            </a:pPr>
+            <a:r>
+              <a:rPr sz="1200"/>
+              <a:t>Many concurrent </a:t>
+            </a:r>
+            <a:r>
+              <a:rPr sz="1200" err="1"/>
+              <a:t>placeOrder</a:t>
+            </a:r>
+            <a:r>
+              <a:rPr sz="1200"/>
+              <a:t> waits would need a shared polling table</a:t>
+            </a:r>
+            <a:endParaRPr lang="de-CH" sz="1200"/>
+          </a:p>
+          <a:p>
+            <a:pPr marL="465750" lvl="1" indent="-285750">
+              <a:buFont typeface="Arial" panose="020B0604020202020204" pitchFamily="34" charset="0"/>
+              <a:buChar char="•"/>
+            </a:pPr>
+            <a:r>
+              <a:rPr sz="1200"/>
+              <a:t>Kafka and SMTP require custom application-level client code</a:t>
+            </a:r>
+            <a:endParaRPr lang="de-CH" sz="1200"/>
+          </a:p>
+          <a:p>
+            <a:pPr marL="465750" lvl="1" indent="-285750">
+              <a:buFont typeface="Arial" panose="020B0604020202020204" pitchFamily="34" charset="0"/>
+              <a:buChar char="•"/>
+            </a:pPr>
+            <a:endParaRPr sz="1200"/>
+          </a:p>
+          <a:p>
+            <a:pPr marL="285750" indent="-285750">
+              <a:buFont typeface="Arial" panose="020B0604020202020204" pitchFamily="34" charset="0"/>
+              <a:buChar char="•"/>
+            </a:pPr>
+            <a:r>
+              <a:rPr sz="1600"/>
+              <a:t>Camunda 8 / </a:t>
+            </a:r>
+            <a:r>
+              <a:rPr sz="1600" err="1"/>
+              <a:t>Zeebe</a:t>
+            </a:r>
+            <a:r>
+              <a:rPr sz="1600"/>
+              <a:t> advantages</a:t>
+            </a:r>
+            <a:endParaRPr lang="de-CH" sz="1600"/>
+          </a:p>
+          <a:p>
+            <a:pPr marL="465750" lvl="1" indent="-285750">
+              <a:buFont typeface="Arial" panose="020B0604020202020204" pitchFamily="34" charset="0"/>
+              <a:buChar char="•"/>
+            </a:pPr>
+            <a:r>
+              <a:rPr sz="1200"/>
+              <a:t>Partitioned log </a:t>
+            </a:r>
+            <a:r>
+              <a:rPr lang="en-US" sz="1200"/>
               <a:t>-</a:t>
             </a:r>
             <a:r>
-              <a:rPr sz="1600" dirty="0"/>
-              <a:t> producer cannot detect the loss</a:t>
-            </a:r>
-          </a:p>
-          <a:p>
-            <a:r>
-              <a:rPr sz="1600" dirty="0"/>
-              <a:t>acks=1: </a:t>
-            </a:r>
-            <a:r>
-              <a:rPr sz="1600" dirty="0" err="1"/>
-              <a:t>eventID</a:t>
-            </a:r>
-            <a:r>
-              <a:rPr sz="1600" dirty="0"/>
-              <a:t>=71 </a:t>
-            </a:r>
-            <a:r>
-              <a:rPr sz="1600" dirty="0" err="1"/>
-              <a:t>ACKed</a:t>
-            </a:r>
-            <a:r>
-              <a:rPr sz="1600" dirty="0"/>
-              <a:t> by leader but lost when leader crashed before replication</a:t>
-            </a:r>
-          </a:p>
-          <a:p>
-            <a:r>
-              <a:rPr sz="1600" dirty="0"/>
-              <a:t>acks=all: ~8.9s availability gap during failover, zero data loss</a:t>
-            </a:r>
-          </a:p>
-          <a:p>
-            <a:r>
-              <a:rPr sz="1600" dirty="0"/>
-              <a:t>Offset reset: earliest replays retained history; latest silently skips it</a:t>
-            </a:r>
-          </a:p>
-          <a:p>
-            <a:r>
-              <a:rPr sz="1600" dirty="0"/>
-              <a:t>Findings directly informed our production config choices (ADR-0001)</a:t>
-            </a:r>
-          </a:p>
-        </p:txBody>
-      </p:sp>
-      <p:sp>
-        <p:nvSpPr>
-          <p:cNvPr id="5" name="Textfeld 4">
+              <a:rPr sz="1200"/>
+              <a:t> each instance waits independently, no job-lock contention</a:t>
+            </a:r>
+            <a:endParaRPr lang="de-CH" sz="1200"/>
+          </a:p>
+          <a:p>
+            <a:pPr marL="465750" lvl="1" indent="-285750">
+              <a:buFont typeface="Arial" panose="020B0604020202020204" pitchFamily="34" charset="0"/>
+              <a:buChar char="•"/>
+            </a:pPr>
+            <a:r>
+              <a:rPr sz="1200"/>
+              <a:t>Connector templates </a:t>
+            </a:r>
+            <a:r>
+              <a:rPr lang="en-US" sz="1200"/>
+              <a:t>-</a:t>
+            </a:r>
+            <a:r>
+              <a:rPr sz="1200"/>
+              <a:t> Kafka + SMTP inside BPMN, zero notification code</a:t>
+            </a:r>
+            <a:endParaRPr lang="de-CH" sz="1200"/>
+          </a:p>
+          <a:p>
+            <a:pPr marL="465750" lvl="1" indent="-285750">
+              <a:buFont typeface="Arial" panose="020B0604020202020204" pitchFamily="34" charset="0"/>
+              <a:buChar char="•"/>
+            </a:pPr>
+            <a:r>
+              <a:rPr sz="1200"/>
+              <a:t>Camunda Operate </a:t>
+            </a:r>
+            <a:r>
+              <a:rPr lang="en-US" sz="1200"/>
+              <a:t>-</a:t>
+            </a:r>
+            <a:r>
+              <a:rPr sz="1200"/>
+              <a:t> runtime visibility without custom dashboards</a:t>
+            </a:r>
+          </a:p>
+        </p:txBody>
+      </p:sp>
+      <p:sp>
+        <p:nvSpPr>
+          <p:cNvPr id="4" name="Textfeld 3">
             <a:extLst>
               <a:ext uri="{FF2B5EF4-FFF2-40B4-BE49-F238E27FC236}">
-                <a16:creationId xmlns:a16="http://schemas.microsoft.com/office/drawing/2014/main" id="{924DC472-EAF7-99E2-4C67-BCA7CB9DD21B}"/>
+                <a16:creationId xmlns:a16="http://schemas.microsoft.com/office/drawing/2014/main" id="{9C210F34-FF09-6865-A3B1-6A2AB6A1CC4A}"/>
               </a:ext>
             </a:extLst>
           </p:cNvPr>
@@ -11973,7 +13019,7 @@
               <a:pPr algn="ctr"/>
               <a:t>6</a:t>
             </a:fld>
-            <a:endParaRPr lang="de-DE" sz="1200" dirty="0">
+            <a:endParaRPr lang="de-DE" sz="1200">
               <a:solidFill>
                 <a:schemeClr val="bg1"/>
               </a:solidFill>
@@ -12022,7 +13068,22 @@
           <a:lstStyle/>
           <a:p>
             <a:r>
-              <a:t>Why Camunda 8 / Zeebe?</a:t>
+              <a:t>Two Saga Patterns</a:t>
+            </a:r>
+            <a:r>
+              <a:rPr lang="de-CH"/>
+              <a:t>:</a:t>
+            </a:r>
+            <a:r>
+              <a:t> </a:t>
+            </a:r>
+            <a:r>
+              <a:rPr b="1">
+                <a:solidFill>
+                  <a:srgbClr val="00802E"/>
+                </a:solidFill>
+              </a:rPr>
+              <a:t>Driven by Wait Semantics</a:t>
             </a:r>
           </a:p>
         </p:txBody>
@@ -12043,124 +13104,200 @@
           <a:lstStyle/>
           <a:p>
             <a:r>
-              <a:rPr sz="1400" dirty="0"/>
-              <a:t>Transition: from events to processes</a:t>
-            </a:r>
-          </a:p>
-          <a:p>
-            <a:r>
-              <a:rPr sz="1400" dirty="0"/>
-              <a:t>Two workflows need durable waiting states </a:t>
-            </a:r>
-            <a:r>
-              <a:rPr lang="en-US" sz="1400" dirty="0"/>
-              <a:t>-</a:t>
-            </a:r>
-            <a:r>
-              <a:rPr sz="1400" dirty="0"/>
-              <a:t> onboarding and order placement</a:t>
-            </a:r>
-          </a:p>
-          <a:p>
-            <a:r>
-              <a:rPr sz="1400" dirty="0"/>
-              <a:t>Why not Camunda 7 / </a:t>
-            </a:r>
-            <a:r>
-              <a:rPr sz="1400" dirty="0" err="1"/>
-              <a:t>Operaton</a:t>
-            </a:r>
-            <a:r>
-              <a:rPr sz="1400" dirty="0"/>
-              <a:t>?</a:t>
-            </a:r>
-          </a:p>
-          <a:p>
-            <a:pPr lvl="1"/>
-            <a:r>
-              <a:rPr sz="1200" dirty="0"/>
-              <a:t>Embedded engine stores process state in the application DB</a:t>
-            </a:r>
-          </a:p>
-          <a:p>
-            <a:pPr lvl="1"/>
-            <a:r>
-              <a:rPr sz="1200" dirty="0"/>
-              <a:t>Many concurrent </a:t>
-            </a:r>
-            <a:r>
-              <a:rPr sz="1200" dirty="0" err="1"/>
-              <a:t>placeOrder</a:t>
-            </a:r>
-            <a:r>
-              <a:rPr sz="1200" dirty="0"/>
-              <a:t> waits would need a shared polling table</a:t>
-            </a:r>
-          </a:p>
-          <a:p>
-            <a:pPr lvl="1"/>
-            <a:r>
-              <a:rPr sz="1200" dirty="0"/>
-              <a:t>Kafka and SMTP require custom application-level client code</a:t>
-            </a:r>
-          </a:p>
-          <a:p>
-            <a:r>
-              <a:rPr sz="1400" dirty="0"/>
-              <a:t>Camunda 8 / </a:t>
-            </a:r>
-            <a:r>
-              <a:rPr sz="1400" dirty="0" err="1"/>
-              <a:t>Zeebe</a:t>
-            </a:r>
-            <a:r>
-              <a:rPr sz="1400" dirty="0"/>
-              <a:t> advantages</a:t>
-            </a:r>
-          </a:p>
-          <a:p>
-            <a:pPr lvl="1"/>
-            <a:r>
-              <a:rPr sz="1200" dirty="0"/>
-              <a:t>Partitioned log </a:t>
-            </a:r>
-            <a:r>
-              <a:rPr lang="en-US" sz="1200" dirty="0"/>
-              <a:t>-</a:t>
-            </a:r>
-            <a:r>
-              <a:rPr sz="1200" dirty="0"/>
-              <a:t> each instance waits independently, no job-lock contention</a:t>
-            </a:r>
-          </a:p>
-          <a:p>
-            <a:pPr lvl="1"/>
-            <a:r>
-              <a:rPr sz="1200" dirty="0"/>
-              <a:t>Connector templates </a:t>
-            </a:r>
-            <a:r>
-              <a:rPr lang="en-US" sz="1200" dirty="0"/>
-              <a:t>-</a:t>
-            </a:r>
-            <a:r>
-              <a:rPr sz="1200" dirty="0"/>
-              <a:t> Kafka + SMTP inside BPMN, zero notification code</a:t>
-            </a:r>
-          </a:p>
-          <a:p>
-            <a:pPr lvl="1"/>
-            <a:r>
-              <a:rPr sz="1200" dirty="0"/>
-              <a:t>Camunda Operate </a:t>
-            </a:r>
-            <a:r>
-              <a:rPr lang="en-US" sz="1200" dirty="0"/>
-              <a:t>-</a:t>
-            </a:r>
-            <a:r>
-              <a:rPr sz="1200" dirty="0"/>
-              <a:t> runtime visibility without custom dashboards</a:t>
+              <a:rPr sz="1400"/>
+              <a:t>Two orchestrated saga styles</a:t>
+            </a:r>
+            <a:r>
+              <a:rPr lang="de-CH" sz="1400"/>
+              <a:t>: </a:t>
+            </a:r>
+            <a:r>
+              <a:rPr sz="1400"/>
+              <a:t>choice driven by nature of the wait</a:t>
+            </a:r>
+          </a:p>
+          <a:p>
+            <a:endParaRPr lang="de-CH" sz="1400"/>
+          </a:p>
+          <a:p>
+            <a:pPr marL="285750" indent="-285750">
+              <a:buFont typeface="Arial" panose="020B0604020202020204" pitchFamily="34" charset="0"/>
+              <a:buChar char="•"/>
+            </a:pPr>
+            <a:r>
+              <a:rPr sz="1400"/>
+              <a:t>Onboarding</a:t>
+            </a:r>
+            <a:r>
+              <a:rPr lang="de-CH" sz="1400"/>
+              <a:t>:</a:t>
+            </a:r>
+            <a:r>
+              <a:rPr sz="1400"/>
+              <a:t> </a:t>
+            </a:r>
+            <a:r>
+              <a:rPr sz="1400" b="1">
+                <a:solidFill>
+                  <a:srgbClr val="00802E"/>
+                </a:solidFill>
+              </a:rPr>
+              <a:t>Parallel Saga</a:t>
+            </a:r>
+            <a:endParaRPr lang="de-CH" b="1">
+              <a:solidFill>
+                <a:srgbClr val="00802E"/>
+              </a:solidFill>
+            </a:endParaRPr>
+          </a:p>
+          <a:p>
+            <a:pPr marL="465750" lvl="1" indent="-285750">
+              <a:buFont typeface="Arial" panose="020B0604020202020204" pitchFamily="34" charset="0"/>
+              <a:buChar char="•"/>
+            </a:pPr>
+            <a:r>
+              <a:rPr sz="1200"/>
+              <a:t>Deterministic wait (user clicks confirmation link)</a:t>
+            </a:r>
+            <a:endParaRPr lang="de-CH" sz="1200"/>
+          </a:p>
+          <a:p>
+            <a:pPr marL="465750" lvl="1" indent="-285750">
+              <a:buFont typeface="Arial" panose="020B0604020202020204" pitchFamily="34" charset="0"/>
+              <a:buChar char="•"/>
+            </a:pPr>
+            <a:r>
+              <a:rPr sz="1200"/>
+              <a:t>Spans two bounded contexts</a:t>
+            </a:r>
+            <a:r>
+              <a:rPr lang="de-CH" sz="1200"/>
+              <a:t>: </a:t>
+            </a:r>
+            <a:r>
+              <a:rPr sz="1200">
+                <a:solidFill>
+                  <a:srgbClr val="00802E"/>
+                </a:solidFill>
+              </a:rPr>
+              <a:t>User</a:t>
+            </a:r>
+            <a:r>
+              <a:rPr sz="1200"/>
+              <a:t> + </a:t>
+            </a:r>
+            <a:r>
+              <a:rPr sz="1200">
+                <a:solidFill>
+                  <a:srgbClr val="00802E"/>
+                </a:solidFill>
+              </a:rPr>
+              <a:t>Portfolio</a:t>
+            </a:r>
+            <a:endParaRPr lang="de-CH" sz="1200">
+              <a:solidFill>
+                <a:srgbClr val="00802E"/>
+              </a:solidFill>
+            </a:endParaRPr>
+          </a:p>
+          <a:p>
+            <a:pPr marL="465750" lvl="1" indent="-285750">
+              <a:buFont typeface="Arial" panose="020B0604020202020204" pitchFamily="34" charset="0"/>
+              <a:buChar char="•"/>
+            </a:pPr>
+            <a:r>
+              <a:rPr sz="1200"/>
+              <a:t>Needs all-or-nothing consistency</a:t>
+            </a:r>
+            <a:endParaRPr lang="de-CH" sz="1200"/>
+          </a:p>
+          <a:p>
+            <a:pPr marL="360000" lvl="2" indent="0">
+              <a:buNone/>
+            </a:pPr>
+            <a:endParaRPr sz="1200"/>
+          </a:p>
+          <a:p>
+            <a:pPr marL="285750" indent="-285750">
+              <a:buFont typeface="Arial" panose="020B0604020202020204" pitchFamily="34" charset="0"/>
+              <a:buChar char="•"/>
+            </a:pPr>
+            <a:r>
+              <a:rPr sz="1400"/>
+              <a:t>Order Placement</a:t>
+            </a:r>
+            <a:r>
+              <a:rPr lang="de-CH" sz="1400"/>
+              <a:t>: </a:t>
+            </a:r>
+            <a:r>
+              <a:rPr sz="1400" b="1">
+                <a:solidFill>
+                  <a:srgbClr val="00802E"/>
+                </a:solidFill>
+              </a:rPr>
+              <a:t>Fairy Tale Saga</a:t>
+            </a:r>
+            <a:endParaRPr lang="de-CH" b="1">
+              <a:solidFill>
+                <a:srgbClr val="00802E"/>
+              </a:solidFill>
+            </a:endParaRPr>
+          </a:p>
+          <a:p>
+            <a:pPr marL="465750" lvl="1" indent="-285750">
+              <a:buFont typeface="Arial" panose="020B0604020202020204" pitchFamily="34" charset="0"/>
+              <a:buChar char="•"/>
+            </a:pPr>
+            <a:r>
+              <a:rPr sz="1200"/>
+              <a:t>Non-deterministic wait (price match from market feed)</a:t>
+            </a:r>
+            <a:endParaRPr lang="de-CH" sz="1200"/>
+          </a:p>
+          <a:p>
+            <a:pPr marL="465750" lvl="1" indent="-285750">
+              <a:buFont typeface="Arial" panose="020B0604020202020204" pitchFamily="34" charset="0"/>
+              <a:buChar char="•"/>
+            </a:pPr>
+            <a:r>
+              <a:rPr sz="1200"/>
+              <a:t>Stays inside one bounded context</a:t>
+            </a:r>
+            <a:r>
+              <a:rPr lang="de-CH" sz="1200"/>
+              <a:t>: </a:t>
+            </a:r>
+            <a:r>
+              <a:rPr sz="1200">
+                <a:solidFill>
+                  <a:srgbClr val="00802E"/>
+                </a:solidFill>
+              </a:rPr>
+              <a:t>Trading</a:t>
+            </a:r>
+            <a:endParaRPr lang="de-CH" sz="1200">
+              <a:solidFill>
+                <a:srgbClr val="00802E"/>
+              </a:solidFill>
+            </a:endParaRPr>
+          </a:p>
+          <a:p>
+            <a:pPr marL="465750" lvl="1" indent="-285750">
+              <a:buFont typeface="Arial" panose="020B0604020202020204" pitchFamily="34" charset="0"/>
+              <a:buChar char="•"/>
+            </a:pPr>
+            <a:r>
+              <a:rPr sz="1200"/>
+              <a:t>Accepts eventual consistency with </a:t>
+            </a:r>
+            <a:r>
+              <a:rPr sz="1200">
+                <a:solidFill>
+                  <a:srgbClr val="00802E"/>
+                </a:solidFill>
+              </a:rPr>
+              <a:t>Portfolio</a:t>
             </a:r>
           </a:p>
         </p:txBody>
@@ -12170,7 +13307,7 @@
           <p:cNvPr id="4" name="Textfeld 3">
             <a:extLst>
               <a:ext uri="{FF2B5EF4-FFF2-40B4-BE49-F238E27FC236}">
-                <a16:creationId xmlns:a16="http://schemas.microsoft.com/office/drawing/2014/main" id="{9C210F34-FF09-6865-A3B1-6A2AB6A1CC4A}"/>
+                <a16:creationId xmlns:a16="http://schemas.microsoft.com/office/drawing/2014/main" id="{5C76045A-16BC-E40D-2927-E405F52888B2}"/>
               </a:ext>
             </a:extLst>
           </p:cNvPr>
@@ -12203,7 +13340,7 @@
               <a:pPr algn="ctr"/>
               <a:t>7</a:t>
             </a:fld>
-            <a:endParaRPr lang="de-DE" sz="1200" dirty="0">
+            <a:endParaRPr lang="de-DE" sz="1200">
               <a:solidFill>
                 <a:schemeClr val="bg1"/>
               </a:solidFill>
@@ -12220,223 +13357,6 @@
 </file>
 
 <file path=ppt/slides/slide8.xml><?xml version="1.0" encoding="utf-8"?>
-<p:sld xmlns:a="http://schemas.openxmlformats.org/drawingml/2006/main" xmlns:r="http://schemas.openxmlformats.org/officeDocument/2006/relationships" xmlns:p="http://schemas.openxmlformats.org/presentationml/2006/main">
-  <p:cSld>
-    <p:spTree>
-      <p:nvGrpSpPr>
-        <p:cNvPr id="1" name=""/>
-        <p:cNvGrpSpPr/>
-        <p:nvPr/>
-      </p:nvGrpSpPr>
-      <p:grpSpPr>
-        <a:xfrm>
-          <a:off x="0" y="0"/>
-          <a:ext cx="0" cy="0"/>
-          <a:chOff x="0" y="0"/>
-          <a:chExt cx="0" cy="0"/>
-        </a:xfrm>
-      </p:grpSpPr>
-      <p:sp>
-        <p:nvSpPr>
-          <p:cNvPr id="2" name="Title 1"/>
-          <p:cNvSpPr>
-            <a:spLocks noGrp="1"/>
-          </p:cNvSpPr>
-          <p:nvPr>
-            <p:ph type="title"/>
-          </p:nvPr>
-        </p:nvSpPr>
-        <p:spPr/>
-        <p:txBody>
-          <a:bodyPr/>
-          <a:lstStyle/>
-          <a:p>
-            <a:r>
-              <a:rPr dirty="0"/>
-              <a:t>Two Saga Patterns </a:t>
-            </a:r>
-            <a:r>
-              <a:rPr lang="en-US" dirty="0"/>
-              <a:t>-</a:t>
-            </a:r>
-            <a:r>
-              <a:rPr dirty="0"/>
-              <a:t> Driven by Wait Semantics</a:t>
-            </a:r>
-          </a:p>
-        </p:txBody>
-      </p:sp>
-      <p:sp>
-        <p:nvSpPr>
-          <p:cNvPr id="3" name="Content Placeholder 2"/>
-          <p:cNvSpPr>
-            <a:spLocks noGrp="1"/>
-          </p:cNvSpPr>
-          <p:nvPr>
-            <p:ph idx="1"/>
-          </p:nvPr>
-        </p:nvSpPr>
-        <p:spPr/>
-        <p:txBody>
-          <a:bodyPr wrap="square"/>
-          <a:lstStyle/>
-          <a:p>
-            <a:r>
-              <a:rPr sz="1400" dirty="0"/>
-              <a:t>Two orchestrated saga styles </a:t>
-            </a:r>
-            <a:r>
-              <a:rPr lang="en-US" sz="1400" dirty="0"/>
-              <a:t>-</a:t>
-            </a:r>
-            <a:r>
-              <a:rPr sz="1400" dirty="0"/>
-              <a:t> choice driven by nature of the wait</a:t>
-            </a:r>
-          </a:p>
-          <a:p>
-            <a:r>
-              <a:rPr sz="1400" dirty="0"/>
-              <a:t>Onboarding → Parallel Saga (</a:t>
-            </a:r>
-            <a:r>
-              <a:rPr sz="1400" dirty="0" err="1"/>
-              <a:t>aeo</a:t>
-            </a:r>
-            <a:r>
-              <a:rPr sz="1400" dirty="0"/>
-              <a:t>)</a:t>
-            </a:r>
-          </a:p>
-          <a:p>
-            <a:pPr lvl="1"/>
-            <a:r>
-              <a:rPr sz="1200" dirty="0"/>
-              <a:t>Deterministic wait (user clicks confirmation link)</a:t>
-            </a:r>
-          </a:p>
-          <a:p>
-            <a:pPr lvl="1"/>
-            <a:r>
-              <a:rPr sz="1200" dirty="0"/>
-              <a:t>Spans two bounded contexts </a:t>
-            </a:r>
-            <a:r>
-              <a:rPr lang="en-US" sz="1200" dirty="0"/>
-              <a:t>-</a:t>
-            </a:r>
-            <a:r>
-              <a:rPr sz="1200" dirty="0"/>
-              <a:t> User + Portfolio</a:t>
-            </a:r>
-          </a:p>
-          <a:p>
-            <a:pPr lvl="1"/>
-            <a:r>
-              <a:rPr sz="1200" dirty="0"/>
-              <a:t>Needs all-or-nothing consistency</a:t>
-            </a:r>
-          </a:p>
-          <a:p>
-            <a:r>
-              <a:rPr sz="1400" dirty="0"/>
-              <a:t>Order Placement → Fairy Tale Saga (</a:t>
-            </a:r>
-            <a:r>
-              <a:rPr sz="1400" dirty="0" err="1"/>
-              <a:t>seo</a:t>
-            </a:r>
-            <a:r>
-              <a:rPr sz="1400" dirty="0"/>
-              <a:t>)</a:t>
-            </a:r>
-          </a:p>
-          <a:p>
-            <a:pPr lvl="1"/>
-            <a:r>
-              <a:rPr sz="1200" dirty="0"/>
-              <a:t>Non-deterministic wait (price match from market feed)</a:t>
-            </a:r>
-          </a:p>
-          <a:p>
-            <a:pPr lvl="1"/>
-            <a:r>
-              <a:rPr sz="1200" dirty="0"/>
-              <a:t>Stays inside one bounded context </a:t>
-            </a:r>
-            <a:r>
-              <a:rPr lang="en-US" sz="1200" dirty="0"/>
-              <a:t>-</a:t>
-            </a:r>
-            <a:r>
-              <a:rPr sz="1200" dirty="0"/>
-              <a:t> Trading</a:t>
-            </a:r>
-          </a:p>
-          <a:p>
-            <a:pPr lvl="1"/>
-            <a:r>
-              <a:rPr sz="1200" dirty="0"/>
-              <a:t>Accepts eventual consistency with Portfolio</a:t>
-            </a:r>
-          </a:p>
-        </p:txBody>
-      </p:sp>
-      <p:sp>
-        <p:nvSpPr>
-          <p:cNvPr id="4" name="Textfeld 3">
-            <a:extLst>
-              <a:ext uri="{FF2B5EF4-FFF2-40B4-BE49-F238E27FC236}">
-                <a16:creationId xmlns:a16="http://schemas.microsoft.com/office/drawing/2014/main" id="{5C76045A-16BC-E40D-2927-E405F52888B2}"/>
-              </a:ext>
-            </a:extLst>
-          </p:cNvPr>
-          <p:cNvSpPr txBox="1"/>
-          <p:nvPr/>
-        </p:nvSpPr>
-        <p:spPr>
-          <a:xfrm>
-            <a:off x="8503298" y="4702629"/>
-            <a:ext cx="360784" cy="261610"/>
-          </a:xfrm>
-          <a:prstGeom prst="rect">
-            <a:avLst/>
-          </a:prstGeom>
-          <a:noFill/>
-        </p:spPr>
-        <p:txBody>
-          <a:bodyPr wrap="square" rtlCol="0">
-            <a:spAutoFit/>
-          </a:bodyPr>
-          <a:lstStyle/>
-          <a:p>
-            <a:pPr algn="ctr"/>
-            <a:fld id="{7C7D4858-ADAF-A34F-A87D-0D5A348A4697}" type="slidenum">
-              <a:rPr lang="de-DE" sz="1100" smtClean="0">
-                <a:solidFill>
-                  <a:schemeClr val="bg1"/>
-                </a:solidFill>
-              </a:rPr>
-              <a:pPr algn="ctr"/>
-              <a:t>8</a:t>
-            </a:fld>
-            <a:endParaRPr lang="de-DE" sz="1200" dirty="0">
-              <a:solidFill>
-                <a:schemeClr val="bg1"/>
-              </a:solidFill>
-            </a:endParaRPr>
-          </a:p>
-        </p:txBody>
-      </p:sp>
-    </p:spTree>
-  </p:cSld>
-  <p:clrMapOvr>
-    <a:masterClrMapping/>
-  </p:clrMapOvr>
-</p:sld>
-</file>
-
-<file path=ppt/slides/slide9.xml><?xml version="1.0" encoding="utf-8"?>
 <p:sld xmlns:a="http://schemas.openxmlformats.org/drawingml/2006/main" xmlns:r="http://schemas.openxmlformats.org/officeDocument/2006/relationships" xmlns:p="http://schemas.openxmlformats.org/presentationml/2006/main">
   <p:cSld>
     <p:spTree>
@@ -12469,8 +13389,8 @@
         </p:blipFill>
         <p:spPr>
           <a:xfrm>
-            <a:off x="388759" y="1297237"/>
-            <a:ext cx="8366482" cy="3094055"/>
+            <a:off x="178398" y="946928"/>
+            <a:ext cx="8787203" cy="3249644"/>
           </a:xfrm>
           <a:prstGeom prst="rect">
             <a:avLst/>
@@ -12493,62 +13413,19 @@
           <a:lstStyle/>
           <a:p>
             <a:r>
-              <a:rPr dirty="0"/>
-              <a:t>Onboarding Process </a:t>
-            </a:r>
-            <a:r>
-              <a:rPr lang="en-US" dirty="0"/>
-              <a:t>-</a:t>
-            </a:r>
-            <a:r>
-              <a:rPr dirty="0"/>
-              <a:t> Parallel Saga</a:t>
-            </a:r>
-          </a:p>
-        </p:txBody>
-      </p:sp>
-      <p:sp>
-        <p:nvSpPr>
-          <p:cNvPr id="3" name="Content Placeholder 2"/>
-          <p:cNvSpPr>
-            <a:spLocks noGrp="1"/>
-          </p:cNvSpPr>
-          <p:nvPr>
-            <p:ph sz="half" idx="1"/>
-          </p:nvPr>
-        </p:nvSpPr>
-        <p:spPr/>
-        <p:txBody>
-          <a:bodyPr wrap="square"/>
-          <a:lstStyle/>
-          <a:p>
-            <a:r>
-              <a:rPr sz="1400"/>
-              <a:t>prepareUserWorker: generates userId, PENDING link</a:t>
-            </a:r>
-          </a:p>
-          <a:p>
-            <a:r>
-              <a:rPr sz="1400"/>
-              <a:t>Camunda email connector sends confirmation</a:t>
-            </a:r>
-          </a:p>
-          <a:p>
-            <a:r>
-              <a:rPr sz="1400"/>
-              <a:t>Event-based gateway: click vs. 1-min timeout</a:t>
-            </a:r>
-          </a:p>
-          <a:p>
-            <a:r>
-              <a:rPr sz="1400"/>
-              <a:t>Parallel fan-out: userCreationWorker + portfolioCreationWorker</a:t>
-            </a:r>
-          </a:p>
-          <a:p>
-            <a:r>
-              <a:rPr sz="1400"/>
-              <a:t>Both must succeed → process completes</a:t>
+              <a:t>Onboarding</a:t>
+            </a:r>
+            <a:r>
+              <a:rPr lang="de-CH"/>
+              <a:t>: </a:t>
+            </a:r>
+            <a:r>
+              <a:rPr b="1">
+                <a:solidFill>
+                  <a:srgbClr val="00802E"/>
+                </a:solidFill>
+              </a:rPr>
+              <a:t>Parallel Saga</a:t>
             </a:r>
           </a:p>
         </p:txBody>
@@ -12589,9 +13466,342 @@
                 </a:solidFill>
               </a:rPr>
               <a:pPr algn="ctr"/>
+              <a:t>8</a:t>
+            </a:fld>
+            <a:endParaRPr lang="de-DE" sz="1200">
+              <a:solidFill>
+                <a:schemeClr val="bg1"/>
+              </a:solidFill>
+            </a:endParaRPr>
+          </a:p>
+        </p:txBody>
+      </p:sp>
+    </p:spTree>
+  </p:cSld>
+  <p:clrMapOvr>
+    <a:masterClrMapping/>
+  </p:clrMapOvr>
+</p:sld>
+</file>
+
+<file path=ppt/slides/slide9.xml><?xml version="1.0" encoding="utf-8"?>
+<p:sld xmlns:a="http://schemas.openxmlformats.org/drawingml/2006/main" xmlns:r="http://schemas.openxmlformats.org/officeDocument/2006/relationships" xmlns:p="http://schemas.openxmlformats.org/presentationml/2006/main">
+  <p:cSld>
+    <p:spTree>
+      <p:nvGrpSpPr>
+        <p:cNvPr id="1" name=""/>
+        <p:cNvGrpSpPr/>
+        <p:nvPr/>
+      </p:nvGrpSpPr>
+      <p:grpSpPr>
+        <a:xfrm>
+          <a:off x="0" y="0"/>
+          <a:ext cx="0" cy="0"/>
+          <a:chOff x="0" y="0"/>
+          <a:chExt cx="0" cy="0"/>
+        </a:xfrm>
+      </p:grpSpPr>
+      <p:sp>
+        <p:nvSpPr>
+          <p:cNvPr id="2" name="Title 1"/>
+          <p:cNvSpPr>
+            <a:spLocks noGrp="1"/>
+          </p:cNvSpPr>
+          <p:nvPr>
+            <p:ph type="title"/>
+          </p:nvPr>
+        </p:nvSpPr>
+        <p:spPr/>
+        <p:txBody>
+          <a:bodyPr/>
+          <a:lstStyle/>
+          <a:p>
+            <a:r>
+              <a:t>Onboarding</a:t>
+            </a:r>
+            <a:r>
+              <a:rPr lang="de-CH"/>
+              <a:t>: </a:t>
+            </a:r>
+            <a:r>
+              <a:rPr b="1">
+                <a:solidFill>
+                  <a:srgbClr val="00802E"/>
+                </a:solidFill>
+              </a:rPr>
+              <a:t>Compensation &amp; Flag-Driven Completion</a:t>
+            </a:r>
+          </a:p>
+        </p:txBody>
+      </p:sp>
+      <p:sp>
+        <p:nvSpPr>
+          <p:cNvPr id="3" name="Content Placeholder 2"/>
+          <p:cNvSpPr>
+            <a:spLocks noGrp="1"/>
+          </p:cNvSpPr>
+          <p:nvPr>
+            <p:ph idx="1"/>
+          </p:nvPr>
+        </p:nvSpPr>
+        <p:spPr/>
+        <p:txBody>
+          <a:bodyPr wrap="square"/>
+          <a:lstStyle/>
+          <a:p>
+            <a:r>
+              <a:rPr sz="1400" b="1">
+                <a:solidFill>
+                  <a:srgbClr val="00802E"/>
+                </a:solidFill>
+              </a:rPr>
+              <a:t>Challenge</a:t>
+            </a:r>
+            <a:r>
+              <a:rPr sz="1400"/>
+              <a:t>: </a:t>
+            </a:r>
+            <a:r>
+              <a:rPr lang="de-CH" sz="1400"/>
+              <a:t>O</a:t>
+            </a:r>
+            <a:r>
+              <a:rPr sz="1400"/>
+              <a:t>ne creation succeeds, the other fails</a:t>
+            </a:r>
+            <a:r>
+              <a:rPr lang="de-CH" sz="1400"/>
+              <a:t>. </a:t>
+            </a:r>
+            <a:r>
+              <a:rPr lang="de-CH" sz="1400" b="1"/>
+              <a:t>W</a:t>
+            </a:r>
+            <a:r>
+              <a:rPr sz="1400" b="1"/>
+              <a:t>hat now?</a:t>
+            </a:r>
+            <a:endParaRPr lang="de-CH" sz="1400" b="1"/>
+          </a:p>
+          <a:p>
+            <a:endParaRPr sz="1400"/>
+          </a:p>
+          <a:p>
+            <a:pPr marL="285750" indent="-285750">
+              <a:buFont typeface="Arial" panose="020B0604020202020204" pitchFamily="34" charset="0"/>
+              <a:buChar char="•"/>
+            </a:pPr>
+            <a:r>
+              <a:rPr sz="1400" b="1"/>
+              <a:t>Flag-driven completion</a:t>
+            </a:r>
+            <a:endParaRPr lang="en-US" b="1"/>
+          </a:p>
+          <a:p>
+            <a:pPr marL="465750" lvl="1" indent="-285750">
+              <a:buFont typeface="Arial" panose="020B0604020202020204" pitchFamily="34" charset="0"/>
+              <a:buChar char="•"/>
+            </a:pPr>
+            <a:r>
+              <a:rPr lang="en-US" sz="1200"/>
+              <a:t>Workers for the creations always complete </a:t>
+            </a:r>
+            <a:r>
+              <a:rPr lang="en-US" sz="1200" err="1"/>
+              <a:t>Zeebe</a:t>
+            </a:r>
+            <a:r>
+              <a:rPr lang="en-US" sz="1200"/>
+              <a:t> jobs, report outcome via </a:t>
+            </a:r>
+            <a:r>
+              <a:rPr lang="en-US" sz="1200" err="1"/>
+              <a:t>boolean</a:t>
+            </a:r>
+            <a:r>
+              <a:rPr lang="en-US" sz="1200"/>
+              <a:t> flags</a:t>
+            </a:r>
+          </a:p>
+          <a:p>
+            <a:pPr marL="825750" lvl="2" indent="-285750"/>
+            <a:r>
+              <a:rPr sz="1200" err="1"/>
+              <a:t>isUserCreated</a:t>
+            </a:r>
+            <a:r>
+              <a:rPr sz="1200"/>
+              <a:t> / </a:t>
+            </a:r>
+            <a:r>
+              <a:rPr sz="1200" err="1"/>
+              <a:t>isPortfolioCreated</a:t>
+            </a:r>
+            <a:r>
+              <a:rPr sz="1200"/>
+              <a:t> drive gateway branches</a:t>
+            </a:r>
+            <a:endParaRPr lang="de-CH" sz="1200"/>
+          </a:p>
+          <a:p>
+            <a:pPr marL="465750" lvl="1" indent="-285750">
+              <a:buFont typeface="Arial" panose="020B0604020202020204" pitchFamily="34" charset="0"/>
+              <a:buChar char="•"/>
+            </a:pPr>
+            <a:r>
+              <a:rPr sz="1200"/>
+              <a:t>BPMN errors would short-circuit and bypass compensation gateways</a:t>
+            </a:r>
+            <a:endParaRPr lang="de-CH" sz="1200"/>
+          </a:p>
+          <a:p>
+            <a:pPr marL="360000" lvl="2" indent="0">
+              <a:buNone/>
+            </a:pPr>
+            <a:endParaRPr sz="1200"/>
+          </a:p>
+          <a:p>
+            <a:pPr marL="285750" indent="-285750">
+              <a:buFont typeface="Arial" panose="020B0604020202020204" pitchFamily="34" charset="0"/>
+              <a:buChar char="•"/>
+            </a:pPr>
+            <a:r>
+              <a:rPr sz="1400" b="1"/>
+              <a:t>Compensation </a:t>
+            </a:r>
+            <a:endParaRPr lang="de-CH" b="1"/>
+          </a:p>
+          <a:p>
+            <a:pPr marL="465750" lvl="1" indent="-285750">
+              <a:buFont typeface="Arial" panose="020B0604020202020204" pitchFamily="34" charset="0"/>
+              <a:buChar char="•"/>
+            </a:pPr>
+            <a:r>
+              <a:rPr sz="1200"/>
+              <a:t>Exclusive gateways inspect flags</a:t>
+            </a:r>
+            <a:r>
+              <a:rPr lang="de-CH" sz="1200"/>
+              <a:t>:</a:t>
+            </a:r>
+            <a:r>
+              <a:rPr sz="1200"/>
+              <a:t> </a:t>
+            </a:r>
+            <a:r>
+              <a:rPr sz="1200">
+                <a:solidFill>
+                  <a:srgbClr val="00802E"/>
+                </a:solidFill>
+              </a:rPr>
+              <a:t>compensation handlers</a:t>
+            </a:r>
+            <a:endParaRPr lang="de-CH" sz="1200">
+              <a:solidFill>
+                <a:srgbClr val="00802E"/>
+              </a:solidFill>
+            </a:endParaRPr>
+          </a:p>
+          <a:p>
+            <a:pPr marL="465750" lvl="1" indent="-285750">
+              <a:buFont typeface="Arial" panose="020B0604020202020204" pitchFamily="34" charset="0"/>
+              <a:buChar char="•"/>
+            </a:pPr>
+            <a:r>
+              <a:rPr sz="1200"/>
+              <a:t>Delete local entity + publish compensation request for peer</a:t>
+            </a:r>
+            <a:endParaRPr lang="de-CH" sz="1200"/>
+          </a:p>
+          <a:p>
+            <a:pPr marL="465750" lvl="1" indent="-285750">
+              <a:buFont typeface="Arial" panose="020B0604020202020204" pitchFamily="34" charset="0"/>
+              <a:buChar char="•"/>
+            </a:pPr>
+            <a:r>
+              <a:rPr sz="1200"/>
+              <a:t>User/Portfolio </a:t>
+            </a:r>
+            <a:r>
+              <a:rPr sz="1200" err="1"/>
+              <a:t>CompensationRequestedEvent</a:t>
+            </a:r>
+            <a:r>
+              <a:rPr sz="1200"/>
+              <a:t> carries full payload</a:t>
+            </a:r>
+            <a:r>
+              <a:rPr lang="de-CH" sz="1200"/>
+              <a:t>: </a:t>
+            </a:r>
+            <a:r>
+              <a:rPr lang="de-CH" sz="1200">
+                <a:solidFill>
+                  <a:srgbClr val="00802E"/>
+                </a:solidFill>
+              </a:rPr>
+              <a:t>ECST</a:t>
+            </a:r>
+          </a:p>
+          <a:p>
+            <a:pPr marL="465750" lvl="1" indent="-285750">
+              <a:buFont typeface="Arial" panose="020B0604020202020204" pitchFamily="34" charset="0"/>
+              <a:buChar char="•"/>
+            </a:pPr>
+            <a:r>
+              <a:rPr sz="1200"/>
+              <a:t>Idempotent deletes </a:t>
+            </a:r>
+            <a:r>
+              <a:rPr lang="en-US" sz="1200"/>
+              <a:t>-</a:t>
+            </a:r>
+            <a:r>
+              <a:rPr sz="1200"/>
+              <a:t> safe under at-least-once delivery</a:t>
+            </a:r>
+          </a:p>
+        </p:txBody>
+      </p:sp>
+      <p:sp>
+        <p:nvSpPr>
+          <p:cNvPr id="4" name="Textfeld 3">
+            <a:extLst>
+              <a:ext uri="{FF2B5EF4-FFF2-40B4-BE49-F238E27FC236}">
+                <a16:creationId xmlns:a16="http://schemas.microsoft.com/office/drawing/2014/main" id="{2C390B98-05F1-67DB-E21C-1A9B3D890325}"/>
+              </a:ext>
+            </a:extLst>
+          </p:cNvPr>
+          <p:cNvSpPr txBox="1"/>
+          <p:nvPr/>
+        </p:nvSpPr>
+        <p:spPr>
+          <a:xfrm>
+            <a:off x="8503298" y="4702629"/>
+            <a:ext cx="360784" cy="261610"/>
+          </a:xfrm>
+          <a:prstGeom prst="rect">
+            <a:avLst/>
+          </a:prstGeom>
+          <a:noFill/>
+        </p:spPr>
+        <p:txBody>
+          <a:bodyPr wrap="square" rtlCol="0">
+            <a:spAutoFit/>
+          </a:bodyPr>
+          <a:lstStyle/>
+          <a:p>
+            <a:pPr algn="ctr"/>
+            <a:fld id="{7C7D4858-ADAF-A34F-A87D-0D5A348A4697}" type="slidenum">
+              <a:rPr lang="de-DE" sz="1100" smtClean="0">
+                <a:solidFill>
+                  <a:schemeClr val="bg1"/>
+                </a:solidFill>
+              </a:rPr>
+              <a:pPr algn="ctr"/>
               <a:t>9</a:t>
             </a:fld>
-            <a:endParaRPr lang="de-DE" sz="1200" dirty="0">
+            <a:endParaRPr lang="de-DE" sz="1200">
               <a:solidFill>
                 <a:schemeClr val="bg1"/>
               </a:solidFill>
@@ -13417,14 +14627,103 @@
 </file>
 
 <file path=customXml/item1.xml><?xml version="1.0" encoding="utf-8"?>
+<TemplafySlideTemplateConfiguration><![CDATA[{"slideVersion":1,"isValidatorEnabled":false,"isLocked":false,"elementsMetadata":[],"slideId":"637750113834125595","enableDocumentContentUpdater":true,"version":"2.0"}]]></TemplafySlideTemplateConfiguration>
+</file>
+
+<file path=customXml/item10.xml><?xml version="1.0" encoding="utf-8"?>
+<TemplafySlideFormConfiguration><![CDATA[{"formFields":[],"formDataEntries":[]}]]></TemplafySlideFormConfiguration>
+</file>
+
+<file path=customXml/item11.xml><?xml version="1.0" encoding="utf-8"?>
+<TemplafySlideTemplateConfiguration><![CDATA[{"slideVersion":1,"isValidatorEnabled":false,"isLocked":false,"elementsMetadata":[],"slideId":"637750113834253485","enableDocumentContentUpdater":true,"version":"2.0"}]]></TemplafySlideTemplateConfiguration>
+</file>
+
+<file path=customXml/item12.xml><?xml version="1.0" encoding="utf-8"?>
+<TemplafyFormConfiguration><![CDATA[{"formFields":[{"required":true,"shareValue":false,"type":"datePicker","name":"Date","label":"Datum"},{"required":false,"placeholder":"","lines":1,"shareValue":false,"type":"textBox","name":"Footer","label":"Fusszeile"},{"defaultValue":{"fixedValue":true},"shareValue":false,"type":"checkBox","name":"FooterLogo","label":"mit Logo in der Fusszeile"}],"formDataEntries":[{"name":"Date","value":"+Z5Mp3YA6oBTYCzRQ9X9ow=="},{"name":"FooterLogo","value":"iTzqZGj1P6MRGUQq8ahlhA=="}]}]]></TemplafyFormConfiguration>
+</file>
+
+<file path=customXml/item13.xml><?xml version="1.0" encoding="utf-8"?>
+<TemplafySlideTemplateConfiguration><![CDATA[{"slideVersion":1,"isValidatorEnabled":false,"isLocked":false,"elementsMetadata":[],"slideId":"637750113834122525","enableDocumentContentUpdater":true,"version":"2.0"}]]></TemplafySlideTemplateConfiguration>
+</file>
+
+<file path=customXml/item14.xml><?xml version="1.0" encoding="utf-8"?>
+<TemplafySlideTemplateConfiguration><![CDATA[{"slideVersion":1,"isValidatorEnabled":false,"isLocked":false,"elementsMetadata":[{"type":"shape","elementConfiguration":{"binding":"{{FormatDateTime(Form.Date,Translate(\"DateFormat\"),DocumentLanguage)}}","type":"text","disableUpdates":false}},{"type":"shape","elementConfiguration":{"width":"{{UserProfile.Department.REFDepartmentLogo.WidthPNGPPTFooter}}","height":"{{UserProfile.Department.REFDepartmentLogo.HeightPNGPPTFooter}}","image":"{{UserProfile.Department.REFDepartmentLogo.ImagePNG}}","visibility":"{{IfElse(Form.FooterLogo, VisibilityType.Visible,VisibilityType.Hidden)}}","type":"image","disableUpdates":false}},{"type":"shape","elementConfiguration":{"binding":"{{Form.Footer}}","type":"text","disableUpdates":false}},{"type":"shape","elementConfiguration":{"binding":"{{UserProfile.Department.DepartmentName}}","visibility":"{{IfElse(Form.FooterLogo, VisibilityType.Hidden,VisibilityType.Visible)}}","type":"text","disableUpdates":false}}],"slideId":"637750113834269210","enableDocumentContentUpdater":true,"version":"2.0"}]]></TemplafySlideTemplateConfiguration>
+</file>
+
+<file path=customXml/item15.xml><?xml version="1.0" encoding="utf-8"?>
+<?mso-contentType ?>
+<FormTemplates xmlns="http://schemas.microsoft.com/sharepoint/v3/contenttype/forms">
+  <Display>DocumentLibraryForm</Display>
+  <Edit>DocumentLibraryForm</Edit>
+  <New>DocumentLibraryForm</New>
+</FormTemplates>
+</file>
+
+<file path=customXml/item16.xml><?xml version="1.0" encoding="utf-8"?>
+<TemplafySlideFormConfiguration><![CDATA[{"formFields":[{"required":true,"shareValue":false,"type":"datePicker","name":"Date","label":"Datum"},{"required":false,"placeholder":"","lines":1,"shareValue":false,"type":"textBox","name":"Footer","label":"Fusszeile"},{"defaultValue":{"fixedValue":true},"shareValue":false,"type":"checkBox","name":"FooterLogo","label":"mit Logo in der Fusszeile"}],"formDataEntries":[]}]]></TemplafySlideFormConfiguration>
+</file>
+
+<file path=customXml/item17.xml><?xml version="1.0" encoding="utf-8"?>
+<TemplafySlideFormConfiguration><![CDATA[{"formFields":[],"formDataEntries":[]}]]></TemplafySlideFormConfiguration>
+</file>
+
+<file path=customXml/item18.xml><?xml version="1.0" encoding="utf-8"?>
+<TemplafySlideFormConfiguration><![CDATA[{"formFields":[{"required":true,"shareValue":false,"type":"datePicker","name":"Date","label":"Datum"},{"required":false,"placeholder":"","lines":1,"shareValue":false,"type":"textBox","name":"Footer","label":"Fusszeile"},{"defaultValue":{"fixedValue":true},"shareValue":false,"type":"checkBox","name":"FooterLogo","label":"mit Logo in der Fusszeile"}],"formDataEntries":[]}]]></TemplafySlideFormConfiguration>
+</file>
+
+<file path=customXml/item19.xml><?xml version="1.0" encoding="utf-8"?>
+<TemplafySlideFormConfiguration><![CDATA[{"formFields":[],"formDataEntries":[]}]]></TemplafySlideFormConfiguration>
+</file>
+
+<file path=customXml/item2.xml><?xml version="1.0" encoding="utf-8"?>
+<TemplafySlideFormConfiguration><![CDATA[{"formFields":[{"required":true,"shareValue":false,"type":"datePicker","name":"Date","label":"Datum"},{"required":false,"placeholder":"","lines":1,"shareValue":false,"type":"textBox","name":"Footer","label":"Fusszeile"},{"defaultValue":{"fixedValue":true},"shareValue":false,"type":"checkBox","name":"FooterLogo","label":"mit Logo in der Fusszeile"}],"formDataEntries":[]}]]></TemplafySlideFormConfiguration>
+</file>
+
+<file path=customXml/item20.xml><?xml version="1.0" encoding="utf-8"?>
+<TemplafySlideTemplateConfiguration><![CDATA[{"slideVersion":1,"isValidatorEnabled":false,"isLocked":false,"elementsMetadata":[{"type":"shape","elementConfiguration":{"binding":"{{FormatDateTime(Form.Date,Translate(\"DateFormat\"),DocumentLanguage)}}","type":"text","disableUpdates":false}},{"type":"shape","elementConfiguration":{"width":"{{UserProfile.Department.REFDepartmentLogo.WidthPNGPPTFooter}}","height":"{{UserProfile.Department.REFDepartmentLogo.HeightPNGPPTFooter}}","image":"{{UserProfile.Department.REFDepartmentLogo.ImagePNG}}","visibility":"{{IfElse(Form.FooterLogo, VisibilityType.Visible,VisibilityType.Hidden)}}","type":"image","disableUpdates":false}},{"type":"shape","elementConfiguration":{"binding":"{{Form.Footer}}","type":"text","disableUpdates":false}},{"type":"shape","elementConfiguration":{"binding":"{{UserProfile.Department.DepartmentName}}","visibility":"{{IfElse(Form.FooterLogo, VisibilityType.Hidden,VisibilityType.Visible)}}","type":"text","disableUpdates":false}}],"slideId":"637750113834279331","enableDocumentContentUpdater":true,"version":"2.0"}]]></TemplafySlideTemplateConfiguration>
+</file>
+
+<file path=customXml/item21.xml><?xml version="1.0" encoding="utf-8"?>
 <TemplafySlideTemplateConfiguration><![CDATA[{"slideVersion":1,"isValidatorEnabled":false,"isLocked":false,"elementsMetadata":[{"type":"shape","elementConfiguration":{"binding":"{{FormatDateTime(Form.Date,Translate(\"DateFormat\"),DocumentLanguage)}}","type":"text","disableUpdates":false}},{"type":"shape","elementConfiguration":{"width":"{{UserProfile.Department.REFDepartmentLogo.WidthPNGPPTFooter}}","height":"{{UserProfile.Department.REFDepartmentLogo.HeightPNGPPTFooter}}","image":"{{UserProfile.Department.REFDepartmentLogo.ImagePNG}}","visibility":"{{IfElse(Form.FooterLogo, VisibilityType.Visible,VisibilityType.Hidden)}}","type":"image","disableUpdates":false}},{"type":"shape","elementConfiguration":{"binding":"{{Form.Footer}}","type":"text","disableUpdates":false}},{"type":"shape","elementConfiguration":{"binding":"{{UserProfile.Department.DepartmentName}}","visibility":"{{IfElse(Form.FooterLogo, VisibilityType.Hidden,VisibilityType.Visible)}}","type":"text","disableUpdates":false}}],"slideId":"637750113834156510","enableDocumentContentUpdater":true,"version":"2.0"}]]></TemplafySlideTemplateConfiguration>
 </file>
 
-<file path=customXml/item10.xml><?xml version="1.0" encoding="utf-8"?>
-<TemplafySlideTemplateConfiguration><![CDATA[{"slideVersion":1,"isValidatorEnabled":false,"isLocked":false,"elementsMetadata":[],"slideId":"637750113834254135","enableDocumentContentUpdater":true,"version":"2.0"}]]></TemplafySlideTemplateConfiguration>
-</file>
-
-<file path=customXml/item11.xml><?xml version="1.0" encoding="utf-8"?>
+<file path=customXml/item22.xml><?xml version="1.0" encoding="utf-8"?>
+<TemplafySlideFormConfiguration><![CDATA[{"formFields":[{"required":true,"shareValue":false,"type":"datePicker","name":"Date","label":"Datum"},{"required":false,"placeholder":"","lines":1,"shareValue":false,"type":"textBox","name":"Footer","label":"Fusszeile"},{"defaultValue":{"fixedValue":true},"shareValue":false,"type":"checkBox","name":"FooterLogo","label":"mit Logo in der Fusszeile"}],"formDataEntries":[]}]]></TemplafySlideFormConfiguration>
+</file>
+
+<file path=customXml/item23.xml><?xml version="1.0" encoding="utf-8"?>
+<TemplafySlideFormConfiguration><![CDATA[{"formFields":[],"formDataEntries":[]}]]></TemplafySlideFormConfiguration>
+</file>
+
+<file path=customXml/item24.xml><?xml version="1.0" encoding="utf-8"?>
+<TemplafySlideTemplateConfiguration><![CDATA[{"slideVersion":1,"isValidatorEnabled":false,"isLocked":false,"elementsMetadata":[{"type":"shape","elementConfiguration":{"width":"{{UserProfile.Department.REFDepartmentLogo.WidthPNGPPT}}","height":"{{UserProfile.Department.REFDepartmentLogo.HeightPNGPPT}}","image":"{{UserProfile.Department.REFDepartmentLogo.ImagePNG}}","type":"image","disableUpdates":false}},{"type":"shape","elementConfiguration":{"binding":"{{UserProfile.Department.DepartmentName}} \n{{UserProfile.Department.DepartmentStreet}} {{UserProfile.Department.DepartmentStreetNumber}} \n{{UserProfile.Department.DepartmentPOBox}} {{UserProfile.Department.DepartmentCity}} \n{{UserProfile.Department.DepartmentCountry}} \n{{UserProfile.Department.DepartmentWebsite}}","type":"text","disableUpdates":false}}],"slideId":"637750113834283378","enableDocumentContentUpdater":true,"version":"2.0"}]]></TemplafySlideTemplateConfiguration>
+</file>
+
+<file path=customXml/item25.xml><?xml version="1.0" encoding="utf-8"?>
+<TemplafySlideFormConfiguration><![CDATA[{"formFields":[],"formDataEntries":[]}]]></TemplafySlideFormConfiguration>
+</file>
+
+<file path=customXml/item26.xml><?xml version="1.0" encoding="utf-8"?>
+<TemplafySlideTemplateConfiguration><![CDATA[{"slideVersion":1,"isValidatorEnabled":false,"isLocked":false,"elementsMetadata":[],"slideId":"637750113834267111","enableDocumentContentUpdater":true,"version":"2.0"}]]></TemplafySlideTemplateConfiguration>
+</file>
+
+<file path=customXml/item27.xml><?xml version="1.0" encoding="utf-8"?>
+<TemplafySlideTemplateConfiguration><![CDATA[{"slideVersion":1,"isValidatorEnabled":false,"isLocked":false,"elementsMetadata":[{"type":"shape","elementConfiguration":{"binding":"{{FormatDateTime(Form.Date,Translate(\"DateFormat\"),DocumentLanguage)}}","type":"text","disableUpdates":false}},{"type":"shape","elementConfiguration":{"width":"{{UserProfile.Department.REFDepartmentLogo.WidthPNGPPTFooter}}","height":"{{UserProfile.Department.REFDepartmentLogo.HeightPNGPPTFooter}}","image":"{{UserProfile.Department.REFDepartmentLogo.ImagePNG}}","visibility":"{{IfElse(Form.FooterLogo, VisibilityType.Visible,VisibilityType.Hidden)}}","type":"image","disableUpdates":false}},{"type":"shape","elementConfiguration":{"binding":"{{Form.Footer}}","type":"text","disableUpdates":false}},{"type":"shape","elementConfiguration":{"binding":"{{UserProfile.Department.DepartmentName}}","visibility":"{{IfElse(Form.FooterLogo, VisibilityType.Hidden,VisibilityType.Visible)}}","type":"text","disableUpdates":false}}],"slideId":"637750113834237210","enableDocumentContentUpdater":true,"version":"2.0"}]]></TemplafySlideTemplateConfiguration>
+</file>
+
+<file path=customXml/item28.xml><?xml version="1.0" encoding="utf-8"?>
+<TemplafySlideFormConfiguration><![CDATA[{"formFields":[],"formDataEntries":[]}]]></TemplafySlideFormConfiguration>
+</file>
+
+<file path=customXml/item29.xml><?xml version="1.0" encoding="utf-8"?>
+<TemplafySlideFormConfiguration><![CDATA[{"formFields":[],"formDataEntries":[]}]]></TemplafySlideFormConfiguration>
+</file>
+
+<file path=customXml/item3.xml><?xml version="1.0" encoding="utf-8"?>
+<TemplafySlideTemplateConfiguration><![CDATA[{"slideVersion":1,"isValidatorEnabled":false,"isLocked":false,"elementsMetadata":[{"type":"shape","elementConfiguration":{"binding":"{{FormatDateTime(Form.Date,Translate(\"DateFormat\"),DocumentLanguage)}}","type":"text","disableUpdates":false}},{"type":"shape","elementConfiguration":{"width":"{{UserProfile.Department.REFDepartmentLogo.WidthPNGPPTFooter}}","height":"{{UserProfile.Department.REFDepartmentLogo.HeightPNGPPTFooter}}","image":"{{UserProfile.Department.REFDepartmentLogo.ImagePNG}}","visibility":"{{IfElse(Form.FooterLogo, VisibilityType.Visible,VisibilityType.Hidden)}}","type":"image","disableUpdates":false}},{"type":"shape","elementConfiguration":{"binding":"{{Form.Footer}}","type":"text","disableUpdates":false}},{"type":"shape","elementConfiguration":{"binding":"{{UserProfile.Department.DepartmentName}}","visibility":"{{IfElse(Form.FooterLogo, VisibilityType.Hidden,VisibilityType.Visible)}}","type":"text","disableUpdates":false}}],"slideId":"637750113834249425","enableDocumentContentUpdater":true,"version":"2.0"}]]></TemplafySlideTemplateConfiguration>
+</file>
+
+<file path=customXml/item30.xml><?xml version="1.0" encoding="utf-8"?>
 <p:properties xmlns:p="http://schemas.microsoft.com/office/2006/metadata/properties" xmlns:xsi="http://www.w3.org/2001/XMLSchema-instance" xmlns:pc="http://schemas.microsoft.com/office/infopath/2007/PartnerControls">
   <documentManagement>
     <lcf76f155ced4ddcb4097134ff3c332f xmlns="07c8a24f-8b40-44ca-950f-ae5db2c4fa23">
@@ -13435,172 +14734,19 @@
 </p:properties>
 </file>
 
-<file path=customXml/item12.xml><?xml version="1.0" encoding="utf-8"?>
-<TemplafySlideTemplateConfiguration><![CDATA[{"slideVersion":1,"isValidatorEnabled":false,"isLocked":false,"elementsMetadata":[],"slideId":"637750113834120761","enableDocumentContentUpdater":true,"version":"2.0"}]]></TemplafySlideTemplateConfiguration>
-</file>
-
-<file path=customXml/item13.xml><?xml version="1.0" encoding="utf-8"?>
-<TemplafySlideTemplateConfiguration><![CDATA[{"slideVersion":1,"isValidatorEnabled":false,"isLocked":false,"elementsMetadata":[{"type":"shape","elementConfiguration":{"width":"{{UserProfile.Department.REFDepartmentLogo.WidthPNGPPT}}","height":"{{UserProfile.Department.REFDepartmentLogo.HeightPNGPPT}}","image":"{{UserProfile.Department.REFDepartmentLogo.ImagePNG}}","type":"image","disableUpdates":false}}],"slideId":"638097175473157463","enableDocumentContentUpdater":false,"version":"2.0"}]]></TemplafySlideTemplateConfiguration>
-</file>
-
-<file path=customXml/item14.xml><?xml version="1.0" encoding="utf-8"?>
-<TemplafySlideFormConfiguration><![CDATA[{"formFields":[{"required":true,"shareValue":false,"type":"datePicker","name":"Date","label":"Datum"},{"required":false,"placeholder":"","lines":1,"shareValue":false,"type":"textBox","name":"Footer","label":"Fusszeile"},{"defaultValue":{"fixedValue":true},"shareValue":false,"type":"checkBox","name":"FooterLogo","label":"mit Logo in der Fusszeile"}],"formDataEntries":[]}]]></TemplafySlideFormConfiguration>
-</file>
-
-<file path=customXml/item15.xml><?xml version="1.0" encoding="utf-8"?>
-<TemplafySlideFormConfiguration><![CDATA[{"formFields":[{"required":true,"shareValue":false,"type":"datePicker","name":"Date","label":"Datum"},{"required":false,"placeholder":"","lines":1,"shareValue":false,"type":"textBox","name":"Footer","label":"Fusszeile"},{"defaultValue":{"fixedValue":true},"shareValue":false,"type":"checkBox","name":"FooterLogo","label":"mit Logo in der Fusszeile"}],"formDataEntries":[]}]]></TemplafySlideFormConfiguration>
-</file>
-
-<file path=customXml/item16.xml><?xml version="1.0" encoding="utf-8"?>
-<TemplafySlideTemplateConfiguration><![CDATA[{"slideVersion":1,"isValidatorEnabled":false,"isLocked":false,"elementsMetadata":[{"type":"shape","elementConfiguration":{"width":"{{UserProfile.Department.REFDepartmentLogo.WidthPNGPPT}}","height":"{{UserProfile.Department.REFDepartmentLogo.HeightPNGPPT}}","image":"{{UserProfile.Department.REFDepartmentLogo.ImagePNG}}","type":"image","disableUpdates":false}}],"slideId":"637750113834107608","enableDocumentContentUpdater":true,"version":"2.0"}]]></TemplafySlideTemplateConfiguration>
-</file>
-
-<file path=customXml/item17.xml><?xml version="1.0" encoding="utf-8"?>
-<TemplafySlideTemplateConfiguration><![CDATA[{"slideVersion":1,"isValidatorEnabled":false,"isLocked":false,"elementsMetadata":[{"type":"shape","elementConfiguration":{"binding":"{{FormatDateTime(Form.Date,Translate(\"DateFormat\"),DocumentLanguage)}}","type":"text","disableUpdates":false}},{"type":"shape","elementConfiguration":{"width":"{{UserProfile.Department.REFDepartmentLogo.WidthPNGPPTFooter}}","height":"{{UserProfile.Department.REFDepartmentLogo.HeightPNGPPTFooter}}","image":"{{UserProfile.Department.REFDepartmentLogo.ImagePNG}}","visibility":"{{IfElse(Form.FooterLogo, VisibilityType.Visible,VisibilityType.Hidden)}}","type":"image","disableUpdates":false}},{"type":"shape","elementConfiguration":{"binding":"{{Form.Footer}}","type":"text","disableUpdates":false}},{"type":"shape","elementConfiguration":{"binding":"{{UserProfile.Department.DepartmentName}}","visibility":"{{IfElse(Form.FooterLogo, VisibilityType.Hidden,VisibilityType.Visible)}}","type":"text","disableUpdates":false}}],"slideId":"637750113834135648","enableDocumentContentUpdater":true,"version":"2.0"}]]></TemplafySlideTemplateConfiguration>
-</file>
-
-<file path=customXml/item18.xml><?xml version="1.0" encoding="utf-8"?>
-<TemplafyFormConfiguration><![CDATA[{"formFields":[{"required":true,"shareValue":false,"type":"datePicker","name":"Date","label":"Datum"},{"required":false,"placeholder":"","lines":1,"shareValue":false,"type":"textBox","name":"Footer","label":"Fusszeile"},{"defaultValue":{"fixedValue":true},"shareValue":false,"type":"checkBox","name":"FooterLogo","label":"mit Logo in der Fusszeile"}],"formDataEntries":[{"name":"Date","value":"+Z5Mp3YA6oBTYCzRQ9X9ow=="},{"name":"FooterLogo","value":"iTzqZGj1P6MRGUQq8ahlhA=="}]}]]></TemplafyFormConfiguration>
-</file>
-
-<file path=customXml/item19.xml><?xml version="1.0" encoding="utf-8"?>
-<TemplafySlideTemplateConfiguration><![CDATA[{"slideVersion":1,"isValidatorEnabled":false,"isLocked":false,"elementsMetadata":[],"slideId":"637750113834122525","enableDocumentContentUpdater":true,"version":"2.0"}]]></TemplafySlideTemplateConfiguration>
-</file>
-
-<file path=customXml/item2.xml><?xml version="1.0" encoding="utf-8"?>
-<TemplafySlideTemplateConfiguration><![CDATA[{"slideVersion":1,"isValidatorEnabled":false,"isLocked":false,"elementsMetadata":[{"type":"shape","elementConfiguration":{"binding":"{{FormatDateTime(Form.Date,Translate(\"DateFormat\"),DocumentLanguage)}}","type":"text","disableUpdates":false}},{"type":"shape","elementConfiguration":{"width":"{{UserProfile.Department.REFDepartmentLogo.WidthPNGPPTFooter}}","height":"{{UserProfile.Department.REFDepartmentLogo.HeightPNGPPTFooter}}","image":"{{UserProfile.Department.REFDepartmentLogo.ImagePNG}}","visibility":"{{IfElse(Form.FooterLogo, VisibilityType.Visible,VisibilityType.Hidden)}}","type":"image","disableUpdates":false}},{"type":"shape","elementConfiguration":{"binding":"{{Form.Footer}}","type":"text","disableUpdates":false}},{"type":"shape","elementConfiguration":{"binding":"{{UserProfile.Department.DepartmentName}}","visibility":"{{IfElse(Form.FooterLogo, VisibilityType.Hidden,VisibilityType.Visible)}}","type":"text","disableUpdates":false}}],"slideId":"637750113834113416","enableDocumentContentUpdater":true,"version":"2.0"}]]></TemplafySlideTemplateConfiguration>
-</file>
-
-<file path=customXml/item20.xml><?xml version="1.0" encoding="utf-8"?>
-<TemplafySlideTemplateConfiguration><![CDATA[{"slideVersion":1,"isValidatorEnabled":false,"isLocked":false,"elementsMetadata":[{"type":"shape","elementConfiguration":{"binding":"{{FormatDateTime(Form.Date,Translate(\"DateFormat\"),DocumentLanguage)}}","type":"text","disableUpdates":false}},{"type":"shape","elementConfiguration":{"width":"{{UserProfile.Department.REFDepartmentLogo.WidthPNGPPTFooter}}","height":"{{UserProfile.Department.REFDepartmentLogo.HeightPNGPPTFooter}}","image":"{{UserProfile.Department.REFDepartmentLogo.ImagePNG}}","visibility":"{{IfElse(Form.FooterLogo, VisibilityType.Visible,VisibilityType.Hidden)}}","type":"image","disableUpdates":false}},{"type":"shape","elementConfiguration":{"binding":"{{Form.Footer}}","type":"text","disableUpdates":false}},{"type":"shape","elementConfiguration":{"binding":"{{UserProfile.Department.DepartmentName}}","visibility":"{{IfElse(Form.FooterLogo, VisibilityType.Hidden,VisibilityType.Visible)}}","type":"text","disableUpdates":false}}],"slideId":"637750113834237210","enableDocumentContentUpdater":true,"version":"2.0"}]]></TemplafySlideTemplateConfiguration>
-</file>
-
-<file path=customXml/item21.xml><?xml version="1.0" encoding="utf-8"?>
+<file path=customXml/item31.xml><?xml version="1.0" encoding="utf-8"?>
+<TemplafySlideTemplateConfiguration><![CDATA[{"slideVersion":1,"isValidatorEnabled":false,"isLocked":false,"elementsMetadata":[{"type":"shape","elementConfiguration":{"binding":"{{FormatDateTime(Form.Date,Translate(\"DateFormat\"),DocumentLanguage)}}","type":"text","disableUpdates":false}},{"type":"shape","elementConfiguration":{"width":"{{UserProfile.Department.REFDepartmentLogo.WidthPNGPPTFooter}}","height":"{{UserProfile.Department.REFDepartmentLogo.HeightPNGPPTFooter}}","image":"{{UserProfile.Department.REFDepartmentLogo.ImagePNG}}","visibility":"{{IfElse(Form.FooterLogo, VisibilityType.Visible,VisibilityType.Hidden)}}","type":"image","disableUpdates":false}},{"type":"shape","elementConfiguration":{"binding":"{{Form.Footer}}","type":"text","disableUpdates":false}},{"type":"shape","elementConfiguration":{"binding":"{{UserProfile.Department.DepartmentName}}","visibility":"{{IfElse(Form.FooterLogo, VisibilityType.Hidden,VisibilityType.Visible)}}","type":"text","disableUpdates":false}}],"slideId":"637750113834231105","enableDocumentContentUpdater":true,"version":"2.0"}]]></TemplafySlideTemplateConfiguration>
+</file>
+
+<file path=customXml/item32.xml><?xml version="1.0" encoding="utf-8"?>
 <TemplafySlideFormConfiguration><![CDATA[{"formFields":[],"formDataEntries":[]}]]></TemplafySlideFormConfiguration>
 </file>
 
-<file path=customXml/item22.xml><?xml version="1.0" encoding="utf-8"?>
-<TemplafySlideFormConfiguration><![CDATA[{"formFields":[{"required":true,"shareValue":false,"type":"datePicker","name":"Date","label":"Datum"},{"required":false,"placeholder":"","lines":1,"shareValue":false,"type":"textBox","name":"Footer","label":"Fusszeile"},{"defaultValue":{"fixedValue":true},"shareValue":false,"type":"checkBox","name":"FooterLogo","label":"mit Logo in der Fusszeile"}],"formDataEntries":[]}]]></TemplafySlideFormConfiguration>
-</file>
-
-<file path=customXml/item23.xml><?xml version="1.0" encoding="utf-8"?>
-<TemplafySlideFormConfiguration><![CDATA[{"formFields":[],"formDataEntries":[]}]]></TemplafySlideFormConfiguration>
-</file>
-
-<file path=customXml/item24.xml><?xml version="1.0" encoding="utf-8"?>
-<TemplafySlideFormConfiguration><![CDATA[{"formFields":[{"required":true,"shareValue":false,"type":"datePicker","name":"Date","label":"Datum"},{"required":false,"placeholder":"","lines":1,"shareValue":false,"type":"textBox","name":"Footer","label":"Fusszeile"},{"defaultValue":{"fixedValue":true},"shareValue":false,"type":"checkBox","name":"FooterLogo","label":"mit Logo in der Fusszeile"}],"formDataEntries":[]}]]></TemplafySlideFormConfiguration>
-</file>
-
-<file path=customXml/item25.xml><?xml version="1.0" encoding="utf-8"?>
-<TemplafySlideFormConfiguration><![CDATA[{"formFields":[],"formDataEntries":[]}]]></TemplafySlideFormConfiguration>
-</file>
-
-<file path=customXml/item26.xml><?xml version="1.0" encoding="utf-8"?>
-<TemplafySlideFormConfiguration><![CDATA[{"formFields":[],"formDataEntries":[]}]]></TemplafySlideFormConfiguration>
-</file>
-
-<file path=customXml/item27.xml><?xml version="1.0" encoding="utf-8"?>
-<TemplafySlideTemplateConfiguration><![CDATA[{"slideVersion":1,"isValidatorEnabled":false,"isLocked":false,"elementsMetadata":[{"type":"shape","elementConfiguration":{"width":"{{UserProfile.Department.REFDepartmentLogo.WidthPNGPPT}}","height":"{{UserProfile.Department.REFDepartmentLogo.HeightPNGPPT}}","image":"{{UserProfile.Department.REFDepartmentLogo.ImagePNG}}","type":"image","disableUpdates":false}},{"type":"shape","elementConfiguration":{"binding":"{{UserProfile.Department.DepartmentName}} \n{{UserProfile.Department.DepartmentStreet}} {{UserProfile.Department.DepartmentStreetNumber}} \n{{UserProfile.Department.DepartmentPOBox}} {{UserProfile.Department.DepartmentCity}} \n{{UserProfile.Department.DepartmentCountry}} \n{{UserProfile.Department.DepartmentWebsite}}","type":"text","disableUpdates":false}}],"slideId":"637750113834283378","enableDocumentContentUpdater":true,"version":"2.0"}]]></TemplafySlideTemplateConfiguration>
-</file>
-
-<file path=customXml/item28.xml><?xml version="1.0" encoding="utf-8"?>
-<TemplafySlideTemplateConfiguration><![CDATA[{"slideVersion":1,"isValidatorEnabled":false,"isLocked":false,"elementsMetadata":[{"type":"shape","elementConfiguration":{"binding":"{{FormatDateTime(Form.Date,Translate(\"DateFormat\"),DocumentLanguage)}}","type":"text","disableUpdates":false}},{"type":"shape","elementConfiguration":{"width":"{{UserProfile.Department.REFDepartmentLogo.WidthPNGPPTFooter}}","height":"{{UserProfile.Department.REFDepartmentLogo.HeightPNGPPTFooter}}","image":"{{UserProfile.Department.REFDepartmentLogo.ImagePNG}}","visibility":"{{IfElse(Form.FooterLogo, VisibilityType.Visible,VisibilityType.Hidden)}}","type":"image","disableUpdates":false}},{"type":"shape","elementConfiguration":{"binding":"{{Form.Footer}}","type":"text","disableUpdates":false}},{"type":"shape","elementConfiguration":{"binding":"{{UserProfile.Department.DepartmentName}}","visibility":"{{IfElse(Form.FooterLogo, VisibilityType.Hidden,VisibilityType.Visible)}}","type":"text","disableUpdates":false}}],"slideId":"637750113834279331","enableDocumentContentUpdater":true,"version":"2.0"}]]></TemplafySlideTemplateConfiguration>
-</file>
-
-<file path=customXml/item29.xml><?xml version="1.0" encoding="utf-8"?>
-<TemplafySlideFormConfiguration><![CDATA[{"formFields":[],"formDataEntries":[]}]]></TemplafySlideFormConfiguration>
-</file>
-
-<file path=customXml/item3.xml><?xml version="1.0" encoding="utf-8"?>
-<TemplafySlideFormConfiguration><![CDATA[{"formFields":[],"formDataEntries":[]}]]></TemplafySlideFormConfiguration>
-</file>
-
-<file path=customXml/item30.xml><?xml version="1.0" encoding="utf-8"?>
-<TemplafySlideTemplateConfiguration><![CDATA[{"slideVersion":1,"isValidatorEnabled":false,"isLocked":false,"elementsMetadata":[],"slideId":"637750113834125595","enableDocumentContentUpdater":true,"version":"2.0"}]]></TemplafySlideTemplateConfiguration>
-</file>
-
-<file path=customXml/item31.xml><?xml version="1.0" encoding="utf-8"?>
-<TemplafySlideTemplateConfiguration><![CDATA[{"slideVersion":1,"isValidatorEnabled":false,"isLocked":false,"elementsMetadata":[{"type":"shape","elementConfiguration":{"width":"{{UserProfile.Department.REFDepartmentLogo.WidthPNGPPT}}","height":"{{UserProfile.Department.REFDepartmentLogo.HeightPNGPPT}}","image":"{{UserProfile.Department.REFDepartmentLogo.ImagePNG}}","type":"image","disableUpdates":false}}],"slideId":"637750113834106457","enableDocumentContentUpdater":true,"version":"2.0"}]]></TemplafySlideTemplateConfiguration>
-</file>
-
-<file path=customXml/item32.xml><?xml version="1.0" encoding="utf-8"?>
-<TemplafySlideFormConfiguration><![CDATA[{"formFields":[{"required":true,"shareValue":false,"type":"datePicker","name":"Date","label":"Datum"},{"required":false,"placeholder":"","lines":1,"shareValue":false,"type":"textBox","name":"Footer","label":"Fusszeile"},{"defaultValue":{"fixedValue":true},"shareValue":false,"type":"checkBox","name":"FooterLogo","label":"mit Logo in der Fusszeile"}],"formDataEntries":[]}]]></TemplafySlideFormConfiguration>
-</file>
-
 <file path=customXml/item33.xml><?xml version="1.0" encoding="utf-8"?>
-<TemplafySlideFormConfiguration><![CDATA[{"formFields":[{"required":true,"shareValue":false,"type":"datePicker","name":"Date","label":"Datum"},{"required":false,"placeholder":"","lines":1,"shareValue":false,"type":"textBox","name":"Footer","label":"Fusszeile"},{"defaultValue":{"fixedValue":true},"shareValue":false,"type":"checkBox","name":"FooterLogo","label":"mit Logo in der Fusszeile"}],"formDataEntries":[]}]]></TemplafySlideFormConfiguration>
+<TemplafyTemplateConfiguration><![CDATA[{"elementsMetadata":[{"type":"shape","id":"56ce75b3-422e-4bea-941a-dc00172cd73f","elementConfiguration":{"binding":"{{FormatDateTime(Form.Date,Translate(\"DateFormat\"),DocumentLanguage)}}","type":"text","disableUpdates":false}},{"type":"shape","id":"ff4a6372-22c5-4dd4-8428-3be358c8e860","elementConfiguration":{"width":"{{UserProfile.Department.REFDepartmentLogo.WidthPNGPPTFooter}}","height":"{{UserProfile.Department.REFDepartmentLogo.HeightPNGPPTFooter}}","image":"{{UserProfile.Department.REFDepartmentLogo.ImagePNG}}","visibility":"{{IfElse(Form.FooterLogo, VisibilityType.Visible,VisibilityType.Hidden)}}","type":"image","disableUpdates":false}},{"type":"shape","id":"802336ec-566b-4a3d-896e-7cccb9fe246d","elementConfiguration":{"binding":"{{Form.Footer}}","type":"text","disableUpdates":false}},{"type":"shape","id":"a2d41398-5271-4cc9-b1dd-66e099bdef04","elementConfiguration":{"binding":"{{UserProfile.Department.DepartmentName}}","visibility":"{{IfElse(Form.FooterLogo, VisibilityType.Hidden,VisibilityType.Visible)}}","type":"text","disableUpdates":false}},{"type":"shape","id":"a40dda36-18a9-40da-9166-9a47a867251f","elementConfiguration":{"width":"{{UserProfile.Department.REFDepartmentLogo.WidthPNGPPT}}","height":"{{UserProfile.Department.REFDepartmentLogo.HeightPNGPPT}}","image":"{{UserProfile.Department.REFDepartmentLogo.ImagePNG}}","type":"image","disableUpdates":false}},{"type":"shape","id":"239d4f55-1bac-4607-8b11-947c6c77cd46","elementConfiguration":{"binding":"{{UserProfile.Department.DepartmentName}} \n{{UserProfile.Department.DepartmentStreet}} {{UserProfile.Department.DepartmentStreetNumber}} \n{{UserProfile.Department.DepartmentPOBox}} {{UserProfile.Department.DepartmentCity}} \n{{UserProfile.Department.DepartmentCountry}} \n{{UserProfile.Department.DepartmentWebsite}}","type":"text","disableUpdates":false}},{"type":"shape","id":"4e7e3c8a-6e06-4468-a348-0ba7b10c4800","elementConfiguration":{"width":"{{UserProfile.Department.REFDepartmentLogo.WidthPNGPPT}}","height":"{{UserProfile.Department.REFDepartmentLogo.HeightPNGPPT}}","image":"{{UserProfile.Department.REFDepartmentLogo.ImagePNG}}","type":"image","disableUpdates":false}},{"type":"shape","id":"843f5766-31d9-4280-a669-00226bb12ba8","elementConfiguration":{"binding":"{{FormatDateTime(Form.Date,Translate(\"DateFormat\"),DocumentLanguage)}}","type":"text","disableUpdates":false}},{"type":"shape","id":"9b9e4f3c-de31-4236-8ed4-5b99f4d3cf2e","elementConfiguration":{"width":"{{UserProfile.Department.REFDepartmentLogo.WidthPNGPPTFooter}}","height":"{{UserProfile.Department.REFDepartmentLogo.HeightPNGPPTFooter}}","image":"{{UserProfile.Department.REFDepartmentLogo.ImagePNG}}","visibility":"{{IfElse(Form.FooterLogo, VisibilityType.Visible,VisibilityType.Hidden)}}","type":"image","disableUpdates":false}},{"type":"shape","id":"75162e3e-ae53-4b5e-99da-7a45748d34cc","elementConfiguration":{"binding":"{{Form.Footer}}","type":"text","disableUpdates":false}},{"type":"shape","id":"4b457ff6-1749-4ff7-9ec1-d06b95bd97c4","elementConfiguration":{"binding":"{{UserProfile.Department.DepartmentName}}","visibility":"{{IfElse(Form.FooterLogo, VisibilityType.Hidden,VisibilityType.Visible)}}","type":"text","disableUpdates":false}},{"type":"shape","id":"595e50e6-f562-4e70-8412-9b3e58d54d40","elementConfiguration":{"width":"{{UserProfile.Department.REFDepartmentLogo.WidthPNGPPT}}","height":"{{UserProfile.Department.REFDepartmentLogo.HeightPNGPPT}}","image":"{{UserProfile.Department.REFDepartmentLogo.ImagePNG}}","type":"image","disableUpdates":false}},{"type":"shape","id":"987706d0-0020-48f8-abb7-fa71e92ba907","elementConfiguration":{"binding":"{{FormatDateTime(Form.Date,Translate(\"DateFormat\"),DocumentLanguage)}}","type":"text","disableUpdates":false}},{"type":"shape","id":"18680601-61d8-4c65-b887-d43faff0f7e7","elementConfiguration":{"width":"{{UserProfile.Department.REFDepartmentLogo.WidthPNGPPT}}","height":"{{UserProfile.Department.REFDepartmentLogo.HeightPNGPPT}}","image":"{{UserProfile.Department.REFDepartmentLogo.ImagePNG}}","type":"image","disableUpdates":false}},{"type":"shape","id":"889eed5e-adc6-4545-a320-e60e7fe89049","elementConfiguration":{"binding":"{{FormatDateTime(Form.Date,Translate(\"DateFormat\"),DocumentLanguage)}}","type":"text","disableUpdates":false}},{"type":"shape","id":"3f852e2a-90cd-405b-aa63-881f2da03bb5","elementConfiguration":{"width":"{{UserProfile.Department.REFDepartmentLogo.WidthPNGPPTFooter}}","height":"{{UserProfile.Department.REFDepartmentLogo.HeightPNGPPTFooter}}","image":"{{UserProfile.Department.REFDepartmentLogo.ImagePNG}}","visibility":"{{IfElse(Form.FooterLogo, VisibilityType.Visible,VisibilityType.Hidden)}}","type":"image","disableUpdates":false}},{"type":"shape","id":"a606881e-514e-4f57-b14a-3e310a69b4b5","elementConfiguration":{"binding":"{{Form.Footer}}","type":"text","disableUpdates":false}},{"type":"shape","id":"d89fcdf5-4b31-4eed-a6ec-a34b7588e3dc","elementConfiguration":{"binding":"{{UserProfile.Department.DepartmentName}}","visibility":"{{IfElse(Form.FooterLogo, VisibilityType.Hidden,VisibilityType.Visible)}}","type":"text","disableUpdates":false}},{"type":"shape","id":"e4895852-1c5c-4754-a233-3eec028fd2a8","elementConfiguration":{"binding":"{{FormatDateTime(Form.Date,Translate(\"DateFormat\"),DocumentLanguage)}}","type":"text","disableUpdates":false}},{"type":"shape","id":"d621d8b6-cd2e-463b-982e-d95c5f8a82fb","elementConfiguration":{"width":"{{UserProfile.Department.REFDepartmentLogo.WidthPNGPPTFooter}}","height":"{{UserProfile.Department.REFDepartmentLogo.HeightPNGPPTFooter}}","image":"{{UserProfile.Department.REFDepartmentLogo.ImagePNG}}","visibility":"{{IfElse(Form.FooterLogo, VisibilityType.Visible,VisibilityType.Hidden)}}","type":"image","disableUpdates":false}},{"type":"shape","id":"65b937f8-b6ed-482d-9fcb-89e2ad98182a","elementConfiguration":{"binding":"{{Form.Footer}}","type":"text","disableUpdates":false}},{"type":"shape","id":"8e41931c-7f95-42d4-bfa3-9c5f04293069","elementConfiguration":{"binding":"{{UserProfile.Department.DepartmentName}}","visibility":"{{IfElse(Form.FooterLogo, VisibilityType.Hidden,VisibilityType.Visible)}}","type":"text","disableUpdates":false}},{"type":"shape","id":"313b8357-6b18-490c-9533-a6c0ee071962","elementConfiguration":{"binding":"{{FormatDateTime(Form.Date,Translate(\"DateFormat\"),DocumentLanguage)}}","type":"text","disableUpdates":false}},{"type":"shape","id":"69582c92-e5c7-4749-97ef-47cc4b58fa8b","elementConfiguration":{"binding":"{{FormatDateTime(Form.Date,Translate(\"DateFormat\"),DocumentLanguage)}}","type":"text","disableUpdates":false}},{"type":"shape","id":"4ee707e9-0b9f-42e6-bfac-8cfa418e9d62","elementConfiguration":{"binding":"{{Form.Footer}}","type":"text","disableUpdates":false}},{"type":"shape","id":"b710521b-d63f-429f-a075-a52a6cb7c897","elementConfiguration":{"width":"{{UserProfile.Department.REFDepartmentLogo.WidthPNGPPTFooter}}","height":"{{UserProfile.Department.REFDepartmentLogo.HeightPNGPPTFooter}}","image":"{{UserProfile.Department.REFDepartmentLogo.ImagePNG}}","visibility":"{{IfElse(Form.FooterLogo, VisibilityType.Visible,VisibilityType.Hidden)}}","type":"image","disableUpdates":false}},{"type":"shape","id":"4c8a9ee4-f540-4aa0-9380-f692b4e2dcc6","elementConfiguration":{"binding":"{{UserProfile.Department.DepartmentName}}","visibility":"{{IfElse(Form.FooterLogo, VisibilityType.Hidden,VisibilityType.Visible)}}","type":"text","disableUpdates":false}},{"type":"shape","id":"9c2bec1f-485e-44d6-987c-4c2a62826230","elementConfiguration":{"binding":"{{FormatDateTime(Form.Date,Translate(\"DateFormat\"),DocumentLanguage)}}","type":"text","disableUpdates":false}},{"type":"shape","id":"965f1849-534b-4cf0-ad65-b946ad9126d8","elementConfiguration":{"width":"{{UserProfile.Department.REFDepartmentLogo.WidthPNGPPTFooter}}","height":"{{UserProfile.Department.REFDepartmentLogo.HeightPNGPPTFooter}}","image":"{{UserProfile.Department.REFDepartmentLogo.ImagePNG}}","visibility":"{{IfElse(Form.FooterLogo, VisibilityType.Visible,VisibilityType.Hidden)}}","type":"image","disableUpdates":false}},{"type":"shape","id":"73b120c8-aa6c-4644-86bc-360261a349b9","elementConfiguration":{"binding":"{{Form.Footer}}","type":"text","disableUpdates":false}},{"type":"shape","id":"297fab75-6aaa-4b1a-95bb-193250870530","elementConfiguration":{"binding":"{{UserProfile.Department.DepartmentName}}","visibility":"{{IfElse(Form.FooterLogo, VisibilityType.Hidden,VisibilityType.Visible)}}","type":"text","disableUpdates":false}}],"transformationConfigurations":[{"language":"{{UserProfile.DocumentLanguage.Language}}","disableUpdates":false,"type":"proofingLanguage"},{"propertyName":"creator","propertyValue":"{{UserProfile.FirstName}} {{UserProfile.LastName}}","disableUpdates":false,"type":"documentProperty"},{"propertyName":"title","propertyValue":"Presentation - University of St.Gallen","disableUpdates":false,"type":"documentProperty"}],"templateName":"UNISG Präsentation","templateDescription":"","enableDocumentContentUpdater":true,"version":"2.0"}]]></TemplafyTemplateConfiguration>
 </file>
 
 <file path=customXml/item34.xml><?xml version="1.0" encoding="utf-8"?>
-<TemplafySlideFormConfiguration><![CDATA[{"formFields":[],"formDataEntries":[]}]]></TemplafySlideFormConfiguration>
-</file>
-
-<file path=customXml/item35.xml><?xml version="1.0" encoding="utf-8"?>
-<TemplafySlideFormConfiguration><![CDATA[{"formFields":[{"required":true,"shareValue":false,"type":"datePicker","name":"Date","label":"Datum"},{"required":false,"placeholder":"","lines":1,"shareValue":false,"type":"textBox","name":"Footer","label":"Fusszeile"},{"defaultValue":{"fixedValue":true},"shareValue":false,"type":"checkBox","name":"FooterLogo","label":"mit Logo in der Fusszeile"}],"formDataEntries":[]}]]></TemplafySlideFormConfiguration>
-</file>
-
-<file path=customXml/item36.xml><?xml version="1.0" encoding="utf-8"?>
-<TemplafySlideFormConfiguration><![CDATA[{"formFields":[{"required":true,"shareValue":false,"type":"datePicker","name":"Date","label":"Datum"},{"required":false,"placeholder":"","lines":1,"shareValue":false,"type":"textBox","name":"Footer","label":"Fusszeile"},{"defaultValue":{"fixedValue":true},"shareValue":false,"type":"checkBox","name":"FooterLogo","label":"mit Logo in der Fusszeile"}],"formDataEntries":[]}]]></TemplafySlideFormConfiguration>
-</file>
-
-<file path=customXml/item37.xml><?xml version="1.0" encoding="utf-8"?>
-<TemplafySlideTemplateConfiguration><![CDATA[{"slideVersion":1,"isValidatorEnabled":false,"isLocked":false,"elementsMetadata":[{"type":"shape","elementConfiguration":{"binding":"{{FormatDateTime(Form.Date,Translate(\"DateFormat\"),DocumentLanguage)}}","type":"text","disableUpdates":false}},{"type":"shape","elementConfiguration":{"binding":"{{Form.Footer}}","type":"text","disableUpdates":false}},{"type":"shape","elementConfiguration":{"width":"{{UserProfile.Department.REFDepartmentLogo.WidthPNGPPTFooter}}","height":"{{UserProfile.Department.REFDepartmentLogo.HeightPNGPPTFooter}}","image":"{{UserProfile.Department.REFDepartmentLogo.ImagePNG}}","visibility":"{{IfElse(Form.FooterLogo, VisibilityType.Visible,VisibilityType.Hidden)}}","type":"image","disableUpdates":false}},{"type":"shape","elementConfiguration":{"binding":"{{UserProfile.Department.DepartmentName}}","visibility":"{{IfElse(Form.FooterLogo, VisibilityType.Hidden,VisibilityType.Visible)}}","type":"text","disableUpdates":false}}],"slideId":"637750113834107890","enableDocumentContentUpdater":true,"version":"2.0"}]]></TemplafySlideTemplateConfiguration>
-</file>
-
-<file path=customXml/item38.xml><?xml version="1.0" encoding="utf-8"?>
-<TemplafySlideTemplateConfiguration><![CDATA[{"slideVersion":1,"isValidatorEnabled":false,"isLocked":false,"elementsMetadata":[{"type":"shape","elementConfiguration":{"binding":"{{FormatDateTime(Form.Date,Translate(\"DateFormat\"),DocumentLanguage)}}","type":"text","disableUpdates":false}},{"type":"shape","elementConfiguration":{"width":"{{UserProfile.Department.REFDepartmentLogo.WidthPNGPPTFooter}}","height":"{{UserProfile.Department.REFDepartmentLogo.HeightPNGPPTFooter}}","image":"{{UserProfile.Department.REFDepartmentLogo.ImagePNG}}","visibility":"{{IfElse(Form.FooterLogo, VisibilityType.Visible,VisibilityType.Hidden)}}","type":"image","disableUpdates":false}},{"type":"shape","elementConfiguration":{"binding":"{{Form.Footer}}","type":"text","disableUpdates":false}},{"type":"shape","elementConfiguration":{"binding":"{{UserProfile.Department.DepartmentName}}","visibility":"{{IfElse(Form.FooterLogo, VisibilityType.Hidden,VisibilityType.Visible)}}","type":"text","disableUpdates":false}}],"slideId":"637750113834231105","enableDocumentContentUpdater":true,"version":"2.0"}]]></TemplafySlideTemplateConfiguration>
-</file>
-
-<file path=customXml/item39.xml><?xml version="1.0" encoding="utf-8"?>
-<TemplafySlideFormConfiguration><![CDATA[{"formFields":[{"required":true,"shareValue":false,"type":"datePicker","name":"Date","label":"Datum"},{"required":false,"placeholder":"","lines":1,"shareValue":false,"type":"textBox","name":"Footer","label":"Fusszeile"},{"defaultValue":{"fixedValue":true},"shareValue":false,"type":"checkBox","name":"FooterLogo","label":"mit Logo in der Fusszeile"}],"formDataEntries":[]}]]></TemplafySlideFormConfiguration>
-</file>
-
-<file path=customXml/item4.xml><?xml version="1.0" encoding="utf-8"?>
-<TemplafySlideTemplateConfiguration><![CDATA[{"slideVersion":1,"isValidatorEnabled":false,"isLocked":false,"elementsMetadata":[{"type":"shape","elementConfiguration":{"width":"{{UserProfile.Department.REFDepartmentLogo.WidthPNGPPT}}","height":"{{UserProfile.Department.REFDepartmentLogo.HeightPNGPPT}}","image":"{{UserProfile.Department.REFDepartmentLogo.ImagePNG}}","type":"image","disableUpdates":false}}],"slideId":"637750113834107008","enableDocumentContentUpdater":true,"version":"2.0"}]]></TemplafySlideTemplateConfiguration>
-</file>
-
-<file path=customXml/item40.xml><?xml version="1.0" encoding="utf-8"?>
-<TemplafySlideTemplateConfiguration><![CDATA[{"slideVersion":1,"isValidatorEnabled":false,"isLocked":false,"elementsMetadata":[{"type":"shape","elementConfiguration":{"binding":"{{FormatDateTime(Form.Date,Translate(\"DateFormat\"),DocumentLanguage)}}","type":"text","disableUpdates":false}},{"type":"shape","elementConfiguration":{"width":"{{UserProfile.Department.REFDepartmentLogo.WidthPNGPPTFooter}}","height":"{{UserProfile.Department.REFDepartmentLogo.HeightPNGPPTFooter}}","image":"{{UserProfile.Department.REFDepartmentLogo.ImagePNG}}","visibility":"{{IfElse(Form.FooterLogo, VisibilityType.Visible,VisibilityType.Hidden)}}","type":"image","disableUpdates":false}},{"type":"shape","elementConfiguration":{"binding":"{{Form.Footer}}","type":"text","disableUpdates":false}},{"type":"shape","elementConfiguration":{"binding":"{{UserProfile.Department.DepartmentName}}","visibility":"{{IfElse(Form.FooterLogo, VisibilityType.Hidden,VisibilityType.Visible)}}","type":"text","disableUpdates":false}}],"slideId":"637750113834249425","enableDocumentContentUpdater":true,"version":"2.0"}]]></TemplafySlideTemplateConfiguration>
-</file>
-
-<file path=customXml/item41.xml><?xml version="1.0" encoding="utf-8"?>
-<TemplafySlideTemplateConfiguration><![CDATA[{"slideVersion":1,"isValidatorEnabled":false,"isLocked":false,"elementsMetadata":[{"type":"shape","elementConfiguration":{"binding":"{{FormatDateTime(Form.Date,Translate(\"DateFormat\"),DocumentLanguage)}}","type":"text","disableUpdates":false}},{"type":"shape","elementConfiguration":{"width":"{{UserProfile.Department.REFDepartmentLogo.WidthPNGPPTFooter}}","height":"{{UserProfile.Department.REFDepartmentLogo.HeightPNGPPTFooter}}","image":"{{UserProfile.Department.REFDepartmentLogo.ImagePNG}}","visibility":"{{IfElse(Form.FooterLogo, VisibilityType.Visible,VisibilityType.Hidden)}}","type":"image","disableUpdates":false}},{"type":"shape","elementConfiguration":{"binding":"{{Form.Footer}}","type":"text","disableUpdates":false}},{"type":"shape","elementConfiguration":{"binding":"{{UserProfile.Department.DepartmentName}}","visibility":"{{IfElse(Form.FooterLogo, VisibilityType.Hidden,VisibilityType.Visible)}}","type":"text","disableUpdates":false}}],"slideId":"637750113834257356","enableDocumentContentUpdater":true,"version":"2.0"}]]></TemplafySlideTemplateConfiguration>
-</file>
-
-<file path=customXml/item42.xml><?xml version="1.0" encoding="utf-8"?>
-<TemplafySlideTemplateConfiguration><![CDATA[{"slideVersion":1,"isValidatorEnabled":false,"isLocked":false,"elementsMetadata":[],"slideId":"637750113834130535","enableDocumentContentUpdater":true,"version":"2.0"}]]></TemplafySlideTemplateConfiguration>
-</file>
-
-<file path=customXml/item43.xml><?xml version="1.0" encoding="utf-8"?>
-<TemplafySlideFormConfiguration><![CDATA[{"formFields":[],"formDataEntries":[]}]]></TemplafySlideFormConfiguration>
-</file>
-
-<file path=customXml/item44.xml><?xml version="1.0" encoding="utf-8"?>
-<TemplafySlideFormConfiguration><![CDATA[{"formFields":[],"formDataEntries":[]}]]></TemplafySlideFormConfiguration>
-</file>
-
-<file path=customXml/item45.xml><?xml version="1.0" encoding="utf-8"?>
-<TemplafySlideFormConfiguration><![CDATA[{"formFields":[{"required":true,"shareValue":false,"type":"datePicker","name":"Date","label":"Datum"},{"required":false,"placeholder":"","lines":1,"shareValue":false,"type":"textBox","name":"Footer","label":"Fusszeile"},{"defaultValue":{"fixedValue":true},"shareValue":false,"type":"checkBox","name":"FooterLogo","label":"mit Logo in der Fusszeile"}],"formDataEntries":[]}]]></TemplafySlideFormConfiguration>
-</file>
-
-<file path=customXml/item46.xml><?xml version="1.0" encoding="utf-8"?>
-<TemplafySlideTemplateConfiguration><![CDATA[{"slideVersion":1,"isValidatorEnabled":false,"isLocked":false,"elementsMetadata":[],"slideId":"637750113834253485","enableDocumentContentUpdater":true,"version":"2.0"}]]></TemplafySlideTemplateConfiguration>
-</file>
-
-<file path=customXml/item47.xml><?xml version="1.0" encoding="utf-8"?>
-<?mso-contentType ?>
-<FormTemplates xmlns="http://schemas.microsoft.com/sharepoint/v3/contenttype/forms">
-  <Display>DocumentLibraryForm</Display>
-  <Edit>DocumentLibraryForm</Edit>
-  <New>DocumentLibraryForm</New>
-</FormTemplates>
-</file>
-
-<file path=customXml/item48.xml><?xml version="1.0" encoding="utf-8"?>
-<TemplafySlideFormConfiguration><![CDATA[{"formFields":[{"required":true,"shareValue":false,"type":"datePicker","name":"Date","label":"Datum"},{"required":false,"placeholder":"","lines":1,"shareValue":false,"type":"textBox","name":"Footer","label":"Fusszeile"},{"defaultValue":{"fixedValue":true},"shareValue":false,"type":"checkBox","name":"FooterLogo","label":"mit Logo in der Fusszeile"}],"formDataEntries":[]}]]></TemplafySlideFormConfiguration>
-</file>
-
-<file path=customXml/item49.xml><?xml version="1.0" encoding="utf-8"?>
 <ct:contentTypeSchema xmlns:ct="http://schemas.microsoft.com/office/2006/metadata/contentType" xmlns:ma="http://schemas.microsoft.com/office/2006/metadata/properties/metaAttributes" ct:_="" ma:_="" ma:contentTypeName="Document" ma:contentTypeID="0x01010034C2EED3AEDAB24AB48AF05A7A255DF4" ma:contentTypeVersion="21" ma:contentTypeDescription="Create a new document." ma:contentTypeScope="" ma:versionID="274d9017fadbcc8b67afbe4b22a55600">
   <xsd:schema xmlns:xsd="http://www.w3.org/2001/XMLSchema" xmlns:xs="http://www.w3.org/2001/XMLSchema" xmlns:p="http://schemas.microsoft.com/office/2006/metadata/properties" xmlns:ns2="07c8a24f-8b40-44ca-950f-ae5db2c4fa23" xmlns:ns3="71d337dc-809a-4269-a690-d6cd31b4acd0" targetNamespace="http://schemas.microsoft.com/office/2006/metadata/properties" ma:root="true" ma:fieldsID="0b58614a3de855f8a451fa93eb2e43b4" ns2:_="" ns3:_="">
     <xsd:import namespace="07c8a24f-8b40-44ca-950f-ae5db2c4fa23"/>
@@ -13849,308 +14995,151 @@
 </ct:contentTypeSchema>
 </file>
 
+<file path=customXml/item35.xml><?xml version="1.0" encoding="utf-8"?>
+<TemplafySlideFormConfiguration><![CDATA[{"formFields":[{"required":true,"shareValue":false,"type":"datePicker","name":"Date","label":"Datum"},{"required":false,"placeholder":"","lines":1,"shareValue":false,"type":"textBox","name":"Footer","label":"Fusszeile"},{"defaultValue":{"fixedValue":true},"shareValue":false,"type":"checkBox","name":"FooterLogo","label":"mit Logo in der Fusszeile"}],"formDataEntries":[]}]]></TemplafySlideFormConfiguration>
+</file>
+
+<file path=customXml/item36.xml><?xml version="1.0" encoding="utf-8"?>
+<TemplafySlideTemplateConfiguration><![CDATA[{"slideVersion":1,"isValidatorEnabled":false,"isLocked":false,"elementsMetadata":[{"type":"shape","elementConfiguration":{"binding":"{{FormatDateTime(Form.Date,Translate(\"DateFormat\"),DocumentLanguage)}}","type":"text","disableUpdates":false}},{"type":"shape","elementConfiguration":{"width":"{{UserProfile.Department.REFDepartmentLogo.WidthPNGPPTFooter}}","height":"{{UserProfile.Department.REFDepartmentLogo.HeightPNGPPTFooter}}","image":"{{UserProfile.Department.REFDepartmentLogo.ImagePNG}}","visibility":"{{IfElse(Form.FooterLogo, VisibilityType.Visible,VisibilityType.Hidden)}}","type":"image","disableUpdates":false}},{"type":"shape","elementConfiguration":{"binding":"{{Form.Footer}}","type":"text","disableUpdates":false}},{"type":"shape","elementConfiguration":{"binding":"{{UserProfile.Department.DepartmentName}}","visibility":"{{IfElse(Form.FooterLogo, VisibilityType.Hidden,VisibilityType.Visible)}}","type":"text","disableUpdates":false}}],"slideId":"637750113834195832","enableDocumentContentUpdater":true,"version":"2.0"}]]></TemplafySlideTemplateConfiguration>
+</file>
+
+<file path=customXml/item37.xml><?xml version="1.0" encoding="utf-8"?>
+<TemplafySlideTemplateConfiguration><![CDATA[{"slideVersion":1,"isValidatorEnabled":false,"isLocked":false,"elementsMetadata":[{"type":"shape","elementConfiguration":{"binding":"{{FormatDateTime(Form.Date,Translate(\"DateFormat\"),DocumentLanguage)}}","type":"text","disableUpdates":false}},{"type":"shape","elementConfiguration":{"binding":"{{Form.Footer}}","type":"text","disableUpdates":false}},{"type":"shape","elementConfiguration":{"width":"{{UserProfile.Department.REFDepartmentLogo.WidthPNGPPTFooter}}","height":"{{UserProfile.Department.REFDepartmentLogo.HeightPNGPPTFooter}}","image":"{{UserProfile.Department.REFDepartmentLogo.ImagePNG}}","visibility":"{{IfElse(Form.FooterLogo, VisibilityType.Visible,VisibilityType.Hidden)}}","type":"image","disableUpdates":false}},{"type":"shape","elementConfiguration":{"binding":"{{UserProfile.Department.DepartmentName}}","visibility":"{{IfElse(Form.FooterLogo, VisibilityType.Hidden,VisibilityType.Visible)}}","type":"text","disableUpdates":false}}],"slideId":"637750113834107890","enableDocumentContentUpdater":true,"version":"2.0"}]]></TemplafySlideTemplateConfiguration>
+</file>
+
+<file path=customXml/item38.xml><?xml version="1.0" encoding="utf-8"?>
+<TemplafySlideTemplateConfiguration><![CDATA[{"slideVersion":1,"isValidatorEnabled":false,"isLocked":false,"elementsMetadata":[],"slideId":"637750113834120761","enableDocumentContentUpdater":true,"version":"2.0"}]]></TemplafySlideTemplateConfiguration>
+</file>
+
+<file path=customXml/item39.xml><?xml version="1.0" encoding="utf-8"?>
+<TemplafySlideFormConfiguration><![CDATA[{"formFields":[{"required":true,"shareValue":false,"type":"datePicker","name":"Date","label":"Datum"},{"required":false,"placeholder":"","lines":1,"shareValue":false,"type":"textBox","name":"Footer","label":"Fusszeile"},{"defaultValue":{"fixedValue":true},"shareValue":false,"type":"checkBox","name":"FooterLogo","label":"mit Logo in der Fusszeile"}],"formDataEntries":[]}]]></TemplafySlideFormConfiguration>
+</file>
+
+<file path=customXml/item4.xml><?xml version="1.0" encoding="utf-8"?>
+<TemplafySlideFormConfiguration><![CDATA[{"formFields":[{"required":true,"shareValue":false,"type":"datePicker","name":"Date","label":"Datum"},{"required":false,"placeholder":"","lines":1,"shareValue":false,"type":"textBox","name":"Footer","label":"Fusszeile"},{"defaultValue":{"fixedValue":true},"shareValue":false,"type":"checkBox","name":"FooterLogo","label":"mit Logo in der Fusszeile"}],"formDataEntries":[]}]]></TemplafySlideFormConfiguration>
+</file>
+
+<file path=customXml/item40.xml><?xml version="1.0" encoding="utf-8"?>
+<TemplafySlideTemplateConfiguration><![CDATA[{"slideVersion":1,"isValidatorEnabled":false,"isLocked":false,"elementsMetadata":[{"type":"shape","elementConfiguration":{"width":"{{UserProfile.Department.REFDepartmentLogo.WidthPNGPPT}}","height":"{{UserProfile.Department.REFDepartmentLogo.HeightPNGPPT}}","image":"{{UserProfile.Department.REFDepartmentLogo.ImagePNG}}","type":"image","disableUpdates":false}}],"slideId":"637750113834106457","enableDocumentContentUpdater":true,"version":"2.0"}]]></TemplafySlideTemplateConfiguration>
+</file>
+
+<file path=customXml/item41.xml><?xml version="1.0" encoding="utf-8"?>
+<TemplafySlideFormConfiguration><![CDATA[{"formFields":[{"required":true,"shareValue":false,"type":"datePicker","name":"Date","label":"Datum"},{"required":false,"placeholder":"","lines":1,"shareValue":false,"type":"textBox","name":"Footer","label":"Fusszeile"},{"defaultValue":{"fixedValue":true},"shareValue":false,"type":"checkBox","name":"FooterLogo","label":"mit Logo in der Fusszeile"}],"formDataEntries":[]}]]></TemplafySlideFormConfiguration>
+</file>
+
+<file path=customXml/item42.xml><?xml version="1.0" encoding="utf-8"?>
+<TemplafySlideFormConfiguration><![CDATA[{"formFields":[],"formDataEntries":[]}]]></TemplafySlideFormConfiguration>
+</file>
+
+<file path=customXml/item43.xml><?xml version="1.0" encoding="utf-8"?>
+<TemplafySlideFormConfiguration><![CDATA[{"formFields":[{"required":true,"shareValue":false,"type":"datePicker","name":"Date","label":"Datum"},{"required":false,"placeholder":"","lines":1,"shareValue":false,"type":"textBox","name":"Footer","label":"Fusszeile"},{"defaultValue":{"fixedValue":true},"shareValue":false,"type":"checkBox","name":"FooterLogo","label":"mit Logo in der Fusszeile"}],"formDataEntries":[]}]]></TemplafySlideFormConfiguration>
+</file>
+
+<file path=customXml/item44.xml><?xml version="1.0" encoding="utf-8"?>
+<TemplafySlideFormConfiguration><![CDATA[{"formFields":[],"formDataEntries":[]}]]></TemplafySlideFormConfiguration>
+</file>
+
+<file path=customXml/item45.xml><?xml version="1.0" encoding="utf-8"?>
+<TemplafySlideFormConfiguration><![CDATA[{"formFields":[{"required":true,"shareValue":false,"type":"datePicker","name":"Date","label":"Datum"},{"required":false,"placeholder":"","lines":1,"shareValue":false,"type":"textBox","name":"Footer","label":"Fusszeile"},{"defaultValue":{"fixedValue":true},"shareValue":false,"type":"checkBox","name":"FooterLogo","label":"mit Logo in der Fusszeile"}],"formDataEntries":[]}]]></TemplafySlideFormConfiguration>
+</file>
+
+<file path=customXml/item46.xml><?xml version="1.0" encoding="utf-8"?>
+<TemplafySlideFormConfiguration><![CDATA[{"formFields":[{"required":true,"shareValue":false,"type":"datePicker","name":"Date","label":"Datum"},{"required":false,"placeholder":"","lines":1,"shareValue":false,"type":"textBox","name":"Footer","label":"Fusszeile"},{"defaultValue":{"fixedValue":true},"shareValue":false,"type":"checkBox","name":"FooterLogo","label":"mit Logo in der Fusszeile"}],"formDataEntries":[]}]]></TemplafySlideFormConfiguration>
+</file>
+
+<file path=customXml/item47.xml><?xml version="1.0" encoding="utf-8"?>
+<TemplafySlideTemplateConfiguration><![CDATA[{"slideVersion":1,"isValidatorEnabled":false,"isLocked":false,"elementsMetadata":[{"type":"shape","elementConfiguration":{"binding":"{{FormatDateTime(Form.Date,Translate(\"DateFormat\"),DocumentLanguage)}}","type":"text","disableUpdates":false}},{"type":"shape","elementConfiguration":{"width":"{{UserProfile.Department.REFDepartmentLogo.WidthPNGPPTFooter}}","height":"{{UserProfile.Department.REFDepartmentLogo.HeightPNGPPTFooter}}","image":"{{UserProfile.Department.REFDepartmentLogo.ImagePNG}}","visibility":"{{IfElse(Form.FooterLogo, VisibilityType.Visible,VisibilityType.Hidden)}}","type":"image","disableUpdates":false}},{"type":"shape","elementConfiguration":{"binding":"{{Form.Footer}}","type":"text","disableUpdates":false}},{"type":"shape","elementConfiguration":{"binding":"{{UserProfile.Department.DepartmentName}}","visibility":"{{IfElse(Form.FooterLogo, VisibilityType.Hidden,VisibilityType.Visible)}}","type":"text","disableUpdates":false}}],"slideId":"637750113834264450","enableDocumentContentUpdater":true,"version":"2.0"}]]></TemplafySlideTemplateConfiguration>
+</file>
+
+<file path=customXml/item48.xml><?xml version="1.0" encoding="utf-8"?>
+<TemplafySlideTemplateConfiguration><![CDATA[{"slideVersion":1,"isValidatorEnabled":false,"isLocked":false,"elementsMetadata":[{"type":"shape","elementConfiguration":{"binding":"{{FormatDateTime(Form.Date,Translate(\"DateFormat\"),DocumentLanguage)}}","type":"text","disableUpdates":false}},{"type":"shape","elementConfiguration":{"width":"{{UserProfile.Department.REFDepartmentLogo.WidthPNGPPTFooter}}","height":"{{UserProfile.Department.REFDepartmentLogo.HeightPNGPPTFooter}}","image":"{{UserProfile.Department.REFDepartmentLogo.ImagePNG}}","visibility":"{{IfElse(Form.FooterLogo, VisibilityType.Visible,VisibilityType.Hidden)}}","type":"image","disableUpdates":false}},{"type":"shape","elementConfiguration":{"binding":"{{Form.Footer}}","type":"text","disableUpdates":false}},{"type":"shape","elementConfiguration":{"binding":"{{UserProfile.Department.DepartmentName}}","visibility":"{{IfElse(Form.FooterLogo, VisibilityType.Hidden,VisibilityType.Visible)}}","type":"text","disableUpdates":false}}],"slideId":"637750113834135648","enableDocumentContentUpdater":true,"version":"2.0"}]]></TemplafySlideTemplateConfiguration>
+</file>
+
+<file path=customXml/item49.xml><?xml version="1.0" encoding="utf-8"?>
+<TemplafySlideTemplateConfiguration><![CDATA[{"slideVersion":1,"isValidatorEnabled":false,"isLocked":false,"elementsMetadata":[],"slideId":"637750113834254135","enableDocumentContentUpdater":true,"version":"2.0"}]]></TemplafySlideTemplateConfiguration>
+</file>
+
 <file path=customXml/item5.xml><?xml version="1.0" encoding="utf-8"?>
+<TemplafySlideTemplateConfiguration><![CDATA[{"slideVersion":1,"isValidatorEnabled":false,"isLocked":false,"elementsMetadata":[{"type":"shape","elementConfiguration":{"width":"{{UserProfile.Department.REFDepartmentLogo.WidthPNGPPT}}","height":"{{UserProfile.Department.REFDepartmentLogo.HeightPNGPPT}}","image":"{{UserProfile.Department.REFDepartmentLogo.ImagePNG}}","type":"image","disableUpdates":false}}],"slideId":"638097175473157463","enableDocumentContentUpdater":false,"version":"2.0"}]]></TemplafySlideTemplateConfiguration>
+</file>
+
+<file path=customXml/item50.xml><?xml version="1.0" encoding="utf-8"?>
+<TemplafySlideFormConfiguration><![CDATA[{"formFields":[{"required":true,"shareValue":false,"type":"datePicker","name":"Date","label":"Datum"},{"required":false,"placeholder":"","lines":1,"shareValue":false,"type":"textBox","name":"Footer","label":"Fusszeile"},{"defaultValue":{"fixedValue":true},"shareValue":false,"type":"checkBox","name":"FooterLogo","label":"mit Logo in der Fusszeile"}],"formDataEntries":[]}]]></TemplafySlideFormConfiguration>
+</file>
+
+<file path=customXml/item51.xml><?xml version="1.0" encoding="utf-8"?>
+<TemplafySlideTemplateConfiguration><![CDATA[{"slideVersion":1,"isValidatorEnabled":false,"isLocked":false,"elementsMetadata":[{"type":"shape","elementConfiguration":{"binding":"{{FormatDateTime(Form.Date,Translate(\"DateFormat\"),DocumentLanguage)}}","type":"text","disableUpdates":false}},{"type":"shape","elementConfiguration":{"width":"{{UserProfile.Department.REFDepartmentLogo.WidthPNGPPTFooter}}","height":"{{UserProfile.Department.REFDepartmentLogo.HeightPNGPPTFooter}}","image":"{{UserProfile.Department.REFDepartmentLogo.ImagePNG}}","visibility":"{{IfElse(Form.FooterLogo, VisibilityType.Visible,VisibilityType.Hidden)}}","type":"image","disableUpdates":false}},{"type":"shape","elementConfiguration":{"binding":"{{Form.Footer}}","type":"text","disableUpdates":false}},{"type":"shape","elementConfiguration":{"binding":"{{UserProfile.Department.DepartmentName}}","visibility":"{{IfElse(Form.FooterLogo, VisibilityType.Hidden,VisibilityType.Visible)}}","type":"text","disableUpdates":false}}],"slideId":"637750113834257356","enableDocumentContentUpdater":true,"version":"2.0"}]]></TemplafySlideTemplateConfiguration>
+</file>
+
+<file path=customXml/item52.xml><?xml version="1.0" encoding="utf-8"?>
+<TemplafySlideTemplateConfiguration><![CDATA[{"slideVersion":1,"isValidatorEnabled":false,"isLocked":false,"elementsMetadata":[{"type":"shape","elementConfiguration":{"width":"{{UserProfile.Department.REFDepartmentLogo.WidthPNGPPT}}","height":"{{UserProfile.Department.REFDepartmentLogo.HeightPNGPPT}}","image":"{{UserProfile.Department.REFDepartmentLogo.ImagePNG}}","type":"image","disableUpdates":false}}],"slideId":"637750113834107008","enableDocumentContentUpdater":true,"version":"2.0"}]]></TemplafySlideTemplateConfiguration>
+</file>
+
+<file path=customXml/item53.xml><?xml version="1.0" encoding="utf-8"?>
+<TemplafySlideTemplateConfiguration><![CDATA[{"slideVersion":1,"isValidatorEnabled":false,"isLocked":false,"elementsMetadata":[{"type":"shape","elementConfiguration":{"binding":"{{FormatDateTime(Form.Date,Translate(\"DateFormat\"),DocumentLanguage)}}","type":"text","disableUpdates":false}},{"type":"shape","elementConfiguration":{"width":"{{UserProfile.Department.REFDepartmentLogo.WidthPNGPPTFooter}}","height":"{{UserProfile.Department.REFDepartmentLogo.HeightPNGPPTFooter}}","image":"{{UserProfile.Department.REFDepartmentLogo.ImagePNG}}","visibility":"{{IfElse(Form.FooterLogo, VisibilityType.Visible,VisibilityType.Hidden)}}","type":"image","disableUpdates":false}},{"type":"shape","elementConfiguration":{"binding":"{{Form.Footer}}","type":"text","disableUpdates":false}},{"type":"shape","elementConfiguration":{"binding":"{{UserProfile.Department.DepartmentName}}","visibility":"{{IfElse(Form.FooterLogo, VisibilityType.Hidden,VisibilityType.Visible)}}","type":"text","disableUpdates":false}}],"slideId":"637750113834261908","enableDocumentContentUpdater":true,"version":"2.0"}]]></TemplafySlideTemplateConfiguration>
+</file>
+
+<file path=customXml/item54.xml><?xml version="1.0" encoding="utf-8"?>
+<TemplafySlideTemplateConfiguration><![CDATA[{"slideVersion":1,"isValidatorEnabled":false,"isLocked":false,"elementsMetadata":[],"slideId":"637750113834130535","enableDocumentContentUpdater":true,"version":"2.0"}]]></TemplafySlideTemplateConfiguration>
+</file>
+
+<file path=customXml/item55.xml><?xml version="1.0" encoding="utf-8"?>
+<TemplafySlideTemplateConfiguration><![CDATA[{"slideVersion":1,"isValidatorEnabled":false,"isLocked":false,"elementsMetadata":[{"type":"shape","elementConfiguration":{"binding":"{{FormatDateTime(Form.Date,Translate(\"DateFormat\"),DocumentLanguage)}}","type":"text","disableUpdates":false}},{"type":"shape","elementConfiguration":{"width":"{{UserProfile.Department.REFDepartmentLogo.WidthPNGPPTFooter}}","height":"{{UserProfile.Department.REFDepartmentLogo.HeightPNGPPTFooter}}","image":"{{UserProfile.Department.REFDepartmentLogo.ImagePNG}}","visibility":"{{IfElse(Form.FooterLogo, VisibilityType.Visible,VisibilityType.Hidden)}}","type":"image","disableUpdates":false}},{"type":"shape","elementConfiguration":{"binding":"{{Form.Footer}}","type":"text","disableUpdates":false}},{"type":"shape","elementConfiguration":{"binding":"{{UserProfile.Department.DepartmentName}}","visibility":"{{IfElse(Form.FooterLogo, VisibilityType.Hidden,VisibilityType.Visible)}}","type":"text","disableUpdates":false}}],"slideId":"637750113834113416","enableDocumentContentUpdater":true,"version":"2.0"}]]></TemplafySlideTemplateConfiguration>
+</file>
+
+<file path=customXml/item6.xml><?xml version="1.0" encoding="utf-8"?>
 <TemplafySlideFormConfiguration><![CDATA[{"formFields":[],"formDataEntries":[]}]]></TemplafySlideFormConfiguration>
 </file>
 
-<file path=customXml/item50.xml><?xml version="1.0" encoding="utf-8"?>
+<file path=customXml/item7.xml><?xml version="1.0" encoding="utf-8"?>
 <TemplafySlideFormConfiguration><![CDATA[{"formFields":[],"formDataEntries":[]}]]></TemplafySlideFormConfiguration>
 </file>
 
-<file path=customXml/item51.xml><?xml version="1.0" encoding="utf-8"?>
+<file path=customXml/item8.xml><?xml version="1.0" encoding="utf-8"?>
+<TemplafySlideTemplateConfiguration><![CDATA[{"slideVersion":1,"isValidatorEnabled":false,"isLocked":false,"elementsMetadata":[{"type":"shape","elementConfiguration":{"width":"{{UserProfile.Department.REFDepartmentLogo.WidthPNGPPT}}","height":"{{UserProfile.Department.REFDepartmentLogo.HeightPNGPPT}}","image":"{{UserProfile.Department.REFDepartmentLogo.ImagePNG}}","type":"image","disableUpdates":false}}],"slideId":"637750113834107608","enableDocumentContentUpdater":true,"version":"2.0"}]]></TemplafySlideTemplateConfiguration>
+</file>
+
+<file path=customXml/item9.xml><?xml version="1.0" encoding="utf-8"?>
 <TemplafySlideFormConfiguration><![CDATA[{"formFields":[{"required":true,"shareValue":false,"type":"datePicker","name":"Date","label":"Datum"},{"required":false,"placeholder":"","lines":1,"shareValue":false,"type":"textBox","name":"Footer","label":"Fusszeile"},{"defaultValue":{"fixedValue":true},"shareValue":false,"type":"checkBox","name":"FooterLogo","label":"mit Logo in der Fusszeile"}],"formDataEntries":[]}]]></TemplafySlideFormConfiguration>
 </file>
 
-<file path=customXml/item52.xml><?xml version="1.0" encoding="utf-8"?>
-<TemplafySlideTemplateConfiguration><![CDATA[{"slideVersion":1,"isValidatorEnabled":false,"isLocked":false,"elementsMetadata":[{"type":"shape","elementConfiguration":{"binding":"{{FormatDateTime(Form.Date,Translate(\"DateFormat\"),DocumentLanguage)}}","type":"text","disableUpdates":false}},{"type":"shape","elementConfiguration":{"width":"{{UserProfile.Department.REFDepartmentLogo.WidthPNGPPTFooter}}","height":"{{UserProfile.Department.REFDepartmentLogo.HeightPNGPPTFooter}}","image":"{{UserProfile.Department.REFDepartmentLogo.ImagePNG}}","visibility":"{{IfElse(Form.FooterLogo, VisibilityType.Visible,VisibilityType.Hidden)}}","type":"image","disableUpdates":false}},{"type":"shape","elementConfiguration":{"binding":"{{Form.Footer}}","type":"text","disableUpdates":false}},{"type":"shape","elementConfiguration":{"binding":"{{UserProfile.Department.DepartmentName}}","visibility":"{{IfElse(Form.FooterLogo, VisibilityType.Hidden,VisibilityType.Visible)}}","type":"text","disableUpdates":false}}],"slideId":"637750113834261908","enableDocumentContentUpdater":true,"version":"2.0"}]]></TemplafySlideTemplateConfiguration>
-</file>
-
-<file path=customXml/item53.xml><?xml version="1.0" encoding="utf-8"?>
-<TemplafyTemplateConfiguration><![CDATA[{"elementsMetadata":[{"type":"shape","id":"56ce75b3-422e-4bea-941a-dc00172cd73f","elementConfiguration":{"binding":"{{FormatDateTime(Form.Date,Translate(\"DateFormat\"),DocumentLanguage)}}","type":"text","disableUpdates":false}},{"type":"shape","id":"ff4a6372-22c5-4dd4-8428-3be358c8e860","elementConfiguration":{"width":"{{UserProfile.Department.REFDepartmentLogo.WidthPNGPPTFooter}}","height":"{{UserProfile.Department.REFDepartmentLogo.HeightPNGPPTFooter}}","image":"{{UserProfile.Department.REFDepartmentLogo.ImagePNG}}","visibility":"{{IfElse(Form.FooterLogo, VisibilityType.Visible,VisibilityType.Hidden)}}","type":"image","disableUpdates":false}},{"type":"shape","id":"802336ec-566b-4a3d-896e-7cccb9fe246d","elementConfiguration":{"binding":"{{Form.Footer}}","type":"text","disableUpdates":false}},{"type":"shape","id":"a2d41398-5271-4cc9-b1dd-66e099bdef04","elementConfiguration":{"binding":"{{UserProfile.Department.DepartmentName}}","visibility":"{{IfElse(Form.FooterLogo, VisibilityType.Hidden,VisibilityType.Visible)}}","type":"text","disableUpdates":false}},{"type":"shape","id":"a40dda36-18a9-40da-9166-9a47a867251f","elementConfiguration":{"width":"{{UserProfile.Department.REFDepartmentLogo.WidthPNGPPT}}","height":"{{UserProfile.Department.REFDepartmentLogo.HeightPNGPPT}}","image":"{{UserProfile.Department.REFDepartmentLogo.ImagePNG}}","type":"image","disableUpdates":false}},{"type":"shape","id":"239d4f55-1bac-4607-8b11-947c6c77cd46","elementConfiguration":{"binding":"{{UserProfile.Department.DepartmentName}} \n{{UserProfile.Department.DepartmentStreet}} {{UserProfile.Department.DepartmentStreetNumber}} \n{{UserProfile.Department.DepartmentPOBox}} {{UserProfile.Department.DepartmentCity}} \n{{UserProfile.Department.DepartmentCountry}} \n{{UserProfile.Department.DepartmentWebsite}}","type":"text","disableUpdates":false}},{"type":"shape","id":"4e7e3c8a-6e06-4468-a348-0ba7b10c4800","elementConfiguration":{"width":"{{UserProfile.Department.REFDepartmentLogo.WidthPNGPPT}}","height":"{{UserProfile.Department.REFDepartmentLogo.HeightPNGPPT}}","image":"{{UserProfile.Department.REFDepartmentLogo.ImagePNG}}","type":"image","disableUpdates":false}},{"type":"shape","id":"843f5766-31d9-4280-a669-00226bb12ba8","elementConfiguration":{"binding":"{{FormatDateTime(Form.Date,Translate(\"DateFormat\"),DocumentLanguage)}}","type":"text","disableUpdates":false}},{"type":"shape","id":"9b9e4f3c-de31-4236-8ed4-5b99f4d3cf2e","elementConfiguration":{"width":"{{UserProfile.Department.REFDepartmentLogo.WidthPNGPPTFooter}}","height":"{{UserProfile.Department.REFDepartmentLogo.HeightPNGPPTFooter}}","image":"{{UserProfile.Department.REFDepartmentLogo.ImagePNG}}","visibility":"{{IfElse(Form.FooterLogo, VisibilityType.Visible,VisibilityType.Hidden)}}","type":"image","disableUpdates":false}},{"type":"shape","id":"75162e3e-ae53-4b5e-99da-7a45748d34cc","elementConfiguration":{"binding":"{{Form.Footer}}","type":"text","disableUpdates":false}},{"type":"shape","id":"4b457ff6-1749-4ff7-9ec1-d06b95bd97c4","elementConfiguration":{"binding":"{{UserProfile.Department.DepartmentName}}","visibility":"{{IfElse(Form.FooterLogo, VisibilityType.Hidden,VisibilityType.Visible)}}","type":"text","disableUpdates":false}},{"type":"shape","id":"595e50e6-f562-4e70-8412-9b3e58d54d40","elementConfiguration":{"width":"{{UserProfile.Department.REFDepartmentLogo.WidthPNGPPT}}","height":"{{UserProfile.Department.REFDepartmentLogo.HeightPNGPPT}}","image":"{{UserProfile.Department.REFDepartmentLogo.ImagePNG}}","type":"image","disableUpdates":false}},{"type":"shape","id":"987706d0-0020-48f8-abb7-fa71e92ba907","elementConfiguration":{"binding":"{{FormatDateTime(Form.Date,Translate(\"DateFormat\"),DocumentLanguage)}}","type":"text","disableUpdates":false}},{"type":"shape","id":"18680601-61d8-4c65-b887-d43faff0f7e7","elementConfiguration":{"width":"{{UserProfile.Department.REFDepartmentLogo.WidthPNGPPT}}","height":"{{UserProfile.Department.REFDepartmentLogo.HeightPNGPPT}}","image":"{{UserProfile.Department.REFDepartmentLogo.ImagePNG}}","type":"image","disableUpdates":false}},{"type":"shape","id":"889eed5e-adc6-4545-a320-e60e7fe89049","elementConfiguration":{"binding":"{{FormatDateTime(Form.Date,Translate(\"DateFormat\"),DocumentLanguage)}}","type":"text","disableUpdates":false}},{"type":"shape","id":"3f852e2a-90cd-405b-aa63-881f2da03bb5","elementConfiguration":{"width":"{{UserProfile.Department.REFDepartmentLogo.WidthPNGPPTFooter}}","height":"{{UserProfile.Department.REFDepartmentLogo.HeightPNGPPTFooter}}","image":"{{UserProfile.Department.REFDepartmentLogo.ImagePNG}}","visibility":"{{IfElse(Form.FooterLogo, VisibilityType.Visible,VisibilityType.Hidden)}}","type":"image","disableUpdates":false}},{"type":"shape","id":"a606881e-514e-4f57-b14a-3e310a69b4b5","elementConfiguration":{"binding":"{{Form.Footer}}","type":"text","disableUpdates":false}},{"type":"shape","id":"d89fcdf5-4b31-4eed-a6ec-a34b7588e3dc","elementConfiguration":{"binding":"{{UserProfile.Department.DepartmentName}}","visibility":"{{IfElse(Form.FooterLogo, VisibilityType.Hidden,VisibilityType.Visible)}}","type":"text","disableUpdates":false}},{"type":"shape","id":"e4895852-1c5c-4754-a233-3eec028fd2a8","elementConfiguration":{"binding":"{{FormatDateTime(Form.Date,Translate(\"DateFormat\"),DocumentLanguage)}}","type":"text","disableUpdates":false}},{"type":"shape","id":"d621d8b6-cd2e-463b-982e-d95c5f8a82fb","elementConfiguration":{"width":"{{UserProfile.Department.REFDepartmentLogo.WidthPNGPPTFooter}}","height":"{{UserProfile.Department.REFDepartmentLogo.HeightPNGPPTFooter}}","image":"{{UserProfile.Department.REFDepartmentLogo.ImagePNG}}","visibility":"{{IfElse(Form.FooterLogo, VisibilityType.Visible,VisibilityType.Hidden)}}","type":"image","disableUpdates":false}},{"type":"shape","id":"65b937f8-b6ed-482d-9fcb-89e2ad98182a","elementConfiguration":{"binding":"{{Form.Footer}}","type":"text","disableUpdates":false}},{"type":"shape","id":"8e41931c-7f95-42d4-bfa3-9c5f04293069","elementConfiguration":{"binding":"{{UserProfile.Department.DepartmentName}}","visibility":"{{IfElse(Form.FooterLogo, VisibilityType.Hidden,VisibilityType.Visible)}}","type":"text","disableUpdates":false}},{"type":"shape","id":"313b8357-6b18-490c-9533-a6c0ee071962","elementConfiguration":{"binding":"{{FormatDateTime(Form.Date,Translate(\"DateFormat\"),DocumentLanguage)}}","type":"text","disableUpdates":false}},{"type":"shape","id":"69582c92-e5c7-4749-97ef-47cc4b58fa8b","elementConfiguration":{"binding":"{{FormatDateTime(Form.Date,Translate(\"DateFormat\"),DocumentLanguage)}}","type":"text","disableUpdates":false}},{"type":"shape","id":"4ee707e9-0b9f-42e6-bfac-8cfa418e9d62","elementConfiguration":{"binding":"{{Form.Footer}}","type":"text","disableUpdates":false}},{"type":"shape","id":"b710521b-d63f-429f-a075-a52a6cb7c897","elementConfiguration":{"width":"{{UserProfile.Department.REFDepartmentLogo.WidthPNGPPTFooter}}","height":"{{UserProfile.Department.REFDepartmentLogo.HeightPNGPPTFooter}}","image":"{{UserProfile.Department.REFDepartmentLogo.ImagePNG}}","visibility":"{{IfElse(Form.FooterLogo, VisibilityType.Visible,VisibilityType.Hidden)}}","type":"image","disableUpdates":false}},{"type":"shape","id":"4c8a9ee4-f540-4aa0-9380-f692b4e2dcc6","elementConfiguration":{"binding":"{{UserProfile.Department.DepartmentName}}","visibility":"{{IfElse(Form.FooterLogo, VisibilityType.Hidden,VisibilityType.Visible)}}","type":"text","disableUpdates":false}},{"type":"shape","id":"9c2bec1f-485e-44d6-987c-4c2a62826230","elementConfiguration":{"binding":"{{FormatDateTime(Form.Date,Translate(\"DateFormat\"),DocumentLanguage)}}","type":"text","disableUpdates":false}},{"type":"shape","id":"965f1849-534b-4cf0-ad65-b946ad9126d8","elementConfiguration":{"width":"{{UserProfile.Department.REFDepartmentLogo.WidthPNGPPTFooter}}","height":"{{UserProfile.Department.REFDepartmentLogo.HeightPNGPPTFooter}}","image":"{{UserProfile.Department.REFDepartmentLogo.ImagePNG}}","visibility":"{{IfElse(Form.FooterLogo, VisibilityType.Visible,VisibilityType.Hidden)}}","type":"image","disableUpdates":false}},{"type":"shape","id":"73b120c8-aa6c-4644-86bc-360261a349b9","elementConfiguration":{"binding":"{{Form.Footer}}","type":"text","disableUpdates":false}},{"type":"shape","id":"297fab75-6aaa-4b1a-95bb-193250870530","elementConfiguration":{"binding":"{{UserProfile.Department.DepartmentName}}","visibility":"{{IfElse(Form.FooterLogo, VisibilityType.Hidden,VisibilityType.Visible)}}","type":"text","disableUpdates":false}}],"transformationConfigurations":[{"language":"{{UserProfile.DocumentLanguage.Language}}","disableUpdates":false,"type":"proofingLanguage"},{"propertyName":"creator","propertyValue":"{{UserProfile.FirstName}} {{UserProfile.LastName}}","disableUpdates":false,"type":"documentProperty"},{"propertyName":"title","propertyValue":"Presentation - University of St.Gallen","disableUpdates":false,"type":"documentProperty"}],"templateName":"UNISG Präsentation","templateDescription":"","enableDocumentContentUpdater":true,"version":"2.0"}]]></TemplafyTemplateConfiguration>
-</file>
-
-<file path=customXml/item54.xml><?xml version="1.0" encoding="utf-8"?>
-<TemplafySlideTemplateConfiguration><![CDATA[{"slideVersion":1,"isValidatorEnabled":false,"isLocked":false,"elementsMetadata":[],"slideId":"637750113834267111","enableDocumentContentUpdater":true,"version":"2.0"}]]></TemplafySlideTemplateConfiguration>
-</file>
-
-<file path=customXml/item55.xml><?xml version="1.0" encoding="utf-8"?>
-<TemplafySlideTemplateConfiguration><![CDATA[{"slideVersion":1,"isValidatorEnabled":false,"isLocked":false,"elementsMetadata":[{"type":"shape","elementConfiguration":{"binding":"{{FormatDateTime(Form.Date,Translate(\"DateFormat\"),DocumentLanguage)}}","type":"text","disableUpdates":false}},{"type":"shape","elementConfiguration":{"width":"{{UserProfile.Department.REFDepartmentLogo.WidthPNGPPTFooter}}","height":"{{UserProfile.Department.REFDepartmentLogo.HeightPNGPPTFooter}}","image":"{{UserProfile.Department.REFDepartmentLogo.ImagePNG}}","visibility":"{{IfElse(Form.FooterLogo, VisibilityType.Visible,VisibilityType.Hidden)}}","type":"image","disableUpdates":false}},{"type":"shape","elementConfiguration":{"binding":"{{Form.Footer}}","type":"text","disableUpdates":false}},{"type":"shape","elementConfiguration":{"binding":"{{UserProfile.Department.DepartmentName}}","visibility":"{{IfElse(Form.FooterLogo, VisibilityType.Hidden,VisibilityType.Visible)}}","type":"text","disableUpdates":false}}],"slideId":"637750113834264450","enableDocumentContentUpdater":true,"version":"2.0"}]]></TemplafySlideTemplateConfiguration>
-</file>
-
-<file path=customXml/item6.xml><?xml version="1.0" encoding="utf-8"?>
-<TemplafySlideTemplateConfiguration><![CDATA[{"slideVersion":1,"isValidatorEnabled":false,"isLocked":false,"elementsMetadata":[{"type":"shape","elementConfiguration":{"binding":"{{FormatDateTime(Form.Date,Translate(\"DateFormat\"),DocumentLanguage)}}","type":"text","disableUpdates":false}},{"type":"shape","elementConfiguration":{"width":"{{UserProfile.Department.REFDepartmentLogo.WidthPNGPPTFooter}}","height":"{{UserProfile.Department.REFDepartmentLogo.HeightPNGPPTFooter}}","image":"{{UserProfile.Department.REFDepartmentLogo.ImagePNG}}","visibility":"{{IfElse(Form.FooterLogo, VisibilityType.Visible,VisibilityType.Hidden)}}","type":"image","disableUpdates":false}},{"type":"shape","elementConfiguration":{"binding":"{{Form.Footer}}","type":"text","disableUpdates":false}},{"type":"shape","elementConfiguration":{"binding":"{{UserProfile.Department.DepartmentName}}","visibility":"{{IfElse(Form.FooterLogo, VisibilityType.Hidden,VisibilityType.Visible)}}","type":"text","disableUpdates":false}}],"slideId":"637750113834269210","enableDocumentContentUpdater":true,"version":"2.0"}]]></TemplafySlideTemplateConfiguration>
-</file>
-
-<file path=customXml/item7.xml><?xml version="1.0" encoding="utf-8"?>
-<TemplafySlideFormConfiguration><![CDATA[{"formFields":[{"required":true,"shareValue":false,"type":"datePicker","name":"Date","label":"Datum"},{"required":false,"placeholder":"","lines":1,"shareValue":false,"type":"textBox","name":"Footer","label":"Fusszeile"},{"defaultValue":{"fixedValue":true},"shareValue":false,"type":"checkBox","name":"FooterLogo","label":"mit Logo in der Fusszeile"}],"formDataEntries":[]}]]></TemplafySlideFormConfiguration>
-</file>
-
-<file path=customXml/item8.xml><?xml version="1.0" encoding="utf-8"?>
-<TemplafySlideTemplateConfiguration><![CDATA[{"slideVersion":1,"isValidatorEnabled":false,"isLocked":false,"elementsMetadata":[{"type":"shape","elementConfiguration":{"binding":"{{FormatDateTime(Form.Date,Translate(\"DateFormat\"),DocumentLanguage)}}","type":"text","disableUpdates":false}},{"type":"shape","elementConfiguration":{"width":"{{UserProfile.Department.REFDepartmentLogo.WidthPNGPPTFooter}}","height":"{{UserProfile.Department.REFDepartmentLogo.HeightPNGPPTFooter}}","image":"{{UserProfile.Department.REFDepartmentLogo.ImagePNG}}","visibility":"{{IfElse(Form.FooterLogo, VisibilityType.Visible,VisibilityType.Hidden)}}","type":"image","disableUpdates":false}},{"type":"shape","elementConfiguration":{"binding":"{{Form.Footer}}","type":"text","disableUpdates":false}},{"type":"shape","elementConfiguration":{"binding":"{{UserProfile.Department.DepartmentName}}","visibility":"{{IfElse(Form.FooterLogo, VisibilityType.Hidden,VisibilityType.Visible)}}","type":"text","disableUpdates":false}}],"slideId":"637750113834195832","enableDocumentContentUpdater":true,"version":"2.0"}]]></TemplafySlideTemplateConfiguration>
-</file>
-
-<file path=customXml/item9.xml><?xml version="1.0" encoding="utf-8"?>
-<TemplafySlideFormConfiguration><![CDATA[{"formFields":[],"formDataEntries":[]}]]></TemplafySlideFormConfiguration>
-</file>
-
 <file path=customXml/itemProps1.xml><?xml version="1.0" encoding="utf-8"?>
-<ds:datastoreItem xmlns:ds="http://schemas.openxmlformats.org/officeDocument/2006/customXml" ds:itemID="{90BBE109-2328-4050-BC2C-A7208F976826}">
+<ds:datastoreItem xmlns:ds="http://schemas.openxmlformats.org/officeDocument/2006/customXml" ds:itemID="{4CA08EE0-6BFF-42CE-9AEB-A2BB1FFE120F}">
   <ds:schemaRefs/>
 </ds:datastoreItem>
 </file>
 
 <file path=customXml/itemProps10.xml><?xml version="1.0" encoding="utf-8"?>
-<ds:datastoreItem xmlns:ds="http://schemas.openxmlformats.org/officeDocument/2006/customXml" ds:itemID="{664F7CED-B0DA-429D-9A7F-4CBF61D24C26}">
+<ds:datastoreItem xmlns:ds="http://schemas.openxmlformats.org/officeDocument/2006/customXml" ds:itemID="{765EC35B-8AF2-40F0-BFE1-C19B71F66BB7}">
   <ds:schemaRefs/>
 </ds:datastoreItem>
 </file>
 
 <file path=customXml/itemProps11.xml><?xml version="1.0" encoding="utf-8"?>
-<ds:datastoreItem xmlns:ds="http://schemas.openxmlformats.org/officeDocument/2006/customXml" ds:itemID="{6567BD5C-CC0C-4648-BED2-6CE28F06E5A9}">
-  <ds:schemaRefs>
-    <ds:schemaRef ds:uri="http://schemas.microsoft.com/office/2006/metadata/properties"/>
-    <ds:schemaRef ds:uri="http://www.w3.org/XML/1998/namespace"/>
-    <ds:schemaRef ds:uri="http://purl.org/dc/elements/1.1/"/>
-    <ds:schemaRef ds:uri="http://purl.org/dc/terms/"/>
-    <ds:schemaRef ds:uri="http://purl.org/dc/dcmitype/"/>
-    <ds:schemaRef ds:uri="71d337dc-809a-4269-a690-d6cd31b4acd0"/>
-    <ds:schemaRef ds:uri="http://schemas.microsoft.com/office/infopath/2007/PartnerControls"/>
-    <ds:schemaRef ds:uri="http://schemas.microsoft.com/office/2006/documentManagement/types"/>
-    <ds:schemaRef ds:uri="http://schemas.openxmlformats.org/package/2006/metadata/core-properties"/>
-    <ds:schemaRef ds:uri="07c8a24f-8b40-44ca-950f-ae5db2c4fa23"/>
-  </ds:schemaRefs>
-</ds:datastoreItem>
-</file>
-
-<file path=customXml/itemProps12.xml><?xml version="1.0" encoding="utf-8"?>
-<ds:datastoreItem xmlns:ds="http://schemas.openxmlformats.org/officeDocument/2006/customXml" ds:itemID="{10DF96B0-5AB8-4312-B635-364A70A3CD64}">
+<ds:datastoreItem xmlns:ds="http://schemas.openxmlformats.org/officeDocument/2006/customXml" ds:itemID="{7F01121C-13E9-483A-B7E6-46DD03B75200}">
   <ds:schemaRefs/>
 </ds:datastoreItem>
 </file>
 
-<file path=customXml/itemProps13.xml><?xml version="1.0" encoding="utf-8"?>
-<ds:datastoreItem xmlns:ds="http://schemas.openxmlformats.org/officeDocument/2006/customXml" ds:itemID="{F0F415B7-3B60-D646-8E61-195FAF28F2E9}">
-  <ds:schemaRefs/>
-</ds:datastoreItem>
-</file>
-
-<file path=customXml/itemProps14.xml><?xml version="1.0" encoding="utf-8"?>
-<ds:datastoreItem xmlns:ds="http://schemas.openxmlformats.org/officeDocument/2006/customXml" ds:itemID="{9B272F4A-5C95-4892-AAD9-D7AEF7A26919}">
-  <ds:schemaRefs/>
-</ds:datastoreItem>
-</file>
-
-<file path=customXml/itemProps15.xml><?xml version="1.0" encoding="utf-8"?>
-<ds:datastoreItem xmlns:ds="http://schemas.openxmlformats.org/officeDocument/2006/customXml" ds:itemID="{3DAEF0AC-8F99-434C-A5E8-5F51192FBC2E}">
-  <ds:schemaRefs/>
-</ds:datastoreItem>
-</file>
-
-<file path=customXml/itemProps16.xml><?xml version="1.0" encoding="utf-8"?>
-<ds:datastoreItem xmlns:ds="http://schemas.openxmlformats.org/officeDocument/2006/customXml" ds:itemID="{46D5571C-37EA-4B1A-965C-D1FF428CABBA}">
-  <ds:schemaRefs/>
-</ds:datastoreItem>
-</file>
-
-<file path=customXml/itemProps17.xml><?xml version="1.0" encoding="utf-8"?>
-<ds:datastoreItem xmlns:ds="http://schemas.openxmlformats.org/officeDocument/2006/customXml" ds:itemID="{7DDF22D5-378F-4B43-9E2C-6011B6850318}">
-  <ds:schemaRefs/>
-</ds:datastoreItem>
-</file>
-
-<file path=customXml/itemProps18.xml><?xml version="1.0" encoding="utf-8"?>
+<file path=customXml/itemProps12.xml><?xml version="1.0" encoding="utf-8"?>
 <ds:datastoreItem xmlns:ds="http://schemas.openxmlformats.org/officeDocument/2006/customXml" ds:itemID="{9BA6235D-7E1A-4B9C-ADE5-24E162A87D03}">
   <ds:schemaRefs/>
 </ds:datastoreItem>
 </file>
 
-<file path=customXml/itemProps19.xml><?xml version="1.0" encoding="utf-8"?>
+<file path=customXml/itemProps13.xml><?xml version="1.0" encoding="utf-8"?>
 <ds:datastoreItem xmlns:ds="http://schemas.openxmlformats.org/officeDocument/2006/customXml" ds:itemID="{BE973802-FCC6-412D-B906-CC95D3BA7379}">
   <ds:schemaRefs/>
 </ds:datastoreItem>
 </file>
 
-<file path=customXml/itemProps2.xml><?xml version="1.0" encoding="utf-8"?>
-<ds:datastoreItem xmlns:ds="http://schemas.openxmlformats.org/officeDocument/2006/customXml" ds:itemID="{DCBF58FE-EC78-4FA4-A4AD-8EA1AF6C427F}">
+<file path=customXml/itemProps14.xml><?xml version="1.0" encoding="utf-8"?>
+<ds:datastoreItem xmlns:ds="http://schemas.openxmlformats.org/officeDocument/2006/customXml" ds:itemID="{DCC1EDEA-6109-42CD-9115-6BD85EF38642}">
   <ds:schemaRefs/>
 </ds:datastoreItem>
 </file>
 
-<file path=customXml/itemProps20.xml><?xml version="1.0" encoding="utf-8"?>
-<ds:datastoreItem xmlns:ds="http://schemas.openxmlformats.org/officeDocument/2006/customXml" ds:itemID="{0AF5DDBE-5E75-48FC-BA21-32ACE2374F30}">
-  <ds:schemaRefs/>
-</ds:datastoreItem>
-</file>
-
-<file path=customXml/itemProps21.xml><?xml version="1.0" encoding="utf-8"?>
-<ds:datastoreItem xmlns:ds="http://schemas.openxmlformats.org/officeDocument/2006/customXml" ds:itemID="{A1DE4887-2FA9-49BA-B8BF-E79FB8D56958}">
-  <ds:schemaRefs/>
-</ds:datastoreItem>
-</file>
-
-<file path=customXml/itemProps22.xml><?xml version="1.0" encoding="utf-8"?>
-<ds:datastoreItem xmlns:ds="http://schemas.openxmlformats.org/officeDocument/2006/customXml" ds:itemID="{1EEB1A81-9962-42B8-BE89-F24FBB4418EA}">
-  <ds:schemaRefs/>
-</ds:datastoreItem>
-</file>
-
-<file path=customXml/itemProps23.xml><?xml version="1.0" encoding="utf-8"?>
-<ds:datastoreItem xmlns:ds="http://schemas.openxmlformats.org/officeDocument/2006/customXml" ds:itemID="{DE9A5BE9-B208-45C2-93C1-997B1E18C5E8}">
-  <ds:schemaRefs/>
-</ds:datastoreItem>
-</file>
-
-<file path=customXml/itemProps24.xml><?xml version="1.0" encoding="utf-8"?>
-<ds:datastoreItem xmlns:ds="http://schemas.openxmlformats.org/officeDocument/2006/customXml" ds:itemID="{84926F0E-4CF9-4868-9C6A-F4B02CC81AC4}">
-  <ds:schemaRefs/>
-</ds:datastoreItem>
-</file>
-
-<file path=customXml/itemProps25.xml><?xml version="1.0" encoding="utf-8"?>
-<ds:datastoreItem xmlns:ds="http://schemas.openxmlformats.org/officeDocument/2006/customXml" ds:itemID="{17B6E611-A877-40D8-9669-147A1865FF06}">
-  <ds:schemaRefs/>
-</ds:datastoreItem>
-</file>
-
-<file path=customXml/itemProps26.xml><?xml version="1.0" encoding="utf-8"?>
-<ds:datastoreItem xmlns:ds="http://schemas.openxmlformats.org/officeDocument/2006/customXml" ds:itemID="{10CA47D5-62BF-412C-82C9-AD9C9628E81D}">
-  <ds:schemaRefs/>
-</ds:datastoreItem>
-</file>
-
-<file path=customXml/itemProps27.xml><?xml version="1.0" encoding="utf-8"?>
-<ds:datastoreItem xmlns:ds="http://schemas.openxmlformats.org/officeDocument/2006/customXml" ds:itemID="{5CDA3866-4191-4ABE-B434-81C70850BD71}">
-  <ds:schemaRefs/>
-</ds:datastoreItem>
-</file>
-
-<file path=customXml/itemProps28.xml><?xml version="1.0" encoding="utf-8"?>
-<ds:datastoreItem xmlns:ds="http://schemas.openxmlformats.org/officeDocument/2006/customXml" ds:itemID="{66FA18C0-85E2-48F7-961D-7BE01285C862}">
-  <ds:schemaRefs/>
-</ds:datastoreItem>
-</file>
-
-<file path=customXml/itemProps29.xml><?xml version="1.0" encoding="utf-8"?>
-<ds:datastoreItem xmlns:ds="http://schemas.openxmlformats.org/officeDocument/2006/customXml" ds:itemID="{187CDBC8-4301-CA40-9C1E-C2AAF09F8BBD}">
-  <ds:schemaRefs/>
-</ds:datastoreItem>
-</file>
-
-<file path=customXml/itemProps3.xml><?xml version="1.0" encoding="utf-8"?>
-<ds:datastoreItem xmlns:ds="http://schemas.openxmlformats.org/officeDocument/2006/customXml" ds:itemID="{765EC35B-8AF2-40F0-BFE1-C19B71F66BB7}">
-  <ds:schemaRefs/>
-</ds:datastoreItem>
-</file>
-
-<file path=customXml/itemProps30.xml><?xml version="1.0" encoding="utf-8"?>
-<ds:datastoreItem xmlns:ds="http://schemas.openxmlformats.org/officeDocument/2006/customXml" ds:itemID="{4CA08EE0-6BFF-42CE-9AEB-A2BB1FFE120F}">
-  <ds:schemaRefs/>
-</ds:datastoreItem>
-</file>
-
-<file path=customXml/itemProps31.xml><?xml version="1.0" encoding="utf-8"?>
-<ds:datastoreItem xmlns:ds="http://schemas.openxmlformats.org/officeDocument/2006/customXml" ds:itemID="{45B06F8E-AA4D-4F38-9B8B-099300ECC694}">
-  <ds:schemaRefs/>
-</ds:datastoreItem>
-</file>
-
-<file path=customXml/itemProps32.xml><?xml version="1.0" encoding="utf-8"?>
-<ds:datastoreItem xmlns:ds="http://schemas.openxmlformats.org/officeDocument/2006/customXml" ds:itemID="{2754228B-0BD8-45C5-B5EB-94306059B5EC}">
-  <ds:schemaRefs/>
-</ds:datastoreItem>
-</file>
-
-<file path=customXml/itemProps33.xml><?xml version="1.0" encoding="utf-8"?>
-<ds:datastoreItem xmlns:ds="http://schemas.openxmlformats.org/officeDocument/2006/customXml" ds:itemID="{A35AE265-4942-487E-9782-B0313E5BE5BA}">
-  <ds:schemaRefs/>
-</ds:datastoreItem>
-</file>
-
-<file path=customXml/itemProps34.xml><?xml version="1.0" encoding="utf-8"?>
-<ds:datastoreItem xmlns:ds="http://schemas.openxmlformats.org/officeDocument/2006/customXml" ds:itemID="{4907208B-9EFE-4124-A198-13AD782B858C}">
-  <ds:schemaRefs/>
-</ds:datastoreItem>
-</file>
-
-<file path=customXml/itemProps35.xml><?xml version="1.0" encoding="utf-8"?>
-<ds:datastoreItem xmlns:ds="http://schemas.openxmlformats.org/officeDocument/2006/customXml" ds:itemID="{B0437DFC-C606-441B-B8FC-7769CEA71C34}">
-  <ds:schemaRefs/>
-</ds:datastoreItem>
-</file>
-
-<file path=customXml/itemProps36.xml><?xml version="1.0" encoding="utf-8"?>
-<ds:datastoreItem xmlns:ds="http://schemas.openxmlformats.org/officeDocument/2006/customXml" ds:itemID="{600482A4-E9CD-4DA2-AD6D-ED3DAAC7A90E}">
-  <ds:schemaRefs/>
-</ds:datastoreItem>
-</file>
-
-<file path=customXml/itemProps37.xml><?xml version="1.0" encoding="utf-8"?>
-<ds:datastoreItem xmlns:ds="http://schemas.openxmlformats.org/officeDocument/2006/customXml" ds:itemID="{EF9A843C-DEE1-4221-96D6-063228FC0A5C}">
-  <ds:schemaRefs/>
-</ds:datastoreItem>
-</file>
-
-<file path=customXml/itemProps38.xml><?xml version="1.0" encoding="utf-8"?>
-<ds:datastoreItem xmlns:ds="http://schemas.openxmlformats.org/officeDocument/2006/customXml" ds:itemID="{7D15E2AB-9AA3-4994-B62A-3E2F5C1A2EC4}">
-  <ds:schemaRefs/>
-</ds:datastoreItem>
-</file>
-
-<file path=customXml/itemProps39.xml><?xml version="1.0" encoding="utf-8"?>
-<ds:datastoreItem xmlns:ds="http://schemas.openxmlformats.org/officeDocument/2006/customXml" ds:itemID="{22F15940-6A24-4FEF-A717-C5EC22A291A1}">
-  <ds:schemaRefs/>
-</ds:datastoreItem>
-</file>
-
-<file path=customXml/itemProps4.xml><?xml version="1.0" encoding="utf-8"?>
-<ds:datastoreItem xmlns:ds="http://schemas.openxmlformats.org/officeDocument/2006/customXml" ds:itemID="{708F14FE-66F6-4744-AD1D-7632167C0D90}">
-  <ds:schemaRefs/>
-</ds:datastoreItem>
-</file>
-
-<file path=customXml/itemProps40.xml><?xml version="1.0" encoding="utf-8"?>
-<ds:datastoreItem xmlns:ds="http://schemas.openxmlformats.org/officeDocument/2006/customXml" ds:itemID="{8AA700CF-41AC-4CCC-923C-17ED3F632772}">
-  <ds:schemaRefs/>
-</ds:datastoreItem>
-</file>
-
-<file path=customXml/itemProps41.xml><?xml version="1.0" encoding="utf-8"?>
-<ds:datastoreItem xmlns:ds="http://schemas.openxmlformats.org/officeDocument/2006/customXml" ds:itemID="{D4F2BED0-C414-46BA-AF63-E57A81C2B9FC}">
-  <ds:schemaRefs/>
-</ds:datastoreItem>
-</file>
-
-<file path=customXml/itemProps42.xml><?xml version="1.0" encoding="utf-8"?>
-<ds:datastoreItem xmlns:ds="http://schemas.openxmlformats.org/officeDocument/2006/customXml" ds:itemID="{BA2D1F52-F0AD-4181-AA76-1D6F58ED2D3E}">
-  <ds:schemaRefs/>
-</ds:datastoreItem>
-</file>
-
-<file path=customXml/itemProps43.xml><?xml version="1.0" encoding="utf-8"?>
-<ds:datastoreItem xmlns:ds="http://schemas.openxmlformats.org/officeDocument/2006/customXml" ds:itemID="{AB24DB1C-E169-480A-9390-B8AAE56F6957}">
-  <ds:schemaRefs/>
-</ds:datastoreItem>
-</file>
-
-<file path=customXml/itemProps44.xml><?xml version="1.0" encoding="utf-8"?>
-<ds:datastoreItem xmlns:ds="http://schemas.openxmlformats.org/officeDocument/2006/customXml" ds:itemID="{DC466C4A-550D-4144-830C-62BC000CB329}">
-  <ds:schemaRefs/>
-</ds:datastoreItem>
-</file>
-
-<file path=customXml/itemProps45.xml><?xml version="1.0" encoding="utf-8"?>
-<ds:datastoreItem xmlns:ds="http://schemas.openxmlformats.org/officeDocument/2006/customXml" ds:itemID="{55868A80-4CEC-40D9-B298-8CDA543EF6B4}">
-  <ds:schemaRefs/>
-</ds:datastoreItem>
-</file>
-
-<file path=customXml/itemProps46.xml><?xml version="1.0" encoding="utf-8"?>
-<ds:datastoreItem xmlns:ds="http://schemas.openxmlformats.org/officeDocument/2006/customXml" ds:itemID="{7F01121C-13E9-483A-B7E6-46DD03B75200}">
-  <ds:schemaRefs/>
-</ds:datastoreItem>
-</file>
-
-<file path=customXml/itemProps47.xml><?xml version="1.0" encoding="utf-8"?>
+<file path=customXml/itemProps15.xml><?xml version="1.0" encoding="utf-8"?>
 <ds:datastoreItem xmlns:ds="http://schemas.openxmlformats.org/officeDocument/2006/customXml" ds:itemID="{ED2A37DE-9640-4BAD-87EB-02349D3561C8}">
   <ds:schemaRefs>
     <ds:schemaRef ds:uri="http://schemas.microsoft.com/sharepoint/v3/contenttype/forms"/>
@@ -14158,93 +15147,314 @@
 </ds:datastoreItem>
 </file>
 
-<file path=customXml/itemProps48.xml><?xml version="1.0" encoding="utf-8"?>
+<file path=customXml/itemProps16.xml><?xml version="1.0" encoding="utf-8"?>
+<ds:datastoreItem xmlns:ds="http://schemas.openxmlformats.org/officeDocument/2006/customXml" ds:itemID="{22F15940-6A24-4FEF-A717-C5EC22A291A1}">
+  <ds:schemaRefs/>
+</ds:datastoreItem>
+</file>
+
+<file path=customXml/itemProps17.xml><?xml version="1.0" encoding="utf-8"?>
+<ds:datastoreItem xmlns:ds="http://schemas.openxmlformats.org/officeDocument/2006/customXml" ds:itemID="{10CA47D5-62BF-412C-82C9-AD9C9628E81D}">
+  <ds:schemaRefs/>
+</ds:datastoreItem>
+</file>
+
+<file path=customXml/itemProps18.xml><?xml version="1.0" encoding="utf-8"?>
+<ds:datastoreItem xmlns:ds="http://schemas.openxmlformats.org/officeDocument/2006/customXml" ds:itemID="{3DAEF0AC-8F99-434C-A5E8-5F51192FBC2E}">
+  <ds:schemaRefs/>
+</ds:datastoreItem>
+</file>
+
+<file path=customXml/itemProps19.xml><?xml version="1.0" encoding="utf-8"?>
+<ds:datastoreItem xmlns:ds="http://schemas.openxmlformats.org/officeDocument/2006/customXml" ds:itemID="{552033E5-1422-443A-ABA7-A9FA421D7629}">
+  <ds:schemaRefs/>
+</ds:datastoreItem>
+</file>
+
+<file path=customXml/itemProps2.xml><?xml version="1.0" encoding="utf-8"?>
 <ds:datastoreItem xmlns:ds="http://schemas.openxmlformats.org/officeDocument/2006/customXml" ds:itemID="{357320CA-212D-4182-9447-766838BC3644}">
   <ds:schemaRefs/>
 </ds:datastoreItem>
 </file>
 
-<file path=customXml/itemProps49.xml><?xml version="1.0" encoding="utf-8"?>
+<file path=customXml/itemProps20.xml><?xml version="1.0" encoding="utf-8"?>
+<ds:datastoreItem xmlns:ds="http://schemas.openxmlformats.org/officeDocument/2006/customXml" ds:itemID="{66FA18C0-85E2-48F7-961D-7BE01285C862}">
+  <ds:schemaRefs/>
+</ds:datastoreItem>
+</file>
+
+<file path=customXml/itemProps21.xml><?xml version="1.0" encoding="utf-8"?>
+<ds:datastoreItem xmlns:ds="http://schemas.openxmlformats.org/officeDocument/2006/customXml" ds:itemID="{90BBE109-2328-4050-BC2C-A7208F976826}">
+  <ds:schemaRefs/>
+</ds:datastoreItem>
+</file>
+
+<file path=customXml/itemProps22.xml><?xml version="1.0" encoding="utf-8"?>
+<ds:datastoreItem xmlns:ds="http://schemas.openxmlformats.org/officeDocument/2006/customXml" ds:itemID="{A435609F-4C76-4415-A5FC-BB21AE5C4FD2}">
+  <ds:schemaRefs/>
+</ds:datastoreItem>
+</file>
+
+<file path=customXml/itemProps23.xml><?xml version="1.0" encoding="utf-8"?>
+<ds:datastoreItem xmlns:ds="http://schemas.openxmlformats.org/officeDocument/2006/customXml" ds:itemID="{DC466C4A-550D-4144-830C-62BC000CB329}">
+  <ds:schemaRefs/>
+</ds:datastoreItem>
+</file>
+
+<file path=customXml/itemProps24.xml><?xml version="1.0" encoding="utf-8"?>
+<ds:datastoreItem xmlns:ds="http://schemas.openxmlformats.org/officeDocument/2006/customXml" ds:itemID="{5CDA3866-4191-4ABE-B434-81C70850BD71}">
+  <ds:schemaRefs/>
+</ds:datastoreItem>
+</file>
+
+<file path=customXml/itemProps25.xml><?xml version="1.0" encoding="utf-8"?>
+<ds:datastoreItem xmlns:ds="http://schemas.openxmlformats.org/officeDocument/2006/customXml" ds:itemID="{B77E3FB8-6B77-4C09-82A2-9AF5ACD3601A}">
+  <ds:schemaRefs/>
+</ds:datastoreItem>
+</file>
+
+<file path=customXml/itemProps26.xml><?xml version="1.0" encoding="utf-8"?>
+<ds:datastoreItem xmlns:ds="http://schemas.openxmlformats.org/officeDocument/2006/customXml" ds:itemID="{FCB61E48-E0AD-4F83-9AA4-8AC901918564}">
+  <ds:schemaRefs/>
+</ds:datastoreItem>
+</file>
+
+<file path=customXml/itemProps27.xml><?xml version="1.0" encoding="utf-8"?>
+<ds:datastoreItem xmlns:ds="http://schemas.openxmlformats.org/officeDocument/2006/customXml" ds:itemID="{0AF5DDBE-5E75-48FC-BA21-32ACE2374F30}">
+  <ds:schemaRefs/>
+</ds:datastoreItem>
+</file>
+
+<file path=customXml/itemProps28.xml><?xml version="1.0" encoding="utf-8"?>
+<ds:datastoreItem xmlns:ds="http://schemas.openxmlformats.org/officeDocument/2006/customXml" ds:itemID="{187CDBC8-4301-CA40-9C1E-C2AAF09F8BBD}">
+  <ds:schemaRefs/>
+</ds:datastoreItem>
+</file>
+
+<file path=customXml/itemProps29.xml><?xml version="1.0" encoding="utf-8"?>
+<ds:datastoreItem xmlns:ds="http://schemas.openxmlformats.org/officeDocument/2006/customXml" ds:itemID="{4907208B-9EFE-4124-A198-13AD782B858C}">
+  <ds:schemaRefs/>
+</ds:datastoreItem>
+</file>
+
+<file path=customXml/itemProps3.xml><?xml version="1.0" encoding="utf-8"?>
+<ds:datastoreItem xmlns:ds="http://schemas.openxmlformats.org/officeDocument/2006/customXml" ds:itemID="{8AA700CF-41AC-4CCC-923C-17ED3F632772}">
+  <ds:schemaRefs/>
+</ds:datastoreItem>
+</file>
+
+<file path=customXml/itemProps30.xml><?xml version="1.0" encoding="utf-8"?>
+<ds:datastoreItem xmlns:ds="http://schemas.openxmlformats.org/officeDocument/2006/customXml" ds:itemID="{6567BD5C-CC0C-4648-BED2-6CE28F06E5A9}">
+  <ds:schemaRefs>
+    <ds:schemaRef ds:uri="07c8a24f-8b40-44ca-950f-ae5db2c4fa23"/>
+    <ds:schemaRef ds:uri="71d337dc-809a-4269-a690-d6cd31b4acd0"/>
+    <ds:schemaRef ds:uri="http://purl.org/dc/dcmitype/"/>
+    <ds:schemaRef ds:uri="http://purl.org/dc/elements/1.1/"/>
+    <ds:schemaRef ds:uri="http://purl.org/dc/terms/"/>
+    <ds:schemaRef ds:uri="http://schemas.microsoft.com/office/2006/documentManagement/types"/>
+    <ds:schemaRef ds:uri="http://schemas.microsoft.com/office/2006/metadata/properties"/>
+    <ds:schemaRef ds:uri="http://schemas.microsoft.com/office/infopath/2007/PartnerControls"/>
+    <ds:schemaRef ds:uri="http://schemas.openxmlformats.org/package/2006/metadata/core-properties"/>
+    <ds:schemaRef ds:uri="http://www.w3.org/XML/1998/namespace"/>
+  </ds:schemaRefs>
+</ds:datastoreItem>
+</file>
+
+<file path=customXml/itemProps31.xml><?xml version="1.0" encoding="utf-8"?>
+<ds:datastoreItem xmlns:ds="http://schemas.openxmlformats.org/officeDocument/2006/customXml" ds:itemID="{7D15E2AB-9AA3-4994-B62A-3E2F5C1A2EC4}">
+  <ds:schemaRefs/>
+</ds:datastoreItem>
+</file>
+
+<file path=customXml/itemProps32.xml><?xml version="1.0" encoding="utf-8"?>
+<ds:datastoreItem xmlns:ds="http://schemas.openxmlformats.org/officeDocument/2006/customXml" ds:itemID="{A1DE4887-2FA9-49BA-B8BF-E79FB8D56958}">
+  <ds:schemaRefs/>
+</ds:datastoreItem>
+</file>
+
+<file path=customXml/itemProps33.xml><?xml version="1.0" encoding="utf-8"?>
+<ds:datastoreItem xmlns:ds="http://schemas.openxmlformats.org/officeDocument/2006/customXml" ds:itemID="{DD23DDCC-ABAF-42D1-9CB2-07E72D883C32}">
+  <ds:schemaRefs/>
+</ds:datastoreItem>
+</file>
+
+<file path=customXml/itemProps34.xml><?xml version="1.0" encoding="utf-8"?>
 <ds:datastoreItem xmlns:ds="http://schemas.openxmlformats.org/officeDocument/2006/customXml" ds:itemID="{329B48A9-5067-463C-80F4-7C90FDDEC242}">
   <ds:schemaRefs>
-    <ds:schemaRef ds:uri="http://schemas.microsoft.com/office/2006/metadata/contentType"/>
-    <ds:schemaRef ds:uri="http://schemas.microsoft.com/office/2006/metadata/properties/metaAttributes"/>
-    <ds:schemaRef ds:uri="http://www.w3.org/2001/XMLSchema"/>
-    <ds:schemaRef ds:uri="http://schemas.microsoft.com/office/2006/metadata/properties"/>
     <ds:schemaRef ds:uri="07c8a24f-8b40-44ca-950f-ae5db2c4fa23"/>
     <ds:schemaRef ds:uri="71d337dc-809a-4269-a690-d6cd31b4acd0"/>
-    <ds:schemaRef ds:uri="http://schemas.microsoft.com/office/2006/documentManagement/types"/>
-    <ds:schemaRef ds:uri="http://schemas.microsoft.com/office/infopath/2007/PartnerControls"/>
-    <ds:schemaRef ds:uri="http://schemas.openxmlformats.org/package/2006/metadata/core-properties"/>
     <ds:schemaRef ds:uri="http://purl.org/dc/elements/1.1/"/>
     <ds:schemaRef ds:uri="http://purl.org/dc/terms/"/>
     <ds:schemaRef ds:uri="http://schemas.microsoft.com/internal/obd"/>
+    <ds:schemaRef ds:uri="http://schemas.microsoft.com/office/2006/documentManagement/types"/>
+    <ds:schemaRef ds:uri="http://schemas.microsoft.com/office/2006/metadata/contentType"/>
+    <ds:schemaRef ds:uri="http://schemas.microsoft.com/office/2006/metadata/properties"/>
+    <ds:schemaRef ds:uri="http://schemas.microsoft.com/office/2006/metadata/properties/metaAttributes"/>
+    <ds:schemaRef ds:uri="http://schemas.microsoft.com/office/infopath/2007/PartnerControls"/>
+    <ds:schemaRef ds:uri="http://schemas.openxmlformats.org/package/2006/metadata/core-properties"/>
+    <ds:schemaRef ds:uri="http://www.w3.org/2001/XMLSchema"/>
   </ds:schemaRefs>
 </ds:datastoreItem>
 </file>
 
-<file path=customXml/itemProps5.xml><?xml version="1.0" encoding="utf-8"?>
-<ds:datastoreItem xmlns:ds="http://schemas.openxmlformats.org/officeDocument/2006/customXml" ds:itemID="{B77E3FB8-6B77-4C09-82A2-9AF5ACD3601A}">
+<file path=customXml/itemProps35.xml><?xml version="1.0" encoding="utf-8"?>
+<ds:datastoreItem xmlns:ds="http://schemas.openxmlformats.org/officeDocument/2006/customXml" ds:itemID="{84926F0E-4CF9-4868-9C6A-F4B02CC81AC4}">
   <ds:schemaRefs/>
 </ds:datastoreItem>
 </file>
 
+<file path=customXml/itemProps36.xml><?xml version="1.0" encoding="utf-8"?>
+<ds:datastoreItem xmlns:ds="http://schemas.openxmlformats.org/officeDocument/2006/customXml" ds:itemID="{C9933F99-DED2-42B9-8123-10C71C06D0F5}">
+  <ds:schemaRefs/>
+</ds:datastoreItem>
+</file>
+
+<file path=customXml/itemProps37.xml><?xml version="1.0" encoding="utf-8"?>
+<ds:datastoreItem xmlns:ds="http://schemas.openxmlformats.org/officeDocument/2006/customXml" ds:itemID="{EF9A843C-DEE1-4221-96D6-063228FC0A5C}">
+  <ds:schemaRefs/>
+</ds:datastoreItem>
+</file>
+
+<file path=customXml/itemProps38.xml><?xml version="1.0" encoding="utf-8"?>
+<ds:datastoreItem xmlns:ds="http://schemas.openxmlformats.org/officeDocument/2006/customXml" ds:itemID="{10DF96B0-5AB8-4312-B635-364A70A3CD64}">
+  <ds:schemaRefs/>
+</ds:datastoreItem>
+</file>
+
+<file path=customXml/itemProps39.xml><?xml version="1.0" encoding="utf-8"?>
+<ds:datastoreItem xmlns:ds="http://schemas.openxmlformats.org/officeDocument/2006/customXml" ds:itemID="{2754228B-0BD8-45C5-B5EB-94306059B5EC}">
+  <ds:schemaRefs/>
+</ds:datastoreItem>
+</file>
+
+<file path=customXml/itemProps4.xml><?xml version="1.0" encoding="utf-8"?>
+<ds:datastoreItem xmlns:ds="http://schemas.openxmlformats.org/officeDocument/2006/customXml" ds:itemID="{A35AE265-4942-487E-9782-B0313E5BE5BA}">
+  <ds:schemaRefs/>
+</ds:datastoreItem>
+</file>
+
+<file path=customXml/itemProps40.xml><?xml version="1.0" encoding="utf-8"?>
+<ds:datastoreItem xmlns:ds="http://schemas.openxmlformats.org/officeDocument/2006/customXml" ds:itemID="{45B06F8E-AA4D-4F38-9B8B-099300ECC694}">
+  <ds:schemaRefs/>
+</ds:datastoreItem>
+</file>
+
+<file path=customXml/itemProps41.xml><?xml version="1.0" encoding="utf-8"?>
+<ds:datastoreItem xmlns:ds="http://schemas.openxmlformats.org/officeDocument/2006/customXml" ds:itemID="{55868A80-4CEC-40D9-B298-8CDA543EF6B4}">
+  <ds:schemaRefs/>
+</ds:datastoreItem>
+</file>
+
+<file path=customXml/itemProps42.xml><?xml version="1.0" encoding="utf-8"?>
+<ds:datastoreItem xmlns:ds="http://schemas.openxmlformats.org/officeDocument/2006/customXml" ds:itemID="{AB24DB1C-E169-480A-9390-B8AAE56F6957}">
+  <ds:schemaRefs/>
+</ds:datastoreItem>
+</file>
+
+<file path=customXml/itemProps43.xml><?xml version="1.0" encoding="utf-8"?>
+<ds:datastoreItem xmlns:ds="http://schemas.openxmlformats.org/officeDocument/2006/customXml" ds:itemID="{9B272F4A-5C95-4892-AAD9-D7AEF7A26919}">
+  <ds:schemaRefs/>
+</ds:datastoreItem>
+</file>
+
+<file path=customXml/itemProps44.xml><?xml version="1.0" encoding="utf-8"?>
+<ds:datastoreItem xmlns:ds="http://schemas.openxmlformats.org/officeDocument/2006/customXml" ds:itemID="{DE9A5BE9-B208-45C2-93C1-997B1E18C5E8}">
+  <ds:schemaRefs/>
+</ds:datastoreItem>
+</file>
+
+<file path=customXml/itemProps45.xml><?xml version="1.0" encoding="utf-8"?>
+<ds:datastoreItem xmlns:ds="http://schemas.openxmlformats.org/officeDocument/2006/customXml" ds:itemID="{FFAB5E35-3CC7-4E36-92C6-6DCD3F34D8CF}">
+  <ds:schemaRefs/>
+</ds:datastoreItem>
+</file>
+
+<file path=customXml/itemProps46.xml><?xml version="1.0" encoding="utf-8"?>
+<ds:datastoreItem xmlns:ds="http://schemas.openxmlformats.org/officeDocument/2006/customXml" ds:itemID="{1EEB1A81-9962-42B8-BE89-F24FBB4418EA}">
+  <ds:schemaRefs/>
+</ds:datastoreItem>
+</file>
+
+<file path=customXml/itemProps47.xml><?xml version="1.0" encoding="utf-8"?>
+<ds:datastoreItem xmlns:ds="http://schemas.openxmlformats.org/officeDocument/2006/customXml" ds:itemID="{0D0AC32F-64CA-4FED-863B-4E0877612F21}">
+  <ds:schemaRefs/>
+</ds:datastoreItem>
+</file>
+
+<file path=customXml/itemProps48.xml><?xml version="1.0" encoding="utf-8"?>
+<ds:datastoreItem xmlns:ds="http://schemas.openxmlformats.org/officeDocument/2006/customXml" ds:itemID="{7DDF22D5-378F-4B43-9E2C-6011B6850318}">
+  <ds:schemaRefs/>
+</ds:datastoreItem>
+</file>
+
+<file path=customXml/itemProps49.xml><?xml version="1.0" encoding="utf-8"?>
+<ds:datastoreItem xmlns:ds="http://schemas.openxmlformats.org/officeDocument/2006/customXml" ds:itemID="{664F7CED-B0DA-429D-9A7F-4CBF61D24C26}">
+  <ds:schemaRefs/>
+</ds:datastoreItem>
+</file>
+
+<file path=customXml/itemProps5.xml><?xml version="1.0" encoding="utf-8"?>
+<ds:datastoreItem xmlns:ds="http://schemas.openxmlformats.org/officeDocument/2006/customXml" ds:itemID="{F0F415B7-3B60-D646-8E61-195FAF28F2E9}">
+  <ds:schemaRefs/>
+</ds:datastoreItem>
+</file>
+
 <file path=customXml/itemProps50.xml><?xml version="1.0" encoding="utf-8"?>
+<ds:datastoreItem xmlns:ds="http://schemas.openxmlformats.org/officeDocument/2006/customXml" ds:itemID="{B0437DFC-C606-441B-B8FC-7769CEA71C34}">
+  <ds:schemaRefs/>
+</ds:datastoreItem>
+</file>
+
+<file path=customXml/itemProps51.xml><?xml version="1.0" encoding="utf-8"?>
+<ds:datastoreItem xmlns:ds="http://schemas.openxmlformats.org/officeDocument/2006/customXml" ds:itemID="{D4F2BED0-C414-46BA-AF63-E57A81C2B9FC}">
+  <ds:schemaRefs/>
+</ds:datastoreItem>
+</file>
+
+<file path=customXml/itemProps52.xml><?xml version="1.0" encoding="utf-8"?>
+<ds:datastoreItem xmlns:ds="http://schemas.openxmlformats.org/officeDocument/2006/customXml" ds:itemID="{708F14FE-66F6-4744-AD1D-7632167C0D90}">
+  <ds:schemaRefs/>
+</ds:datastoreItem>
+</file>
+
+<file path=customXml/itemProps53.xml><?xml version="1.0" encoding="utf-8"?>
+<ds:datastoreItem xmlns:ds="http://schemas.openxmlformats.org/officeDocument/2006/customXml" ds:itemID="{5F64DE57-8A63-47CA-A8AA-FC8E23CF697A}">
+  <ds:schemaRefs/>
+</ds:datastoreItem>
+</file>
+
+<file path=customXml/itemProps54.xml><?xml version="1.0" encoding="utf-8"?>
+<ds:datastoreItem xmlns:ds="http://schemas.openxmlformats.org/officeDocument/2006/customXml" ds:itemID="{BA2D1F52-F0AD-4181-AA76-1D6F58ED2D3E}">
+  <ds:schemaRefs/>
+</ds:datastoreItem>
+</file>
+
+<file path=customXml/itemProps55.xml><?xml version="1.0" encoding="utf-8"?>
+<ds:datastoreItem xmlns:ds="http://schemas.openxmlformats.org/officeDocument/2006/customXml" ds:itemID="{DCBF58FE-EC78-4FA4-A4AD-8EA1AF6C427F}">
+  <ds:schemaRefs/>
+</ds:datastoreItem>
+</file>
+
+<file path=customXml/itemProps6.xml><?xml version="1.0" encoding="utf-8"?>
+<ds:datastoreItem xmlns:ds="http://schemas.openxmlformats.org/officeDocument/2006/customXml" ds:itemID="{17B6E611-A877-40D8-9669-147A1865FF06}">
+  <ds:schemaRefs/>
+</ds:datastoreItem>
+</file>
+
+<file path=customXml/itemProps7.xml><?xml version="1.0" encoding="utf-8"?>
 <ds:datastoreItem xmlns:ds="http://schemas.openxmlformats.org/officeDocument/2006/customXml" ds:itemID="{57D5D086-3D49-4363-99E9-93FB10F7001F}">
   <ds:schemaRefs/>
 </ds:datastoreItem>
 </file>
 
-<file path=customXml/itemProps51.xml><?xml version="1.0" encoding="utf-8"?>
-<ds:datastoreItem xmlns:ds="http://schemas.openxmlformats.org/officeDocument/2006/customXml" ds:itemID="{A435609F-4C76-4415-A5FC-BB21AE5C4FD2}">
+<file path=customXml/itemProps8.xml><?xml version="1.0" encoding="utf-8"?>
+<ds:datastoreItem xmlns:ds="http://schemas.openxmlformats.org/officeDocument/2006/customXml" ds:itemID="{46D5571C-37EA-4B1A-965C-D1FF428CABBA}">
   <ds:schemaRefs/>
 </ds:datastoreItem>
 </file>
 
-<file path=customXml/itemProps52.xml><?xml version="1.0" encoding="utf-8"?>
-<ds:datastoreItem xmlns:ds="http://schemas.openxmlformats.org/officeDocument/2006/customXml" ds:itemID="{5F64DE57-8A63-47CA-A8AA-FC8E23CF697A}">
-  <ds:schemaRefs/>
-</ds:datastoreItem>
-</file>
-
-<file path=customXml/itemProps53.xml><?xml version="1.0" encoding="utf-8"?>
-<ds:datastoreItem xmlns:ds="http://schemas.openxmlformats.org/officeDocument/2006/customXml" ds:itemID="{DD23DDCC-ABAF-42D1-9CB2-07E72D883C32}">
-  <ds:schemaRefs/>
-</ds:datastoreItem>
-</file>
-
-<file path=customXml/itemProps54.xml><?xml version="1.0" encoding="utf-8"?>
-<ds:datastoreItem xmlns:ds="http://schemas.openxmlformats.org/officeDocument/2006/customXml" ds:itemID="{FCB61E48-E0AD-4F83-9AA4-8AC901918564}">
-  <ds:schemaRefs/>
-</ds:datastoreItem>
-</file>
-
-<file path=customXml/itemProps55.xml><?xml version="1.0" encoding="utf-8"?>
-<ds:datastoreItem xmlns:ds="http://schemas.openxmlformats.org/officeDocument/2006/customXml" ds:itemID="{0D0AC32F-64CA-4FED-863B-4E0877612F21}">
-  <ds:schemaRefs/>
-</ds:datastoreItem>
-</file>
-
-<file path=customXml/itemProps6.xml><?xml version="1.0" encoding="utf-8"?>
-<ds:datastoreItem xmlns:ds="http://schemas.openxmlformats.org/officeDocument/2006/customXml" ds:itemID="{DCC1EDEA-6109-42CD-9115-6BD85EF38642}">
-  <ds:schemaRefs/>
-</ds:datastoreItem>
-</file>
-
-<file path=customXml/itemProps7.xml><?xml version="1.0" encoding="utf-8"?>
-<ds:datastoreItem xmlns:ds="http://schemas.openxmlformats.org/officeDocument/2006/customXml" ds:itemID="{FFAB5E35-3CC7-4E36-92C6-6DCD3F34D8CF}">
-  <ds:schemaRefs/>
-</ds:datastoreItem>
-</file>
-
-<file path=customXml/itemProps8.xml><?xml version="1.0" encoding="utf-8"?>
-<ds:datastoreItem xmlns:ds="http://schemas.openxmlformats.org/officeDocument/2006/customXml" ds:itemID="{C9933F99-DED2-42B9-8123-10C71C06D0F5}">
-  <ds:schemaRefs/>
-</ds:datastoreItem>
-</file>
-
 <file path=customXml/itemProps9.xml><?xml version="1.0" encoding="utf-8"?>
-<ds:datastoreItem xmlns:ds="http://schemas.openxmlformats.org/officeDocument/2006/customXml" ds:itemID="{552033E5-1422-443A-ABA7-A9FA421D7629}">
+<ds:datastoreItem xmlns:ds="http://schemas.openxmlformats.org/officeDocument/2006/customXml" ds:itemID="{600482A4-E9CD-4DA2-AD6D-ED3DAAC7A90E}">
   <ds:schemaRefs/>
 </ds:datastoreItem>
 </file>

--- a/docs/presentation/cryptoflow.pptx
+++ b/docs/presentation/cryptoflow.pptx
@@ -148,11 +148,17 @@
 </p:presentation>
 </file>
 
+<file path=ppt/authors.xml><?xml version="1.0" encoding="utf-8"?>
+<p188:authorLst xmlns:a="http://schemas.openxmlformats.org/drawingml/2006/main" xmlns:r="http://schemas.openxmlformats.org/officeDocument/2006/relationships" xmlns:p188="http://schemas.microsoft.com/office/powerpoint/2018/8/main">
+  <p188:author id="{2BFCA692-9728-8082-ECD9-498F78147902}" name="Gabriele, Cyril" initials="" userId="S::cyril.gabriele@student.unisg.ch::1be75a10-e39f-4032-8195-d4e5b0ea0b62" providerId="AD"/>
+  <p188:author id="{E1A0EFA6-9B30-97EA-CBE8-AD9642A5FEDF}" name="Theodosiadis, Ioannis" initials="IT" userId="S::ioannis.theodosiadis@student.unisg.ch::3e5ab6a3-7003-4a3e-bd62-affcd0d9d0ec" providerId="AD"/>
+</p188:authorLst>
+</file>
+
 <file path=ppt/revisionInfo.xml><?xml version="1.0" encoding="utf-8"?>
 <p1510:revInfo xmlns:a="http://schemas.openxmlformats.org/drawingml/2006/main" xmlns:r="http://schemas.openxmlformats.org/officeDocument/2006/relationships" xmlns:p1510="http://schemas.microsoft.com/office/powerpoint/2015/10/main">
   <p1510:revLst>
-    <p1510:client id="{B0A1087C-1C87-F64B-8F02-62FA3A69F4E0}" v="1300" dt="2026-04-12T17:37:10.045"/>
-    <p1510:client id="{E5D7D1B7-876E-1386-33E6-EA420D72BC46}" v="1" dt="2026-04-12T15:24:01.910"/>
+    <p1510:client id="{E61B8B2A-525C-7145-9CD3-3609D62FC3F2}" v="17" dt="2026-04-15T18:34:55.883"/>
   </p1510:revLst>
 </p1510:revInfo>
 </file>
@@ -176,9 +182,281 @@
     </pc:docChg>
   </pc:docChgLst>
   <pc:docChgLst>
+    <pc:chgData name="Theodosiadis, Ioannis" userId="3e5ab6a3-7003-4a3e-bd62-affcd0d9d0ec" providerId="ADAL" clId="{F8523F4A-7F4C-54C0-BF9D-D2B47B4F963C}"/>
+    <pc:docChg chg="undo custSel modSld">
+      <pc:chgData name="Theodosiadis, Ioannis" userId="3e5ab6a3-7003-4a3e-bd62-affcd0d9d0ec" providerId="ADAL" clId="{F8523F4A-7F4C-54C0-BF9D-D2B47B4F963C}" dt="2026-04-15T18:37:00.154" v="219" actId="404"/>
+      <pc:docMkLst>
+        <pc:docMk/>
+      </pc:docMkLst>
+      <pc:sldChg chg="addSp modSp mod">
+        <pc:chgData name="Theodosiadis, Ioannis" userId="3e5ab6a3-7003-4a3e-bd62-affcd0d9d0ec" providerId="ADAL" clId="{F8523F4A-7F4C-54C0-BF9D-D2B47B4F963C}" dt="2026-04-15T18:33:42.215" v="199" actId="2085"/>
+        <pc:sldMkLst>
+          <pc:docMk/>
+          <pc:sldMk cId="0" sldId="257"/>
+        </pc:sldMkLst>
+        <pc:spChg chg="add mod">
+          <ac:chgData name="Theodosiadis, Ioannis" userId="3e5ab6a3-7003-4a3e-bd62-affcd0d9d0ec" providerId="ADAL" clId="{F8523F4A-7F4C-54C0-BF9D-D2B47B4F963C}" dt="2026-04-15T18:33:42.215" v="199" actId="2085"/>
+          <ac:spMkLst>
+            <pc:docMk/>
+            <pc:sldMk cId="0" sldId="257"/>
+            <ac:spMk id="4" creationId="{61D9E05C-EFDA-C38E-1060-691E99E439D1}"/>
+          </ac:spMkLst>
+        </pc:spChg>
+      </pc:sldChg>
+      <pc:sldChg chg="addSp modSp">
+        <pc:chgData name="Theodosiadis, Ioannis" userId="3e5ab6a3-7003-4a3e-bd62-affcd0d9d0ec" providerId="ADAL" clId="{F8523F4A-7F4C-54C0-BF9D-D2B47B4F963C}" dt="2026-04-15T18:34:25.121" v="216"/>
+        <pc:sldMkLst>
+          <pc:docMk/>
+          <pc:sldMk cId="0" sldId="258"/>
+        </pc:sldMkLst>
+        <pc:spChg chg="add mod">
+          <ac:chgData name="Theodosiadis, Ioannis" userId="3e5ab6a3-7003-4a3e-bd62-affcd0d9d0ec" providerId="ADAL" clId="{F8523F4A-7F4C-54C0-BF9D-D2B47B4F963C}" dt="2026-04-15T18:33:50.786" v="200"/>
+          <ac:spMkLst>
+            <pc:docMk/>
+            <pc:sldMk cId="0" sldId="258"/>
+            <ac:spMk id="5" creationId="{86516D82-9D37-78AB-9479-BFD317259EFF}"/>
+          </ac:spMkLst>
+        </pc:spChg>
+        <pc:spChg chg="add mod">
+          <ac:chgData name="Theodosiadis, Ioannis" userId="3e5ab6a3-7003-4a3e-bd62-affcd0d9d0ec" providerId="ADAL" clId="{F8523F4A-7F4C-54C0-BF9D-D2B47B4F963C}" dt="2026-04-15T18:34:25.121" v="216"/>
+          <ac:spMkLst>
+            <pc:docMk/>
+            <pc:sldMk cId="0" sldId="258"/>
+            <ac:spMk id="7" creationId="{F0C146E2-3C8A-85DD-101D-6665FB99E2A5}"/>
+          </ac:spMkLst>
+        </pc:spChg>
+      </pc:sldChg>
+      <pc:sldChg chg="addSp modSp">
+        <pc:chgData name="Theodosiadis, Ioannis" userId="3e5ab6a3-7003-4a3e-bd62-affcd0d9d0ec" providerId="ADAL" clId="{F8523F4A-7F4C-54C0-BF9D-D2B47B4F963C}" dt="2026-04-15T18:34:22.739" v="214"/>
+        <pc:sldMkLst>
+          <pc:docMk/>
+          <pc:sldMk cId="0" sldId="259"/>
+        </pc:sldMkLst>
+        <pc:spChg chg="add mod">
+          <ac:chgData name="Theodosiadis, Ioannis" userId="3e5ab6a3-7003-4a3e-bd62-affcd0d9d0ec" providerId="ADAL" clId="{F8523F4A-7F4C-54C0-BF9D-D2B47B4F963C}" dt="2026-04-15T18:34:22.739" v="214"/>
+          <ac:spMkLst>
+            <pc:docMk/>
+            <pc:sldMk cId="0" sldId="259"/>
+            <ac:spMk id="5" creationId="{1135BB86-BD57-C330-94E7-2FB3FBCF34A7}"/>
+          </ac:spMkLst>
+        </pc:spChg>
+      </pc:sldChg>
+      <pc:sldChg chg="addSp modSp mod">
+        <pc:chgData name="Theodosiadis, Ioannis" userId="3e5ab6a3-7003-4a3e-bd62-affcd0d9d0ec" providerId="ADAL" clId="{F8523F4A-7F4C-54C0-BF9D-D2B47B4F963C}" dt="2026-04-15T18:37:00.154" v="219" actId="404"/>
+        <pc:sldMkLst>
+          <pc:docMk/>
+          <pc:sldMk cId="0" sldId="262"/>
+        </pc:sldMkLst>
+        <pc:spChg chg="mod">
+          <ac:chgData name="Theodosiadis, Ioannis" userId="3e5ab6a3-7003-4a3e-bd62-affcd0d9d0ec" providerId="ADAL" clId="{F8523F4A-7F4C-54C0-BF9D-D2B47B4F963C}" dt="2026-04-15T18:37:00.154" v="219" actId="404"/>
+          <ac:spMkLst>
+            <pc:docMk/>
+            <pc:sldMk cId="0" sldId="262"/>
+            <ac:spMk id="3" creationId="{00000000-0000-0000-0000-000000000000}"/>
+          </ac:spMkLst>
+        </pc:spChg>
+        <pc:spChg chg="add mod">
+          <ac:chgData name="Theodosiadis, Ioannis" userId="3e5ab6a3-7003-4a3e-bd62-affcd0d9d0ec" providerId="ADAL" clId="{F8523F4A-7F4C-54C0-BF9D-D2B47B4F963C}" dt="2026-04-15T18:34:21.333" v="213"/>
+          <ac:spMkLst>
+            <pc:docMk/>
+            <pc:sldMk cId="0" sldId="262"/>
+            <ac:spMk id="5" creationId="{A99E5A74-B06E-BBF2-82BC-B1028D8ABD96}"/>
+          </ac:spMkLst>
+        </pc:spChg>
+      </pc:sldChg>
+      <pc:sldChg chg="addSp modSp">
+        <pc:chgData name="Theodosiadis, Ioannis" userId="3e5ab6a3-7003-4a3e-bd62-affcd0d9d0ec" providerId="ADAL" clId="{F8523F4A-7F4C-54C0-BF9D-D2B47B4F963C}" dt="2026-04-15T18:34:19.785" v="212"/>
+        <pc:sldMkLst>
+          <pc:docMk/>
+          <pc:sldMk cId="0" sldId="263"/>
+        </pc:sldMkLst>
+        <pc:spChg chg="add mod">
+          <ac:chgData name="Theodosiadis, Ioannis" userId="3e5ab6a3-7003-4a3e-bd62-affcd0d9d0ec" providerId="ADAL" clId="{F8523F4A-7F4C-54C0-BF9D-D2B47B4F963C}" dt="2026-04-15T18:34:19.785" v="212"/>
+          <ac:spMkLst>
+            <pc:docMk/>
+            <pc:sldMk cId="0" sldId="263"/>
+            <ac:spMk id="5" creationId="{D7811D09-FB76-8323-71C7-33E032576060}"/>
+          </ac:spMkLst>
+        </pc:spChg>
+      </pc:sldChg>
+      <pc:sldChg chg="addSp modSp">
+        <pc:chgData name="Theodosiadis, Ioannis" userId="3e5ab6a3-7003-4a3e-bd62-affcd0d9d0ec" providerId="ADAL" clId="{F8523F4A-7F4C-54C0-BF9D-D2B47B4F963C}" dt="2026-04-15T18:34:13.240" v="211"/>
+        <pc:sldMkLst>
+          <pc:docMk/>
+          <pc:sldMk cId="0" sldId="264"/>
+        </pc:sldMkLst>
+        <pc:spChg chg="add mod">
+          <ac:chgData name="Theodosiadis, Ioannis" userId="3e5ab6a3-7003-4a3e-bd62-affcd0d9d0ec" providerId="ADAL" clId="{F8523F4A-7F4C-54C0-BF9D-D2B47B4F963C}" dt="2026-04-15T18:34:13.240" v="211"/>
+          <ac:spMkLst>
+            <pc:docMk/>
+            <pc:sldMk cId="0" sldId="264"/>
+            <ac:spMk id="3" creationId="{BFA9E884-AC95-7984-2CEA-26ADDDD8BA5D}"/>
+          </ac:spMkLst>
+        </pc:spChg>
+      </pc:sldChg>
+      <pc:sldChg chg="addSp modSp">
+        <pc:chgData name="Theodosiadis, Ioannis" userId="3e5ab6a3-7003-4a3e-bd62-affcd0d9d0ec" providerId="ADAL" clId="{F8523F4A-7F4C-54C0-BF9D-D2B47B4F963C}" dt="2026-04-15T18:34:12.300" v="210"/>
+        <pc:sldMkLst>
+          <pc:docMk/>
+          <pc:sldMk cId="0" sldId="265"/>
+        </pc:sldMkLst>
+        <pc:spChg chg="add mod">
+          <ac:chgData name="Theodosiadis, Ioannis" userId="3e5ab6a3-7003-4a3e-bd62-affcd0d9d0ec" providerId="ADAL" clId="{F8523F4A-7F4C-54C0-BF9D-D2B47B4F963C}" dt="2026-04-15T18:34:12.300" v="210"/>
+          <ac:spMkLst>
+            <pc:docMk/>
+            <pc:sldMk cId="0" sldId="265"/>
+            <ac:spMk id="5" creationId="{735374E2-F5BF-9E8D-5673-7D4F7970FCAE}"/>
+          </ac:spMkLst>
+        </pc:spChg>
+      </pc:sldChg>
+      <pc:sldChg chg="addSp modSp">
+        <pc:chgData name="Theodosiadis, Ioannis" userId="3e5ab6a3-7003-4a3e-bd62-affcd0d9d0ec" providerId="ADAL" clId="{F8523F4A-7F4C-54C0-BF9D-D2B47B4F963C}" dt="2026-04-15T18:34:11.597" v="209"/>
+        <pc:sldMkLst>
+          <pc:docMk/>
+          <pc:sldMk cId="0" sldId="266"/>
+        </pc:sldMkLst>
+        <pc:spChg chg="add mod">
+          <ac:chgData name="Theodosiadis, Ioannis" userId="3e5ab6a3-7003-4a3e-bd62-affcd0d9d0ec" providerId="ADAL" clId="{F8523F4A-7F4C-54C0-BF9D-D2B47B4F963C}" dt="2026-04-15T18:34:11.597" v="209"/>
+          <ac:spMkLst>
+            <pc:docMk/>
+            <pc:sldMk cId="0" sldId="266"/>
+            <ac:spMk id="5" creationId="{E38A3897-1D26-FE5E-A233-BCD4D720EBA4}"/>
+          </ac:spMkLst>
+        </pc:spChg>
+      </pc:sldChg>
+      <pc:sldChg chg="addSp modSp">
+        <pc:chgData name="Theodosiadis, Ioannis" userId="3e5ab6a3-7003-4a3e-bd62-affcd0d9d0ec" providerId="ADAL" clId="{F8523F4A-7F4C-54C0-BF9D-D2B47B4F963C}" dt="2026-04-15T18:34:10.966" v="208"/>
+        <pc:sldMkLst>
+          <pc:docMk/>
+          <pc:sldMk cId="0" sldId="267"/>
+        </pc:sldMkLst>
+        <pc:spChg chg="add mod">
+          <ac:chgData name="Theodosiadis, Ioannis" userId="3e5ab6a3-7003-4a3e-bd62-affcd0d9d0ec" providerId="ADAL" clId="{F8523F4A-7F4C-54C0-BF9D-D2B47B4F963C}" dt="2026-04-15T18:34:10.966" v="208"/>
+          <ac:spMkLst>
+            <pc:docMk/>
+            <pc:sldMk cId="0" sldId="267"/>
+            <ac:spMk id="3" creationId="{0C8697EE-FD77-D792-4B92-B6B34B5BBB82}"/>
+          </ac:spMkLst>
+        </pc:spChg>
+      </pc:sldChg>
+      <pc:sldChg chg="addSp modSp">
+        <pc:chgData name="Theodosiadis, Ioannis" userId="3e5ab6a3-7003-4a3e-bd62-affcd0d9d0ec" providerId="ADAL" clId="{F8523F4A-7F4C-54C0-BF9D-D2B47B4F963C}" dt="2026-04-15T18:34:09.167" v="207"/>
+        <pc:sldMkLst>
+          <pc:docMk/>
+          <pc:sldMk cId="0" sldId="269"/>
+        </pc:sldMkLst>
+        <pc:spChg chg="add mod">
+          <ac:chgData name="Theodosiadis, Ioannis" userId="3e5ab6a3-7003-4a3e-bd62-affcd0d9d0ec" providerId="ADAL" clId="{F8523F4A-7F4C-54C0-BF9D-D2B47B4F963C}" dt="2026-04-15T18:34:09.167" v="207"/>
+          <ac:spMkLst>
+            <pc:docMk/>
+            <pc:sldMk cId="0" sldId="269"/>
+            <ac:spMk id="5" creationId="{0F913F75-48DE-A207-2463-50421F55CEF3}"/>
+          </ac:spMkLst>
+        </pc:spChg>
+      </pc:sldChg>
+      <pc:sldChg chg="addSp modSp">
+        <pc:chgData name="Theodosiadis, Ioannis" userId="3e5ab6a3-7003-4a3e-bd62-affcd0d9d0ec" providerId="ADAL" clId="{F8523F4A-7F4C-54C0-BF9D-D2B47B4F963C}" dt="2026-04-15T18:34:07.212" v="206"/>
+        <pc:sldMkLst>
+          <pc:docMk/>
+          <pc:sldMk cId="0" sldId="270"/>
+        </pc:sldMkLst>
+        <pc:spChg chg="add mod">
+          <ac:chgData name="Theodosiadis, Ioannis" userId="3e5ab6a3-7003-4a3e-bd62-affcd0d9d0ec" providerId="ADAL" clId="{F8523F4A-7F4C-54C0-BF9D-D2B47B4F963C}" dt="2026-04-15T18:34:07.212" v="206"/>
+          <ac:spMkLst>
+            <pc:docMk/>
+            <pc:sldMk cId="0" sldId="270"/>
+            <ac:spMk id="5" creationId="{50DFA382-58E9-25A7-5169-A90D78FFF4BE}"/>
+          </ac:spMkLst>
+        </pc:spChg>
+      </pc:sldChg>
+      <pc:sldChg chg="addSp delSp modSp mod modCm">
+        <pc:chgData name="Theodosiadis, Ioannis" userId="3e5ab6a3-7003-4a3e-bd62-affcd0d9d0ec" providerId="ADAL" clId="{F8523F4A-7F4C-54C0-BF9D-D2B47B4F963C}" dt="2026-04-15T18:34:24.235" v="215"/>
+        <pc:sldMkLst>
+          <pc:docMk/>
+          <pc:sldMk cId="3410646215" sldId="274"/>
+        </pc:sldMkLst>
+        <pc:spChg chg="mod">
+          <ac:chgData name="Theodosiadis, Ioannis" userId="3e5ab6a3-7003-4a3e-bd62-affcd0d9d0ec" providerId="ADAL" clId="{F8523F4A-7F4C-54C0-BF9D-D2B47B4F963C}" dt="2026-04-13T15:44:01.986" v="164" actId="20577"/>
+          <ac:spMkLst>
+            <pc:docMk/>
+            <pc:sldMk cId="3410646215" sldId="274"/>
+            <ac:spMk id="2" creationId="{00000000-0000-0000-0000-000000000000}"/>
+          </ac:spMkLst>
+        </pc:spChg>
+        <pc:spChg chg="add mod">
+          <ac:chgData name="Theodosiadis, Ioannis" userId="3e5ab6a3-7003-4a3e-bd62-affcd0d9d0ec" providerId="ADAL" clId="{F8523F4A-7F4C-54C0-BF9D-D2B47B4F963C}" dt="2026-04-15T18:34:24.235" v="215"/>
+          <ac:spMkLst>
+            <pc:docMk/>
+            <pc:sldMk cId="3410646215" sldId="274"/>
+            <ac:spMk id="3" creationId="{5D9DF689-BC35-62B4-3820-8B811AF4715E}"/>
+          </ac:spMkLst>
+        </pc:spChg>
+        <pc:spChg chg="mod">
+          <ac:chgData name="Theodosiadis, Ioannis" userId="3e5ab6a3-7003-4a3e-bd62-affcd0d9d0ec" providerId="ADAL" clId="{F8523F4A-7F4C-54C0-BF9D-D2B47B4F963C}" dt="2026-04-13T15:57:01.624" v="194" actId="113"/>
+          <ac:spMkLst>
+            <pc:docMk/>
+            <pc:sldMk cId="3410646215" sldId="274"/>
+            <ac:spMk id="7" creationId="{FFEC9FEF-08AE-EFBD-0A20-22A2B916E1D0}"/>
+          </ac:spMkLst>
+        </pc:spChg>
+        <pc:extLst>
+          <p:ext xmlns:p="http://schemas.openxmlformats.org/presentationml/2006/main" uri="{D6D511B9-2390-475A-947B-AFAB55BFBCF1}">
+            <pc226:cmChg xmlns:pc226="http://schemas.microsoft.com/office/powerpoint/2022/06/main/command" chg="mod">
+              <pc226:chgData name="Theodosiadis, Ioannis" userId="3e5ab6a3-7003-4a3e-bd62-affcd0d9d0ec" providerId="ADAL" clId="{F8523F4A-7F4C-54C0-BF9D-D2B47B4F963C}" dt="2026-04-13T15:54:19.721" v="185" actId="20577"/>
+              <pc2:cmMkLst xmlns:pc2="http://schemas.microsoft.com/office/powerpoint/2019/9/main/command">
+                <pc:docMk/>
+                <pc:sldMk cId="3410646215" sldId="274"/>
+                <pc2:cmMk id="{A347C1F4-CFBB-4943-9283-33B4056E088F}"/>
+              </pc2:cmMkLst>
+            </pc226:cmChg>
+          </p:ext>
+        </pc:extLst>
+      </pc:sldChg>
+      <pc:sldChg chg="addSp delSp modSp mod">
+        <pc:chgData name="Theodosiadis, Ioannis" userId="3e5ab6a3-7003-4a3e-bd62-affcd0d9d0ec" providerId="ADAL" clId="{F8523F4A-7F4C-54C0-BF9D-D2B47B4F963C}" dt="2026-04-15T18:34:55.883" v="218"/>
+        <pc:sldMkLst>
+          <pc:docMk/>
+          <pc:sldMk cId="2996261185" sldId="275"/>
+        </pc:sldMkLst>
+        <pc:spChg chg="add mod">
+          <ac:chgData name="Theodosiadis, Ioannis" userId="3e5ab6a3-7003-4a3e-bd62-affcd0d9d0ec" providerId="ADAL" clId="{F8523F4A-7F4C-54C0-BF9D-D2B47B4F963C}" dt="2026-04-15T18:34:03.107" v="205" actId="1035"/>
+          <ac:spMkLst>
+            <pc:docMk/>
+            <pc:sldMk cId="2996261185" sldId="275"/>
+            <ac:spMk id="3" creationId="{BE8C2E73-443B-1ADF-A385-CFD84D950D01}"/>
+          </ac:spMkLst>
+        </pc:spChg>
+        <pc:spChg chg="del">
+          <ac:chgData name="Theodosiadis, Ioannis" userId="3e5ab6a3-7003-4a3e-bd62-affcd0d9d0ec" providerId="ADAL" clId="{F8523F4A-7F4C-54C0-BF9D-D2B47B4F963C}" dt="2026-04-15T18:34:55.194" v="217" actId="478"/>
+          <ac:spMkLst>
+            <pc:docMk/>
+            <pc:sldMk cId="2996261185" sldId="275"/>
+            <ac:spMk id="4" creationId="{F29099E5-CEB2-12DF-32D9-6AEF073823DA}"/>
+          </ac:spMkLst>
+        </pc:spChg>
+        <pc:spChg chg="add mod">
+          <ac:chgData name="Theodosiadis, Ioannis" userId="3e5ab6a3-7003-4a3e-bd62-affcd0d9d0ec" providerId="ADAL" clId="{F8523F4A-7F4C-54C0-BF9D-D2B47B4F963C}" dt="2026-04-15T18:34:00.133" v="203"/>
+          <ac:spMkLst>
+            <pc:docMk/>
+            <pc:sldMk cId="2996261185" sldId="275"/>
+            <ac:spMk id="5" creationId="{3978DAB5-DB6F-2B74-CBA9-7882FB4446AE}"/>
+          </ac:spMkLst>
+        </pc:spChg>
+        <pc:spChg chg="add mod">
+          <ac:chgData name="Theodosiadis, Ioannis" userId="3e5ab6a3-7003-4a3e-bd62-affcd0d9d0ec" providerId="ADAL" clId="{F8523F4A-7F4C-54C0-BF9D-D2B47B4F963C}" dt="2026-04-15T18:34:55.883" v="218"/>
+          <ac:spMkLst>
+            <pc:docMk/>
+            <pc:sldMk cId="2996261185" sldId="275"/>
+            <ac:spMk id="6" creationId="{A62C041B-3188-72C0-1B1B-672F7EE7F362}"/>
+          </ac:spMkLst>
+        </pc:spChg>
+      </pc:sldChg>
+    </pc:docChg>
+  </pc:docChgLst>
+  <pc:docChgLst>
     <pc:chgData name="Gabriele, Cyril" userId="1be75a10-e39f-4032-8195-d4e5b0ea0b62" providerId="ADAL" clId="{B0A1087C-1C87-F64B-8F02-62FA3A69F4E0}"/>
     <pc:docChg chg="undo custSel addSld delSld modSld">
-      <pc:chgData name="Gabriele, Cyril" userId="1be75a10-e39f-4032-8195-d4e5b0ea0b62" providerId="ADAL" clId="{B0A1087C-1C87-F64B-8F02-62FA3A69F4E0}" dt="2026-04-12T17:37:10.045" v="1305" actId="207"/>
+      <pc:chgData name="Gabriele, Cyril" userId="1be75a10-e39f-4032-8195-d4e5b0ea0b62" providerId="ADAL" clId="{B0A1087C-1C87-F64B-8F02-62FA3A69F4E0}" dt="2026-04-13T11:03:56.613" v="1313"/>
       <pc:docMkLst>
         <pc:docMk/>
       </pc:docMkLst>
@@ -217,38 +495,6 @@
             <pc:docMk/>
             <pc:sldMk cId="0" sldId="257"/>
             <ac:spMk id="3" creationId="{00000000-0000-0000-0000-000000000000}"/>
-          </ac:spMkLst>
-        </pc:spChg>
-        <pc:spChg chg="add del mod">
-          <ac:chgData name="Gabriele, Cyril" userId="1be75a10-e39f-4032-8195-d4e5b0ea0b62" providerId="ADAL" clId="{B0A1087C-1C87-F64B-8F02-62FA3A69F4E0}" dt="2026-04-12T15:50:04.199" v="415"/>
-          <ac:spMkLst>
-            <pc:docMk/>
-            <pc:sldMk cId="0" sldId="257"/>
-            <ac:spMk id="4" creationId="{82F7E517-7B99-745D-B957-32F7CC0E8A98}"/>
-          </ac:spMkLst>
-        </pc:spChg>
-        <pc:spChg chg="add del mod">
-          <ac:chgData name="Gabriele, Cyril" userId="1be75a10-e39f-4032-8195-d4e5b0ea0b62" providerId="ADAL" clId="{B0A1087C-1C87-F64B-8F02-62FA3A69F4E0}" dt="2026-04-12T15:50:04.199" v="413"/>
-          <ac:spMkLst>
-            <pc:docMk/>
-            <pc:sldMk cId="0" sldId="257"/>
-            <ac:spMk id="5" creationId="{2F784B29-1FDD-E94C-EA11-B1436FDA66D2}"/>
-          </ac:spMkLst>
-        </pc:spChg>
-        <pc:spChg chg="add del mod">
-          <ac:chgData name="Gabriele, Cyril" userId="1be75a10-e39f-4032-8195-d4e5b0ea0b62" providerId="ADAL" clId="{B0A1087C-1C87-F64B-8F02-62FA3A69F4E0}" dt="2026-04-12T15:50:03.976" v="411"/>
-          <ac:spMkLst>
-            <pc:docMk/>
-            <pc:sldMk cId="0" sldId="257"/>
-            <ac:spMk id="7" creationId="{94F25265-D12F-4DEE-082D-7954606B1CB8}"/>
-          </ac:spMkLst>
-        </pc:spChg>
-        <pc:spChg chg="add del mod">
-          <ac:chgData name="Gabriele, Cyril" userId="1be75a10-e39f-4032-8195-d4e5b0ea0b62" providerId="ADAL" clId="{B0A1087C-1C87-F64B-8F02-62FA3A69F4E0}" dt="2026-04-12T15:50:04.685" v="417"/>
-          <ac:spMkLst>
-            <pc:docMk/>
-            <pc:sldMk cId="0" sldId="257"/>
-            <ac:spMk id="8" creationId="{D6ABCC4C-3B69-2D5F-5711-00F46605743F}"/>
           </ac:spMkLst>
         </pc:spChg>
       </pc:sldChg>
@@ -297,22 +543,6 @@
             <ac:spMk id="3" creationId="{00000000-0000-0000-0000-000000000000}"/>
           </ac:spMkLst>
         </pc:spChg>
-        <pc:spChg chg="add del mod">
-          <ac:chgData name="Gabriele, Cyril" userId="1be75a10-e39f-4032-8195-d4e5b0ea0b62" providerId="ADAL" clId="{B0A1087C-1C87-F64B-8F02-62FA3A69F4E0}" dt="2026-04-12T15:31:15.894" v="245"/>
-          <ac:spMkLst>
-            <pc:docMk/>
-            <pc:sldMk cId="0" sldId="259"/>
-            <ac:spMk id="5" creationId="{32C34B0F-AE5D-94DF-0528-CCAF6CB7E46B}"/>
-          </ac:spMkLst>
-        </pc:spChg>
-        <pc:spChg chg="add mod">
-          <ac:chgData name="Gabriele, Cyril" userId="1be75a10-e39f-4032-8195-d4e5b0ea0b62" providerId="ADAL" clId="{B0A1087C-1C87-F64B-8F02-62FA3A69F4E0}" dt="2026-04-12T16:04:18.992" v="508" actId="571"/>
-          <ac:spMkLst>
-            <pc:docMk/>
-            <pc:sldMk cId="0" sldId="259"/>
-            <ac:spMk id="7" creationId="{01747B22-E7C6-BB49-1488-E3AFB53DEC4D}"/>
-          </ac:spMkLst>
-        </pc:spChg>
         <pc:picChg chg="mod">
           <ac:chgData name="Gabriele, Cyril" userId="1be75a10-e39f-4032-8195-d4e5b0ea0b62" providerId="ADAL" clId="{B0A1087C-1C87-F64B-8F02-62FA3A69F4E0}" dt="2026-04-12T16:04:13.861" v="506" actId="1076"/>
           <ac:picMkLst>
@@ -321,20 +551,6 @@
             <ac:picMk id="4" creationId="{00000000-0000-0000-0000-000000000000}"/>
           </ac:picMkLst>
         </pc:picChg>
-      </pc:sldChg>
-      <pc:sldChg chg="del">
-        <pc:chgData name="Gabriele, Cyril" userId="1be75a10-e39f-4032-8195-d4e5b0ea0b62" providerId="ADAL" clId="{B0A1087C-1C87-F64B-8F02-62FA3A69F4E0}" dt="2026-04-12T15:21:30.350" v="0" actId="2696"/>
-        <pc:sldMkLst>
-          <pc:docMk/>
-          <pc:sldMk cId="0" sldId="260"/>
-        </pc:sldMkLst>
-      </pc:sldChg>
-      <pc:sldChg chg="del">
-        <pc:chgData name="Gabriele, Cyril" userId="1be75a10-e39f-4032-8195-d4e5b0ea0b62" providerId="ADAL" clId="{B0A1087C-1C87-F64B-8F02-62FA3A69F4E0}" dt="2026-04-12T15:21:30.350" v="0" actId="2696"/>
-        <pc:sldMkLst>
-          <pc:docMk/>
-          <pc:sldMk cId="0" sldId="261"/>
-        </pc:sldMkLst>
       </pc:sldChg>
       <pc:sldChg chg="modSp mod">
         <pc:chgData name="Gabriele, Cyril" userId="1be75a10-e39f-4032-8195-d4e5b0ea0b62" providerId="ADAL" clId="{B0A1087C-1C87-F64B-8F02-62FA3A69F4E0}" dt="2026-04-12T16:21:04.344" v="779" actId="113"/>
@@ -396,14 +612,6 @@
             <ac:spMk id="2" creationId="{00000000-0000-0000-0000-000000000000}"/>
           </ac:spMkLst>
         </pc:spChg>
-        <pc:spChg chg="del mod">
-          <ac:chgData name="Gabriele, Cyril" userId="1be75a10-e39f-4032-8195-d4e5b0ea0b62" providerId="ADAL" clId="{B0A1087C-1C87-F64B-8F02-62FA3A69F4E0}" dt="2026-04-12T16:16:52.921" v="651" actId="478"/>
-          <ac:spMkLst>
-            <pc:docMk/>
-            <pc:sldMk cId="0" sldId="264"/>
-            <ac:spMk id="3" creationId="{00000000-0000-0000-0000-000000000000}"/>
-          </ac:spMkLst>
-        </pc:spChg>
         <pc:picChg chg="mod">
           <ac:chgData name="Gabriele, Cyril" userId="1be75a10-e39f-4032-8195-d4e5b0ea0b62" providerId="ADAL" clId="{B0A1087C-1C87-F64B-8F02-62FA3A69F4E0}" dt="2026-04-12T16:17:02.932" v="654" actId="1076"/>
           <ac:picMkLst>
@@ -437,7 +645,7 @@
         </pc:spChg>
       </pc:sldChg>
       <pc:sldChg chg="addSp delSp modSp mod modAnim modNotesTx">
-        <pc:chgData name="Gabriele, Cyril" userId="1be75a10-e39f-4032-8195-d4e5b0ea0b62" providerId="ADAL" clId="{B0A1087C-1C87-F64B-8F02-62FA3A69F4E0}" dt="2026-04-12T17:30:57.474" v="1235"/>
+        <pc:chgData name="Gabriele, Cyril" userId="1be75a10-e39f-4032-8195-d4e5b0ea0b62" providerId="ADAL" clId="{B0A1087C-1C87-F64B-8F02-62FA3A69F4E0}" dt="2026-04-13T07:18:57.623" v="1312" actId="1076"/>
         <pc:sldMkLst>
           <pc:docMk/>
           <pc:sldMk cId="0" sldId="266"/>
@@ -458,16 +666,8 @@
             <ac:spMk id="3" creationId="{00000000-0000-0000-0000-000000000000}"/>
           </ac:spMkLst>
         </pc:spChg>
-        <pc:spChg chg="add del mod">
-          <ac:chgData name="Gabriele, Cyril" userId="1be75a10-e39f-4032-8195-d4e5b0ea0b62" providerId="ADAL" clId="{B0A1087C-1C87-F64B-8F02-62FA3A69F4E0}" dt="2026-04-12T16:28:02.531" v="951" actId="478"/>
-          <ac:spMkLst>
-            <pc:docMk/>
-            <pc:sldMk cId="0" sldId="266"/>
-            <ac:spMk id="5" creationId="{6059272D-4E14-A6D8-D546-6DF8D5901240}"/>
-          </ac:spMkLst>
-        </pc:spChg>
         <pc:spChg chg="add mod">
-          <ac:chgData name="Gabriele, Cyril" userId="1be75a10-e39f-4032-8195-d4e5b0ea0b62" providerId="ADAL" clId="{B0A1087C-1C87-F64B-8F02-62FA3A69F4E0}" dt="2026-04-12T16:30:16.710" v="988" actId="113"/>
+          <ac:chgData name="Gabriele, Cyril" userId="1be75a10-e39f-4032-8195-d4e5b0ea0b62" providerId="ADAL" clId="{B0A1087C-1C87-F64B-8F02-62FA3A69F4E0}" dt="2026-04-13T07:18:37.029" v="1308" actId="14100"/>
           <ac:spMkLst>
             <pc:docMk/>
             <pc:sldMk cId="0" sldId="266"/>
@@ -475,7 +675,7 @@
           </ac:spMkLst>
         </pc:spChg>
         <pc:spChg chg="add mod">
-          <ac:chgData name="Gabriele, Cyril" userId="1be75a10-e39f-4032-8195-d4e5b0ea0b62" providerId="ADAL" clId="{B0A1087C-1C87-F64B-8F02-62FA3A69F4E0}" dt="2026-04-12T16:30:17.743" v="989" actId="113"/>
+          <ac:chgData name="Gabriele, Cyril" userId="1be75a10-e39f-4032-8195-d4e5b0ea0b62" providerId="ADAL" clId="{B0A1087C-1C87-F64B-8F02-62FA3A69F4E0}" dt="2026-04-13T07:18:42.826" v="1310" actId="1076"/>
           <ac:spMkLst>
             <pc:docMk/>
             <pc:sldMk cId="0" sldId="266"/>
@@ -491,7 +691,7 @@
           </ac:spMkLst>
         </pc:spChg>
         <pc:cxnChg chg="add mod">
-          <ac:chgData name="Gabriele, Cyril" userId="1be75a10-e39f-4032-8195-d4e5b0ea0b62" providerId="ADAL" clId="{B0A1087C-1C87-F64B-8F02-62FA3A69F4E0}" dt="2026-04-12T16:31:54.672" v="1053" actId="1076"/>
+          <ac:chgData name="Gabriele, Cyril" userId="1be75a10-e39f-4032-8195-d4e5b0ea0b62" providerId="ADAL" clId="{B0A1087C-1C87-F64B-8F02-62FA3A69F4E0}" dt="2026-04-13T07:18:57.623" v="1312" actId="1076"/>
           <ac:cxnSpMkLst>
             <pc:docMk/>
             <pc:sldMk cId="0" sldId="266"/>
@@ -513,14 +713,6 @@
             <ac:spMk id="2" creationId="{00000000-0000-0000-0000-000000000000}"/>
           </ac:spMkLst>
         </pc:spChg>
-        <pc:spChg chg="del mod">
-          <ac:chgData name="Gabriele, Cyril" userId="1be75a10-e39f-4032-8195-d4e5b0ea0b62" providerId="ADAL" clId="{B0A1087C-1C87-F64B-8F02-62FA3A69F4E0}" dt="2026-04-12T16:32:11.571" v="1058" actId="478"/>
-          <ac:spMkLst>
-            <pc:docMk/>
-            <pc:sldMk cId="0" sldId="267"/>
-            <ac:spMk id="3" creationId="{00000000-0000-0000-0000-000000000000}"/>
-          </ac:spMkLst>
-        </pc:spChg>
         <pc:picChg chg="mod">
           <ac:chgData name="Gabriele, Cyril" userId="1be75a10-e39f-4032-8195-d4e5b0ea0b62" providerId="ADAL" clId="{B0A1087C-1C87-F64B-8F02-62FA3A69F4E0}" dt="2026-04-12T16:32:28.631" v="1063" actId="1076"/>
           <ac:picMkLst>
@@ -529,21 +721,6 @@
             <ac:picMk id="4" creationId="{00000000-0000-0000-0000-000000000000}"/>
           </ac:picMkLst>
         </pc:picChg>
-      </pc:sldChg>
-      <pc:sldChg chg="modSp del mod modNotesTx">
-        <pc:chgData name="Gabriele, Cyril" userId="1be75a10-e39f-4032-8195-d4e5b0ea0b62" providerId="ADAL" clId="{B0A1087C-1C87-F64B-8F02-62FA3A69F4E0}" dt="2026-04-12T15:29:10.937" v="148" actId="2696"/>
-        <pc:sldMkLst>
-          <pc:docMk/>
-          <pc:sldMk cId="0" sldId="268"/>
-        </pc:sldMkLst>
-        <pc:spChg chg="mod">
-          <ac:chgData name="Gabriele, Cyril" userId="1be75a10-e39f-4032-8195-d4e5b0ea0b62" providerId="ADAL" clId="{B0A1087C-1C87-F64B-8F02-62FA3A69F4E0}" dt="2026-04-12T15:29:08.082" v="147" actId="21"/>
-          <ac:spMkLst>
-            <pc:docMk/>
-            <pc:sldMk cId="0" sldId="268"/>
-            <ac:spMk id="3" creationId="{00000000-0000-0000-0000-000000000000}"/>
-          </ac:spMkLst>
-        </pc:spChg>
       </pc:sldChg>
       <pc:sldChg chg="modSp mod modNotesTx">
         <pc:chgData name="Gabriele, Cyril" userId="1be75a10-e39f-4032-8195-d4e5b0ea0b62" providerId="ADAL" clId="{B0A1087C-1C87-F64B-8F02-62FA3A69F4E0}" dt="2026-04-12T17:36:51.656" v="1301" actId="207"/>
@@ -612,8 +789,8 @@
           <pc:sldMk cId="0" sldId="273"/>
         </pc:sldMkLst>
       </pc:sldChg>
-      <pc:sldChg chg="modSp mod modNotesTx">
-        <pc:chgData name="Gabriele, Cyril" userId="1be75a10-e39f-4032-8195-d4e5b0ea0b62" providerId="ADAL" clId="{B0A1087C-1C87-F64B-8F02-62FA3A69F4E0}" dt="2026-04-12T16:21:14.753" v="783" actId="207"/>
+      <pc:sldChg chg="modSp mod addCm modNotesTx">
+        <pc:chgData name="Gabriele, Cyril" userId="1be75a10-e39f-4032-8195-d4e5b0ea0b62" providerId="ADAL" clId="{B0A1087C-1C87-F64B-8F02-62FA3A69F4E0}" dt="2026-04-13T11:03:56.613" v="1313"/>
         <pc:sldMkLst>
           <pc:docMk/>
           <pc:sldMk cId="3410646215" sldId="274"/>
@@ -626,6 +803,18 @@
             <ac:spMk id="2" creationId="{00000000-0000-0000-0000-000000000000}"/>
           </ac:spMkLst>
         </pc:spChg>
+        <pc:extLst>
+          <p:ext xmlns:p="http://schemas.openxmlformats.org/presentationml/2006/main" uri="{D6D511B9-2390-475A-947B-AFAB55BFBCF1}">
+            <pc226:cmChg xmlns:pc226="http://schemas.microsoft.com/office/powerpoint/2022/06/main/command" chg="add">
+              <pc226:chgData name="Gabriele, Cyril" userId="1be75a10-e39f-4032-8195-d4e5b0ea0b62" providerId="ADAL" clId="{B0A1087C-1C87-F64B-8F02-62FA3A69F4E0}" dt="2026-04-13T11:03:56.613" v="1313"/>
+              <pc2:cmMkLst xmlns:pc2="http://schemas.microsoft.com/office/powerpoint/2019/9/main/command">
+                <pc:docMk/>
+                <pc:sldMk cId="3410646215" sldId="274"/>
+                <pc2:cmMk id="{A347C1F4-CFBB-4943-9283-33B4056E088F}"/>
+              </pc2:cmMkLst>
+            </pc226:cmChg>
+          </p:ext>
+        </pc:extLst>
       </pc:sldChg>
       <pc:sldChg chg="delSp modSp new mod">
         <pc:chgData name="Gabriele, Cyril" userId="1be75a10-e39f-4032-8195-d4e5b0ea0b62" providerId="ADAL" clId="{B0A1087C-1C87-F64B-8F02-62FA3A69F4E0}" dt="2026-04-12T17:01:24.971" v="1090" actId="113"/>
@@ -641,18 +830,59 @@
             <ac:spMk id="2" creationId="{DE1E6F96-6669-1625-A966-127287BEE127}"/>
           </ac:spMkLst>
         </pc:spChg>
-        <pc:spChg chg="del">
-          <ac:chgData name="Gabriele, Cyril" userId="1be75a10-e39f-4032-8195-d4e5b0ea0b62" providerId="ADAL" clId="{B0A1087C-1C87-F64B-8F02-62FA3A69F4E0}" dt="2026-04-12T17:01:10.488" v="1067" actId="478"/>
-          <ac:spMkLst>
-            <pc:docMk/>
-            <pc:sldMk cId="2996261185" sldId="275"/>
-            <ac:spMk id="3" creationId="{7F22B2E9-A9E3-8FDB-134A-8EE4FC4D819B}"/>
-          </ac:spMkLst>
-        </pc:spChg>
       </pc:sldChg>
     </pc:docChg>
   </pc:docChgLst>
 </pc:chgInfo>
+</file>
+
+<file path=ppt/comments/modernComment_112_CB4A54C7.xml><?xml version="1.0" encoding="utf-8"?>
+<p188:cmLst xmlns:a="http://schemas.openxmlformats.org/drawingml/2006/main" xmlns:r="http://schemas.openxmlformats.org/officeDocument/2006/relationships" xmlns:p188="http://schemas.microsoft.com/office/powerpoint/2018/8/main">
+  <p188:cm id="{A347C1F4-CFBB-4943-9283-33B4056E088F}" authorId="{2BFCA692-9728-8082-ECD9-498F78147902}" created="2026-04-13T11:03:56.577">
+    <ac:txMkLst xmlns:ac="http://schemas.microsoft.com/office/drawing/2013/main/command">
+      <pc:docMk xmlns:pc="http://schemas.microsoft.com/office/powerpoint/2013/main/command"/>
+      <pc:sldMk xmlns:pc="http://schemas.microsoft.com/office/powerpoint/2013/main/command" cId="3410646215" sldId="274"/>
+      <ac:spMk id="7" creationId="{FFEC9FEF-08AE-EFBD-0A20-22A2B916E1D0}"/>
+      <ac:txMk cp="337">
+        <ac:context len="784" hash="3652954237"/>
+      </ac:txMk>
+    </ac:txMkLst>
+    <p188:pos x="1670992" y="1205594"/>
+    <p188:replyLst>
+      <p188:reply id="{4BE40565-6921-6649-AB5E-E683E4FE825D}" authorId="{E1A0EFA6-9B30-97EA-CBE8-AD9642A5FEDF}" created="2026-04-13T15:52:38.587">
+        <p188:txBody>
+          <a:bodyPr/>
+          <a:lstStyle/>
+          <a:p>
+            <a:r>
+              <a:rPr lang="de-DE"/>
+              <a:t>exchanged for availability, emphasised more the trade-off between availability and Data consistency</a:t>
+            </a:r>
+          </a:p>
+        </p188:txBody>
+      </p188:reply>
+    </p188:replyLst>
+    <p188:txBody>
+      <a:bodyPr/>
+      <a:lstStyle/>
+      <a:p>
+        <a:r>
+          <a:rPr lang="en-US"/>
+          <a:t>[@Theodosiadis, Ioannis] is listing data conistency in a event driven architecture not a bit “a joke” since we also then state that we several times accepted eventual consistency? should we not mention more something like scalability or somethin gin this direction whcih would more emphasize the event driven type?</a:t>
+        </a:r>
+      </a:p>
+    </p188:txBody>
+    <p188:extLst>
+      <p:ext xmlns:p="http://schemas.openxmlformats.org/presentationml/2006/main" uri="{57CB4572-C831-44C2-8A1C-0ADB6CCDFE69}">
+        <p223:reactions xmlns:p223="http://schemas.microsoft.com/office/powerpoint/2022/03/main">
+          <p223:rxn type="👍">
+            <p223:instance time="2026-04-13T15:51:54.794" authorId="{E1A0EFA6-9B30-97EA-CBE8-AD9642A5FEDF}"/>
+          </p223:rxn>
+        </p223:reactions>
+      </p:ext>
+    </p188:extLst>
+  </p188:cm>
+</p188:cmLst>
 </file>
 
 <file path=ppt/handoutMasters/handoutMaster1.xml><?xml version="1.0" encoding="utf-8"?>
@@ -749,7 +979,7 @@
           <a:p>
             <a:fld id="{2BF4C96F-5C6D-48ED-8D42-B768302B23AD}" type="datetimeFigureOut">
               <a:rPr lang="de-CH" smtClean="0"/>
-              <a:t>12.04.2026</a:t>
+              <a:t>15.04.26</a:t>
             </a:fld>
             <a:endParaRPr lang="de-CH"/>
           </a:p>
@@ -827,7 +1057,7 @@
           <a:p>
             <a:fld id="{EF76BEFE-BF9F-47C0-9B2B-37E6860B00C1}" type="slidenum">
               <a:rPr lang="de-CH" smtClean="0"/>
-              <a:t>‹#›</a:t>
+              <a:t>‹Nr.›</a:t>
             </a:fld>
             <a:endParaRPr lang="de-CH"/>
           </a:p>
@@ -926,7 +1156,7 @@
           <a:p>
             <a:fld id="{736D3A44-FA09-4C0A-99A6-1BA009890161}" type="datetimeFigureOut">
               <a:rPr lang="de-CH" smtClean="0"/>
-              <a:t>12.04.2026</a:t>
+              <a:t>15.04.26</a:t>
             </a:fld>
             <a:endParaRPr lang="de-CH"/>
           </a:p>
@@ -1085,7 +1315,7 @@
           <a:p>
             <a:fld id="{19EFE3F1-1C0D-4780-BCDC-4F7033F6C9E1}" type="slidenum">
               <a:rPr lang="de-CH" smtClean="0"/>
-              <a:t>‹#›</a:t>
+              <a:t>‹Nr.›</a:t>
             </a:fld>
             <a:endParaRPr lang="de-CH"/>
           </a:p>
@@ -1239,20 +1469,23 @@
           <a:lstStyle/>
           <a:p>
             <a:r>
+              <a:rPr dirty="0"/>
               <a:t>Open confidently. We built </a:t>
             </a:r>
             <a:r>
-              <a:rPr err="1"/>
+              <a:rPr dirty="0" err="1"/>
               <a:t>CryptoFlow</a:t>
             </a:r>
             <a:r>
+              <a:rPr dirty="0"/>
               <a:t> to exercise the full set of EDPO lecture concepts end to end: two communication channels, five microservices, two saga patterns. This slide is just the name card </a:t>
             </a:r>
             <a:r>
-              <a:rPr lang="en-US"/>
+              <a:rPr lang="en-US" dirty="0"/>
               <a:t>-</a:t>
             </a:r>
             <a:r>
+              <a:rPr dirty="0"/>
               <a:t> keep it to ten seconds.</a:t>
             </a:r>
           </a:p>
@@ -1400,64 +1633,65 @@
           <a:lstStyle/>
           <a:p>
             <a:r>
-              <a:rPr lang="de-CH"/>
+              <a:rPr lang="de-CH" dirty="0"/>
               <a:t>Ioannis:</a:t>
             </a:r>
           </a:p>
           <a:p>
             <a:r>
+              <a:rPr dirty="0"/>
               <a:t>Key distinction from onboarding: the approval is terminal in the trading context. Portfolio propagation is a downstream consequence, not a saga step. This is exactly the Fairy Tale Saga trade-off: synchronous within the context, eventual across contexts.</a:t>
             </a:r>
             <a:br>
-              <a:rPr lang="de-CH"/>
+              <a:rPr lang="de-CH" dirty="0"/>
             </a:br>
             <a:br>
-              <a:rPr lang="de-CH"/>
+              <a:rPr lang="de-CH" dirty="0"/>
             </a:br>
             <a:r>
-              <a:rPr lang="en-US" sz="1200"/>
+              <a:rPr lang="en-US" sz="1200" dirty="0"/>
               <a:t>order-processing-worker validates user locally, creates PENDING </a:t>
             </a:r>
             <a:r>
-              <a:rPr lang="en-US" sz="1200" err="1"/>
+              <a:rPr lang="en-US" sz="1200" dirty="0" err="1"/>
               <a:t>tx</a:t>
             </a:r>
-            <a:endParaRPr lang="en-US" sz="1200"/>
-          </a:p>
-          <a:p>
-            <a:r>
-              <a:rPr lang="en-US" sz="1200"/>
+            <a:endParaRPr lang="en-US" sz="1200" dirty="0"/>
+          </a:p>
+          <a:p>
+            <a:r>
+              <a:rPr lang="en-US" sz="1200" dirty="0"/>
               <a:t>Event-based gateway: price match vs. 1-min timeout</a:t>
             </a:r>
           </a:p>
           <a:p>
             <a:r>
-              <a:rPr lang="en-US" sz="1200" err="1"/>
+              <a:rPr lang="en-US" sz="1200" dirty="0" err="1"/>
               <a:t>approveOrderWorker</a:t>
             </a:r>
             <a:r>
-              <a:rPr lang="en-US" sz="1200"/>
+              <a:rPr lang="en-US" sz="1200" dirty="0"/>
               <a:t> writes APPROVED + outbox row in one transaction</a:t>
             </a:r>
           </a:p>
           <a:p>
             <a:r>
-              <a:rPr lang="en-US" sz="1200" err="1"/>
+              <a:rPr lang="en-US" sz="1200" dirty="0" err="1"/>
               <a:t>publishOrderApprovedWorker</a:t>
             </a:r>
             <a:r>
-              <a:rPr lang="en-US" sz="1200"/>
+              <a:rPr lang="en-US" sz="1200" dirty="0"/>
               <a:t> publishes to Kafka → email</a:t>
             </a:r>
           </a:p>
           <a:p>
             <a:r>
-              <a:rPr lang="en-US" sz="1200"/>
+              <a:rPr lang="en-US" sz="1200" dirty="0"/>
               <a:t>Portfolio update happens independently via Kafka</a:t>
             </a:r>
           </a:p>
           <a:p>
-            <a:endParaRPr/>
+            <a:endParaRPr dirty="0"/>
           </a:p>
         </p:txBody>
       </p:sp>
@@ -1793,20 +2027,23 @@
           <a:lstStyle/>
           <a:p>
             <a:r>
+              <a:rPr dirty="0"/>
               <a:t>Keep the demo tight </a:t>
             </a:r>
             <a:r>
-              <a:rPr lang="en-US"/>
+              <a:rPr lang="en-US" dirty="0"/>
               <a:t>-</a:t>
             </a:r>
             <a:r>
+              <a:rPr dirty="0"/>
               <a:t> 2-3 minutes max. Have the Docker Compose stack running before the presentation starts. If something breaks live, switch to Operate to show the instance state </a:t>
             </a:r>
             <a:r>
-              <a:rPr lang="en-US"/>
+              <a:rPr lang="en-US" dirty="0"/>
               <a:t>-</a:t>
             </a:r>
             <a:r>
+              <a:rPr dirty="0"/>
               <a:t> that's still a valid demo of observability.</a:t>
             </a:r>
           </a:p>
@@ -1947,6 +2184,7 @@
           <a:lstStyle/>
           <a:p>
             <a:r>
+              <a:rPr dirty="0"/>
               <a:t>Open the floor. If the audience is quiet, prime the pump with the first backup topic yourself.</a:t>
             </a:r>
           </a:p>
@@ -2167,7 +2405,7 @@
               <a:rPr lang="de-CH"/>
               <a:t>Ioannis</a:t>
             </a:r>
-            <a:endParaRPr/>
+            <a:endParaRPr dirty="0"/>
           </a:p>
         </p:txBody>
       </p:sp>
@@ -2869,7 +3107,7 @@
           <a:p>
             <a:pPr algn="r"/>
             <a:r>
-              <a:rPr lang="en-GB" sz="1000">
+              <a:rPr lang="en-GB" sz="1000" dirty="0">
                 <a:solidFill>
                   <a:schemeClr val="bg2"/>
                 </a:solidFill>
@@ -2877,7 +3115,7 @@
               <a:t>From </a:t>
             </a:r>
             <a:r>
-              <a:rPr lang="en-GB" sz="1000" err="1">
+              <a:rPr lang="en-GB" sz="1000" dirty="0" err="1">
                 <a:solidFill>
                   <a:schemeClr val="bg2"/>
                 </a:solidFill>
@@ -2885,7 +3123,7 @@
               <a:t>insight</a:t>
             </a:r>
             <a:r>
-              <a:rPr lang="en-GB" sz="1000">
+              <a:rPr lang="en-GB" sz="1000" dirty="0">
                 <a:solidFill>
                   <a:schemeClr val="bg2"/>
                 </a:solidFill>
@@ -2893,7 +3131,7 @@
               <a:t> </a:t>
             </a:r>
             <a:r>
-              <a:rPr lang="en-GB" sz="1000" err="1">
+              <a:rPr lang="en-GB" sz="1000" dirty="0" err="1">
                 <a:solidFill>
                   <a:schemeClr val="bg2"/>
                 </a:solidFill>
@@ -2901,7 +3139,7 @@
               <a:t>to</a:t>
             </a:r>
             <a:r>
-              <a:rPr lang="en-GB" sz="1000">
+              <a:rPr lang="en-GB" sz="1000" dirty="0">
                 <a:solidFill>
                   <a:schemeClr val="bg2"/>
                 </a:solidFill>
@@ -2909,7 +3147,7 @@
               <a:t> </a:t>
             </a:r>
             <a:r>
-              <a:rPr lang="en-GB" sz="1000" err="1">
+              <a:rPr lang="en-GB" sz="1000" dirty="0" err="1">
                 <a:solidFill>
                   <a:schemeClr val="bg2"/>
                 </a:solidFill>
@@ -2917,7 +3155,7 @@
               <a:t>impact</a:t>
             </a:r>
             <a:r>
-              <a:rPr lang="en-GB" sz="1000">
+              <a:rPr lang="en-GB" sz="1000" dirty="0">
                 <a:solidFill>
                   <a:schemeClr val="bg2"/>
                 </a:solidFill>
@@ -2987,7 +3225,7 @@
           </a:lstStyle>
           <a:p>
             <a:r>
-              <a:rPr lang="en-GB"/>
+              <a:rPr lang="en-GB" dirty="0"/>
               <a:t>Click to edit Master title style</a:t>
             </a:r>
           </a:p>
@@ -3060,35 +3298,39 @@
           <a:p>
             <a:pPr lvl="0"/>
             <a:r>
-              <a:rPr lang="en-GB"/>
+              <a:rPr lang="en-GB" dirty="0"/>
               <a:t>Click to edit Master text styles</a:t>
             </a:r>
+            <a:endParaRPr lang="en-GB"/>
           </a:p>
           <a:p>
             <a:pPr lvl="1"/>
             <a:r>
-              <a:rPr lang="en-GB"/>
+              <a:rPr lang="en-GB" dirty="0"/>
               <a:t>Second level</a:t>
             </a:r>
+            <a:endParaRPr lang="en-GB"/>
           </a:p>
           <a:p>
             <a:pPr lvl="2"/>
             <a:r>
-              <a:rPr lang="en-GB"/>
+              <a:rPr lang="en-GB" dirty="0"/>
               <a:t>Third level</a:t>
             </a:r>
+            <a:endParaRPr lang="en-GB"/>
           </a:p>
           <a:p>
             <a:pPr lvl="3"/>
             <a:r>
-              <a:rPr lang="en-GB"/>
+              <a:rPr lang="en-GB" dirty="0"/>
               <a:t>Fourth level</a:t>
             </a:r>
+            <a:endParaRPr lang="en-GB"/>
           </a:p>
           <a:p>
             <a:pPr lvl="4"/>
             <a:r>
-              <a:rPr lang="en-GB"/>
+              <a:rPr lang="en-GB" dirty="0"/>
               <a:t>Fifth level</a:t>
             </a:r>
           </a:p>
@@ -3252,7 +3494,7 @@
           <a:p>
             <a:fld id="{7559FC98-AF75-4A00-A03C-DF9FEBF6BCB9}" type="slidenum">
               <a:rPr lang="en-GB" smtClean="0"/>
-              <a:t>‹#›</a:t>
+              <a:t>‹Nr.›</a:t>
             </a:fld>
             <a:endParaRPr lang="en-GB"/>
           </a:p>
@@ -3489,7 +3731,7 @@
           <a:p>
             <a:pPr algn="l"/>
             <a:r>
-              <a:rPr lang="en-GB" sz="800">
+              <a:rPr lang="en-GB" sz="800" dirty="0">
                 <a:solidFill>
                   <a:schemeClr val="tx1"/>
                 </a:solidFill>
@@ -3569,7 +3811,7 @@
           <a:lstStyle/>
           <a:p>
             <a:pPr algn="l"/>
-            <a:endParaRPr lang="en-GB" sz="800">
+            <a:endParaRPr lang="en-GB" sz="800" dirty="0">
               <a:solidFill>
                 <a:schemeClr val="tx1"/>
               </a:solidFill>
@@ -3624,7 +3866,7 @@
           <a:p>
             <a:pPr algn="l"/>
             <a:r>
-              <a:rPr lang="en-GB" sz="800" u="none">
+              <a:rPr lang="en-GB" sz="800" u="none" dirty="0">
                 <a:solidFill>
                   <a:schemeClr val="tx1"/>
                 </a:solidFill>
@@ -3794,6 +4036,7 @@
               <a:rPr lang="en-GB"/>
               <a:t>Click to edit Master title style</a:t>
             </a:r>
+            <a:endParaRPr lang="en-GB" dirty="0"/>
           </a:p>
         </p:txBody>
       </p:sp>
@@ -3820,7 +4063,7 @@
           <a:p>
             <a:fld id="{7559FC98-AF75-4A00-A03C-DF9FEBF6BCB9}" type="slidenum">
               <a:rPr lang="en-GB" smtClean="0"/>
-              <a:t>‹#›</a:t>
+              <a:t>‹Nr.›</a:t>
             </a:fld>
             <a:endParaRPr lang="en-GB"/>
           </a:p>
@@ -3873,7 +4116,7 @@
           <a:p>
             <a:pPr algn="l"/>
             <a:r>
-              <a:rPr lang="en-GB" sz="800">
+              <a:rPr lang="en-GB" sz="800" dirty="0">
                 <a:solidFill>
                   <a:schemeClr val="tx1"/>
                 </a:solidFill>
@@ -3953,7 +4196,7 @@
           <a:lstStyle/>
           <a:p>
             <a:pPr algn="l"/>
-            <a:endParaRPr lang="en-GB" sz="800">
+            <a:endParaRPr lang="en-GB" sz="800" dirty="0">
               <a:solidFill>
                 <a:schemeClr val="tx1"/>
               </a:solidFill>
@@ -4008,7 +4251,7 @@
           <a:p>
             <a:pPr algn="l"/>
             <a:r>
-              <a:rPr lang="en-GB" sz="800" u="none">
+              <a:rPr lang="en-GB" sz="800" u="none" dirty="0">
                 <a:solidFill>
                   <a:schemeClr val="tx1"/>
                 </a:solidFill>
@@ -4215,9 +4458,10 @@
           <a:p>
             <a:pPr lvl="0"/>
             <a:r>
-              <a:rPr lang="en-GB"/>
+              <a:rPr lang="en-GB" dirty="0"/>
               <a:t>Click to edit Master text styles</a:t>
             </a:r>
+            <a:endParaRPr lang="en-GB"/>
           </a:p>
         </p:txBody>
       </p:sp>
@@ -4414,9 +4658,10 @@
           <a:p>
             <a:pPr lvl="0"/>
             <a:r>
-              <a:rPr lang="en-GB"/>
+              <a:rPr lang="en-GB" dirty="0"/>
               <a:t>Click to edit Master text styles</a:t>
             </a:r>
+            <a:endParaRPr lang="en-GB"/>
           </a:p>
         </p:txBody>
       </p:sp>
@@ -4565,6 +4810,7 @@
               <a:rPr lang="en-GB"/>
               <a:t>Click to edit Master title style</a:t>
             </a:r>
+            <a:endParaRPr lang="en-GB" dirty="0"/>
           </a:p>
         </p:txBody>
       </p:sp>
@@ -4683,6 +4929,7 @@
               <a:rPr lang="en-GB"/>
               <a:t>Click to edit Master title style</a:t>
             </a:r>
+            <a:endParaRPr lang="en-GB" dirty="0"/>
           </a:p>
         </p:txBody>
       </p:sp>
@@ -4818,6 +5065,7 @@
               <a:rPr lang="en-GB"/>
               <a:t>Click to edit Master title style</a:t>
             </a:r>
+            <a:endParaRPr lang="en-GB" dirty="0"/>
           </a:p>
         </p:txBody>
       </p:sp>
@@ -5340,7 +5588,7 @@
               </a:lnSpc>
             </a:pPr>
             <a:r>
-              <a:rPr lang="en-GB" sz="1000">
+              <a:rPr lang="en-GB" sz="1000" dirty="0">
                 <a:solidFill>
                   <a:schemeClr val="tx1"/>
                 </a:solidFill>
@@ -5491,7 +5739,7 @@
           <a:p>
             <a:fld id="{7559FC98-AF75-4A00-A03C-DF9FEBF6BCB9}" type="slidenum">
               <a:rPr lang="en-GB" smtClean="0"/>
-              <a:t>‹#›</a:t>
+              <a:t>‹Nr.›</a:t>
             </a:fld>
             <a:endParaRPr lang="en-GB"/>
           </a:p>
@@ -5544,7 +5792,7 @@
           <a:p>
             <a:pPr algn="l"/>
             <a:r>
-              <a:rPr lang="en-GB" sz="800">
+              <a:rPr lang="en-GB" sz="800" dirty="0">
                 <a:solidFill>
                   <a:schemeClr val="tx1"/>
                 </a:solidFill>
@@ -5622,7 +5870,7 @@
           <a:p>
             <a:pPr algn="l"/>
             <a:r>
-              <a:rPr lang="en-GB" sz="1000">
+              <a:rPr lang="en-GB" sz="1000" dirty="0">
                 <a:solidFill>
                   <a:schemeClr val="tx1"/>
                 </a:solidFill>
@@ -5630,7 +5878,7 @@
               <a:t>From </a:t>
             </a:r>
             <a:r>
-              <a:rPr lang="en-GB" sz="1000" err="1">
+              <a:rPr lang="en-GB" sz="1000" dirty="0" err="1">
                 <a:solidFill>
                   <a:schemeClr val="tx1"/>
                 </a:solidFill>
@@ -5638,7 +5886,7 @@
               <a:t>insight</a:t>
             </a:r>
             <a:r>
-              <a:rPr lang="en-GB" sz="1000">
+              <a:rPr lang="en-GB" sz="1000" dirty="0">
                 <a:solidFill>
                   <a:schemeClr val="tx1"/>
                 </a:solidFill>
@@ -5646,7 +5894,7 @@
               <a:t> </a:t>
             </a:r>
             <a:r>
-              <a:rPr lang="en-GB" sz="1000" err="1">
+              <a:rPr lang="en-GB" sz="1000" dirty="0" err="1">
                 <a:solidFill>
                   <a:schemeClr val="tx1"/>
                 </a:solidFill>
@@ -5654,7 +5902,7 @@
               <a:t>to</a:t>
             </a:r>
             <a:r>
-              <a:rPr lang="en-GB" sz="1000">
+              <a:rPr lang="en-GB" sz="1000" dirty="0">
                 <a:solidFill>
                   <a:schemeClr val="tx1"/>
                 </a:solidFill>
@@ -5662,7 +5910,7 @@
               <a:t> </a:t>
             </a:r>
             <a:r>
-              <a:rPr lang="en-GB" sz="1000" err="1">
+              <a:rPr lang="en-GB" sz="1000" dirty="0" err="1">
                 <a:solidFill>
                   <a:schemeClr val="tx1"/>
                 </a:solidFill>
@@ -5670,7 +5918,7 @@
               <a:t>impact</a:t>
             </a:r>
             <a:r>
-              <a:rPr lang="en-GB" sz="1000">
+              <a:rPr lang="en-GB" sz="1000" dirty="0">
                 <a:solidFill>
                   <a:schemeClr val="tx1"/>
                 </a:solidFill>
@@ -5773,7 +6021,7 @@
           </a:lstStyle>
           <a:p>
             <a:r>
-              <a:rPr lang="en-GB"/>
+              <a:rPr lang="en-GB" dirty="0"/>
               <a:t>Click to edit Master title style</a:t>
             </a:r>
           </a:p>
@@ -5846,27 +6094,30 @@
           <a:p>
             <a:pPr lvl="0"/>
             <a:r>
-              <a:rPr lang="en-GB"/>
+              <a:rPr lang="en-GB" dirty="0"/>
               <a:t>Click to edit Master text styles</a:t>
             </a:r>
+            <a:endParaRPr lang="en-GB"/>
           </a:p>
           <a:p>
             <a:pPr lvl="1"/>
             <a:r>
-              <a:rPr lang="en-GB"/>
+              <a:rPr lang="en-GB" dirty="0"/>
               <a:t>Second level</a:t>
             </a:r>
+            <a:endParaRPr lang="en-GB"/>
           </a:p>
           <a:p>
             <a:pPr lvl="2"/>
             <a:r>
-              <a:rPr lang="en-GB"/>
+              <a:rPr lang="en-GB" dirty="0"/>
               <a:t>Third level</a:t>
             </a:r>
+            <a:endParaRPr lang="en-GB"/>
           </a:p>
           <a:p>
             <a:pPr lvl="3"/>
-            <a:endParaRPr lang="en-GB"/>
+            <a:endParaRPr lang="en-GB" dirty="0"/>
           </a:p>
         </p:txBody>
       </p:sp>
@@ -6018,7 +6269,7 @@
           <a:p>
             <a:fld id="{7559FC98-AF75-4A00-A03C-DF9FEBF6BCB9}" type="slidenum">
               <a:rPr lang="en-GB" smtClean="0"/>
-              <a:t>‹#›</a:t>
+              <a:t>‹Nr.›</a:t>
             </a:fld>
             <a:endParaRPr lang="en-GB"/>
           </a:p>
@@ -6071,7 +6322,7 @@
           <a:p>
             <a:pPr algn="l"/>
             <a:r>
-              <a:rPr lang="en-GB" sz="800">
+              <a:rPr lang="en-GB" sz="800" dirty="0">
                 <a:solidFill>
                   <a:schemeClr val="tx1"/>
                 </a:solidFill>
@@ -6304,7 +6555,7 @@
           <a:p>
             <a:pPr algn="r"/>
             <a:r>
-              <a:rPr lang="en-GB" sz="1000">
+              <a:rPr lang="en-GB" sz="1000" dirty="0">
                 <a:solidFill>
                   <a:schemeClr val="tx1"/>
                 </a:solidFill>
@@ -6312,7 +6563,7 @@
               <a:t>From </a:t>
             </a:r>
             <a:r>
-              <a:rPr lang="en-GB" sz="1000" err="1">
+              <a:rPr lang="en-GB" sz="1000" dirty="0" err="1">
                 <a:solidFill>
                   <a:schemeClr val="tx1"/>
                 </a:solidFill>
@@ -6320,7 +6571,7 @@
               <a:t>insight</a:t>
             </a:r>
             <a:r>
-              <a:rPr lang="en-GB" sz="1000">
+              <a:rPr lang="en-GB" sz="1000" dirty="0">
                 <a:solidFill>
                   <a:schemeClr val="tx1"/>
                 </a:solidFill>
@@ -6328,7 +6579,7 @@
               <a:t> </a:t>
             </a:r>
             <a:r>
-              <a:rPr lang="en-GB" sz="1000" err="1">
+              <a:rPr lang="en-GB" sz="1000" dirty="0" err="1">
                 <a:solidFill>
                   <a:schemeClr val="tx1"/>
                 </a:solidFill>
@@ -6336,7 +6587,7 @@
               <a:t>to</a:t>
             </a:r>
             <a:r>
-              <a:rPr lang="en-GB" sz="1000">
+              <a:rPr lang="en-GB" sz="1000" dirty="0">
                 <a:solidFill>
                   <a:schemeClr val="tx1"/>
                 </a:solidFill>
@@ -6344,7 +6595,7 @@
               <a:t> </a:t>
             </a:r>
             <a:r>
-              <a:rPr lang="en-GB" sz="1000" err="1">
+              <a:rPr lang="en-GB" sz="1000" dirty="0" err="1">
                 <a:solidFill>
                   <a:schemeClr val="tx1"/>
                 </a:solidFill>
@@ -6352,7 +6603,7 @@
               <a:t>impact</a:t>
             </a:r>
             <a:r>
-              <a:rPr lang="en-GB" sz="1000">
+              <a:rPr lang="en-GB" sz="1000" dirty="0">
                 <a:solidFill>
                   <a:schemeClr val="tx1"/>
                 </a:solidFill>
@@ -6422,7 +6673,7 @@
           </a:lstStyle>
           <a:p>
             <a:r>
-              <a:rPr lang="en-GB"/>
+              <a:rPr lang="en-GB" dirty="0"/>
               <a:t>Click to edit Master title style</a:t>
             </a:r>
           </a:p>
@@ -6495,27 +6746,30 @@
           <a:p>
             <a:pPr lvl="0"/>
             <a:r>
-              <a:rPr lang="en-GB"/>
+              <a:rPr lang="en-GB" dirty="0"/>
               <a:t>Click to edit Master text styles</a:t>
             </a:r>
+            <a:endParaRPr lang="en-GB"/>
           </a:p>
           <a:p>
             <a:pPr lvl="1"/>
             <a:r>
-              <a:rPr lang="en-GB"/>
+              <a:rPr lang="en-GB" dirty="0"/>
               <a:t>Second level</a:t>
             </a:r>
+            <a:endParaRPr lang="en-GB"/>
           </a:p>
           <a:p>
             <a:pPr lvl="2"/>
             <a:r>
-              <a:rPr lang="en-GB"/>
+              <a:rPr lang="en-GB" dirty="0"/>
               <a:t>Third level</a:t>
             </a:r>
+            <a:endParaRPr lang="en-GB"/>
           </a:p>
           <a:p>
             <a:pPr lvl="3"/>
-            <a:endParaRPr lang="en-GB"/>
+            <a:endParaRPr lang="en-GB" dirty="0"/>
           </a:p>
         </p:txBody>
       </p:sp>
@@ -6695,7 +6949,7 @@
           <a:bodyPr/>
           <a:lstStyle/>
           <a:p>
-            <a:endParaRPr lang="en-GB"/>
+            <a:endParaRPr lang="en-GB" dirty="0"/>
           </a:p>
         </p:txBody>
       </p:sp>
@@ -6905,7 +7159,7 @@
           </a:lstStyle>
           <a:p>
             <a:r>
-              <a:rPr lang="en-GB"/>
+              <a:rPr lang="en-GB" dirty="0"/>
               <a:t>Click to edit Master title style</a:t>
             </a:r>
           </a:p>
@@ -6995,97 +7249,106 @@
           <a:p>
             <a:pPr lvl="0"/>
             <a:r>
-              <a:rPr lang="en-GB"/>
+              <a:rPr lang="en-GB" dirty="0"/>
               <a:t>Click to edit Master text styles</a:t>
             </a:r>
+            <a:endParaRPr lang="en-GB"/>
           </a:p>
           <a:p>
             <a:pPr lvl="1"/>
             <a:r>
-              <a:rPr lang="en-GB" err="1"/>
+              <a:rPr lang="en-GB" dirty="0" err="1"/>
               <a:t>Zweite</a:t>
             </a:r>
             <a:r>
-              <a:rPr lang="en-GB"/>
+              <a:rPr lang="en-GB" dirty="0"/>
               <a:t> Ebene</a:t>
             </a:r>
+            <a:endParaRPr lang="en-GB"/>
           </a:p>
           <a:p>
             <a:pPr lvl="2"/>
             <a:r>
-              <a:rPr lang="en-GB" err="1"/>
+              <a:rPr lang="en-GB" dirty="0" err="1"/>
               <a:t>Dritte</a:t>
             </a:r>
             <a:r>
-              <a:rPr lang="en-GB"/>
+              <a:rPr lang="en-GB" dirty="0"/>
               <a:t> Ebene</a:t>
             </a:r>
+            <a:endParaRPr lang="en-GB"/>
           </a:p>
           <a:p>
             <a:pPr lvl="3"/>
             <a:r>
-              <a:rPr lang="en-GB" err="1"/>
+              <a:rPr lang="en-GB" dirty="0" err="1"/>
               <a:t>Vierte</a:t>
             </a:r>
             <a:r>
-              <a:rPr lang="en-GB"/>
+              <a:rPr lang="en-GB" dirty="0"/>
               <a:t> Ebene</a:t>
             </a:r>
+            <a:endParaRPr lang="en-GB"/>
           </a:p>
           <a:p>
             <a:pPr lvl="4"/>
             <a:r>
-              <a:rPr lang="en-GB" err="1"/>
+              <a:rPr lang="en-GB" dirty="0" err="1"/>
               <a:t>Fünfte</a:t>
             </a:r>
             <a:r>
-              <a:rPr lang="en-GB"/>
+              <a:rPr lang="en-GB" dirty="0"/>
               <a:t> Ebene</a:t>
             </a:r>
+            <a:endParaRPr lang="en-GB"/>
           </a:p>
           <a:p>
             <a:pPr lvl="5"/>
             <a:r>
-              <a:rPr lang="en-GB" err="1"/>
+              <a:rPr lang="en-GB" dirty="0" err="1"/>
               <a:t>Sechste</a:t>
             </a:r>
             <a:r>
-              <a:rPr lang="en-GB"/>
+              <a:rPr lang="en-GB" dirty="0"/>
               <a:t> Ebene</a:t>
             </a:r>
+            <a:endParaRPr lang="en-GB"/>
           </a:p>
           <a:p>
             <a:pPr lvl="6"/>
             <a:r>
-              <a:rPr lang="en-GB" err="1"/>
+              <a:rPr lang="en-GB" dirty="0" err="1"/>
               <a:t>Siebte</a:t>
             </a:r>
             <a:r>
-              <a:rPr lang="en-GB"/>
+              <a:rPr lang="en-GB" dirty="0"/>
               <a:t> Ebene</a:t>
             </a:r>
+            <a:endParaRPr lang="en-GB"/>
           </a:p>
           <a:p>
             <a:pPr lvl="7"/>
             <a:r>
-              <a:rPr lang="en-GB" err="1"/>
+              <a:rPr lang="en-GB" dirty="0" err="1"/>
               <a:t>Achte</a:t>
             </a:r>
             <a:r>
-              <a:rPr lang="en-GB"/>
+              <a:rPr lang="en-GB" dirty="0"/>
               <a:t> Ebene</a:t>
             </a:r>
+            <a:endParaRPr lang="en-GB"/>
           </a:p>
           <a:p>
             <a:pPr lvl="8"/>
             <a:r>
-              <a:rPr lang="en-GB" err="1"/>
+              <a:rPr lang="en-GB" dirty="0" err="1"/>
               <a:t>Neunte</a:t>
             </a:r>
             <a:r>
-              <a:rPr lang="en-GB"/>
+              <a:rPr lang="en-GB" dirty="0"/>
               <a:t> Ebene</a:t>
             </a:r>
+            <a:endParaRPr lang="en-GB"/>
           </a:p>
         </p:txBody>
       </p:sp>
@@ -7113,9 +7376,9 @@
             <a:fld id="{7559FC98-AF75-4A00-A03C-DF9FEBF6BCB9}" type="slidenum">
               <a:rPr lang="en-GB" smtClean="0"/>
               <a:pPr/>
-              <a:t>‹#›</a:t>
+              <a:t>‹Nr.›</a:t>
             </a:fld>
-            <a:endParaRPr lang="en-GB"/>
+            <a:endParaRPr lang="en-GB" dirty="0"/>
           </a:p>
         </p:txBody>
       </p:sp>
@@ -7166,7 +7429,7 @@
           <a:p>
             <a:pPr algn="l"/>
             <a:r>
-              <a:rPr lang="en-GB" sz="800">
+              <a:rPr lang="en-GB" sz="800" dirty="0">
                 <a:solidFill>
                   <a:schemeClr val="tx1"/>
                 </a:solidFill>
@@ -7222,7 +7485,7 @@
           <a:lstStyle/>
           <a:p>
             <a:pPr algn="l"/>
-            <a:endParaRPr lang="en-GB" sz="800">
+            <a:endParaRPr lang="en-GB" sz="800" dirty="0">
               <a:solidFill>
                 <a:schemeClr val="tx1"/>
               </a:solidFill>
@@ -7301,7 +7564,7 @@
           <a:p>
             <a:pPr algn="l"/>
             <a:r>
-              <a:rPr lang="en-GB" sz="800" u="none">
+              <a:rPr lang="en-GB" sz="800" u="none" dirty="0">
                 <a:solidFill>
                   <a:schemeClr val="tx1"/>
                 </a:solidFill>
@@ -7395,6 +7658,7 @@
               <a:rPr lang="en-GB"/>
               <a:t>Click to edit Master title style</a:t>
             </a:r>
+            <a:endParaRPr lang="en-GB" dirty="0"/>
           </a:p>
         </p:txBody>
       </p:sp>
@@ -7745,6 +8009,7 @@
               <a:rPr lang="en-GB"/>
               <a:t>Click to edit Master title style</a:t>
             </a:r>
+            <a:endParaRPr lang="en-GB" dirty="0"/>
           </a:p>
         </p:txBody>
       </p:sp>
@@ -8066,35 +8331,39 @@
           <a:p>
             <a:pPr lvl="0"/>
             <a:r>
-              <a:rPr lang="en-GB"/>
+              <a:rPr lang="en-GB" dirty="0"/>
               <a:t>Click to edit Master text styles</a:t>
             </a:r>
+            <a:endParaRPr lang="en-GB"/>
           </a:p>
           <a:p>
             <a:pPr lvl="1"/>
             <a:r>
-              <a:rPr lang="en-GB"/>
+              <a:rPr lang="en-GB" dirty="0"/>
               <a:t>Second level</a:t>
             </a:r>
+            <a:endParaRPr lang="en-GB"/>
           </a:p>
           <a:p>
             <a:pPr lvl="2"/>
             <a:r>
-              <a:rPr lang="en-GB"/>
+              <a:rPr lang="en-GB" dirty="0"/>
               <a:t>Third level</a:t>
             </a:r>
+            <a:endParaRPr lang="en-GB"/>
           </a:p>
           <a:p>
             <a:pPr lvl="3"/>
             <a:r>
-              <a:rPr lang="en-GB"/>
+              <a:rPr lang="en-GB" dirty="0"/>
               <a:t>Fourth level</a:t>
             </a:r>
+            <a:endParaRPr lang="en-GB"/>
           </a:p>
           <a:p>
             <a:pPr lvl="4"/>
             <a:r>
-              <a:rPr lang="en-GB"/>
+              <a:rPr lang="en-GB" dirty="0"/>
               <a:t>Fifth level</a:t>
             </a:r>
           </a:p>
@@ -8161,6 +8430,7 @@
               <a:rPr lang="en-GB"/>
               <a:t>Fifth level</a:t>
             </a:r>
+            <a:endParaRPr lang="en-GB" dirty="0"/>
           </a:p>
         </p:txBody>
       </p:sp>
@@ -8188,9 +8458,9 @@
             <a:fld id="{7559FC98-AF75-4A00-A03C-DF9FEBF6BCB9}" type="slidenum">
               <a:rPr lang="en-GB" smtClean="0"/>
               <a:pPr/>
-              <a:t>‹#›</a:t>
+              <a:t>‹Nr.›</a:t>
             </a:fld>
-            <a:endParaRPr lang="en-GB"/>
+            <a:endParaRPr lang="en-GB" dirty="0"/>
           </a:p>
         </p:txBody>
       </p:sp>
@@ -8241,7 +8511,7 @@
           <a:p>
             <a:pPr algn="l"/>
             <a:r>
-              <a:rPr lang="en-GB" sz="800">
+              <a:rPr lang="en-GB" sz="800" dirty="0">
                 <a:solidFill>
                   <a:schemeClr val="tx1"/>
                 </a:solidFill>
@@ -8321,7 +8591,7 @@
           <a:lstStyle/>
           <a:p>
             <a:pPr algn="l"/>
-            <a:endParaRPr lang="en-GB" sz="800">
+            <a:endParaRPr lang="en-GB" sz="800" dirty="0">
               <a:solidFill>
                 <a:schemeClr val="tx1"/>
               </a:solidFill>
@@ -8376,7 +8646,7 @@
           <a:p>
             <a:pPr algn="l"/>
             <a:r>
-              <a:rPr lang="en-GB" sz="800" u="none">
+              <a:rPr lang="en-GB" sz="800" u="none" dirty="0">
                 <a:solidFill>
                   <a:schemeClr val="tx1"/>
                 </a:solidFill>
@@ -8546,6 +8816,7 @@
               <a:rPr lang="en-GB"/>
               <a:t>Click to edit Master title style</a:t>
             </a:r>
+            <a:endParaRPr lang="en-GB" dirty="0"/>
           </a:p>
         </p:txBody>
       </p:sp>
@@ -8574,35 +8845,39 @@
           <a:p>
             <a:pPr lvl="0"/>
             <a:r>
-              <a:rPr lang="en-GB"/>
+              <a:rPr lang="en-GB" dirty="0"/>
               <a:t>Click to edit Master text styles</a:t>
             </a:r>
+            <a:endParaRPr lang="en-GB"/>
           </a:p>
           <a:p>
             <a:pPr lvl="1"/>
             <a:r>
-              <a:rPr lang="en-GB"/>
+              <a:rPr lang="en-GB" dirty="0"/>
               <a:t>Second level</a:t>
             </a:r>
+            <a:endParaRPr lang="en-GB"/>
           </a:p>
           <a:p>
             <a:pPr lvl="2"/>
             <a:r>
-              <a:rPr lang="en-GB"/>
+              <a:rPr lang="en-GB" dirty="0"/>
               <a:t>Third level</a:t>
             </a:r>
+            <a:endParaRPr lang="en-GB"/>
           </a:p>
           <a:p>
             <a:pPr lvl="3"/>
             <a:r>
-              <a:rPr lang="en-GB"/>
+              <a:rPr lang="en-GB" dirty="0"/>
               <a:t>Fourth level</a:t>
             </a:r>
+            <a:endParaRPr lang="en-GB"/>
           </a:p>
           <a:p>
             <a:pPr lvl="4"/>
             <a:r>
-              <a:rPr lang="en-GB"/>
+              <a:rPr lang="en-GB" dirty="0"/>
               <a:t>Fifth level</a:t>
             </a:r>
           </a:p>
@@ -8645,9 +8920,9 @@
             <a:fld id="{7559FC98-AF75-4A00-A03C-DF9FEBF6BCB9}" type="slidenum">
               <a:rPr lang="en-GB" smtClean="0"/>
               <a:pPr/>
-              <a:t>‹#›</a:t>
+              <a:t>‹Nr.›</a:t>
             </a:fld>
-            <a:endParaRPr lang="en-GB"/>
+            <a:endParaRPr lang="en-GB" dirty="0"/>
           </a:p>
         </p:txBody>
       </p:sp>
@@ -8698,7 +8973,7 @@
           <a:p>
             <a:pPr algn="l"/>
             <a:r>
-              <a:rPr lang="en-GB" sz="800">
+              <a:rPr lang="en-GB" sz="800" dirty="0">
                 <a:solidFill>
                   <a:schemeClr val="tx1"/>
                 </a:solidFill>
@@ -8778,7 +9053,7 @@
           <a:lstStyle/>
           <a:p>
             <a:pPr algn="l"/>
-            <a:endParaRPr lang="en-GB" sz="800">
+            <a:endParaRPr lang="en-GB" sz="800" dirty="0">
               <a:solidFill>
                 <a:schemeClr val="tx1"/>
               </a:solidFill>
@@ -8833,7 +9108,7 @@
           <a:p>
             <a:pPr algn="l"/>
             <a:r>
-              <a:rPr lang="en-GB" sz="800" u="none">
+              <a:rPr lang="en-GB" sz="800" u="none" dirty="0">
                 <a:solidFill>
                   <a:schemeClr val="tx1"/>
                 </a:solidFill>
@@ -9029,7 +9304,7 @@
           <a:p>
             <a:fld id="{7559FC98-AF75-4A00-A03C-DF9FEBF6BCB9}" type="slidenum">
               <a:rPr lang="en-GB" smtClean="0"/>
-              <a:t>‹#›</a:t>
+              <a:t>‹Nr.›</a:t>
             </a:fld>
             <a:endParaRPr lang="en-GB"/>
           </a:p>
@@ -9148,7 +9423,7 @@
           <a:p>
             <a:pPr algn="l"/>
             <a:r>
-              <a:rPr lang="en-GB" sz="800">
+              <a:rPr lang="en-GB" sz="800" dirty="0">
                 <a:solidFill>
                   <a:schemeClr val="tx1"/>
                 </a:solidFill>
@@ -9228,7 +9503,7 @@
           <a:lstStyle/>
           <a:p>
             <a:pPr algn="l"/>
-            <a:endParaRPr lang="en-GB" sz="800">
+            <a:endParaRPr lang="en-GB" sz="800" dirty="0">
               <a:solidFill>
                 <a:schemeClr val="tx1"/>
               </a:solidFill>
@@ -9283,7 +9558,7 @@
           <a:p>
             <a:pPr algn="l"/>
             <a:r>
-              <a:rPr lang="en-GB" sz="800" u="none">
+              <a:rPr lang="en-GB" sz="800" u="none" dirty="0">
                 <a:solidFill>
                   <a:schemeClr val="tx1"/>
                 </a:solidFill>
@@ -9363,6 +9638,7 @@
               <a:rPr lang="en-GB"/>
               <a:t>Click to edit Master title style</a:t>
             </a:r>
+            <a:endParaRPr lang="en-GB" dirty="0"/>
           </a:p>
         </p:txBody>
       </p:sp>
@@ -9399,35 +9675,39 @@
           <a:p>
             <a:pPr lvl="0"/>
             <a:r>
-              <a:rPr lang="en-GB"/>
+              <a:rPr lang="en-GB" dirty="0"/>
               <a:t>Click to edit Master text styles</a:t>
             </a:r>
+            <a:endParaRPr lang="en-GB"/>
           </a:p>
           <a:p>
             <a:pPr lvl="1"/>
             <a:r>
-              <a:rPr lang="en-GB"/>
+              <a:rPr lang="en-GB" dirty="0"/>
               <a:t>Second level</a:t>
             </a:r>
+            <a:endParaRPr lang="en-GB"/>
           </a:p>
           <a:p>
             <a:pPr lvl="2"/>
             <a:r>
-              <a:rPr lang="en-GB"/>
+              <a:rPr lang="en-GB" dirty="0"/>
               <a:t>Third level</a:t>
             </a:r>
+            <a:endParaRPr lang="en-GB"/>
           </a:p>
           <a:p>
             <a:pPr lvl="3"/>
             <a:r>
-              <a:rPr lang="en-GB"/>
+              <a:rPr lang="en-GB" dirty="0"/>
               <a:t>Fourth level</a:t>
             </a:r>
+            <a:endParaRPr lang="en-GB"/>
           </a:p>
           <a:p>
             <a:pPr lvl="4"/>
             <a:r>
-              <a:rPr lang="en-GB"/>
+              <a:rPr lang="en-GB" dirty="0"/>
               <a:t>Fifth level</a:t>
             </a:r>
           </a:p>
@@ -9472,9 +9752,9 @@
           <a:p>
             <a:fld id="{ED8FFC02-F414-406A-9AF9-AE6E7846E736}" type="datetime4">
               <a:rPr lang="en-GB" smtClean="0"/>
-              <a:t>12 April 2026</a:t>
+              <a:t>15 April 2026</a:t>
             </a:fld>
-            <a:endParaRPr lang="en-GB"/>
+            <a:endParaRPr lang="en-GB" dirty="0"/>
           </a:p>
         </p:txBody>
       </p:sp>
@@ -9519,6 +9799,7 @@
               <a:rPr lang="en-GB"/>
               <a:t>Corporate Design - Power Point Master</a:t>
             </a:r>
+            <a:endParaRPr lang="en-GB" dirty="0"/>
           </a:p>
         </p:txBody>
       </p:sp>
@@ -9562,9 +9843,9 @@
             <a:fld id="{7559FC98-AF75-4A00-A03C-DF9FEBF6BCB9}" type="slidenum">
               <a:rPr lang="en-GB" smtClean="0"/>
               <a:pPr/>
-              <a:t>‹#›</a:t>
+              <a:t>‹Nr.›</a:t>
             </a:fld>
-            <a:endParaRPr lang="en-GB"/>
+            <a:endParaRPr lang="en-GB" dirty="0"/>
           </a:p>
         </p:txBody>
       </p:sp>
@@ -10026,19 +10307,21 @@
           <a:lstStyle/>
           <a:p>
             <a:r>
+              <a:rPr dirty="0"/>
               <a:t>EDPO Project FS26</a:t>
             </a:r>
           </a:p>
           <a:p>
             <a:r>
-              <a:rPr err="1"/>
+              <a:rPr dirty="0" err="1"/>
               <a:t>St.Gallen</a:t>
             </a:r>
             <a:r>
+              <a:rPr dirty="0"/>
               <a:t>  |</a:t>
             </a:r>
             <a:r>
-              <a:rPr lang="de-DE"/>
+              <a:rPr lang="de-DE" dirty="0"/>
               <a:t>  Ioannis Theodosiadis &amp; Cyril Gabriele</a:t>
             </a:r>
           </a:p>
@@ -10082,7 +10365,7 @@
               <a:pPr algn="ctr"/>
               <a:t>1</a:t>
             </a:fld>
-            <a:endParaRPr lang="de-DE" sz="1200">
+            <a:endParaRPr lang="de-DE" sz="1200" dirty="0">
               <a:solidFill>
                 <a:schemeClr val="bg1"/>
               </a:solidFill>
@@ -10118,7 +10401,7 @@
           </a:bodyPr>
           <a:lstStyle/>
           <a:p>
-            <a:endParaRPr lang="de-DE"/>
+            <a:endParaRPr lang="de-DE" dirty="0"/>
           </a:p>
         </p:txBody>
       </p:sp>
@@ -10280,8 +10563,8 @@
         </p:nvSpPr>
         <p:spPr>
           <a:xfrm>
-            <a:off x="640701" y="1740753"/>
-            <a:ext cx="3643431" cy="1700466"/>
+            <a:off x="358774" y="1715416"/>
+            <a:ext cx="3657600" cy="1700466"/>
           </a:xfrm>
           <a:prstGeom prst="rect">
             <a:avLst/>
@@ -10345,8 +10628,8 @@
         </p:nvSpPr>
         <p:spPr>
           <a:xfrm>
-            <a:off x="4859867" y="1728906"/>
-            <a:ext cx="3643431" cy="2577629"/>
+            <a:off x="5026079" y="1715416"/>
+            <a:ext cx="3657600" cy="2577629"/>
           </a:xfrm>
           <a:prstGeom prst="rect">
             <a:avLst/>
@@ -10445,7 +10728,7 @@
         </p:nvCxnSpPr>
         <p:spPr>
           <a:xfrm>
-            <a:off x="4521227" y="1800020"/>
+            <a:off x="4387326" y="1792463"/>
             <a:ext cx="0" cy="2213180"/>
           </a:xfrm>
           <a:prstGeom prst="line">
@@ -10503,6 +10786,53 @@
               <a:rPr lang="en-US"/>
               <a:t>: 1 extra service but clean separation</a:t>
             </a:r>
+          </a:p>
+        </p:txBody>
+      </p:sp>
+      <p:sp>
+        <p:nvSpPr>
+          <p:cNvPr id="5" name="Rechteck 4">
+            <a:extLst>
+              <a:ext uri="{FF2B5EF4-FFF2-40B4-BE49-F238E27FC236}">
+                <a16:creationId xmlns:a16="http://schemas.microsoft.com/office/drawing/2014/main" id="{E38A3897-1D26-FE5E-A233-BCD4D720EBA4}"/>
+              </a:ext>
+            </a:extLst>
+          </p:cNvPr>
+          <p:cNvSpPr/>
+          <p:nvPr/>
+        </p:nvSpPr>
+        <p:spPr>
+          <a:xfrm>
+            <a:off x="6771862" y="4767261"/>
+            <a:ext cx="649356" cy="142669"/>
+          </a:xfrm>
+          <a:prstGeom prst="rect">
+            <a:avLst/>
+          </a:prstGeom>
+          <a:ln>
+            <a:noFill/>
+          </a:ln>
+        </p:spPr>
+        <p:style>
+          <a:lnRef idx="2">
+            <a:schemeClr val="accent6"/>
+          </a:lnRef>
+          <a:fillRef idx="1">
+            <a:schemeClr val="lt1"/>
+          </a:fillRef>
+          <a:effectRef idx="0">
+            <a:schemeClr val="accent6"/>
+          </a:effectRef>
+          <a:fontRef idx="minor">
+            <a:schemeClr val="dk1"/>
+          </a:fontRef>
+        </p:style>
+        <p:txBody>
+          <a:bodyPr rtlCol="0" anchor="ctr"/>
+          <a:lstStyle/>
+          <a:p>
+            <a:pPr algn="ctr"/>
+            <a:endParaRPr lang="de-DE"/>
           </a:p>
         </p:txBody>
       </p:sp>
@@ -10715,6 +11045,53 @@
           </a:p>
         </p:txBody>
       </p:sp>
+      <p:sp>
+        <p:nvSpPr>
+          <p:cNvPr id="3" name="Rechteck 2">
+            <a:extLst>
+              <a:ext uri="{FF2B5EF4-FFF2-40B4-BE49-F238E27FC236}">
+                <a16:creationId xmlns:a16="http://schemas.microsoft.com/office/drawing/2014/main" id="{0C8697EE-FD77-D792-4B92-B6B34B5BBB82}"/>
+              </a:ext>
+            </a:extLst>
+          </p:cNvPr>
+          <p:cNvSpPr/>
+          <p:nvPr/>
+        </p:nvSpPr>
+        <p:spPr>
+          <a:xfrm>
+            <a:off x="6771862" y="4767261"/>
+            <a:ext cx="649356" cy="142669"/>
+          </a:xfrm>
+          <a:prstGeom prst="rect">
+            <a:avLst/>
+          </a:prstGeom>
+          <a:ln>
+            <a:noFill/>
+          </a:ln>
+        </p:spPr>
+        <p:style>
+          <a:lnRef idx="2">
+            <a:schemeClr val="accent6"/>
+          </a:lnRef>
+          <a:fillRef idx="1">
+            <a:schemeClr val="lt1"/>
+          </a:fillRef>
+          <a:effectRef idx="0">
+            <a:schemeClr val="accent6"/>
+          </a:effectRef>
+          <a:fontRef idx="minor">
+            <a:schemeClr val="dk1"/>
+          </a:fontRef>
+        </p:style>
+        <p:txBody>
+          <a:bodyPr rtlCol="0" anchor="ctr"/>
+          <a:lstStyle/>
+          <a:p>
+            <a:pPr algn="ctr"/>
+            <a:endParaRPr lang="de-DE"/>
+          </a:p>
+        </p:txBody>
+      </p:sp>
     </p:spTree>
   </p:cSld>
   <p:clrMapOvr>
@@ -10994,6 +11371,53 @@
           </a:p>
         </p:txBody>
       </p:sp>
+      <p:sp>
+        <p:nvSpPr>
+          <p:cNvPr id="5" name="Rechteck 4">
+            <a:extLst>
+              <a:ext uri="{FF2B5EF4-FFF2-40B4-BE49-F238E27FC236}">
+                <a16:creationId xmlns:a16="http://schemas.microsoft.com/office/drawing/2014/main" id="{0F913F75-48DE-A207-2463-50421F55CEF3}"/>
+              </a:ext>
+            </a:extLst>
+          </p:cNvPr>
+          <p:cNvSpPr/>
+          <p:nvPr/>
+        </p:nvSpPr>
+        <p:spPr>
+          <a:xfrm>
+            <a:off x="6771862" y="4767261"/>
+            <a:ext cx="649356" cy="142669"/>
+          </a:xfrm>
+          <a:prstGeom prst="rect">
+            <a:avLst/>
+          </a:prstGeom>
+          <a:ln>
+            <a:noFill/>
+          </a:ln>
+        </p:spPr>
+        <p:style>
+          <a:lnRef idx="2">
+            <a:schemeClr val="accent6"/>
+          </a:lnRef>
+          <a:fillRef idx="1">
+            <a:schemeClr val="lt1"/>
+          </a:fillRef>
+          <a:effectRef idx="0">
+            <a:schemeClr val="accent6"/>
+          </a:effectRef>
+          <a:fontRef idx="minor">
+            <a:schemeClr val="dk1"/>
+          </a:fontRef>
+        </p:style>
+        <p:txBody>
+          <a:bodyPr rtlCol="0" anchor="ctr"/>
+          <a:lstStyle/>
+          <a:p>
+            <a:pPr algn="ctr"/>
+            <a:endParaRPr lang="de-DE"/>
+          </a:p>
+        </p:txBody>
+      </p:sp>
     </p:spTree>
   </p:cSld>
   <p:clrMapOvr>
@@ -11253,11 +11677,58 @@
               <a:pPr algn="ctr"/>
               <a:t>13</a:t>
             </a:fld>
-            <a:endParaRPr lang="de-DE" sz="1200">
+            <a:endParaRPr lang="de-DE" sz="1200" dirty="0">
               <a:solidFill>
                 <a:schemeClr val="bg1"/>
               </a:solidFill>
             </a:endParaRPr>
+          </a:p>
+        </p:txBody>
+      </p:sp>
+      <p:sp>
+        <p:nvSpPr>
+          <p:cNvPr id="5" name="Rechteck 4">
+            <a:extLst>
+              <a:ext uri="{FF2B5EF4-FFF2-40B4-BE49-F238E27FC236}">
+                <a16:creationId xmlns:a16="http://schemas.microsoft.com/office/drawing/2014/main" id="{50DFA382-58E9-25A7-5169-A90D78FFF4BE}"/>
+              </a:ext>
+            </a:extLst>
+          </p:cNvPr>
+          <p:cNvSpPr/>
+          <p:nvPr/>
+        </p:nvSpPr>
+        <p:spPr>
+          <a:xfrm>
+            <a:off x="6771862" y="4767261"/>
+            <a:ext cx="649356" cy="142669"/>
+          </a:xfrm>
+          <a:prstGeom prst="rect">
+            <a:avLst/>
+          </a:prstGeom>
+          <a:ln>
+            <a:noFill/>
+          </a:ln>
+        </p:spPr>
+        <p:style>
+          <a:lnRef idx="2">
+            <a:schemeClr val="accent6"/>
+          </a:lnRef>
+          <a:fillRef idx="1">
+            <a:schemeClr val="lt1"/>
+          </a:fillRef>
+          <a:effectRef idx="0">
+            <a:schemeClr val="accent6"/>
+          </a:effectRef>
+          <a:fontRef idx="minor">
+            <a:schemeClr val="dk1"/>
+          </a:fontRef>
+        </p:style>
+        <p:txBody>
+          <a:bodyPr rtlCol="0" anchor="ctr"/>
+          <a:lstStyle/>
+          <a:p>
+            <a:pPr algn="ctr"/>
+            <a:endParaRPr lang="de-DE"/>
           </a:p>
         </p:txBody>
       </p:sp>
@@ -11326,31 +11797,94 @@
       </p:sp>
       <p:sp>
         <p:nvSpPr>
-          <p:cNvPr id="4" name="Slide Number Placeholder 3">
+          <p:cNvPr id="3" name="Rechteck 2">
             <a:extLst>
               <a:ext uri="{FF2B5EF4-FFF2-40B4-BE49-F238E27FC236}">
-                <a16:creationId xmlns:a16="http://schemas.microsoft.com/office/drawing/2014/main" id="{F29099E5-CEB2-12DF-32D9-6AEF073823DA}"/>
+                <a16:creationId xmlns:a16="http://schemas.microsoft.com/office/drawing/2014/main" id="{BE8C2E73-443B-1ADF-A385-CFD84D950D01}"/>
               </a:ext>
             </a:extLst>
           </p:cNvPr>
-          <p:cNvSpPr>
-            <a:spLocks noGrp="1"/>
-          </p:cNvSpPr>
-          <p:nvPr>
-            <p:ph type="sldNum" sz="quarter" idx="12"/>
-          </p:nvPr>
-        </p:nvSpPr>
-        <p:spPr/>
-        <p:txBody>
-          <a:bodyPr/>
+          <p:cNvSpPr/>
+          <p:nvPr/>
+        </p:nvSpPr>
+        <p:spPr>
+          <a:xfrm>
+            <a:off x="6771862" y="4747383"/>
+            <a:ext cx="649356" cy="142669"/>
+          </a:xfrm>
+          <a:prstGeom prst="rect">
+            <a:avLst/>
+          </a:prstGeom>
+          <a:ln>
+            <a:noFill/>
+          </a:ln>
+        </p:spPr>
+        <p:style>
+          <a:lnRef idx="2">
+            <a:schemeClr val="accent6"/>
+          </a:lnRef>
+          <a:fillRef idx="1">
+            <a:schemeClr val="lt1"/>
+          </a:fillRef>
+          <a:effectRef idx="0">
+            <a:schemeClr val="accent6"/>
+          </a:effectRef>
+          <a:fontRef idx="minor">
+            <a:schemeClr val="dk1"/>
+          </a:fontRef>
+        </p:style>
+        <p:txBody>
+          <a:bodyPr rtlCol="0" anchor="ctr"/>
           <a:lstStyle/>
           <a:p>
-            <a:fld id="{7559FC98-AF75-4A00-A03C-DF9FEBF6BCB9}" type="slidenum">
-              <a:rPr lang="en-GB" smtClean="0"/>
-              <a:pPr/>
+            <a:pPr algn="ctr"/>
+            <a:endParaRPr lang="de-DE"/>
+          </a:p>
+        </p:txBody>
+      </p:sp>
+      <p:sp>
+        <p:nvSpPr>
+          <p:cNvPr id="6" name="Textfeld 5">
+            <a:extLst>
+              <a:ext uri="{FF2B5EF4-FFF2-40B4-BE49-F238E27FC236}">
+                <a16:creationId xmlns:a16="http://schemas.microsoft.com/office/drawing/2014/main" id="{A62C041B-3188-72C0-1B1B-672F7EE7F362}"/>
+              </a:ext>
+            </a:extLst>
+          </p:cNvPr>
+          <p:cNvSpPr txBox="1"/>
+          <p:nvPr/>
+        </p:nvSpPr>
+        <p:spPr>
+          <a:xfrm>
+            <a:off x="8503298" y="4702629"/>
+            <a:ext cx="360784" cy="261610"/>
+          </a:xfrm>
+          <a:prstGeom prst="rect">
+            <a:avLst/>
+          </a:prstGeom>
+          <a:noFill/>
+        </p:spPr>
+        <p:txBody>
+          <a:bodyPr wrap="square" rtlCol="0">
+            <a:spAutoFit/>
+          </a:bodyPr>
+          <a:lstStyle/>
+          <a:p>
+            <a:pPr algn="ctr"/>
+            <a:fld id="{7C7D4858-ADAF-A34F-A87D-0D5A348A4697}" type="slidenum">
+              <a:rPr lang="de-DE" sz="1100" smtClean="0">
+                <a:solidFill>
+                  <a:schemeClr val="bg1"/>
+                </a:solidFill>
+              </a:rPr>
+              <a:pPr algn="ctr"/>
               <a:t>14</a:t>
             </a:fld>
-            <a:endParaRPr lang="en-GB"/>
+            <a:endParaRPr lang="de-DE" sz="1200" dirty="0">
+              <a:solidFill>
+                <a:schemeClr val="bg1"/>
+              </a:solidFill>
+            </a:endParaRPr>
           </a:p>
         </p:txBody>
       </p:sp>
@@ -11421,71 +11955,71 @@
           <a:lstStyle/>
           <a:p>
             <a:r>
-              <a:rPr sz="1400"/>
+              <a:rPr sz="1400" dirty="0"/>
               <a:t>Demo 1 </a:t>
             </a:r>
             <a:r>
-              <a:rPr lang="en-US" sz="1400"/>
+              <a:rPr lang="en-US" sz="1400" dirty="0"/>
               <a:t>-</a:t>
             </a:r>
             <a:r>
-              <a:rPr sz="1400"/>
+              <a:rPr sz="1400" dirty="0"/>
               <a:t> Happy-path onboarding</a:t>
             </a:r>
           </a:p>
           <a:p>
             <a:pPr lvl="1"/>
             <a:r>
-              <a:rPr sz="1200" err="1"/>
+              <a:rPr sz="1200" dirty="0" err="1"/>
               <a:t>Tasklist</a:t>
             </a:r>
             <a:r>
-              <a:rPr sz="1200"/>
+              <a:rPr sz="1200" dirty="0"/>
               <a:t> form → confirmation email → click → user + portfolio created</a:t>
             </a:r>
           </a:p>
           <a:p>
             <a:pPr lvl="1"/>
             <a:r>
-              <a:rPr sz="1200"/>
+              <a:rPr sz="1200" dirty="0"/>
               <a:t>Camunda Operate shows the completed process instance</a:t>
             </a:r>
           </a:p>
           <a:p>
             <a:r>
-              <a:rPr sz="1400"/>
+              <a:rPr sz="1400" dirty="0"/>
               <a:t>Demo 2 </a:t>
             </a:r>
             <a:r>
-              <a:rPr lang="en-US" sz="1400"/>
+              <a:rPr lang="en-US" sz="1400" dirty="0"/>
               <a:t>-</a:t>
             </a:r>
             <a:r>
-              <a:rPr sz="1400"/>
+              <a:rPr sz="1400" dirty="0"/>
               <a:t> Happy-path order placement</a:t>
             </a:r>
           </a:p>
           <a:p>
             <a:pPr lvl="1"/>
             <a:r>
-              <a:rPr sz="1200" err="1"/>
+              <a:rPr sz="1200" dirty="0" err="1"/>
               <a:t>Tasklist</a:t>
             </a:r>
             <a:r>
-              <a:rPr sz="1200"/>
+              <a:rPr sz="1200" dirty="0"/>
               <a:t> order → price match → APPROVED → portfolio updated</a:t>
             </a:r>
           </a:p>
           <a:p>
             <a:pPr lvl="1"/>
             <a:r>
-              <a:rPr sz="1200"/>
+              <a:rPr sz="1200" dirty="0"/>
               <a:t>Notification email received</a:t>
             </a:r>
           </a:p>
           <a:p>
             <a:r>
-              <a:rPr sz="1400"/>
+              <a:rPr sz="1400" dirty="0"/>
               <a:t>Optional if time permits: timeout scenario, Kafka UI, Operate history</a:t>
             </a:r>
           </a:p>
@@ -11529,7 +12063,7 @@
               <a:pPr algn="ctr"/>
               <a:t>15</a:t>
             </a:fld>
-            <a:endParaRPr lang="de-DE" sz="1200">
+            <a:endParaRPr lang="de-DE" sz="1200" dirty="0">
               <a:solidFill>
                 <a:schemeClr val="bg1"/>
               </a:solidFill>
@@ -11673,7 +12207,7 @@
               <a:pPr algn="ctr"/>
               <a:t>16</a:t>
             </a:fld>
-            <a:endParaRPr lang="de-DE" sz="1200">
+            <a:endParaRPr lang="de-DE" sz="1200" dirty="0">
               <a:solidFill>
                 <a:schemeClr val="bg1"/>
               </a:solidFill>
@@ -11818,7 +12352,7 @@
               <a:pPr algn="ctr"/>
               <a:t>17</a:t>
             </a:fld>
-            <a:endParaRPr lang="de-DE" sz="1200">
+            <a:endParaRPr lang="de-DE" sz="1200" dirty="0">
               <a:solidFill>
                 <a:schemeClr val="bg1"/>
               </a:solidFill>
@@ -11867,7 +12401,7 @@
           <a:lstStyle/>
           <a:p>
             <a:r>
-              <a:rPr b="1">
+              <a:rPr lang="de-DE" b="1">
                 <a:solidFill>
                   <a:srgbClr val="00802E"/>
                 </a:solidFill>
@@ -11875,7 +12409,7 @@
               <a:t>What is </a:t>
             </a:r>
             <a:r>
-              <a:rPr b="1" err="1">
+              <a:rPr lang="de-DE" b="1" err="1">
                 <a:solidFill>
                   <a:srgbClr val="00802E"/>
                 </a:solidFill>
@@ -11883,7 +12417,7 @@
               <a:t>CryptoFlow</a:t>
             </a:r>
             <a:r>
-              <a:rPr b="1">
+              <a:rPr lang="de-DE" b="1">
                 <a:solidFill>
                   <a:srgbClr val="00802E"/>
                 </a:solidFill>
@@ -12008,6 +12542,53 @@
                 <a:schemeClr val="bg1"/>
               </a:solidFill>
             </a:endParaRPr>
+          </a:p>
+        </p:txBody>
+      </p:sp>
+      <p:sp>
+        <p:nvSpPr>
+          <p:cNvPr id="4" name="Rechteck 3">
+            <a:extLst>
+              <a:ext uri="{FF2B5EF4-FFF2-40B4-BE49-F238E27FC236}">
+                <a16:creationId xmlns:a16="http://schemas.microsoft.com/office/drawing/2014/main" id="{61D9E05C-EFDA-C38E-1060-691E99E439D1}"/>
+              </a:ext>
+            </a:extLst>
+          </p:cNvPr>
+          <p:cNvSpPr/>
+          <p:nvPr/>
+        </p:nvSpPr>
+        <p:spPr>
+          <a:xfrm>
+            <a:off x="6771862" y="4767261"/>
+            <a:ext cx="649356" cy="142669"/>
+          </a:xfrm>
+          <a:prstGeom prst="rect">
+            <a:avLst/>
+          </a:prstGeom>
+          <a:ln>
+            <a:noFill/>
+          </a:ln>
+        </p:spPr>
+        <p:style>
+          <a:lnRef idx="2">
+            <a:schemeClr val="accent6"/>
+          </a:lnRef>
+          <a:fillRef idx="1">
+            <a:schemeClr val="lt1"/>
+          </a:fillRef>
+          <a:effectRef idx="0">
+            <a:schemeClr val="accent6"/>
+          </a:effectRef>
+          <a:fontRef idx="minor">
+            <a:schemeClr val="dk1"/>
+          </a:fontRef>
+        </p:style>
+        <p:txBody>
+          <a:bodyPr rtlCol="0" anchor="ctr"/>
+          <a:lstStyle/>
+          <a:p>
+            <a:pPr algn="ctr"/>
+            <a:endParaRPr lang="de-DE"/>
           </a:p>
         </p:txBody>
       </p:sp>
@@ -12302,6 +12883,53 @@
           </a:p>
         </p:txBody>
       </p:sp>
+      <p:sp>
+        <p:nvSpPr>
+          <p:cNvPr id="5" name="Rechteck 4">
+            <a:extLst>
+              <a:ext uri="{FF2B5EF4-FFF2-40B4-BE49-F238E27FC236}">
+                <a16:creationId xmlns:a16="http://schemas.microsoft.com/office/drawing/2014/main" id="{86516D82-9D37-78AB-9479-BFD317259EFF}"/>
+              </a:ext>
+            </a:extLst>
+          </p:cNvPr>
+          <p:cNvSpPr/>
+          <p:nvPr/>
+        </p:nvSpPr>
+        <p:spPr>
+          <a:xfrm>
+            <a:off x="6771862" y="4767261"/>
+            <a:ext cx="649356" cy="142669"/>
+          </a:xfrm>
+          <a:prstGeom prst="rect">
+            <a:avLst/>
+          </a:prstGeom>
+          <a:ln>
+            <a:noFill/>
+          </a:ln>
+        </p:spPr>
+        <p:style>
+          <a:lnRef idx="2">
+            <a:schemeClr val="accent6"/>
+          </a:lnRef>
+          <a:fillRef idx="1">
+            <a:schemeClr val="lt1"/>
+          </a:fillRef>
+          <a:effectRef idx="0">
+            <a:schemeClr val="accent6"/>
+          </a:effectRef>
+          <a:fontRef idx="minor">
+            <a:schemeClr val="dk1"/>
+          </a:fontRef>
+        </p:style>
+        <p:txBody>
+          <a:bodyPr rtlCol="0" anchor="ctr"/>
+          <a:lstStyle/>
+          <a:p>
+            <a:pPr algn="ctr"/>
+            <a:endParaRPr lang="de-DE"/>
+          </a:p>
+        </p:txBody>
+      </p:sp>
     </p:spTree>
   </p:cSld>
   <p:clrMapOvr>
@@ -12343,7 +12971,7 @@
           <a:lstStyle/>
           <a:p>
             <a:r>
-              <a:rPr lang="de-CH" b="1">
+              <a:rPr lang="de-CH" b="1" dirty="0">
                 <a:solidFill>
                   <a:srgbClr val="00802E"/>
                 </a:solidFill>
@@ -12351,7 +12979,7 @@
               <a:t>Non-</a:t>
             </a:r>
             <a:r>
-              <a:rPr lang="de-CH" b="1" err="1">
+              <a:rPr lang="de-CH" b="1" dirty="0" err="1">
                 <a:solidFill>
                   <a:srgbClr val="00802E"/>
                 </a:solidFill>
@@ -12359,26 +12987,13 @@
               <a:t>Functional</a:t>
             </a:r>
             <a:r>
-              <a:rPr lang="de-CH" b="1">
+              <a:rPr lang="de-CH" b="1" dirty="0">
                 <a:solidFill>
                   <a:srgbClr val="00802E"/>
                 </a:solidFill>
               </a:rPr>
-              <a:t> </a:t>
-            </a:r>
-            <a:r>
-              <a:rPr lang="de-CH" b="1" err="1">
-                <a:solidFill>
-                  <a:srgbClr val="00802E"/>
-                </a:solidFill>
-              </a:rPr>
-              <a:t>Requirements</a:t>
-            </a:r>
-            <a:endParaRPr b="1">
-              <a:solidFill>
-                <a:srgbClr val="00802E"/>
-              </a:solidFill>
-            </a:endParaRPr>
+              <a:t> Properties</a:t>
+            </a:r>
           </a:p>
         </p:txBody>
       </p:sp>
@@ -12420,7 +13035,7 @@
               <a:pPr algn="ctr"/>
               <a:t>4</a:t>
             </a:fld>
-            <a:endParaRPr lang="de-DE" sz="1200">
+            <a:endParaRPr lang="de-DE" sz="1200" dirty="0">
               <a:solidFill>
                 <a:schemeClr val="bg1"/>
               </a:solidFill>
@@ -12454,7 +13069,583 @@
           <a:bodyPr/>
           <a:lstStyle/>
           <a:p>
-            <a:endParaRPr lang="en-US"/>
+            <a:r>
+              <a:rPr lang="en-US" dirty="0"/>
+              <a:t>Top 3 drivers</a:t>
+            </a:r>
+          </a:p>
+          <a:p>
+            <a:pPr marL="285750" indent="-285750">
+              <a:buFont typeface="Symbol" pitchFamily="2" charset="2"/>
+              <a:buChar char="-"/>
+            </a:pPr>
+            <a:r>
+              <a:rPr lang="en-US" b="1" dirty="0">
+                <a:solidFill>
+                  <a:schemeClr val="accent1"/>
+                </a:solidFill>
+              </a:rPr>
+              <a:t>Data integrity</a:t>
+            </a:r>
+            <a:r>
+              <a:rPr lang="en-US" dirty="0"/>
+              <a:t>: every state change must be durably captured and propagated across contexts without loss</a:t>
+            </a:r>
+          </a:p>
+          <a:p>
+            <a:pPr marL="285750" indent="-285750">
+              <a:buFont typeface="Symbol" pitchFamily="2" charset="2"/>
+              <a:buChar char="-"/>
+            </a:pPr>
+            <a:r>
+              <a:rPr lang="en-US" b="1" dirty="0">
+                <a:solidFill>
+                  <a:schemeClr val="accent1"/>
+                </a:solidFill>
+              </a:rPr>
+              <a:t>Fault tolerance</a:t>
+            </a:r>
+            <a:r>
+              <a:rPr lang="en-US" dirty="0"/>
+              <a:t>: </a:t>
+            </a:r>
+            <a:r>
+              <a:rPr lang="de-DE" dirty="0" err="1"/>
+              <a:t>services</a:t>
+            </a:r>
+            <a:r>
+              <a:rPr lang="de-DE" dirty="0"/>
+              <a:t> </a:t>
+            </a:r>
+            <a:r>
+              <a:rPr lang="de-DE" dirty="0" err="1"/>
+              <a:t>can</a:t>
+            </a:r>
+            <a:r>
+              <a:rPr lang="de-DE" dirty="0"/>
+              <a:t> fail </a:t>
+            </a:r>
+            <a:r>
+              <a:rPr lang="de-DE" dirty="0" err="1"/>
+              <a:t>independently</a:t>
+            </a:r>
+            <a:r>
+              <a:rPr lang="de-DE" dirty="0"/>
+              <a:t>; partial </a:t>
+            </a:r>
+            <a:r>
+              <a:rPr lang="de-DE" dirty="0" err="1"/>
+              <a:t>failures</a:t>
+            </a:r>
+            <a:r>
+              <a:rPr lang="de-DE" dirty="0"/>
+              <a:t> and </a:t>
+            </a:r>
+            <a:r>
+              <a:rPr lang="de-DE" dirty="0" err="1"/>
+              <a:t>outages</a:t>
+            </a:r>
+            <a:r>
+              <a:rPr lang="de-DE" dirty="0"/>
+              <a:t> </a:t>
+            </a:r>
+            <a:r>
+              <a:rPr lang="de-DE" dirty="0" err="1"/>
+              <a:t>must</a:t>
+            </a:r>
+            <a:r>
+              <a:rPr lang="de-DE" dirty="0"/>
+              <a:t> not </a:t>
+            </a:r>
+            <a:r>
+              <a:rPr lang="de-DE" dirty="0" err="1"/>
+              <a:t>corrupt</a:t>
+            </a:r>
+            <a:r>
+              <a:rPr lang="de-DE" dirty="0"/>
+              <a:t> </a:t>
+            </a:r>
+            <a:r>
+              <a:rPr lang="de-DE" dirty="0" err="1"/>
+              <a:t>state</a:t>
+            </a:r>
+            <a:r>
+              <a:rPr lang="de-DE" dirty="0"/>
+              <a:t> </a:t>
+            </a:r>
+            <a:r>
+              <a:rPr lang="de-DE" dirty="0" err="1"/>
+              <a:t>or</a:t>
+            </a:r>
+            <a:r>
+              <a:rPr lang="de-DE" dirty="0"/>
+              <a:t> block </a:t>
+            </a:r>
+            <a:r>
+              <a:rPr lang="de-DE" dirty="0" err="1"/>
+              <a:t>processing</a:t>
+            </a:r>
+            <a:endParaRPr lang="de-DE" dirty="0"/>
+          </a:p>
+          <a:p>
+            <a:pPr marL="285750" indent="-285750">
+              <a:buFont typeface="Symbol" pitchFamily="2" charset="2"/>
+              <a:buChar char="-"/>
+            </a:pPr>
+            <a:r>
+              <a:rPr lang="de-DE" b="1" dirty="0" err="1">
+                <a:solidFill>
+                  <a:schemeClr val="accent1"/>
+                </a:solidFill>
+              </a:rPr>
+              <a:t>Availability</a:t>
+            </a:r>
+            <a:r>
+              <a:rPr lang="de-DE" dirty="0"/>
+              <a:t>: </a:t>
+            </a:r>
+            <a:r>
+              <a:rPr lang="de-DE" dirty="0" err="1"/>
+              <a:t>contexts</a:t>
+            </a:r>
+            <a:r>
+              <a:rPr lang="de-DE" dirty="0"/>
+              <a:t> </a:t>
+            </a:r>
+            <a:r>
+              <a:rPr lang="de-DE" dirty="0" err="1"/>
+              <a:t>remain</a:t>
+            </a:r>
+            <a:r>
+              <a:rPr lang="de-DE" dirty="0"/>
+              <a:t> operational </a:t>
+            </a:r>
+            <a:r>
+              <a:rPr lang="de-DE" dirty="0" err="1"/>
+              <a:t>even</a:t>
+            </a:r>
+            <a:r>
+              <a:rPr lang="de-DE" dirty="0"/>
+              <a:t> </a:t>
+            </a:r>
+            <a:r>
+              <a:rPr lang="de-DE" dirty="0" err="1"/>
+              <a:t>if</a:t>
+            </a:r>
+            <a:r>
+              <a:rPr lang="de-DE" dirty="0"/>
+              <a:t> </a:t>
+            </a:r>
+            <a:r>
+              <a:rPr lang="de-DE" dirty="0" err="1"/>
+              <a:t>others</a:t>
+            </a:r>
+            <a:r>
+              <a:rPr lang="de-DE" dirty="0"/>
+              <a:t> </a:t>
+            </a:r>
+            <a:r>
+              <a:rPr lang="de-DE" dirty="0" err="1"/>
+              <a:t>are</a:t>
+            </a:r>
+            <a:r>
+              <a:rPr lang="de-DE" dirty="0"/>
+              <a:t> </a:t>
+            </a:r>
+            <a:r>
+              <a:rPr lang="de-DE" dirty="0" err="1"/>
+              <a:t>unavailable</a:t>
+            </a:r>
+            <a:r>
+              <a:rPr lang="de-DE" dirty="0"/>
+              <a:t> → </a:t>
+            </a:r>
+            <a:r>
+              <a:rPr lang="de-DE" dirty="0" err="1"/>
+              <a:t>no</a:t>
+            </a:r>
+            <a:r>
+              <a:rPr lang="de-DE" dirty="0"/>
+              <a:t> </a:t>
+            </a:r>
+            <a:r>
+              <a:rPr lang="de-DE" dirty="0" err="1"/>
+              <a:t>cascading</a:t>
+            </a:r>
+            <a:r>
+              <a:rPr lang="de-DE" dirty="0"/>
+              <a:t> </a:t>
+            </a:r>
+            <a:r>
+              <a:rPr lang="de-DE" dirty="0" err="1"/>
+              <a:t>failures</a:t>
+            </a:r>
+            <a:endParaRPr lang="en-US" dirty="0"/>
+          </a:p>
+          <a:p>
+            <a:endParaRPr lang="en-US" dirty="0"/>
+          </a:p>
+          <a:p>
+            <a:r>
+              <a:rPr lang="en-US" dirty="0"/>
+              <a:t>Also driving</a:t>
+            </a:r>
+          </a:p>
+          <a:p>
+            <a:pPr marL="285750" indent="-285750">
+              <a:buFont typeface="Symbol" pitchFamily="2" charset="2"/>
+              <a:buChar char="-"/>
+            </a:pPr>
+            <a:r>
+              <a:rPr lang="de-DE" b="1" dirty="0">
+                <a:solidFill>
+                  <a:srgbClr val="C00000"/>
+                </a:solidFill>
+              </a:rPr>
+              <a:t>Data </a:t>
+            </a:r>
+            <a:r>
+              <a:rPr lang="de-DE" b="1" dirty="0" err="1">
+                <a:solidFill>
+                  <a:srgbClr val="C00000"/>
+                </a:solidFill>
+              </a:rPr>
+              <a:t>consistency</a:t>
+            </a:r>
+            <a:r>
+              <a:rPr lang="de-DE" b="1" dirty="0">
+                <a:solidFill>
+                  <a:srgbClr val="C00000"/>
+                </a:solidFill>
+              </a:rPr>
+              <a:t> (trade-off)</a:t>
+            </a:r>
+            <a:r>
+              <a:rPr lang="de-DE" dirty="0"/>
+              <a:t>: </a:t>
+            </a:r>
+            <a:r>
+              <a:rPr lang="de-DE" dirty="0" err="1"/>
+              <a:t>no</a:t>
+            </a:r>
+            <a:r>
+              <a:rPr lang="de-DE" dirty="0"/>
+              <a:t> </a:t>
+            </a:r>
+            <a:r>
+              <a:rPr lang="de-DE" dirty="0" err="1"/>
+              <a:t>shared</a:t>
+            </a:r>
+            <a:r>
+              <a:rPr lang="de-DE" dirty="0"/>
+              <a:t> </a:t>
+            </a:r>
+            <a:r>
+              <a:rPr lang="de-DE" dirty="0" err="1"/>
+              <a:t>database</a:t>
+            </a:r>
+            <a:r>
+              <a:rPr lang="de-DE" dirty="0"/>
+              <a:t>; </a:t>
+            </a:r>
+            <a:r>
+              <a:rPr lang="de-DE" dirty="0" err="1"/>
+              <a:t>strict</a:t>
+            </a:r>
+            <a:r>
+              <a:rPr lang="de-DE" dirty="0"/>
+              <a:t> </a:t>
+            </a:r>
+            <a:r>
+              <a:rPr lang="de-DE" dirty="0" err="1"/>
+              <a:t>consistency</a:t>
+            </a:r>
+            <a:r>
+              <a:rPr lang="de-DE" dirty="0"/>
+              <a:t> </a:t>
+            </a:r>
+            <a:r>
+              <a:rPr lang="de-DE" dirty="0" err="1"/>
+              <a:t>is</a:t>
+            </a:r>
+            <a:r>
+              <a:rPr lang="de-DE" dirty="0"/>
+              <a:t> </a:t>
+            </a:r>
+            <a:r>
+              <a:rPr lang="de-DE" dirty="0" err="1"/>
+              <a:t>sacrificed</a:t>
+            </a:r>
+            <a:r>
+              <a:rPr lang="de-DE" dirty="0"/>
+              <a:t> </a:t>
+            </a:r>
+            <a:r>
+              <a:rPr lang="de-DE" dirty="0" err="1"/>
+              <a:t>for</a:t>
+            </a:r>
+            <a:r>
+              <a:rPr lang="de-DE" dirty="0"/>
+              <a:t> </a:t>
+            </a:r>
+            <a:r>
+              <a:rPr lang="de-DE" dirty="0" err="1"/>
+              <a:t>availability</a:t>
+            </a:r>
+            <a:r>
+              <a:rPr lang="de-DE" dirty="0"/>
+              <a:t> → </a:t>
+            </a:r>
+            <a:r>
+              <a:rPr lang="de-DE" dirty="0" err="1"/>
+              <a:t>system</a:t>
+            </a:r>
+            <a:r>
+              <a:rPr lang="de-DE" dirty="0"/>
+              <a:t> </a:t>
+            </a:r>
+            <a:r>
+              <a:rPr lang="de-DE" dirty="0" err="1"/>
+              <a:t>converges</a:t>
+            </a:r>
+            <a:r>
+              <a:rPr lang="de-DE" dirty="0"/>
+              <a:t> via eventual </a:t>
+            </a:r>
+            <a:r>
+              <a:rPr lang="de-DE" dirty="0" err="1"/>
+              <a:t>consistency</a:t>
+            </a:r>
+            <a:r>
+              <a:rPr lang="de-DE" dirty="0"/>
+              <a:t> (</a:t>
+            </a:r>
+            <a:r>
+              <a:rPr lang="de-DE" dirty="0" err="1"/>
+              <a:t>events</a:t>
+            </a:r>
+            <a:r>
+              <a:rPr lang="de-DE" dirty="0"/>
+              <a:t>, </a:t>
+            </a:r>
+            <a:r>
+              <a:rPr lang="de-DE" dirty="0" err="1"/>
+              <a:t>sagas</a:t>
+            </a:r>
+            <a:r>
+              <a:rPr lang="de-DE" dirty="0"/>
+              <a:t>)</a:t>
+            </a:r>
+            <a:endParaRPr lang="en-US" dirty="0"/>
+          </a:p>
+          <a:p>
+            <a:pPr marL="285750" indent="-285750">
+              <a:buFont typeface="Symbol" pitchFamily="2" charset="2"/>
+              <a:buChar char="-"/>
+            </a:pPr>
+            <a:r>
+              <a:rPr lang="en-US" b="1" dirty="0"/>
+              <a:t>Responsiveness</a:t>
+            </a:r>
+            <a:r>
+              <a:rPr lang="en-US" dirty="0"/>
+              <a:t>: </a:t>
+            </a:r>
+            <a:r>
+              <a:rPr lang="de-DE" dirty="0" err="1"/>
+              <a:t>state</a:t>
+            </a:r>
+            <a:r>
+              <a:rPr lang="de-DE" dirty="0"/>
+              <a:t> </a:t>
+            </a:r>
+            <a:r>
+              <a:rPr lang="de-DE" dirty="0" err="1"/>
+              <a:t>changes</a:t>
+            </a:r>
+            <a:r>
+              <a:rPr lang="de-DE" dirty="0"/>
+              <a:t> </a:t>
+            </a:r>
+            <a:r>
+              <a:rPr lang="de-DE" dirty="0" err="1"/>
+              <a:t>reflected</a:t>
+            </a:r>
+            <a:r>
+              <a:rPr lang="de-DE" dirty="0"/>
+              <a:t> </a:t>
+            </a:r>
+            <a:r>
+              <a:rPr lang="de-DE" dirty="0" err="1"/>
+              <a:t>with</a:t>
+            </a:r>
+            <a:r>
+              <a:rPr lang="de-DE" dirty="0"/>
+              <a:t> minimal </a:t>
+            </a:r>
+            <a:r>
+              <a:rPr lang="de-DE" dirty="0" err="1"/>
+              <a:t>delay</a:t>
+            </a:r>
+            <a:endParaRPr lang="en-US" dirty="0"/>
+          </a:p>
+          <a:p>
+            <a:pPr marL="285750" indent="-285750">
+              <a:buFont typeface="Symbol" pitchFamily="2" charset="2"/>
+              <a:buChar char="-"/>
+            </a:pPr>
+            <a:r>
+              <a:rPr lang="en-US" b="1" dirty="0" err="1"/>
+              <a:t>Deployability</a:t>
+            </a:r>
+            <a:r>
+              <a:rPr lang="en-US" dirty="0"/>
+              <a:t>: </a:t>
+            </a:r>
+            <a:r>
+              <a:rPr lang="de-DE" dirty="0" err="1"/>
+              <a:t>services</a:t>
+            </a:r>
+            <a:r>
+              <a:rPr lang="de-DE" dirty="0"/>
+              <a:t> </a:t>
+            </a:r>
+            <a:r>
+              <a:rPr lang="de-DE" dirty="0" err="1"/>
+              <a:t>independently</a:t>
+            </a:r>
+            <a:r>
+              <a:rPr lang="de-DE" dirty="0"/>
+              <a:t> </a:t>
+            </a:r>
+            <a:r>
+              <a:rPr lang="de-DE" dirty="0" err="1"/>
+              <a:t>developable</a:t>
+            </a:r>
+            <a:r>
+              <a:rPr lang="de-DE" dirty="0"/>
+              <a:t> and </a:t>
+            </a:r>
+            <a:r>
+              <a:rPr lang="de-DE" dirty="0" err="1"/>
+              <a:t>releasable</a:t>
+            </a:r>
+            <a:endParaRPr lang="en-US" dirty="0"/>
+          </a:p>
+          <a:p>
+            <a:pPr marL="285750" indent="-285750">
+              <a:buFont typeface="Symbol" pitchFamily="2" charset="2"/>
+              <a:buChar char="-"/>
+            </a:pPr>
+            <a:r>
+              <a:rPr lang="en-US" b="1" dirty="0"/>
+              <a:t>Extensibility</a:t>
+            </a:r>
+            <a:r>
+              <a:rPr lang="en-US" dirty="0"/>
+              <a:t>: </a:t>
+            </a:r>
+            <a:r>
+              <a:rPr lang="de-DE" dirty="0" err="1"/>
+              <a:t>integrations</a:t>
+            </a:r>
+            <a:r>
+              <a:rPr lang="de-DE" dirty="0"/>
+              <a:t> </a:t>
+            </a:r>
+            <a:r>
+              <a:rPr lang="de-DE" dirty="0" err="1"/>
+              <a:t>replaceable</a:t>
+            </a:r>
+            <a:r>
+              <a:rPr lang="de-DE" dirty="0"/>
+              <a:t> </a:t>
+            </a:r>
+            <a:r>
+              <a:rPr lang="de-DE" dirty="0" err="1"/>
+              <a:t>without</a:t>
+            </a:r>
+            <a:r>
+              <a:rPr lang="de-DE" dirty="0"/>
+              <a:t> </a:t>
+            </a:r>
+            <a:r>
+              <a:rPr lang="de-DE" dirty="0" err="1"/>
+              <a:t>changing</a:t>
+            </a:r>
+            <a:r>
+              <a:rPr lang="de-DE" dirty="0"/>
+              <a:t> </a:t>
+            </a:r>
+            <a:r>
+              <a:rPr lang="de-DE" dirty="0" err="1"/>
+              <a:t>domain</a:t>
+            </a:r>
+            <a:r>
+              <a:rPr lang="de-DE" dirty="0"/>
+              <a:t> </a:t>
+            </a:r>
+            <a:r>
+              <a:rPr lang="de-DE" dirty="0" err="1"/>
+              <a:t>logic</a:t>
+            </a:r>
+            <a:endParaRPr lang="en-US" dirty="0"/>
+          </a:p>
+          <a:p>
+            <a:endParaRPr lang="en-US" dirty="0"/>
+          </a:p>
+          <a:p>
+            <a:r>
+              <a:rPr lang="en-US" dirty="0"/>
+              <a:t>Others considered: scalability, testability, interoperability, recoverability</a:t>
+            </a:r>
+          </a:p>
+        </p:txBody>
+      </p:sp>
+      <p:sp>
+        <p:nvSpPr>
+          <p:cNvPr id="3" name="Rechteck 2">
+            <a:extLst>
+              <a:ext uri="{FF2B5EF4-FFF2-40B4-BE49-F238E27FC236}">
+                <a16:creationId xmlns:a16="http://schemas.microsoft.com/office/drawing/2014/main" id="{5D9DF689-BC35-62B4-3820-8B811AF4715E}"/>
+              </a:ext>
+            </a:extLst>
+          </p:cNvPr>
+          <p:cNvSpPr/>
+          <p:nvPr/>
+        </p:nvSpPr>
+        <p:spPr>
+          <a:xfrm>
+            <a:off x="6771862" y="4767261"/>
+            <a:ext cx="649356" cy="142669"/>
+          </a:xfrm>
+          <a:prstGeom prst="rect">
+            <a:avLst/>
+          </a:prstGeom>
+          <a:ln>
+            <a:noFill/>
+          </a:ln>
+        </p:spPr>
+        <p:style>
+          <a:lnRef idx="2">
+            <a:schemeClr val="accent6"/>
+          </a:lnRef>
+          <a:fillRef idx="1">
+            <a:schemeClr val="lt1"/>
+          </a:fillRef>
+          <a:effectRef idx="0">
+            <a:schemeClr val="accent6"/>
+          </a:effectRef>
+          <a:fontRef idx="minor">
+            <a:schemeClr val="dk1"/>
+          </a:fontRef>
+        </p:style>
+        <p:txBody>
+          <a:bodyPr rtlCol="0" anchor="ctr"/>
+          <a:lstStyle/>
+          <a:p>
+            <a:pPr algn="ctr"/>
+            <a:endParaRPr lang="de-DE"/>
           </a:p>
         </p:txBody>
       </p:sp>
@@ -12468,6 +13659,11 @@
   <p:clrMapOvr>
     <a:masterClrMapping/>
   </p:clrMapOvr>
+  <p:extLst>
+    <p:ext uri="{6950BFC3-D8DA-4A85-94F7-54DA5524770B}">
+      <p188:commentRel xmlns:p188="http://schemas.microsoft.com/office/powerpoint/2018/8/main" r:id="rId3"/>
+    </p:ext>
+  </p:extLst>
 </p:sld>
 </file>
 
@@ -12705,6 +13901,53 @@
           </a:p>
         </p:txBody>
       </p:sp>
+      <p:sp>
+        <p:nvSpPr>
+          <p:cNvPr id="5" name="Rechteck 4">
+            <a:extLst>
+              <a:ext uri="{FF2B5EF4-FFF2-40B4-BE49-F238E27FC236}">
+                <a16:creationId xmlns:a16="http://schemas.microsoft.com/office/drawing/2014/main" id="{1135BB86-BD57-C330-94E7-2FB3FBCF34A7}"/>
+              </a:ext>
+            </a:extLst>
+          </p:cNvPr>
+          <p:cNvSpPr/>
+          <p:nvPr/>
+        </p:nvSpPr>
+        <p:spPr>
+          <a:xfrm>
+            <a:off x="6771862" y="4767261"/>
+            <a:ext cx="649356" cy="142669"/>
+          </a:xfrm>
+          <a:prstGeom prst="rect">
+            <a:avLst/>
+          </a:prstGeom>
+          <a:ln>
+            <a:noFill/>
+          </a:ln>
+        </p:spPr>
+        <p:style>
+          <a:lnRef idx="2">
+            <a:schemeClr val="accent6"/>
+          </a:lnRef>
+          <a:fillRef idx="1">
+            <a:schemeClr val="lt1"/>
+          </a:fillRef>
+          <a:effectRef idx="0">
+            <a:schemeClr val="accent6"/>
+          </a:effectRef>
+          <a:fontRef idx="minor">
+            <a:schemeClr val="dk1"/>
+          </a:fontRef>
+        </p:style>
+        <p:txBody>
+          <a:bodyPr rtlCol="0" anchor="ctr"/>
+          <a:lstStyle/>
+          <a:p>
+            <a:pPr algn="ctr"/>
+            <a:endParaRPr lang="de-DE"/>
+          </a:p>
+        </p:txBody>
+      </p:sp>
     </p:spTree>
   </p:cSld>
   <p:clrMapOvr>
@@ -12800,11 +14043,11 @@
               <a:buChar char="•"/>
             </a:pPr>
             <a:r>
-              <a:rPr sz="1400"/>
+              <a:rPr sz="1400" dirty="0"/>
               <a:t>Two workflows need durable waiting states</a:t>
             </a:r>
             <a:r>
-              <a:rPr lang="de-CH" sz="1400"/>
+              <a:rPr lang="de-CH" sz="1400" dirty="0"/>
               <a:t>:</a:t>
             </a:r>
           </a:p>
@@ -12814,10 +14057,10 @@
               <a:buChar char="•"/>
             </a:pPr>
             <a:r>
-              <a:rPr sz="1200"/>
+              <a:rPr sz="1200" dirty="0"/>
               <a:t>onboarding and </a:t>
             </a:r>
-            <a:endParaRPr lang="de-CH" sz="1200"/>
+            <a:endParaRPr lang="de-CH" sz="1200" dirty="0"/>
           </a:p>
           <a:p>
             <a:pPr marL="465750" lvl="1" indent="-285750">
@@ -12825,17 +14068,17 @@
               <a:buChar char="•"/>
             </a:pPr>
             <a:r>
-              <a:rPr sz="1200"/>
+              <a:rPr sz="1200" dirty="0"/>
               <a:t>order placement</a:t>
             </a:r>
-            <a:endParaRPr lang="de-CH" sz="1200"/>
+            <a:endParaRPr lang="de-CH" sz="1200" dirty="0"/>
           </a:p>
           <a:p>
             <a:pPr marL="285750" indent="-285750">
               <a:buFont typeface="Arial" panose="020B0604020202020204" pitchFamily="34" charset="0"/>
               <a:buChar char="•"/>
             </a:pPr>
-            <a:endParaRPr sz="1400"/>
+            <a:endParaRPr sz="1400" dirty="0"/>
           </a:p>
           <a:p>
             <a:pPr marL="285750" indent="-285750">
@@ -12843,18 +14086,18 @@
               <a:buChar char="•"/>
             </a:pPr>
             <a:r>
-              <a:rPr sz="1400"/>
+              <a:rPr sz="1400" dirty="0"/>
               <a:t>Why not Camunda 7 / </a:t>
             </a:r>
             <a:r>
-              <a:rPr sz="1400" err="1"/>
+              <a:rPr sz="1400" dirty="0" err="1"/>
               <a:t>Operaton</a:t>
             </a:r>
             <a:r>
-              <a:rPr sz="1400"/>
+              <a:rPr sz="1400" dirty="0"/>
               <a:t>?</a:t>
             </a:r>
-            <a:endParaRPr lang="de-CH"/>
+            <a:endParaRPr lang="de-CH" dirty="0"/>
           </a:p>
           <a:p>
             <a:pPr marL="465750" lvl="1" indent="-285750">
@@ -12862,10 +14105,10 @@
               <a:buChar char="•"/>
             </a:pPr>
             <a:r>
-              <a:rPr sz="1200"/>
+              <a:rPr sz="1200" dirty="0"/>
               <a:t>Embedded engine stores process state in the application DB</a:t>
             </a:r>
-            <a:endParaRPr lang="de-CH" sz="1200"/>
+            <a:endParaRPr lang="de-CH" sz="1200" dirty="0"/>
           </a:p>
           <a:p>
             <a:pPr marL="465750" lvl="1" indent="-285750">
@@ -12873,18 +14116,18 @@
               <a:buChar char="•"/>
             </a:pPr>
             <a:r>
-              <a:rPr sz="1200"/>
+              <a:rPr sz="1200" dirty="0"/>
               <a:t>Many concurrent </a:t>
             </a:r>
             <a:r>
-              <a:rPr sz="1200" err="1"/>
+              <a:rPr sz="1200" dirty="0" err="1"/>
               <a:t>placeOrder</a:t>
             </a:r>
             <a:r>
-              <a:rPr sz="1200"/>
+              <a:rPr sz="1200" dirty="0"/>
               <a:t> waits would need a shared polling table</a:t>
             </a:r>
-            <a:endParaRPr lang="de-CH" sz="1200"/>
+            <a:endParaRPr lang="de-CH" sz="1200" dirty="0"/>
           </a:p>
           <a:p>
             <a:pPr marL="465750" lvl="1" indent="-285750">
@@ -12892,17 +14135,17 @@
               <a:buChar char="•"/>
             </a:pPr>
             <a:r>
-              <a:rPr sz="1200"/>
+              <a:rPr sz="1200" dirty="0"/>
               <a:t>Kafka and SMTP require custom application-level client code</a:t>
             </a:r>
-            <a:endParaRPr lang="de-CH" sz="1200"/>
+            <a:endParaRPr lang="de-CH" sz="1200" dirty="0"/>
           </a:p>
           <a:p>
             <a:pPr marL="465750" lvl="1" indent="-285750">
               <a:buFont typeface="Arial" panose="020B0604020202020204" pitchFamily="34" charset="0"/>
               <a:buChar char="•"/>
             </a:pPr>
-            <a:endParaRPr sz="1200"/>
+            <a:endParaRPr sz="1200" dirty="0"/>
           </a:p>
           <a:p>
             <a:pPr marL="285750" indent="-285750">
@@ -12910,18 +14153,18 @@
               <a:buChar char="•"/>
             </a:pPr>
             <a:r>
-              <a:rPr sz="1600"/>
+              <a:rPr dirty="0"/>
               <a:t>Camunda 8 / </a:t>
             </a:r>
             <a:r>
-              <a:rPr sz="1600" err="1"/>
+              <a:rPr dirty="0" err="1"/>
               <a:t>Zeebe</a:t>
             </a:r>
             <a:r>
-              <a:rPr sz="1600"/>
+              <a:rPr dirty="0"/>
               <a:t> advantages</a:t>
             </a:r>
-            <a:endParaRPr lang="de-CH" sz="1600"/>
+            <a:endParaRPr lang="de-CH" dirty="0"/>
           </a:p>
           <a:p>
             <a:pPr marL="465750" lvl="1" indent="-285750">
@@ -12929,18 +14172,18 @@
               <a:buChar char="•"/>
             </a:pPr>
             <a:r>
-              <a:rPr sz="1200"/>
+              <a:rPr sz="1200" dirty="0"/>
               <a:t>Partitioned log </a:t>
             </a:r>
             <a:r>
-              <a:rPr lang="en-US" sz="1200"/>
+              <a:rPr lang="en-US" sz="1200" dirty="0"/>
               <a:t>-</a:t>
             </a:r>
             <a:r>
-              <a:rPr sz="1200"/>
+              <a:rPr sz="1200" dirty="0"/>
               <a:t> each instance waits independently, no job-lock contention</a:t>
             </a:r>
-            <a:endParaRPr lang="de-CH" sz="1200"/>
+            <a:endParaRPr lang="de-CH" sz="1200" dirty="0"/>
           </a:p>
           <a:p>
             <a:pPr marL="465750" lvl="1" indent="-285750">
@@ -12948,18 +14191,18 @@
               <a:buChar char="•"/>
             </a:pPr>
             <a:r>
-              <a:rPr sz="1200"/>
+              <a:rPr sz="1200" dirty="0"/>
               <a:t>Connector templates </a:t>
             </a:r>
             <a:r>
-              <a:rPr lang="en-US" sz="1200"/>
+              <a:rPr lang="en-US" sz="1200" dirty="0"/>
               <a:t>-</a:t>
             </a:r>
             <a:r>
-              <a:rPr sz="1200"/>
+              <a:rPr sz="1200" dirty="0"/>
               <a:t> Kafka + SMTP inside BPMN, zero notification code</a:t>
             </a:r>
-            <a:endParaRPr lang="de-CH" sz="1200"/>
+            <a:endParaRPr lang="de-CH" sz="1200" dirty="0"/>
           </a:p>
           <a:p>
             <a:pPr marL="465750" lvl="1" indent="-285750">
@@ -12967,15 +14210,15 @@
               <a:buChar char="•"/>
             </a:pPr>
             <a:r>
-              <a:rPr sz="1200"/>
+              <a:rPr sz="1200" dirty="0"/>
               <a:t>Camunda Operate </a:t>
             </a:r>
             <a:r>
-              <a:rPr lang="en-US" sz="1200"/>
+              <a:rPr lang="en-US" sz="1200" dirty="0"/>
               <a:t>-</a:t>
             </a:r>
             <a:r>
-              <a:rPr sz="1200"/>
+              <a:rPr sz="1200" dirty="0"/>
               <a:t> runtime visibility without custom dashboards</a:t>
             </a:r>
           </a:p>
@@ -13024,6 +14267,53 @@
                 <a:schemeClr val="bg1"/>
               </a:solidFill>
             </a:endParaRPr>
+          </a:p>
+        </p:txBody>
+      </p:sp>
+      <p:sp>
+        <p:nvSpPr>
+          <p:cNvPr id="5" name="Rechteck 4">
+            <a:extLst>
+              <a:ext uri="{FF2B5EF4-FFF2-40B4-BE49-F238E27FC236}">
+                <a16:creationId xmlns:a16="http://schemas.microsoft.com/office/drawing/2014/main" id="{A99E5A74-B06E-BBF2-82BC-B1028D8ABD96}"/>
+              </a:ext>
+            </a:extLst>
+          </p:cNvPr>
+          <p:cNvSpPr/>
+          <p:nvPr/>
+        </p:nvSpPr>
+        <p:spPr>
+          <a:xfrm>
+            <a:off x="6771862" y="4767261"/>
+            <a:ext cx="649356" cy="142669"/>
+          </a:xfrm>
+          <a:prstGeom prst="rect">
+            <a:avLst/>
+          </a:prstGeom>
+          <a:ln>
+            <a:noFill/>
+          </a:ln>
+        </p:spPr>
+        <p:style>
+          <a:lnRef idx="2">
+            <a:schemeClr val="accent6"/>
+          </a:lnRef>
+          <a:fillRef idx="1">
+            <a:schemeClr val="lt1"/>
+          </a:fillRef>
+          <a:effectRef idx="0">
+            <a:schemeClr val="accent6"/>
+          </a:effectRef>
+          <a:fontRef idx="minor">
+            <a:schemeClr val="dk1"/>
+          </a:fontRef>
+        </p:style>
+        <p:txBody>
+          <a:bodyPr rtlCol="0" anchor="ctr"/>
+          <a:lstStyle/>
+          <a:p>
+            <a:pPr algn="ctr"/>
+            <a:endParaRPr lang="de-DE"/>
           </a:p>
         </p:txBody>
       </p:sp>
@@ -13104,20 +14394,20 @@
           <a:lstStyle/>
           <a:p>
             <a:r>
-              <a:rPr sz="1400"/>
+              <a:rPr sz="1400" dirty="0"/>
               <a:t>Two orchestrated saga styles</a:t>
             </a:r>
             <a:r>
-              <a:rPr lang="de-CH" sz="1400"/>
+              <a:rPr lang="de-CH" sz="1400" dirty="0"/>
               <a:t>: </a:t>
             </a:r>
             <a:r>
-              <a:rPr sz="1400"/>
+              <a:rPr sz="1400" dirty="0"/>
               <a:t>choice driven by nature of the wait</a:t>
             </a:r>
           </a:p>
           <a:p>
-            <a:endParaRPr lang="de-CH" sz="1400"/>
+            <a:endParaRPr lang="de-CH" sz="1400" dirty="0"/>
           </a:p>
           <a:p>
             <a:pPr marL="285750" indent="-285750">
@@ -13125,26 +14415,26 @@
               <a:buChar char="•"/>
             </a:pPr>
             <a:r>
-              <a:rPr sz="1400"/>
+              <a:rPr sz="1400" dirty="0"/>
               <a:t>Onboarding</a:t>
             </a:r>
             <a:r>
-              <a:rPr lang="de-CH" sz="1400"/>
+              <a:rPr lang="de-CH" sz="1400" dirty="0"/>
               <a:t>:</a:t>
             </a:r>
             <a:r>
-              <a:rPr sz="1400"/>
+              <a:rPr sz="1400" dirty="0"/>
               <a:t> </a:t>
             </a:r>
             <a:r>
-              <a:rPr sz="1400" b="1">
+              <a:rPr sz="1400" b="1" dirty="0">
                 <a:solidFill>
                   <a:srgbClr val="00802E"/>
                 </a:solidFill>
               </a:rPr>
               <a:t>Parallel Saga</a:t>
             </a:r>
-            <a:endParaRPr lang="de-CH" b="1">
+            <a:endParaRPr lang="de-CH" b="1" dirty="0">
               <a:solidFill>
                 <a:srgbClr val="00802E"/>
               </a:solidFill>
@@ -13156,10 +14446,10 @@
               <a:buChar char="•"/>
             </a:pPr>
             <a:r>
-              <a:rPr sz="1200"/>
+              <a:rPr sz="1200" dirty="0"/>
               <a:t>Deterministic wait (user clicks confirmation link)</a:t>
             </a:r>
-            <a:endParaRPr lang="de-CH" sz="1200"/>
+            <a:endParaRPr lang="de-CH" sz="1200" dirty="0"/>
           </a:p>
           <a:p>
             <a:pPr marL="465750" lvl="1" indent="-285750">
@@ -13167,15 +14457,15 @@
               <a:buChar char="•"/>
             </a:pPr>
             <a:r>
-              <a:rPr sz="1200"/>
+              <a:rPr sz="1200" dirty="0"/>
               <a:t>Spans two bounded contexts</a:t>
             </a:r>
             <a:r>
-              <a:rPr lang="de-CH" sz="1200"/>
+              <a:rPr lang="de-CH" sz="1200" dirty="0"/>
               <a:t>: </a:t>
             </a:r>
             <a:r>
-              <a:rPr sz="1200">
+              <a:rPr sz="1200" dirty="0">
                 <a:solidFill>
                   <a:srgbClr val="00802E"/>
                 </a:solidFill>
@@ -13183,18 +14473,18 @@
               <a:t>User</a:t>
             </a:r>
             <a:r>
-              <a:rPr sz="1200"/>
+              <a:rPr sz="1200" dirty="0"/>
               <a:t> + </a:t>
             </a:r>
             <a:r>
-              <a:rPr sz="1200">
+              <a:rPr sz="1200" dirty="0">
                 <a:solidFill>
                   <a:srgbClr val="00802E"/>
                 </a:solidFill>
               </a:rPr>
               <a:t>Portfolio</a:t>
             </a:r>
-            <a:endParaRPr lang="de-CH" sz="1200">
+            <a:endParaRPr lang="de-CH" sz="1200" dirty="0">
               <a:solidFill>
                 <a:srgbClr val="00802E"/>
               </a:solidFill>
@@ -13206,16 +14496,16 @@
               <a:buChar char="•"/>
             </a:pPr>
             <a:r>
-              <a:rPr sz="1200"/>
+              <a:rPr sz="1200" dirty="0"/>
               <a:t>Needs all-or-nothing consistency</a:t>
             </a:r>
-            <a:endParaRPr lang="de-CH" sz="1200"/>
+            <a:endParaRPr lang="de-CH" sz="1200" dirty="0"/>
           </a:p>
           <a:p>
             <a:pPr marL="360000" lvl="2" indent="0">
               <a:buNone/>
             </a:pPr>
-            <a:endParaRPr sz="1200"/>
+            <a:endParaRPr sz="1200" dirty="0"/>
           </a:p>
           <a:p>
             <a:pPr marL="285750" indent="-285750">
@@ -13223,22 +14513,22 @@
               <a:buChar char="•"/>
             </a:pPr>
             <a:r>
-              <a:rPr sz="1400"/>
+              <a:rPr sz="1400" dirty="0"/>
               <a:t>Order Placement</a:t>
             </a:r>
             <a:r>
-              <a:rPr lang="de-CH" sz="1400"/>
+              <a:rPr lang="de-CH" sz="1400" dirty="0"/>
               <a:t>: </a:t>
             </a:r>
             <a:r>
-              <a:rPr sz="1400" b="1">
+              <a:rPr sz="1400" b="1" dirty="0">
                 <a:solidFill>
                   <a:srgbClr val="00802E"/>
                 </a:solidFill>
               </a:rPr>
               <a:t>Fairy Tale Saga</a:t>
             </a:r>
-            <a:endParaRPr lang="de-CH" b="1">
+            <a:endParaRPr lang="de-CH" b="1" dirty="0">
               <a:solidFill>
                 <a:srgbClr val="00802E"/>
               </a:solidFill>
@@ -13250,10 +14540,10 @@
               <a:buChar char="•"/>
             </a:pPr>
             <a:r>
-              <a:rPr sz="1200"/>
+              <a:rPr sz="1200" dirty="0"/>
               <a:t>Non-deterministic wait (price match from market feed)</a:t>
             </a:r>
-            <a:endParaRPr lang="de-CH" sz="1200"/>
+            <a:endParaRPr lang="de-CH" sz="1200" dirty="0"/>
           </a:p>
           <a:p>
             <a:pPr marL="465750" lvl="1" indent="-285750">
@@ -13261,22 +14551,22 @@
               <a:buChar char="•"/>
             </a:pPr>
             <a:r>
-              <a:rPr sz="1200"/>
+              <a:rPr sz="1200" dirty="0"/>
               <a:t>Stays inside one bounded context</a:t>
             </a:r>
             <a:r>
-              <a:rPr lang="de-CH" sz="1200"/>
+              <a:rPr lang="de-CH" sz="1200" dirty="0"/>
               <a:t>: </a:t>
             </a:r>
             <a:r>
-              <a:rPr sz="1200">
+              <a:rPr sz="1200" dirty="0">
                 <a:solidFill>
                   <a:srgbClr val="00802E"/>
                 </a:solidFill>
               </a:rPr>
               <a:t>Trading</a:t>
             </a:r>
-            <a:endParaRPr lang="de-CH" sz="1200">
+            <a:endParaRPr lang="de-CH" sz="1200" dirty="0">
               <a:solidFill>
                 <a:srgbClr val="00802E"/>
               </a:solidFill>
@@ -13288,11 +14578,11 @@
               <a:buChar char="•"/>
             </a:pPr>
             <a:r>
-              <a:rPr sz="1200"/>
+              <a:rPr sz="1200" dirty="0"/>
               <a:t>Accepts eventual consistency with </a:t>
             </a:r>
             <a:r>
-              <a:rPr sz="1200">
+              <a:rPr sz="1200" dirty="0">
                 <a:solidFill>
                   <a:srgbClr val="00802E"/>
                 </a:solidFill>
@@ -13345,6 +14635,53 @@
                 <a:schemeClr val="bg1"/>
               </a:solidFill>
             </a:endParaRPr>
+          </a:p>
+        </p:txBody>
+      </p:sp>
+      <p:sp>
+        <p:nvSpPr>
+          <p:cNvPr id="5" name="Rechteck 4">
+            <a:extLst>
+              <a:ext uri="{FF2B5EF4-FFF2-40B4-BE49-F238E27FC236}">
+                <a16:creationId xmlns:a16="http://schemas.microsoft.com/office/drawing/2014/main" id="{D7811D09-FB76-8323-71C7-33E032576060}"/>
+              </a:ext>
+            </a:extLst>
+          </p:cNvPr>
+          <p:cNvSpPr/>
+          <p:nvPr/>
+        </p:nvSpPr>
+        <p:spPr>
+          <a:xfrm>
+            <a:off x="6771862" y="4767261"/>
+            <a:ext cx="649356" cy="142669"/>
+          </a:xfrm>
+          <a:prstGeom prst="rect">
+            <a:avLst/>
+          </a:prstGeom>
+          <a:ln>
+            <a:noFill/>
+          </a:ln>
+        </p:spPr>
+        <p:style>
+          <a:lnRef idx="2">
+            <a:schemeClr val="accent6"/>
+          </a:lnRef>
+          <a:fillRef idx="1">
+            <a:schemeClr val="lt1"/>
+          </a:fillRef>
+          <a:effectRef idx="0">
+            <a:schemeClr val="accent6"/>
+          </a:effectRef>
+          <a:fontRef idx="minor">
+            <a:schemeClr val="dk1"/>
+          </a:fontRef>
+        </p:style>
+        <p:txBody>
+          <a:bodyPr rtlCol="0" anchor="ctr"/>
+          <a:lstStyle/>
+          <a:p>
+            <a:pPr algn="ctr"/>
+            <a:endParaRPr lang="de-DE"/>
           </a:p>
         </p:txBody>
       </p:sp>
@@ -13476,6 +14813,53 @@
           </a:p>
         </p:txBody>
       </p:sp>
+      <p:sp>
+        <p:nvSpPr>
+          <p:cNvPr id="3" name="Rechteck 2">
+            <a:extLst>
+              <a:ext uri="{FF2B5EF4-FFF2-40B4-BE49-F238E27FC236}">
+                <a16:creationId xmlns:a16="http://schemas.microsoft.com/office/drawing/2014/main" id="{BFA9E884-AC95-7984-2CEA-26ADDDD8BA5D}"/>
+              </a:ext>
+            </a:extLst>
+          </p:cNvPr>
+          <p:cNvSpPr/>
+          <p:nvPr/>
+        </p:nvSpPr>
+        <p:spPr>
+          <a:xfrm>
+            <a:off x="6771862" y="4767261"/>
+            <a:ext cx="649356" cy="142669"/>
+          </a:xfrm>
+          <a:prstGeom prst="rect">
+            <a:avLst/>
+          </a:prstGeom>
+          <a:ln>
+            <a:noFill/>
+          </a:ln>
+        </p:spPr>
+        <p:style>
+          <a:lnRef idx="2">
+            <a:schemeClr val="accent6"/>
+          </a:lnRef>
+          <a:fillRef idx="1">
+            <a:schemeClr val="lt1"/>
+          </a:fillRef>
+          <a:effectRef idx="0">
+            <a:schemeClr val="accent6"/>
+          </a:effectRef>
+          <a:fontRef idx="minor">
+            <a:schemeClr val="dk1"/>
+          </a:fontRef>
+        </p:style>
+        <p:txBody>
+          <a:bodyPr rtlCol="0" anchor="ctr"/>
+          <a:lstStyle/>
+          <a:p>
+            <a:pPr algn="ctr"/>
+            <a:endParaRPr lang="de-DE"/>
+          </a:p>
+        </p:txBody>
+      </p:sp>
     </p:spTree>
   </p:cSld>
   <p:clrMapOvr>
@@ -13806,6 +15190,53 @@
                 <a:schemeClr val="bg1"/>
               </a:solidFill>
             </a:endParaRPr>
+          </a:p>
+        </p:txBody>
+      </p:sp>
+      <p:sp>
+        <p:nvSpPr>
+          <p:cNvPr id="5" name="Rechteck 4">
+            <a:extLst>
+              <a:ext uri="{FF2B5EF4-FFF2-40B4-BE49-F238E27FC236}">
+                <a16:creationId xmlns:a16="http://schemas.microsoft.com/office/drawing/2014/main" id="{735374E2-F5BF-9E8D-5673-7D4F7970FCAE}"/>
+              </a:ext>
+            </a:extLst>
+          </p:cNvPr>
+          <p:cNvSpPr/>
+          <p:nvPr/>
+        </p:nvSpPr>
+        <p:spPr>
+          <a:xfrm>
+            <a:off x="6771862" y="4767261"/>
+            <a:ext cx="649356" cy="142669"/>
+          </a:xfrm>
+          <a:prstGeom prst="rect">
+            <a:avLst/>
+          </a:prstGeom>
+          <a:ln>
+            <a:noFill/>
+          </a:ln>
+        </p:spPr>
+        <p:style>
+          <a:lnRef idx="2">
+            <a:schemeClr val="accent6"/>
+          </a:lnRef>
+          <a:fillRef idx="1">
+            <a:schemeClr val="lt1"/>
+          </a:fillRef>
+          <a:effectRef idx="0">
+            <a:schemeClr val="accent6"/>
+          </a:effectRef>
+          <a:fontRef idx="minor">
+            <a:schemeClr val="dk1"/>
+          </a:fontRef>
+        </p:style>
+        <p:txBody>
+          <a:bodyPr rtlCol="0" anchor="ctr"/>
+          <a:lstStyle/>
+          <a:p>
+            <a:pPr algn="ctr"/>
+            <a:endParaRPr lang="de-DE"/>
           </a:p>
         </p:txBody>
       </p:sp>
@@ -14627,126 +16058,34 @@
 </file>
 
 <file path=customXml/item1.xml><?xml version="1.0" encoding="utf-8"?>
+<TemplafySlideFormConfiguration><![CDATA[{"formFields":[{"required":true,"shareValue":false,"type":"datePicker","name":"Date","label":"Datum"},{"required":false,"placeholder":"","lines":1,"shareValue":false,"type":"textBox","name":"Footer","label":"Fusszeile"},{"defaultValue":{"fixedValue":true},"shareValue":false,"type":"checkBox","name":"FooterLogo","label":"mit Logo in der Fusszeile"}],"formDataEntries":[]}]]></TemplafySlideFormConfiguration>
+</file>
+
+<file path=customXml/item10.xml><?xml version="1.0" encoding="utf-8"?>
+<TemplafySlideTemplateConfiguration><![CDATA[{"slideVersion":1,"isValidatorEnabled":false,"isLocked":false,"elementsMetadata":[{"type":"shape","elementConfiguration":{"binding":"{{FormatDateTime(Form.Date,Translate(\"DateFormat\"),DocumentLanguage)}}","type":"text","disableUpdates":false}},{"type":"shape","elementConfiguration":{"width":"{{UserProfile.Department.REFDepartmentLogo.WidthPNGPPTFooter}}","height":"{{UserProfile.Department.REFDepartmentLogo.HeightPNGPPTFooter}}","image":"{{UserProfile.Department.REFDepartmentLogo.ImagePNG}}","visibility":"{{IfElse(Form.FooterLogo, VisibilityType.Visible,VisibilityType.Hidden)}}","type":"image","disableUpdates":false}},{"type":"shape","elementConfiguration":{"binding":"{{Form.Footer}}","type":"text","disableUpdates":false}},{"type":"shape","elementConfiguration":{"binding":"{{UserProfile.Department.DepartmentName}}","visibility":"{{IfElse(Form.FooterLogo, VisibilityType.Hidden,VisibilityType.Visible)}}","type":"text","disableUpdates":false}}],"slideId":"637750113834257356","enableDocumentContentUpdater":true,"version":"2.0"}]]></TemplafySlideTemplateConfiguration>
+</file>
+
+<file path=customXml/item11.xml><?xml version="1.0" encoding="utf-8"?>
+<TemplafySlideTemplateConfiguration><![CDATA[{"slideVersion":1,"isValidatorEnabled":false,"isLocked":false,"elementsMetadata":[],"slideId":"637750113834120761","enableDocumentContentUpdater":true,"version":"2.0"}]]></TemplafySlideTemplateConfiguration>
+</file>
+
+<file path=customXml/item12.xml><?xml version="1.0" encoding="utf-8"?>
 <TemplafySlideTemplateConfiguration><![CDATA[{"slideVersion":1,"isValidatorEnabled":false,"isLocked":false,"elementsMetadata":[],"slideId":"637750113834125595","enableDocumentContentUpdater":true,"version":"2.0"}]]></TemplafySlideTemplateConfiguration>
 </file>
 
-<file path=customXml/item10.xml><?xml version="1.0" encoding="utf-8"?>
+<file path=customXml/item13.xml><?xml version="1.0" encoding="utf-8"?>
 <TemplafySlideFormConfiguration><![CDATA[{"formFields":[],"formDataEntries":[]}]]></TemplafySlideFormConfiguration>
 </file>
 
-<file path=customXml/item11.xml><?xml version="1.0" encoding="utf-8"?>
-<TemplafySlideTemplateConfiguration><![CDATA[{"slideVersion":1,"isValidatorEnabled":false,"isLocked":false,"elementsMetadata":[],"slideId":"637750113834253485","enableDocumentContentUpdater":true,"version":"2.0"}]]></TemplafySlideTemplateConfiguration>
-</file>
-
-<file path=customXml/item12.xml><?xml version="1.0" encoding="utf-8"?>
-<TemplafyFormConfiguration><![CDATA[{"formFields":[{"required":true,"shareValue":false,"type":"datePicker","name":"Date","label":"Datum"},{"required":false,"placeholder":"","lines":1,"shareValue":false,"type":"textBox","name":"Footer","label":"Fusszeile"},{"defaultValue":{"fixedValue":true},"shareValue":false,"type":"checkBox","name":"FooterLogo","label":"mit Logo in der Fusszeile"}],"formDataEntries":[{"name":"Date","value":"+Z5Mp3YA6oBTYCzRQ9X9ow=="},{"name":"FooterLogo","value":"iTzqZGj1P6MRGUQq8ahlhA=="}]}]]></TemplafyFormConfiguration>
-</file>
-
-<file path=customXml/item13.xml><?xml version="1.0" encoding="utf-8"?>
-<TemplafySlideTemplateConfiguration><![CDATA[{"slideVersion":1,"isValidatorEnabled":false,"isLocked":false,"elementsMetadata":[],"slideId":"637750113834122525","enableDocumentContentUpdater":true,"version":"2.0"}]]></TemplafySlideTemplateConfiguration>
-</file>
-
 <file path=customXml/item14.xml><?xml version="1.0" encoding="utf-8"?>
-<TemplafySlideTemplateConfiguration><![CDATA[{"slideVersion":1,"isValidatorEnabled":false,"isLocked":false,"elementsMetadata":[{"type":"shape","elementConfiguration":{"binding":"{{FormatDateTime(Form.Date,Translate(\"DateFormat\"),DocumentLanguage)}}","type":"text","disableUpdates":false}},{"type":"shape","elementConfiguration":{"width":"{{UserProfile.Department.REFDepartmentLogo.WidthPNGPPTFooter}}","height":"{{UserProfile.Department.REFDepartmentLogo.HeightPNGPPTFooter}}","image":"{{UserProfile.Department.REFDepartmentLogo.ImagePNG}}","visibility":"{{IfElse(Form.FooterLogo, VisibilityType.Visible,VisibilityType.Hidden)}}","type":"image","disableUpdates":false}},{"type":"shape","elementConfiguration":{"binding":"{{Form.Footer}}","type":"text","disableUpdates":false}},{"type":"shape","elementConfiguration":{"binding":"{{UserProfile.Department.DepartmentName}}","visibility":"{{IfElse(Form.FooterLogo, VisibilityType.Hidden,VisibilityType.Visible)}}","type":"text","disableUpdates":false}}],"slideId":"637750113834269210","enableDocumentContentUpdater":true,"version":"2.0"}]]></TemplafySlideTemplateConfiguration>
+<TemplafySlideTemplateConfiguration><![CDATA[{"slideVersion":1,"isValidatorEnabled":false,"isLocked":false,"elementsMetadata":[],"slideId":"637750113834130535","enableDocumentContentUpdater":true,"version":"2.0"}]]></TemplafySlideTemplateConfiguration>
 </file>
 
 <file path=customXml/item15.xml><?xml version="1.0" encoding="utf-8"?>
-<?mso-contentType ?>
-<FormTemplates xmlns="http://schemas.microsoft.com/sharepoint/v3/contenttype/forms">
-  <Display>DocumentLibraryForm</Display>
-  <Edit>DocumentLibraryForm</Edit>
-  <New>DocumentLibraryForm</New>
-</FormTemplates>
+<TemplafySlideFormConfiguration><![CDATA[{"formFields":[],"formDataEntries":[]}]]></TemplafySlideFormConfiguration>
 </file>
 
 <file path=customXml/item16.xml><?xml version="1.0" encoding="utf-8"?>
-<TemplafySlideFormConfiguration><![CDATA[{"formFields":[{"required":true,"shareValue":false,"type":"datePicker","name":"Date","label":"Datum"},{"required":false,"placeholder":"","lines":1,"shareValue":false,"type":"textBox","name":"Footer","label":"Fusszeile"},{"defaultValue":{"fixedValue":true},"shareValue":false,"type":"checkBox","name":"FooterLogo","label":"mit Logo in der Fusszeile"}],"formDataEntries":[]}]]></TemplafySlideFormConfiguration>
-</file>
-
-<file path=customXml/item17.xml><?xml version="1.0" encoding="utf-8"?>
-<TemplafySlideFormConfiguration><![CDATA[{"formFields":[],"formDataEntries":[]}]]></TemplafySlideFormConfiguration>
-</file>
-
-<file path=customXml/item18.xml><?xml version="1.0" encoding="utf-8"?>
-<TemplafySlideFormConfiguration><![CDATA[{"formFields":[{"required":true,"shareValue":false,"type":"datePicker","name":"Date","label":"Datum"},{"required":false,"placeholder":"","lines":1,"shareValue":false,"type":"textBox","name":"Footer","label":"Fusszeile"},{"defaultValue":{"fixedValue":true},"shareValue":false,"type":"checkBox","name":"FooterLogo","label":"mit Logo in der Fusszeile"}],"formDataEntries":[]}]]></TemplafySlideFormConfiguration>
-</file>
-
-<file path=customXml/item19.xml><?xml version="1.0" encoding="utf-8"?>
-<TemplafySlideFormConfiguration><![CDATA[{"formFields":[],"formDataEntries":[]}]]></TemplafySlideFormConfiguration>
-</file>
-
-<file path=customXml/item2.xml><?xml version="1.0" encoding="utf-8"?>
-<TemplafySlideFormConfiguration><![CDATA[{"formFields":[{"required":true,"shareValue":false,"type":"datePicker","name":"Date","label":"Datum"},{"required":false,"placeholder":"","lines":1,"shareValue":false,"type":"textBox","name":"Footer","label":"Fusszeile"},{"defaultValue":{"fixedValue":true},"shareValue":false,"type":"checkBox","name":"FooterLogo","label":"mit Logo in der Fusszeile"}],"formDataEntries":[]}]]></TemplafySlideFormConfiguration>
-</file>
-
-<file path=customXml/item20.xml><?xml version="1.0" encoding="utf-8"?>
-<TemplafySlideTemplateConfiguration><![CDATA[{"slideVersion":1,"isValidatorEnabled":false,"isLocked":false,"elementsMetadata":[{"type":"shape","elementConfiguration":{"binding":"{{FormatDateTime(Form.Date,Translate(\"DateFormat\"),DocumentLanguage)}}","type":"text","disableUpdates":false}},{"type":"shape","elementConfiguration":{"width":"{{UserProfile.Department.REFDepartmentLogo.WidthPNGPPTFooter}}","height":"{{UserProfile.Department.REFDepartmentLogo.HeightPNGPPTFooter}}","image":"{{UserProfile.Department.REFDepartmentLogo.ImagePNG}}","visibility":"{{IfElse(Form.FooterLogo, VisibilityType.Visible,VisibilityType.Hidden)}}","type":"image","disableUpdates":false}},{"type":"shape","elementConfiguration":{"binding":"{{Form.Footer}}","type":"text","disableUpdates":false}},{"type":"shape","elementConfiguration":{"binding":"{{UserProfile.Department.DepartmentName}}","visibility":"{{IfElse(Form.FooterLogo, VisibilityType.Hidden,VisibilityType.Visible)}}","type":"text","disableUpdates":false}}],"slideId":"637750113834279331","enableDocumentContentUpdater":true,"version":"2.0"}]]></TemplafySlideTemplateConfiguration>
-</file>
-
-<file path=customXml/item21.xml><?xml version="1.0" encoding="utf-8"?>
-<TemplafySlideTemplateConfiguration><![CDATA[{"slideVersion":1,"isValidatorEnabled":false,"isLocked":false,"elementsMetadata":[{"type":"shape","elementConfiguration":{"binding":"{{FormatDateTime(Form.Date,Translate(\"DateFormat\"),DocumentLanguage)}}","type":"text","disableUpdates":false}},{"type":"shape","elementConfiguration":{"width":"{{UserProfile.Department.REFDepartmentLogo.WidthPNGPPTFooter}}","height":"{{UserProfile.Department.REFDepartmentLogo.HeightPNGPPTFooter}}","image":"{{UserProfile.Department.REFDepartmentLogo.ImagePNG}}","visibility":"{{IfElse(Form.FooterLogo, VisibilityType.Visible,VisibilityType.Hidden)}}","type":"image","disableUpdates":false}},{"type":"shape","elementConfiguration":{"binding":"{{Form.Footer}}","type":"text","disableUpdates":false}},{"type":"shape","elementConfiguration":{"binding":"{{UserProfile.Department.DepartmentName}}","visibility":"{{IfElse(Form.FooterLogo, VisibilityType.Hidden,VisibilityType.Visible)}}","type":"text","disableUpdates":false}}],"slideId":"637750113834156510","enableDocumentContentUpdater":true,"version":"2.0"}]]></TemplafySlideTemplateConfiguration>
-</file>
-
-<file path=customXml/item22.xml><?xml version="1.0" encoding="utf-8"?>
-<TemplafySlideFormConfiguration><![CDATA[{"formFields":[{"required":true,"shareValue":false,"type":"datePicker","name":"Date","label":"Datum"},{"required":false,"placeholder":"","lines":1,"shareValue":false,"type":"textBox","name":"Footer","label":"Fusszeile"},{"defaultValue":{"fixedValue":true},"shareValue":false,"type":"checkBox","name":"FooterLogo","label":"mit Logo in der Fusszeile"}],"formDataEntries":[]}]]></TemplafySlideFormConfiguration>
-</file>
-
-<file path=customXml/item23.xml><?xml version="1.0" encoding="utf-8"?>
-<TemplafySlideFormConfiguration><![CDATA[{"formFields":[],"formDataEntries":[]}]]></TemplafySlideFormConfiguration>
-</file>
-
-<file path=customXml/item24.xml><?xml version="1.0" encoding="utf-8"?>
-<TemplafySlideTemplateConfiguration><![CDATA[{"slideVersion":1,"isValidatorEnabled":false,"isLocked":false,"elementsMetadata":[{"type":"shape","elementConfiguration":{"width":"{{UserProfile.Department.REFDepartmentLogo.WidthPNGPPT}}","height":"{{UserProfile.Department.REFDepartmentLogo.HeightPNGPPT}}","image":"{{UserProfile.Department.REFDepartmentLogo.ImagePNG}}","type":"image","disableUpdates":false}},{"type":"shape","elementConfiguration":{"binding":"{{UserProfile.Department.DepartmentName}} \n{{UserProfile.Department.DepartmentStreet}} {{UserProfile.Department.DepartmentStreetNumber}} \n{{UserProfile.Department.DepartmentPOBox}} {{UserProfile.Department.DepartmentCity}} \n{{UserProfile.Department.DepartmentCountry}} \n{{UserProfile.Department.DepartmentWebsite}}","type":"text","disableUpdates":false}}],"slideId":"637750113834283378","enableDocumentContentUpdater":true,"version":"2.0"}]]></TemplafySlideTemplateConfiguration>
-</file>
-
-<file path=customXml/item25.xml><?xml version="1.0" encoding="utf-8"?>
-<TemplafySlideFormConfiguration><![CDATA[{"formFields":[],"formDataEntries":[]}]]></TemplafySlideFormConfiguration>
-</file>
-
-<file path=customXml/item26.xml><?xml version="1.0" encoding="utf-8"?>
-<TemplafySlideTemplateConfiguration><![CDATA[{"slideVersion":1,"isValidatorEnabled":false,"isLocked":false,"elementsMetadata":[],"slideId":"637750113834267111","enableDocumentContentUpdater":true,"version":"2.0"}]]></TemplafySlideTemplateConfiguration>
-</file>
-
-<file path=customXml/item27.xml><?xml version="1.0" encoding="utf-8"?>
-<TemplafySlideTemplateConfiguration><![CDATA[{"slideVersion":1,"isValidatorEnabled":false,"isLocked":false,"elementsMetadata":[{"type":"shape","elementConfiguration":{"binding":"{{FormatDateTime(Form.Date,Translate(\"DateFormat\"),DocumentLanguage)}}","type":"text","disableUpdates":false}},{"type":"shape","elementConfiguration":{"width":"{{UserProfile.Department.REFDepartmentLogo.WidthPNGPPTFooter}}","height":"{{UserProfile.Department.REFDepartmentLogo.HeightPNGPPTFooter}}","image":"{{UserProfile.Department.REFDepartmentLogo.ImagePNG}}","visibility":"{{IfElse(Form.FooterLogo, VisibilityType.Visible,VisibilityType.Hidden)}}","type":"image","disableUpdates":false}},{"type":"shape","elementConfiguration":{"binding":"{{Form.Footer}}","type":"text","disableUpdates":false}},{"type":"shape","elementConfiguration":{"binding":"{{UserProfile.Department.DepartmentName}}","visibility":"{{IfElse(Form.FooterLogo, VisibilityType.Hidden,VisibilityType.Visible)}}","type":"text","disableUpdates":false}}],"slideId":"637750113834237210","enableDocumentContentUpdater":true,"version":"2.0"}]]></TemplafySlideTemplateConfiguration>
-</file>
-
-<file path=customXml/item28.xml><?xml version="1.0" encoding="utf-8"?>
-<TemplafySlideFormConfiguration><![CDATA[{"formFields":[],"formDataEntries":[]}]]></TemplafySlideFormConfiguration>
-</file>
-
-<file path=customXml/item29.xml><?xml version="1.0" encoding="utf-8"?>
-<TemplafySlideFormConfiguration><![CDATA[{"formFields":[],"formDataEntries":[]}]]></TemplafySlideFormConfiguration>
-</file>
-
-<file path=customXml/item3.xml><?xml version="1.0" encoding="utf-8"?>
-<TemplafySlideTemplateConfiguration><![CDATA[{"slideVersion":1,"isValidatorEnabled":false,"isLocked":false,"elementsMetadata":[{"type":"shape","elementConfiguration":{"binding":"{{FormatDateTime(Form.Date,Translate(\"DateFormat\"),DocumentLanguage)}}","type":"text","disableUpdates":false}},{"type":"shape","elementConfiguration":{"width":"{{UserProfile.Department.REFDepartmentLogo.WidthPNGPPTFooter}}","height":"{{UserProfile.Department.REFDepartmentLogo.HeightPNGPPTFooter}}","image":"{{UserProfile.Department.REFDepartmentLogo.ImagePNG}}","visibility":"{{IfElse(Form.FooterLogo, VisibilityType.Visible,VisibilityType.Hidden)}}","type":"image","disableUpdates":false}},{"type":"shape","elementConfiguration":{"binding":"{{Form.Footer}}","type":"text","disableUpdates":false}},{"type":"shape","elementConfiguration":{"binding":"{{UserProfile.Department.DepartmentName}}","visibility":"{{IfElse(Form.FooterLogo, VisibilityType.Hidden,VisibilityType.Visible)}}","type":"text","disableUpdates":false}}],"slideId":"637750113834249425","enableDocumentContentUpdater":true,"version":"2.0"}]]></TemplafySlideTemplateConfiguration>
-</file>
-
-<file path=customXml/item30.xml><?xml version="1.0" encoding="utf-8"?>
-<p:properties xmlns:p="http://schemas.microsoft.com/office/2006/metadata/properties" xmlns:xsi="http://www.w3.org/2001/XMLSchema-instance" xmlns:pc="http://schemas.microsoft.com/office/infopath/2007/PartnerControls">
-  <documentManagement>
-    <lcf76f155ced4ddcb4097134ff3c332f xmlns="07c8a24f-8b40-44ca-950f-ae5db2c4fa23">
-      <Terms xmlns="http://schemas.microsoft.com/office/infopath/2007/PartnerControls"/>
-    </lcf76f155ced4ddcb4097134ff3c332f>
-    <TaxCatchAll xmlns="71d337dc-809a-4269-a690-d6cd31b4acd0" xsi:nil="true"/>
-  </documentManagement>
-</p:properties>
-</file>
-
-<file path=customXml/item31.xml><?xml version="1.0" encoding="utf-8"?>
-<TemplafySlideTemplateConfiguration><![CDATA[{"slideVersion":1,"isValidatorEnabled":false,"isLocked":false,"elementsMetadata":[{"type":"shape","elementConfiguration":{"binding":"{{FormatDateTime(Form.Date,Translate(\"DateFormat\"),DocumentLanguage)}}","type":"text","disableUpdates":false}},{"type":"shape","elementConfiguration":{"width":"{{UserProfile.Department.REFDepartmentLogo.WidthPNGPPTFooter}}","height":"{{UserProfile.Department.REFDepartmentLogo.HeightPNGPPTFooter}}","image":"{{UserProfile.Department.REFDepartmentLogo.ImagePNG}}","visibility":"{{IfElse(Form.FooterLogo, VisibilityType.Visible,VisibilityType.Hidden)}}","type":"image","disableUpdates":false}},{"type":"shape","elementConfiguration":{"binding":"{{Form.Footer}}","type":"text","disableUpdates":false}},{"type":"shape","elementConfiguration":{"binding":"{{UserProfile.Department.DepartmentName}}","visibility":"{{IfElse(Form.FooterLogo, VisibilityType.Hidden,VisibilityType.Visible)}}","type":"text","disableUpdates":false}}],"slideId":"637750113834231105","enableDocumentContentUpdater":true,"version":"2.0"}]]></TemplafySlideTemplateConfiguration>
-</file>
-
-<file path=customXml/item32.xml><?xml version="1.0" encoding="utf-8"?>
-<TemplafySlideFormConfiguration><![CDATA[{"formFields":[],"formDataEntries":[]}]]></TemplafySlideFormConfiguration>
-</file>
-
-<file path=customXml/item33.xml><?xml version="1.0" encoding="utf-8"?>
-<TemplafyTemplateConfiguration><![CDATA[{"elementsMetadata":[{"type":"shape","id":"56ce75b3-422e-4bea-941a-dc00172cd73f","elementConfiguration":{"binding":"{{FormatDateTime(Form.Date,Translate(\"DateFormat\"),DocumentLanguage)}}","type":"text","disableUpdates":false}},{"type":"shape","id":"ff4a6372-22c5-4dd4-8428-3be358c8e860","elementConfiguration":{"width":"{{UserProfile.Department.REFDepartmentLogo.WidthPNGPPTFooter}}","height":"{{UserProfile.Department.REFDepartmentLogo.HeightPNGPPTFooter}}","image":"{{UserProfile.Department.REFDepartmentLogo.ImagePNG}}","visibility":"{{IfElse(Form.FooterLogo, VisibilityType.Visible,VisibilityType.Hidden)}}","type":"image","disableUpdates":false}},{"type":"shape","id":"802336ec-566b-4a3d-896e-7cccb9fe246d","elementConfiguration":{"binding":"{{Form.Footer}}","type":"text","disableUpdates":false}},{"type":"shape","id":"a2d41398-5271-4cc9-b1dd-66e099bdef04","elementConfiguration":{"binding":"{{UserProfile.Department.DepartmentName}}","visibility":"{{IfElse(Form.FooterLogo, VisibilityType.Hidden,VisibilityType.Visible)}}","type":"text","disableUpdates":false}},{"type":"shape","id":"a40dda36-18a9-40da-9166-9a47a867251f","elementConfiguration":{"width":"{{UserProfile.Department.REFDepartmentLogo.WidthPNGPPT}}","height":"{{UserProfile.Department.REFDepartmentLogo.HeightPNGPPT}}","image":"{{UserProfile.Department.REFDepartmentLogo.ImagePNG}}","type":"image","disableUpdates":false}},{"type":"shape","id":"239d4f55-1bac-4607-8b11-947c6c77cd46","elementConfiguration":{"binding":"{{UserProfile.Department.DepartmentName}} \n{{UserProfile.Department.DepartmentStreet}} {{UserProfile.Department.DepartmentStreetNumber}} \n{{UserProfile.Department.DepartmentPOBox}} {{UserProfile.Department.DepartmentCity}} \n{{UserProfile.Department.DepartmentCountry}} \n{{UserProfile.Department.DepartmentWebsite}}","type":"text","disableUpdates":false}},{"type":"shape","id":"4e7e3c8a-6e06-4468-a348-0ba7b10c4800","elementConfiguration":{"width":"{{UserProfile.Department.REFDepartmentLogo.WidthPNGPPT}}","height":"{{UserProfile.Department.REFDepartmentLogo.HeightPNGPPT}}","image":"{{UserProfile.Department.REFDepartmentLogo.ImagePNG}}","type":"image","disableUpdates":false}},{"type":"shape","id":"843f5766-31d9-4280-a669-00226bb12ba8","elementConfiguration":{"binding":"{{FormatDateTime(Form.Date,Translate(\"DateFormat\"),DocumentLanguage)}}","type":"text","disableUpdates":false}},{"type":"shape","id":"9b9e4f3c-de31-4236-8ed4-5b99f4d3cf2e","elementConfiguration":{"width":"{{UserProfile.Department.REFDepartmentLogo.WidthPNGPPTFooter}}","height":"{{UserProfile.Department.REFDepartmentLogo.HeightPNGPPTFooter}}","image":"{{UserProfile.Department.REFDepartmentLogo.ImagePNG}}","visibility":"{{IfElse(Form.FooterLogo, VisibilityType.Visible,VisibilityType.Hidden)}}","type":"image","disableUpdates":false}},{"type":"shape","id":"75162e3e-ae53-4b5e-99da-7a45748d34cc","elementConfiguration":{"binding":"{{Form.Footer}}","type":"text","disableUpdates":false}},{"type":"shape","id":"4b457ff6-1749-4ff7-9ec1-d06b95bd97c4","elementConfiguration":{"binding":"{{UserProfile.Department.DepartmentName}}","visibility":"{{IfElse(Form.FooterLogo, VisibilityType.Hidden,VisibilityType.Visible)}}","type":"text","disableUpdates":false}},{"type":"shape","id":"595e50e6-f562-4e70-8412-9b3e58d54d40","elementConfiguration":{"width":"{{UserProfile.Department.REFDepartmentLogo.WidthPNGPPT}}","height":"{{UserProfile.Department.REFDepartmentLogo.HeightPNGPPT}}","image":"{{UserProfile.Department.REFDepartmentLogo.ImagePNG}}","type":"image","disableUpdates":false}},{"type":"shape","id":"987706d0-0020-48f8-abb7-fa71e92ba907","elementConfiguration":{"binding":"{{FormatDateTime(Form.Date,Translate(\"DateFormat\"),DocumentLanguage)}}","type":"text","disableUpdates":false}},{"type":"shape","id":"18680601-61d8-4c65-b887-d43faff0f7e7","elementConfiguration":{"width":"{{UserProfile.Department.REFDepartmentLogo.WidthPNGPPT}}","height":"{{UserProfile.Department.REFDepartmentLogo.HeightPNGPPT}}","image":"{{UserProfile.Department.REFDepartmentLogo.ImagePNG}}","type":"image","disableUpdates":false}},{"type":"shape","id":"889eed5e-adc6-4545-a320-e60e7fe89049","elementConfiguration":{"binding":"{{FormatDateTime(Form.Date,Translate(\"DateFormat\"),DocumentLanguage)}}","type":"text","disableUpdates":false}},{"type":"shape","id":"3f852e2a-90cd-405b-aa63-881f2da03bb5","elementConfiguration":{"width":"{{UserProfile.Department.REFDepartmentLogo.WidthPNGPPTFooter}}","height":"{{UserProfile.Department.REFDepartmentLogo.HeightPNGPPTFooter}}","image":"{{UserProfile.Department.REFDepartmentLogo.ImagePNG}}","visibility":"{{IfElse(Form.FooterLogo, VisibilityType.Visible,VisibilityType.Hidden)}}","type":"image","disableUpdates":false}},{"type":"shape","id":"a606881e-514e-4f57-b14a-3e310a69b4b5","elementConfiguration":{"binding":"{{Form.Footer}}","type":"text","disableUpdates":false}},{"type":"shape","id":"d89fcdf5-4b31-4eed-a6ec-a34b7588e3dc","elementConfiguration":{"binding":"{{UserProfile.Department.DepartmentName}}","visibility":"{{IfElse(Form.FooterLogo, VisibilityType.Hidden,VisibilityType.Visible)}}","type":"text","disableUpdates":false}},{"type":"shape","id":"e4895852-1c5c-4754-a233-3eec028fd2a8","elementConfiguration":{"binding":"{{FormatDateTime(Form.Date,Translate(\"DateFormat\"),DocumentLanguage)}}","type":"text","disableUpdates":false}},{"type":"shape","id":"d621d8b6-cd2e-463b-982e-d95c5f8a82fb","elementConfiguration":{"width":"{{UserProfile.Department.REFDepartmentLogo.WidthPNGPPTFooter}}","height":"{{UserProfile.Department.REFDepartmentLogo.HeightPNGPPTFooter}}","image":"{{UserProfile.Department.REFDepartmentLogo.ImagePNG}}","visibility":"{{IfElse(Form.FooterLogo, VisibilityType.Visible,VisibilityType.Hidden)}}","type":"image","disableUpdates":false}},{"type":"shape","id":"65b937f8-b6ed-482d-9fcb-89e2ad98182a","elementConfiguration":{"binding":"{{Form.Footer}}","type":"text","disableUpdates":false}},{"type":"shape","id":"8e41931c-7f95-42d4-bfa3-9c5f04293069","elementConfiguration":{"binding":"{{UserProfile.Department.DepartmentName}}","visibility":"{{IfElse(Form.FooterLogo, VisibilityType.Hidden,VisibilityType.Visible)}}","type":"text","disableUpdates":false}},{"type":"shape","id":"313b8357-6b18-490c-9533-a6c0ee071962","elementConfiguration":{"binding":"{{FormatDateTime(Form.Date,Translate(\"DateFormat\"),DocumentLanguage)}}","type":"text","disableUpdates":false}},{"type":"shape","id":"69582c92-e5c7-4749-97ef-47cc4b58fa8b","elementConfiguration":{"binding":"{{FormatDateTime(Form.Date,Translate(\"DateFormat\"),DocumentLanguage)}}","type":"text","disableUpdates":false}},{"type":"shape","id":"4ee707e9-0b9f-42e6-bfac-8cfa418e9d62","elementConfiguration":{"binding":"{{Form.Footer}}","type":"text","disableUpdates":false}},{"type":"shape","id":"b710521b-d63f-429f-a075-a52a6cb7c897","elementConfiguration":{"width":"{{UserProfile.Department.REFDepartmentLogo.WidthPNGPPTFooter}}","height":"{{UserProfile.Department.REFDepartmentLogo.HeightPNGPPTFooter}}","image":"{{UserProfile.Department.REFDepartmentLogo.ImagePNG}}","visibility":"{{IfElse(Form.FooterLogo, VisibilityType.Visible,VisibilityType.Hidden)}}","type":"image","disableUpdates":false}},{"type":"shape","id":"4c8a9ee4-f540-4aa0-9380-f692b4e2dcc6","elementConfiguration":{"binding":"{{UserProfile.Department.DepartmentName}}","visibility":"{{IfElse(Form.FooterLogo, VisibilityType.Hidden,VisibilityType.Visible)}}","type":"text","disableUpdates":false}},{"type":"shape","id":"9c2bec1f-485e-44d6-987c-4c2a62826230","elementConfiguration":{"binding":"{{FormatDateTime(Form.Date,Translate(\"DateFormat\"),DocumentLanguage)}}","type":"text","disableUpdates":false}},{"type":"shape","id":"965f1849-534b-4cf0-ad65-b946ad9126d8","elementConfiguration":{"width":"{{UserProfile.Department.REFDepartmentLogo.WidthPNGPPTFooter}}","height":"{{UserProfile.Department.REFDepartmentLogo.HeightPNGPPTFooter}}","image":"{{UserProfile.Department.REFDepartmentLogo.ImagePNG}}","visibility":"{{IfElse(Form.FooterLogo, VisibilityType.Visible,VisibilityType.Hidden)}}","type":"image","disableUpdates":false}},{"type":"shape","id":"73b120c8-aa6c-4644-86bc-360261a349b9","elementConfiguration":{"binding":"{{Form.Footer}}","type":"text","disableUpdates":false}},{"type":"shape","id":"297fab75-6aaa-4b1a-95bb-193250870530","elementConfiguration":{"binding":"{{UserProfile.Department.DepartmentName}}","visibility":"{{IfElse(Form.FooterLogo, VisibilityType.Hidden,VisibilityType.Visible)}}","type":"text","disableUpdates":false}}],"transformationConfigurations":[{"language":"{{UserProfile.DocumentLanguage.Language}}","disableUpdates":false,"type":"proofingLanguage"},{"propertyName":"creator","propertyValue":"{{UserProfile.FirstName}} {{UserProfile.LastName}}","disableUpdates":false,"type":"documentProperty"},{"propertyName":"title","propertyValue":"Presentation - University of St.Gallen","disableUpdates":false,"type":"documentProperty"}],"templateName":"UNISG Präsentation","templateDescription":"","enableDocumentContentUpdater":true,"version":"2.0"}]]></TemplafyTemplateConfiguration>
-</file>
-
-<file path=customXml/item34.xml><?xml version="1.0" encoding="utf-8"?>
 <ct:contentTypeSchema xmlns:ct="http://schemas.microsoft.com/office/2006/metadata/contentType" xmlns:ma="http://schemas.microsoft.com/office/2006/metadata/properties/metaAttributes" ct:_="" ma:_="" ma:contentTypeName="Document" ma:contentTypeID="0x01010034C2EED3AEDAB24AB48AF05A7A255DF4" ma:contentTypeVersion="21" ma:contentTypeDescription="Create a new document." ma:contentTypeScope="" ma:versionID="274d9017fadbcc8b67afbe4b22a55600">
   <xsd:schema xmlns:xsd="http://www.w3.org/2001/XMLSchema" xmlns:xs="http://www.w3.org/2001/XMLSchema" xmlns:p="http://schemas.microsoft.com/office/2006/metadata/properties" xmlns:ns2="07c8a24f-8b40-44ca-950f-ae5db2c4fa23" xmlns:ns3="71d337dc-809a-4269-a690-d6cd31b4acd0" targetNamespace="http://schemas.microsoft.com/office/2006/metadata/properties" ma:root="true" ma:fieldsID="0b58614a3de855f8a451fa93eb2e43b4" ns2:_="" ns3:_="">
     <xsd:import namespace="07c8a24f-8b40-44ca-950f-ae5db2c4fa23"/>
@@ -14995,96 +16334,188 @@
 </ct:contentTypeSchema>
 </file>
 
+<file path=customXml/item17.xml><?xml version="1.0" encoding="utf-8"?>
+<TemplafySlideFormConfiguration><![CDATA[{"formFields":[{"required":true,"shareValue":false,"type":"datePicker","name":"Date","label":"Datum"},{"required":false,"placeholder":"","lines":1,"shareValue":false,"type":"textBox","name":"Footer","label":"Fusszeile"},{"defaultValue":{"fixedValue":true},"shareValue":false,"type":"checkBox","name":"FooterLogo","label":"mit Logo in der Fusszeile"}],"formDataEntries":[]}]]></TemplafySlideFormConfiguration>
+</file>
+
+<file path=customXml/item18.xml><?xml version="1.0" encoding="utf-8"?>
+<TemplafySlideFormConfiguration><![CDATA[{"formFields":[{"required":true,"shareValue":false,"type":"datePicker","name":"Date","label":"Datum"},{"required":false,"placeholder":"","lines":1,"shareValue":false,"type":"textBox","name":"Footer","label":"Fusszeile"},{"defaultValue":{"fixedValue":true},"shareValue":false,"type":"checkBox","name":"FooterLogo","label":"mit Logo in der Fusszeile"}],"formDataEntries":[]}]]></TemplafySlideFormConfiguration>
+</file>
+
+<file path=customXml/item19.xml><?xml version="1.0" encoding="utf-8"?>
+<TemplafySlideTemplateConfiguration><![CDATA[{"slideVersion":1,"isValidatorEnabled":false,"isLocked":false,"elementsMetadata":[{"type":"shape","elementConfiguration":{"width":"{{UserProfile.Department.REFDepartmentLogo.WidthPNGPPT}}","height":"{{UserProfile.Department.REFDepartmentLogo.HeightPNGPPT}}","image":"{{UserProfile.Department.REFDepartmentLogo.ImagePNG}}","type":"image","disableUpdates":false}}],"slideId":"637750113834107008","enableDocumentContentUpdater":true,"version":"2.0"}]]></TemplafySlideTemplateConfiguration>
+</file>
+
+<file path=customXml/item2.xml><?xml version="1.0" encoding="utf-8"?>
+<TemplafySlideFormConfiguration><![CDATA[{"formFields":[{"required":true,"shareValue":false,"type":"datePicker","name":"Date","label":"Datum"},{"required":false,"placeholder":"","lines":1,"shareValue":false,"type":"textBox","name":"Footer","label":"Fusszeile"},{"defaultValue":{"fixedValue":true},"shareValue":false,"type":"checkBox","name":"FooterLogo","label":"mit Logo in der Fusszeile"}],"formDataEntries":[]}]]></TemplafySlideFormConfiguration>
+</file>
+
+<file path=customXml/item20.xml><?xml version="1.0" encoding="utf-8"?>
+<TemplafyTemplateConfiguration><![CDATA[{"elementsMetadata":[{"type":"shape","id":"56ce75b3-422e-4bea-941a-dc00172cd73f","elementConfiguration":{"binding":"{{FormatDateTime(Form.Date,Translate(\"DateFormat\"),DocumentLanguage)}}","type":"text","disableUpdates":false}},{"type":"shape","id":"ff4a6372-22c5-4dd4-8428-3be358c8e860","elementConfiguration":{"width":"{{UserProfile.Department.REFDepartmentLogo.WidthPNGPPTFooter}}","height":"{{UserProfile.Department.REFDepartmentLogo.HeightPNGPPTFooter}}","image":"{{UserProfile.Department.REFDepartmentLogo.ImagePNG}}","visibility":"{{IfElse(Form.FooterLogo, VisibilityType.Visible,VisibilityType.Hidden)}}","type":"image","disableUpdates":false}},{"type":"shape","id":"802336ec-566b-4a3d-896e-7cccb9fe246d","elementConfiguration":{"binding":"{{Form.Footer}}","type":"text","disableUpdates":false}},{"type":"shape","id":"a2d41398-5271-4cc9-b1dd-66e099bdef04","elementConfiguration":{"binding":"{{UserProfile.Department.DepartmentName}}","visibility":"{{IfElse(Form.FooterLogo, VisibilityType.Hidden,VisibilityType.Visible)}}","type":"text","disableUpdates":false}},{"type":"shape","id":"a40dda36-18a9-40da-9166-9a47a867251f","elementConfiguration":{"width":"{{UserProfile.Department.REFDepartmentLogo.WidthPNGPPT}}","height":"{{UserProfile.Department.REFDepartmentLogo.HeightPNGPPT}}","image":"{{UserProfile.Department.REFDepartmentLogo.ImagePNG}}","type":"image","disableUpdates":false}},{"type":"shape","id":"239d4f55-1bac-4607-8b11-947c6c77cd46","elementConfiguration":{"binding":"{{UserProfile.Department.DepartmentName}} \n{{UserProfile.Department.DepartmentStreet}} {{UserProfile.Department.DepartmentStreetNumber}} \n{{UserProfile.Department.DepartmentPOBox}} {{UserProfile.Department.DepartmentCity}} \n{{UserProfile.Department.DepartmentCountry}} \n{{UserProfile.Department.DepartmentWebsite}}","type":"text","disableUpdates":false}},{"type":"shape","id":"4e7e3c8a-6e06-4468-a348-0ba7b10c4800","elementConfiguration":{"width":"{{UserProfile.Department.REFDepartmentLogo.WidthPNGPPT}}","height":"{{UserProfile.Department.REFDepartmentLogo.HeightPNGPPT}}","image":"{{UserProfile.Department.REFDepartmentLogo.ImagePNG}}","type":"image","disableUpdates":false}},{"type":"shape","id":"843f5766-31d9-4280-a669-00226bb12ba8","elementConfiguration":{"binding":"{{FormatDateTime(Form.Date,Translate(\"DateFormat\"),DocumentLanguage)}}","type":"text","disableUpdates":false}},{"type":"shape","id":"9b9e4f3c-de31-4236-8ed4-5b99f4d3cf2e","elementConfiguration":{"width":"{{UserProfile.Department.REFDepartmentLogo.WidthPNGPPTFooter}}","height":"{{UserProfile.Department.REFDepartmentLogo.HeightPNGPPTFooter}}","image":"{{UserProfile.Department.REFDepartmentLogo.ImagePNG}}","visibility":"{{IfElse(Form.FooterLogo, VisibilityType.Visible,VisibilityType.Hidden)}}","type":"image","disableUpdates":false}},{"type":"shape","id":"75162e3e-ae53-4b5e-99da-7a45748d34cc","elementConfiguration":{"binding":"{{Form.Footer}}","type":"text","disableUpdates":false}},{"type":"shape","id":"4b457ff6-1749-4ff7-9ec1-d06b95bd97c4","elementConfiguration":{"binding":"{{UserProfile.Department.DepartmentName}}","visibility":"{{IfElse(Form.FooterLogo, VisibilityType.Hidden,VisibilityType.Visible)}}","type":"text","disableUpdates":false}},{"type":"shape","id":"595e50e6-f562-4e70-8412-9b3e58d54d40","elementConfiguration":{"width":"{{UserProfile.Department.REFDepartmentLogo.WidthPNGPPT}}","height":"{{UserProfile.Department.REFDepartmentLogo.HeightPNGPPT}}","image":"{{UserProfile.Department.REFDepartmentLogo.ImagePNG}}","type":"image","disableUpdates":false}},{"type":"shape","id":"987706d0-0020-48f8-abb7-fa71e92ba907","elementConfiguration":{"binding":"{{FormatDateTime(Form.Date,Translate(\"DateFormat\"),DocumentLanguage)}}","type":"text","disableUpdates":false}},{"type":"shape","id":"18680601-61d8-4c65-b887-d43faff0f7e7","elementConfiguration":{"width":"{{UserProfile.Department.REFDepartmentLogo.WidthPNGPPT}}","height":"{{UserProfile.Department.REFDepartmentLogo.HeightPNGPPT}}","image":"{{UserProfile.Department.REFDepartmentLogo.ImagePNG}}","type":"image","disableUpdates":false}},{"type":"shape","id":"889eed5e-adc6-4545-a320-e60e7fe89049","elementConfiguration":{"binding":"{{FormatDateTime(Form.Date,Translate(\"DateFormat\"),DocumentLanguage)}}","type":"text","disableUpdates":false}},{"type":"shape","id":"3f852e2a-90cd-405b-aa63-881f2da03bb5","elementConfiguration":{"width":"{{UserProfile.Department.REFDepartmentLogo.WidthPNGPPTFooter}}","height":"{{UserProfile.Department.REFDepartmentLogo.HeightPNGPPTFooter}}","image":"{{UserProfile.Department.REFDepartmentLogo.ImagePNG}}","visibility":"{{IfElse(Form.FooterLogo, VisibilityType.Visible,VisibilityType.Hidden)}}","type":"image","disableUpdates":false}},{"type":"shape","id":"a606881e-514e-4f57-b14a-3e310a69b4b5","elementConfiguration":{"binding":"{{Form.Footer}}","type":"text","disableUpdates":false}},{"type":"shape","id":"d89fcdf5-4b31-4eed-a6ec-a34b7588e3dc","elementConfiguration":{"binding":"{{UserProfile.Department.DepartmentName}}","visibility":"{{IfElse(Form.FooterLogo, VisibilityType.Hidden,VisibilityType.Visible)}}","type":"text","disableUpdates":false}},{"type":"shape","id":"e4895852-1c5c-4754-a233-3eec028fd2a8","elementConfiguration":{"binding":"{{FormatDateTime(Form.Date,Translate(\"DateFormat\"),DocumentLanguage)}}","type":"text","disableUpdates":false}},{"type":"shape","id":"d621d8b6-cd2e-463b-982e-d95c5f8a82fb","elementConfiguration":{"width":"{{UserProfile.Department.REFDepartmentLogo.WidthPNGPPTFooter}}","height":"{{UserProfile.Department.REFDepartmentLogo.HeightPNGPPTFooter}}","image":"{{UserProfile.Department.REFDepartmentLogo.ImagePNG}}","visibility":"{{IfElse(Form.FooterLogo, VisibilityType.Visible,VisibilityType.Hidden)}}","type":"image","disableUpdates":false}},{"type":"shape","id":"65b937f8-b6ed-482d-9fcb-89e2ad98182a","elementConfiguration":{"binding":"{{Form.Footer}}","type":"text","disableUpdates":false}},{"type":"shape","id":"8e41931c-7f95-42d4-bfa3-9c5f04293069","elementConfiguration":{"binding":"{{UserProfile.Department.DepartmentName}}","visibility":"{{IfElse(Form.FooterLogo, VisibilityType.Hidden,VisibilityType.Visible)}}","type":"text","disableUpdates":false}},{"type":"shape","id":"313b8357-6b18-490c-9533-a6c0ee071962","elementConfiguration":{"binding":"{{FormatDateTime(Form.Date,Translate(\"DateFormat\"),DocumentLanguage)}}","type":"text","disableUpdates":false}},{"type":"shape","id":"69582c92-e5c7-4749-97ef-47cc4b58fa8b","elementConfiguration":{"binding":"{{FormatDateTime(Form.Date,Translate(\"DateFormat\"),DocumentLanguage)}}","type":"text","disableUpdates":false}},{"type":"shape","id":"4ee707e9-0b9f-42e6-bfac-8cfa418e9d62","elementConfiguration":{"binding":"{{Form.Footer}}","type":"text","disableUpdates":false}},{"type":"shape","id":"b710521b-d63f-429f-a075-a52a6cb7c897","elementConfiguration":{"width":"{{UserProfile.Department.REFDepartmentLogo.WidthPNGPPTFooter}}","height":"{{UserProfile.Department.REFDepartmentLogo.HeightPNGPPTFooter}}","image":"{{UserProfile.Department.REFDepartmentLogo.ImagePNG}}","visibility":"{{IfElse(Form.FooterLogo, VisibilityType.Visible,VisibilityType.Hidden)}}","type":"image","disableUpdates":false}},{"type":"shape","id":"4c8a9ee4-f540-4aa0-9380-f692b4e2dcc6","elementConfiguration":{"binding":"{{UserProfile.Department.DepartmentName}}","visibility":"{{IfElse(Form.FooterLogo, VisibilityType.Hidden,VisibilityType.Visible)}}","type":"text","disableUpdates":false}},{"type":"shape","id":"9c2bec1f-485e-44d6-987c-4c2a62826230","elementConfiguration":{"binding":"{{FormatDateTime(Form.Date,Translate(\"DateFormat\"),DocumentLanguage)}}","type":"text","disableUpdates":false}},{"type":"shape","id":"965f1849-534b-4cf0-ad65-b946ad9126d8","elementConfiguration":{"width":"{{UserProfile.Department.REFDepartmentLogo.WidthPNGPPTFooter}}","height":"{{UserProfile.Department.REFDepartmentLogo.HeightPNGPPTFooter}}","image":"{{UserProfile.Department.REFDepartmentLogo.ImagePNG}}","visibility":"{{IfElse(Form.FooterLogo, VisibilityType.Visible,VisibilityType.Hidden)}}","type":"image","disableUpdates":false}},{"type":"shape","id":"73b120c8-aa6c-4644-86bc-360261a349b9","elementConfiguration":{"binding":"{{Form.Footer}}","type":"text","disableUpdates":false}},{"type":"shape","id":"297fab75-6aaa-4b1a-95bb-193250870530","elementConfiguration":{"binding":"{{UserProfile.Department.DepartmentName}}","visibility":"{{IfElse(Form.FooterLogo, VisibilityType.Hidden,VisibilityType.Visible)}}","type":"text","disableUpdates":false}}],"transformationConfigurations":[{"language":"{{UserProfile.DocumentLanguage.Language}}","disableUpdates":false,"type":"proofingLanguage"},{"propertyName":"creator","propertyValue":"{{UserProfile.FirstName}} {{UserProfile.LastName}}","disableUpdates":false,"type":"documentProperty"},{"propertyName":"title","propertyValue":"Presentation - University of St.Gallen","disableUpdates":false,"type":"documentProperty"}],"templateName":"UNISG Präsentation","templateDescription":"","enableDocumentContentUpdater":true,"version":"2.0"}]]></TemplafyTemplateConfiguration>
+</file>
+
+<file path=customXml/item21.xml><?xml version="1.0" encoding="utf-8"?>
+<TemplafySlideFormConfiguration><![CDATA[{"formFields":[],"formDataEntries":[]}]]></TemplafySlideFormConfiguration>
+</file>
+
+<file path=customXml/item22.xml><?xml version="1.0" encoding="utf-8"?>
+<TemplafySlideFormConfiguration><![CDATA[{"formFields":[{"required":true,"shareValue":false,"type":"datePicker","name":"Date","label":"Datum"},{"required":false,"placeholder":"","lines":1,"shareValue":false,"type":"textBox","name":"Footer","label":"Fusszeile"},{"defaultValue":{"fixedValue":true},"shareValue":false,"type":"checkBox","name":"FooterLogo","label":"mit Logo in der Fusszeile"}],"formDataEntries":[]}]]></TemplafySlideFormConfiguration>
+</file>
+
+<file path=customXml/item23.xml><?xml version="1.0" encoding="utf-8"?>
+<TemplafySlideTemplateConfiguration><![CDATA[{"slideVersion":1,"isValidatorEnabled":false,"isLocked":false,"elementsMetadata":[{"type":"shape","elementConfiguration":{"width":"{{UserProfile.Department.REFDepartmentLogo.WidthPNGPPT}}","height":"{{UserProfile.Department.REFDepartmentLogo.HeightPNGPPT}}","image":"{{UserProfile.Department.REFDepartmentLogo.ImagePNG}}","type":"image","disableUpdates":false}},{"type":"shape","elementConfiguration":{"binding":"{{UserProfile.Department.DepartmentName}} \n{{UserProfile.Department.DepartmentStreet}} {{UserProfile.Department.DepartmentStreetNumber}} \n{{UserProfile.Department.DepartmentPOBox}} {{UserProfile.Department.DepartmentCity}} \n{{UserProfile.Department.DepartmentCountry}} \n{{UserProfile.Department.DepartmentWebsite}}","type":"text","disableUpdates":false}}],"slideId":"637750113834283378","enableDocumentContentUpdater":true,"version":"2.0"}]]></TemplafySlideTemplateConfiguration>
+</file>
+
+<file path=customXml/item24.xml><?xml version="1.0" encoding="utf-8"?>
+<TemplafySlideTemplateConfiguration><![CDATA[{"slideVersion":1,"isValidatorEnabled":false,"isLocked":false,"elementsMetadata":[],"slideId":"637750113834254135","enableDocumentContentUpdater":true,"version":"2.0"}]]></TemplafySlideTemplateConfiguration>
+</file>
+
+<file path=customXml/item25.xml><?xml version="1.0" encoding="utf-8"?>
+<TemplafySlideFormConfiguration><![CDATA[{"formFields":[{"required":true,"shareValue":false,"type":"datePicker","name":"Date","label":"Datum"},{"required":false,"placeholder":"","lines":1,"shareValue":false,"type":"textBox","name":"Footer","label":"Fusszeile"},{"defaultValue":{"fixedValue":true},"shareValue":false,"type":"checkBox","name":"FooterLogo","label":"mit Logo in der Fusszeile"}],"formDataEntries":[]}]]></TemplafySlideFormConfiguration>
+</file>
+
+<file path=customXml/item26.xml><?xml version="1.0" encoding="utf-8"?>
+<TemplafySlideFormConfiguration><![CDATA[{"formFields":[],"formDataEntries":[]}]]></TemplafySlideFormConfiguration>
+</file>
+
+<file path=customXml/item27.xml><?xml version="1.0" encoding="utf-8"?>
+<?mso-contentType ?>
+<FormTemplates xmlns="http://schemas.microsoft.com/sharepoint/v3/contenttype/forms">
+  <Display>DocumentLibraryForm</Display>
+  <Edit>DocumentLibraryForm</Edit>
+  <New>DocumentLibraryForm</New>
+</FormTemplates>
+</file>
+
+<file path=customXml/item28.xml><?xml version="1.0" encoding="utf-8"?>
+<TemplafySlideFormConfiguration><![CDATA[{"formFields":[],"formDataEntries":[]}]]></TemplafySlideFormConfiguration>
+</file>
+
+<file path=customXml/item29.xml><?xml version="1.0" encoding="utf-8"?>
+<TemplafySlideFormConfiguration><![CDATA[{"formFields":[{"required":true,"shareValue":false,"type":"datePicker","name":"Date","label":"Datum"},{"required":false,"placeholder":"","lines":1,"shareValue":false,"type":"textBox","name":"Footer","label":"Fusszeile"},{"defaultValue":{"fixedValue":true},"shareValue":false,"type":"checkBox","name":"FooterLogo","label":"mit Logo in der Fusszeile"}],"formDataEntries":[]}]]></TemplafySlideFormConfiguration>
+</file>
+
+<file path=customXml/item3.xml><?xml version="1.0" encoding="utf-8"?>
+<TemplafySlideFormConfiguration><![CDATA[{"formFields":[{"required":true,"shareValue":false,"type":"datePicker","name":"Date","label":"Datum"},{"required":false,"placeholder":"","lines":1,"shareValue":false,"type":"textBox","name":"Footer","label":"Fusszeile"},{"defaultValue":{"fixedValue":true},"shareValue":false,"type":"checkBox","name":"FooterLogo","label":"mit Logo in der Fusszeile"}],"formDataEntries":[]}]]></TemplafySlideFormConfiguration>
+</file>
+
+<file path=customXml/item30.xml><?xml version="1.0" encoding="utf-8"?>
+<TemplafySlideTemplateConfiguration><![CDATA[{"slideVersion":1,"isValidatorEnabled":false,"isLocked":false,"elementsMetadata":[],"slideId":"637750113834122525","enableDocumentContentUpdater":true,"version":"2.0"}]]></TemplafySlideTemplateConfiguration>
+</file>
+
+<file path=customXml/item31.xml><?xml version="1.0" encoding="utf-8"?>
+<TemplafySlideFormConfiguration><![CDATA[{"formFields":[],"formDataEntries":[]}]]></TemplafySlideFormConfiguration>
+</file>
+
+<file path=customXml/item32.xml><?xml version="1.0" encoding="utf-8"?>
+<TemplafySlideTemplateConfiguration><![CDATA[{"slideVersion":1,"isValidatorEnabled":false,"isLocked":false,"elementsMetadata":[{"type":"shape","elementConfiguration":{"binding":"{{FormatDateTime(Form.Date,Translate(\"DateFormat\"),DocumentLanguage)}}","type":"text","disableUpdates":false}},{"type":"shape","elementConfiguration":{"width":"{{UserProfile.Department.REFDepartmentLogo.WidthPNGPPTFooter}}","height":"{{UserProfile.Department.REFDepartmentLogo.HeightPNGPPTFooter}}","image":"{{UserProfile.Department.REFDepartmentLogo.ImagePNG}}","visibility":"{{IfElse(Form.FooterLogo, VisibilityType.Visible,VisibilityType.Hidden)}}","type":"image","disableUpdates":false}},{"type":"shape","elementConfiguration":{"binding":"{{Form.Footer}}","type":"text","disableUpdates":false}},{"type":"shape","elementConfiguration":{"binding":"{{UserProfile.Department.DepartmentName}}","visibility":"{{IfElse(Form.FooterLogo, VisibilityType.Hidden,VisibilityType.Visible)}}","type":"text","disableUpdates":false}}],"slideId":"637750113834231105","enableDocumentContentUpdater":true,"version":"2.0"}]]></TemplafySlideTemplateConfiguration>
+</file>
+
+<file path=customXml/item33.xml><?xml version="1.0" encoding="utf-8"?>
+<p:properties xmlns:p="http://schemas.microsoft.com/office/2006/metadata/properties" xmlns:xsi="http://www.w3.org/2001/XMLSchema-instance" xmlns:pc="http://schemas.microsoft.com/office/infopath/2007/PartnerControls">
+  <documentManagement>
+    <lcf76f155ced4ddcb4097134ff3c332f xmlns="07c8a24f-8b40-44ca-950f-ae5db2c4fa23">
+      <Terms xmlns="http://schemas.microsoft.com/office/infopath/2007/PartnerControls"/>
+    </lcf76f155ced4ddcb4097134ff3c332f>
+    <TaxCatchAll xmlns="71d337dc-809a-4269-a690-d6cd31b4acd0" xsi:nil="true"/>
+  </documentManagement>
+</p:properties>
+</file>
+
+<file path=customXml/item34.xml><?xml version="1.0" encoding="utf-8"?>
+<TemplafySlideFormConfiguration><![CDATA[{"formFields":[],"formDataEntries":[]}]]></TemplafySlideFormConfiguration>
+</file>
+
 <file path=customXml/item35.xml><?xml version="1.0" encoding="utf-8"?>
 <TemplafySlideFormConfiguration><![CDATA[{"formFields":[{"required":true,"shareValue":false,"type":"datePicker","name":"Date","label":"Datum"},{"required":false,"placeholder":"","lines":1,"shareValue":false,"type":"textBox","name":"Footer","label":"Fusszeile"},{"defaultValue":{"fixedValue":true},"shareValue":false,"type":"checkBox","name":"FooterLogo","label":"mit Logo in der Fusszeile"}],"formDataEntries":[]}]]></TemplafySlideFormConfiguration>
 </file>
 
 <file path=customXml/item36.xml><?xml version="1.0" encoding="utf-8"?>
+<TemplafySlideTemplateConfiguration><![CDATA[{"slideVersion":1,"isValidatorEnabled":false,"isLocked":false,"elementsMetadata":[{"type":"shape","elementConfiguration":{"width":"{{UserProfile.Department.REFDepartmentLogo.WidthPNGPPT}}","height":"{{UserProfile.Department.REFDepartmentLogo.HeightPNGPPT}}","image":"{{UserProfile.Department.REFDepartmentLogo.ImagePNG}}","type":"image","disableUpdates":false}}],"slideId":"637750113834106457","enableDocumentContentUpdater":true,"version":"2.0"}]]></TemplafySlideTemplateConfiguration>
+</file>
+
+<file path=customXml/item37.xml><?xml version="1.0" encoding="utf-8"?>
+<TemplafySlideFormConfiguration><![CDATA[{"formFields":[{"required":true,"shareValue":false,"type":"datePicker","name":"Date","label":"Datum"},{"required":false,"placeholder":"","lines":1,"shareValue":false,"type":"textBox","name":"Footer","label":"Fusszeile"},{"defaultValue":{"fixedValue":true},"shareValue":false,"type":"checkBox","name":"FooterLogo","label":"mit Logo in der Fusszeile"}],"formDataEntries":[]}]]></TemplafySlideFormConfiguration>
+</file>
+
+<file path=customXml/item38.xml><?xml version="1.0" encoding="utf-8"?>
+<TemplafySlideTemplateConfiguration><![CDATA[{"slideVersion":1,"isValidatorEnabled":false,"isLocked":false,"elementsMetadata":[{"type":"shape","elementConfiguration":{"binding":"{{FormatDateTime(Form.Date,Translate(\"DateFormat\"),DocumentLanguage)}}","type":"text","disableUpdates":false}},{"type":"shape","elementConfiguration":{"width":"{{UserProfile.Department.REFDepartmentLogo.WidthPNGPPTFooter}}","height":"{{UserProfile.Department.REFDepartmentLogo.HeightPNGPPTFooter}}","image":"{{UserProfile.Department.REFDepartmentLogo.ImagePNG}}","visibility":"{{IfElse(Form.FooterLogo, VisibilityType.Visible,VisibilityType.Hidden)}}","type":"image","disableUpdates":false}},{"type":"shape","elementConfiguration":{"binding":"{{Form.Footer}}","type":"text","disableUpdates":false}},{"type":"shape","elementConfiguration":{"binding":"{{UserProfile.Department.DepartmentName}}","visibility":"{{IfElse(Form.FooterLogo, VisibilityType.Hidden,VisibilityType.Visible)}}","type":"text","disableUpdates":false}}],"slideId":"637750113834156510","enableDocumentContentUpdater":true,"version":"2.0"}]]></TemplafySlideTemplateConfiguration>
+</file>
+
+<file path=customXml/item39.xml><?xml version="1.0" encoding="utf-8"?>
+<TemplafySlideTemplateConfiguration><![CDATA[{"slideVersion":1,"isValidatorEnabled":false,"isLocked":false,"elementsMetadata":[{"type":"shape","elementConfiguration":{"binding":"{{FormatDateTime(Form.Date,Translate(\"DateFormat\"),DocumentLanguage)}}","type":"text","disableUpdates":false}},{"type":"shape","elementConfiguration":{"width":"{{UserProfile.Department.REFDepartmentLogo.WidthPNGPPTFooter}}","height":"{{UserProfile.Department.REFDepartmentLogo.HeightPNGPPTFooter}}","image":"{{UserProfile.Department.REFDepartmentLogo.ImagePNG}}","visibility":"{{IfElse(Form.FooterLogo, VisibilityType.Visible,VisibilityType.Hidden)}}","type":"image","disableUpdates":false}},{"type":"shape","elementConfiguration":{"binding":"{{Form.Footer}}","type":"text","disableUpdates":false}},{"type":"shape","elementConfiguration":{"binding":"{{UserProfile.Department.DepartmentName}}","visibility":"{{IfElse(Form.FooterLogo, VisibilityType.Hidden,VisibilityType.Visible)}}","type":"text","disableUpdates":false}}],"slideId":"637750113834279331","enableDocumentContentUpdater":true,"version":"2.0"}]]></TemplafySlideTemplateConfiguration>
+</file>
+
+<file path=customXml/item4.xml><?xml version="1.0" encoding="utf-8"?>
+<TemplafySlideFormConfiguration><![CDATA[{"formFields":[],"formDataEntries":[]}]]></TemplafySlideFormConfiguration>
+</file>
+
+<file path=customXml/item40.xml><?xml version="1.0" encoding="utf-8"?>
+<TemplafySlideFormConfiguration><![CDATA[{"formFields":[],"formDataEntries":[]}]]></TemplafySlideFormConfiguration>
+</file>
+
+<file path=customXml/item41.xml><?xml version="1.0" encoding="utf-8"?>
+<TemplafySlideTemplateConfiguration><![CDATA[{"slideVersion":1,"isValidatorEnabled":false,"isLocked":false,"elementsMetadata":[],"slideId":"637750113834253485","enableDocumentContentUpdater":true,"version":"2.0"}]]></TemplafySlideTemplateConfiguration>
+</file>
+
+<file path=customXml/item42.xml><?xml version="1.0" encoding="utf-8"?>
+<TemplafySlideFormConfiguration><![CDATA[{"formFields":[{"required":true,"shareValue":false,"type":"datePicker","name":"Date","label":"Datum"},{"required":false,"placeholder":"","lines":1,"shareValue":false,"type":"textBox","name":"Footer","label":"Fusszeile"},{"defaultValue":{"fixedValue":true},"shareValue":false,"type":"checkBox","name":"FooterLogo","label":"mit Logo in der Fusszeile"}],"formDataEntries":[]}]]></TemplafySlideFormConfiguration>
+</file>
+
+<file path=customXml/item43.xml><?xml version="1.0" encoding="utf-8"?>
+<TemplafySlideTemplateConfiguration><![CDATA[{"slideVersion":1,"isValidatorEnabled":false,"isLocked":false,"elementsMetadata":[{"type":"shape","elementConfiguration":{"binding":"{{FormatDateTime(Form.Date,Translate(\"DateFormat\"),DocumentLanguage)}}","type":"text","disableUpdates":false}},{"type":"shape","elementConfiguration":{"width":"{{UserProfile.Department.REFDepartmentLogo.WidthPNGPPTFooter}}","height":"{{UserProfile.Department.REFDepartmentLogo.HeightPNGPPTFooter}}","image":"{{UserProfile.Department.REFDepartmentLogo.ImagePNG}}","visibility":"{{IfElse(Form.FooterLogo, VisibilityType.Visible,VisibilityType.Hidden)}}","type":"image","disableUpdates":false}},{"type":"shape","elementConfiguration":{"binding":"{{Form.Footer}}","type":"text","disableUpdates":false}},{"type":"shape","elementConfiguration":{"binding":"{{UserProfile.Department.DepartmentName}}","visibility":"{{IfElse(Form.FooterLogo, VisibilityType.Hidden,VisibilityType.Visible)}}","type":"text","disableUpdates":false}}],"slideId":"637750113834237210","enableDocumentContentUpdater":true,"version":"2.0"}]]></TemplafySlideTemplateConfiguration>
+</file>
+
+<file path=customXml/item44.xml><?xml version="1.0" encoding="utf-8"?>
+<TemplafySlideTemplateConfiguration><![CDATA[{"slideVersion":1,"isValidatorEnabled":false,"isLocked":false,"elementsMetadata":[],"slideId":"637750113834267111","enableDocumentContentUpdater":true,"version":"2.0"}]]></TemplafySlideTemplateConfiguration>
+</file>
+
+<file path=customXml/item45.xml><?xml version="1.0" encoding="utf-8"?>
+<TemplafySlideFormConfiguration><![CDATA[{"formFields":[],"formDataEntries":[]}]]></TemplafySlideFormConfiguration>
+</file>
+
+<file path=customXml/item46.xml><?xml version="1.0" encoding="utf-8"?>
+<TemplafySlideTemplateConfiguration><![CDATA[{"slideVersion":1,"isValidatorEnabled":false,"isLocked":false,"elementsMetadata":[{"type":"shape","elementConfiguration":{"width":"{{UserProfile.Department.REFDepartmentLogo.WidthPNGPPT}}","height":"{{UserProfile.Department.REFDepartmentLogo.HeightPNGPPT}}","image":"{{UserProfile.Department.REFDepartmentLogo.ImagePNG}}","type":"image","disableUpdates":false}}],"slideId":"637750113834107608","enableDocumentContentUpdater":true,"version":"2.0"}]]></TemplafySlideTemplateConfiguration>
+</file>
+
+<file path=customXml/item47.xml><?xml version="1.0" encoding="utf-8"?>
+<TemplafySlideTemplateConfiguration><![CDATA[{"slideVersion":1,"isValidatorEnabled":false,"isLocked":false,"elementsMetadata":[{"type":"shape","elementConfiguration":{"width":"{{UserProfile.Department.REFDepartmentLogo.WidthPNGPPT}}","height":"{{UserProfile.Department.REFDepartmentLogo.HeightPNGPPT}}","image":"{{UserProfile.Department.REFDepartmentLogo.ImagePNG}}","type":"image","disableUpdates":false}}],"slideId":"638097175473157463","enableDocumentContentUpdater":false,"version":"2.0"}]]></TemplafySlideTemplateConfiguration>
+</file>
+
+<file path=customXml/item48.xml><?xml version="1.0" encoding="utf-8"?>
+<TemplafySlideFormConfiguration><![CDATA[{"formFields":[{"required":true,"shareValue":false,"type":"datePicker","name":"Date","label":"Datum"},{"required":false,"placeholder":"","lines":1,"shareValue":false,"type":"textBox","name":"Footer","label":"Fusszeile"},{"defaultValue":{"fixedValue":true},"shareValue":false,"type":"checkBox","name":"FooterLogo","label":"mit Logo in der Fusszeile"}],"formDataEntries":[]}]]></TemplafySlideFormConfiguration>
+</file>
+
+<file path=customXml/item49.xml><?xml version="1.0" encoding="utf-8"?>
+<TemplafySlideTemplateConfiguration><![CDATA[{"slideVersion":1,"isValidatorEnabled":false,"isLocked":false,"elementsMetadata":[{"type":"shape","elementConfiguration":{"binding":"{{FormatDateTime(Form.Date,Translate(\"DateFormat\"),DocumentLanguage)}}","type":"text","disableUpdates":false}},{"type":"shape","elementConfiguration":{"width":"{{UserProfile.Department.REFDepartmentLogo.WidthPNGPPTFooter}}","height":"{{UserProfile.Department.REFDepartmentLogo.HeightPNGPPTFooter}}","image":"{{UserProfile.Department.REFDepartmentLogo.ImagePNG}}","visibility":"{{IfElse(Form.FooterLogo, VisibilityType.Visible,VisibilityType.Hidden)}}","type":"image","disableUpdates":false}},{"type":"shape","elementConfiguration":{"binding":"{{Form.Footer}}","type":"text","disableUpdates":false}},{"type":"shape","elementConfiguration":{"binding":"{{UserProfile.Department.DepartmentName}}","visibility":"{{IfElse(Form.FooterLogo, VisibilityType.Hidden,VisibilityType.Visible)}}","type":"text","disableUpdates":false}}],"slideId":"637750113834261908","enableDocumentContentUpdater":true,"version":"2.0"}]]></TemplafySlideTemplateConfiguration>
+</file>
+
+<file path=customXml/item5.xml><?xml version="1.0" encoding="utf-8"?>
 <TemplafySlideTemplateConfiguration><![CDATA[{"slideVersion":1,"isValidatorEnabled":false,"isLocked":false,"elementsMetadata":[{"type":"shape","elementConfiguration":{"binding":"{{FormatDateTime(Form.Date,Translate(\"DateFormat\"),DocumentLanguage)}}","type":"text","disableUpdates":false}},{"type":"shape","elementConfiguration":{"width":"{{UserProfile.Department.REFDepartmentLogo.WidthPNGPPTFooter}}","height":"{{UserProfile.Department.REFDepartmentLogo.HeightPNGPPTFooter}}","image":"{{UserProfile.Department.REFDepartmentLogo.ImagePNG}}","visibility":"{{IfElse(Form.FooterLogo, VisibilityType.Visible,VisibilityType.Hidden)}}","type":"image","disableUpdates":false}},{"type":"shape","elementConfiguration":{"binding":"{{Form.Footer}}","type":"text","disableUpdates":false}},{"type":"shape","elementConfiguration":{"binding":"{{UserProfile.Department.DepartmentName}}","visibility":"{{IfElse(Form.FooterLogo, VisibilityType.Hidden,VisibilityType.Visible)}}","type":"text","disableUpdates":false}}],"slideId":"637750113834195832","enableDocumentContentUpdater":true,"version":"2.0"}]]></TemplafySlideTemplateConfiguration>
 </file>
 
-<file path=customXml/item37.xml><?xml version="1.0" encoding="utf-8"?>
-<TemplafySlideTemplateConfiguration><![CDATA[{"slideVersion":1,"isValidatorEnabled":false,"isLocked":false,"elementsMetadata":[{"type":"shape","elementConfiguration":{"binding":"{{FormatDateTime(Form.Date,Translate(\"DateFormat\"),DocumentLanguage)}}","type":"text","disableUpdates":false}},{"type":"shape","elementConfiguration":{"binding":"{{Form.Footer}}","type":"text","disableUpdates":false}},{"type":"shape","elementConfiguration":{"width":"{{UserProfile.Department.REFDepartmentLogo.WidthPNGPPTFooter}}","height":"{{UserProfile.Department.REFDepartmentLogo.HeightPNGPPTFooter}}","image":"{{UserProfile.Department.REFDepartmentLogo.ImagePNG}}","visibility":"{{IfElse(Form.FooterLogo, VisibilityType.Visible,VisibilityType.Hidden)}}","type":"image","disableUpdates":false}},{"type":"shape","elementConfiguration":{"binding":"{{UserProfile.Department.DepartmentName}}","visibility":"{{IfElse(Form.FooterLogo, VisibilityType.Hidden,VisibilityType.Visible)}}","type":"text","disableUpdates":false}}],"slideId":"637750113834107890","enableDocumentContentUpdater":true,"version":"2.0"}]]></TemplafySlideTemplateConfiguration>
-</file>
-
-<file path=customXml/item38.xml><?xml version="1.0" encoding="utf-8"?>
-<TemplafySlideTemplateConfiguration><![CDATA[{"slideVersion":1,"isValidatorEnabled":false,"isLocked":false,"elementsMetadata":[],"slideId":"637750113834120761","enableDocumentContentUpdater":true,"version":"2.0"}]]></TemplafySlideTemplateConfiguration>
-</file>
-
-<file path=customXml/item39.xml><?xml version="1.0" encoding="utf-8"?>
-<TemplafySlideFormConfiguration><![CDATA[{"formFields":[{"required":true,"shareValue":false,"type":"datePicker","name":"Date","label":"Datum"},{"required":false,"placeholder":"","lines":1,"shareValue":false,"type":"textBox","name":"Footer","label":"Fusszeile"},{"defaultValue":{"fixedValue":true},"shareValue":false,"type":"checkBox","name":"FooterLogo","label":"mit Logo in der Fusszeile"}],"formDataEntries":[]}]]></TemplafySlideFormConfiguration>
-</file>
-
-<file path=customXml/item4.xml><?xml version="1.0" encoding="utf-8"?>
-<TemplafySlideFormConfiguration><![CDATA[{"formFields":[{"required":true,"shareValue":false,"type":"datePicker","name":"Date","label":"Datum"},{"required":false,"placeholder":"","lines":1,"shareValue":false,"type":"textBox","name":"Footer","label":"Fusszeile"},{"defaultValue":{"fixedValue":true},"shareValue":false,"type":"checkBox","name":"FooterLogo","label":"mit Logo in der Fusszeile"}],"formDataEntries":[]}]]></TemplafySlideFormConfiguration>
-</file>
-
-<file path=customXml/item40.xml><?xml version="1.0" encoding="utf-8"?>
-<TemplafySlideTemplateConfiguration><![CDATA[{"slideVersion":1,"isValidatorEnabled":false,"isLocked":false,"elementsMetadata":[{"type":"shape","elementConfiguration":{"width":"{{UserProfile.Department.REFDepartmentLogo.WidthPNGPPT}}","height":"{{UserProfile.Department.REFDepartmentLogo.HeightPNGPPT}}","image":"{{UserProfile.Department.REFDepartmentLogo.ImagePNG}}","type":"image","disableUpdates":false}}],"slideId":"637750113834106457","enableDocumentContentUpdater":true,"version":"2.0"}]]></TemplafySlideTemplateConfiguration>
-</file>
-
-<file path=customXml/item41.xml><?xml version="1.0" encoding="utf-8"?>
-<TemplafySlideFormConfiguration><![CDATA[{"formFields":[{"required":true,"shareValue":false,"type":"datePicker","name":"Date","label":"Datum"},{"required":false,"placeholder":"","lines":1,"shareValue":false,"type":"textBox","name":"Footer","label":"Fusszeile"},{"defaultValue":{"fixedValue":true},"shareValue":false,"type":"checkBox","name":"FooterLogo","label":"mit Logo in der Fusszeile"}],"formDataEntries":[]}]]></TemplafySlideFormConfiguration>
-</file>
-
-<file path=customXml/item42.xml><?xml version="1.0" encoding="utf-8"?>
+<file path=customXml/item50.xml><?xml version="1.0" encoding="utf-8"?>
+<TemplafySlideTemplateConfiguration><![CDATA[{"slideVersion":1,"isValidatorEnabled":false,"isLocked":false,"elementsMetadata":[{"type":"shape","elementConfiguration":{"binding":"{{FormatDateTime(Form.Date,Translate(\"DateFormat\"),DocumentLanguage)}}","type":"text","disableUpdates":false}},{"type":"shape","elementConfiguration":{"width":"{{UserProfile.Department.REFDepartmentLogo.WidthPNGPPTFooter}}","height":"{{UserProfile.Department.REFDepartmentLogo.HeightPNGPPTFooter}}","image":"{{UserProfile.Department.REFDepartmentLogo.ImagePNG}}","visibility":"{{IfElse(Form.FooterLogo, VisibilityType.Visible,VisibilityType.Hidden)}}","type":"image","disableUpdates":false}},{"type":"shape","elementConfiguration":{"binding":"{{Form.Footer}}","type":"text","disableUpdates":false}},{"type":"shape","elementConfiguration":{"binding":"{{UserProfile.Department.DepartmentName}}","visibility":"{{IfElse(Form.FooterLogo, VisibilityType.Hidden,VisibilityType.Visible)}}","type":"text","disableUpdates":false}}],"slideId":"637750113834249425","enableDocumentContentUpdater":true,"version":"2.0"}]]></TemplafySlideTemplateConfiguration>
+</file>
+
+<file path=customXml/item51.xml><?xml version="1.0" encoding="utf-8"?>
+<TemplafySlideTemplateConfiguration><![CDATA[{"slideVersion":1,"isValidatorEnabled":false,"isLocked":false,"elementsMetadata":[{"type":"shape","elementConfiguration":{"binding":"{{FormatDateTime(Form.Date,Translate(\"DateFormat\"),DocumentLanguage)}}","type":"text","disableUpdates":false}},{"type":"shape","elementConfiguration":{"width":"{{UserProfile.Department.REFDepartmentLogo.WidthPNGPPTFooter}}","height":"{{UserProfile.Department.REFDepartmentLogo.HeightPNGPPTFooter}}","image":"{{UserProfile.Department.REFDepartmentLogo.ImagePNG}}","visibility":"{{IfElse(Form.FooterLogo, VisibilityType.Visible,VisibilityType.Hidden)}}","type":"image","disableUpdates":false}},{"type":"shape","elementConfiguration":{"binding":"{{Form.Footer}}","type":"text","disableUpdates":false}},{"type":"shape","elementConfiguration":{"binding":"{{UserProfile.Department.DepartmentName}}","visibility":"{{IfElse(Form.FooterLogo, VisibilityType.Hidden,VisibilityType.Visible)}}","type":"text","disableUpdates":false}}],"slideId":"637750113834135648","enableDocumentContentUpdater":true,"version":"2.0"}]]></TemplafySlideTemplateConfiguration>
+</file>
+
+<file path=customXml/item52.xml><?xml version="1.0" encoding="utf-8"?>
 <TemplafySlideFormConfiguration><![CDATA[{"formFields":[],"formDataEntries":[]}]]></TemplafySlideFormConfiguration>
 </file>
 
-<file path=customXml/item43.xml><?xml version="1.0" encoding="utf-8"?>
-<TemplafySlideFormConfiguration><![CDATA[{"formFields":[{"required":true,"shareValue":false,"type":"datePicker","name":"Date","label":"Datum"},{"required":false,"placeholder":"","lines":1,"shareValue":false,"type":"textBox","name":"Footer","label":"Fusszeile"},{"defaultValue":{"fixedValue":true},"shareValue":false,"type":"checkBox","name":"FooterLogo","label":"mit Logo in der Fusszeile"}],"formDataEntries":[]}]]></TemplafySlideFormConfiguration>
-</file>
-
-<file path=customXml/item44.xml><?xml version="1.0" encoding="utf-8"?>
-<TemplafySlideFormConfiguration><![CDATA[{"formFields":[],"formDataEntries":[]}]]></TemplafySlideFormConfiguration>
-</file>
-
-<file path=customXml/item45.xml><?xml version="1.0" encoding="utf-8"?>
-<TemplafySlideFormConfiguration><![CDATA[{"formFields":[{"required":true,"shareValue":false,"type":"datePicker","name":"Date","label":"Datum"},{"required":false,"placeholder":"","lines":1,"shareValue":false,"type":"textBox","name":"Footer","label":"Fusszeile"},{"defaultValue":{"fixedValue":true},"shareValue":false,"type":"checkBox","name":"FooterLogo","label":"mit Logo in der Fusszeile"}],"formDataEntries":[]}]]></TemplafySlideFormConfiguration>
-</file>
-
-<file path=customXml/item46.xml><?xml version="1.0" encoding="utf-8"?>
-<TemplafySlideFormConfiguration><![CDATA[{"formFields":[{"required":true,"shareValue":false,"type":"datePicker","name":"Date","label":"Datum"},{"required":false,"placeholder":"","lines":1,"shareValue":false,"type":"textBox","name":"Footer","label":"Fusszeile"},{"defaultValue":{"fixedValue":true},"shareValue":false,"type":"checkBox","name":"FooterLogo","label":"mit Logo in der Fusszeile"}],"formDataEntries":[]}]]></TemplafySlideFormConfiguration>
-</file>
-
-<file path=customXml/item47.xml><?xml version="1.0" encoding="utf-8"?>
+<file path=customXml/item53.xml><?xml version="1.0" encoding="utf-8"?>
 <TemplafySlideTemplateConfiguration><![CDATA[{"slideVersion":1,"isValidatorEnabled":false,"isLocked":false,"elementsMetadata":[{"type":"shape","elementConfiguration":{"binding":"{{FormatDateTime(Form.Date,Translate(\"DateFormat\"),DocumentLanguage)}}","type":"text","disableUpdates":false}},{"type":"shape","elementConfiguration":{"width":"{{UserProfile.Department.REFDepartmentLogo.WidthPNGPPTFooter}}","height":"{{UserProfile.Department.REFDepartmentLogo.HeightPNGPPTFooter}}","image":"{{UserProfile.Department.REFDepartmentLogo.ImagePNG}}","visibility":"{{IfElse(Form.FooterLogo, VisibilityType.Visible,VisibilityType.Hidden)}}","type":"image","disableUpdates":false}},{"type":"shape","elementConfiguration":{"binding":"{{Form.Footer}}","type":"text","disableUpdates":false}},{"type":"shape","elementConfiguration":{"binding":"{{UserProfile.Department.DepartmentName}}","visibility":"{{IfElse(Form.FooterLogo, VisibilityType.Hidden,VisibilityType.Visible)}}","type":"text","disableUpdates":false}}],"slideId":"637750113834264450","enableDocumentContentUpdater":true,"version":"2.0"}]]></TemplafySlideTemplateConfiguration>
 </file>
 
-<file path=customXml/item48.xml><?xml version="1.0" encoding="utf-8"?>
-<TemplafySlideTemplateConfiguration><![CDATA[{"slideVersion":1,"isValidatorEnabled":false,"isLocked":false,"elementsMetadata":[{"type":"shape","elementConfiguration":{"binding":"{{FormatDateTime(Form.Date,Translate(\"DateFormat\"),DocumentLanguage)}}","type":"text","disableUpdates":false}},{"type":"shape","elementConfiguration":{"width":"{{UserProfile.Department.REFDepartmentLogo.WidthPNGPPTFooter}}","height":"{{UserProfile.Department.REFDepartmentLogo.HeightPNGPPTFooter}}","image":"{{UserProfile.Department.REFDepartmentLogo.ImagePNG}}","visibility":"{{IfElse(Form.FooterLogo, VisibilityType.Visible,VisibilityType.Hidden)}}","type":"image","disableUpdates":false}},{"type":"shape","elementConfiguration":{"binding":"{{Form.Footer}}","type":"text","disableUpdates":false}},{"type":"shape","elementConfiguration":{"binding":"{{UserProfile.Department.DepartmentName}}","visibility":"{{IfElse(Form.FooterLogo, VisibilityType.Hidden,VisibilityType.Visible)}}","type":"text","disableUpdates":false}}],"slideId":"637750113834135648","enableDocumentContentUpdater":true,"version":"2.0"}]]></TemplafySlideTemplateConfiguration>
-</file>
-
-<file path=customXml/item49.xml><?xml version="1.0" encoding="utf-8"?>
-<TemplafySlideTemplateConfiguration><![CDATA[{"slideVersion":1,"isValidatorEnabled":false,"isLocked":false,"elementsMetadata":[],"slideId":"637750113834254135","enableDocumentContentUpdater":true,"version":"2.0"}]]></TemplafySlideTemplateConfiguration>
-</file>
-
-<file path=customXml/item5.xml><?xml version="1.0" encoding="utf-8"?>
-<TemplafySlideTemplateConfiguration><![CDATA[{"slideVersion":1,"isValidatorEnabled":false,"isLocked":false,"elementsMetadata":[{"type":"shape","elementConfiguration":{"width":"{{UserProfile.Department.REFDepartmentLogo.WidthPNGPPT}}","height":"{{UserProfile.Department.REFDepartmentLogo.HeightPNGPPT}}","image":"{{UserProfile.Department.REFDepartmentLogo.ImagePNG}}","type":"image","disableUpdates":false}}],"slideId":"638097175473157463","enableDocumentContentUpdater":false,"version":"2.0"}]]></TemplafySlideTemplateConfiguration>
-</file>
-
-<file path=customXml/item50.xml><?xml version="1.0" encoding="utf-8"?>
-<TemplafySlideFormConfiguration><![CDATA[{"formFields":[{"required":true,"shareValue":false,"type":"datePicker","name":"Date","label":"Datum"},{"required":false,"placeholder":"","lines":1,"shareValue":false,"type":"textBox","name":"Footer","label":"Fusszeile"},{"defaultValue":{"fixedValue":true},"shareValue":false,"type":"checkBox","name":"FooterLogo","label":"mit Logo in der Fusszeile"}],"formDataEntries":[]}]]></TemplafySlideFormConfiguration>
-</file>
-
-<file path=customXml/item51.xml><?xml version="1.0" encoding="utf-8"?>
-<TemplafySlideTemplateConfiguration><![CDATA[{"slideVersion":1,"isValidatorEnabled":false,"isLocked":false,"elementsMetadata":[{"type":"shape","elementConfiguration":{"binding":"{{FormatDateTime(Form.Date,Translate(\"DateFormat\"),DocumentLanguage)}}","type":"text","disableUpdates":false}},{"type":"shape","elementConfiguration":{"width":"{{UserProfile.Department.REFDepartmentLogo.WidthPNGPPTFooter}}","height":"{{UserProfile.Department.REFDepartmentLogo.HeightPNGPPTFooter}}","image":"{{UserProfile.Department.REFDepartmentLogo.ImagePNG}}","visibility":"{{IfElse(Form.FooterLogo, VisibilityType.Visible,VisibilityType.Hidden)}}","type":"image","disableUpdates":false}},{"type":"shape","elementConfiguration":{"binding":"{{Form.Footer}}","type":"text","disableUpdates":false}},{"type":"shape","elementConfiguration":{"binding":"{{UserProfile.Department.DepartmentName}}","visibility":"{{IfElse(Form.FooterLogo, VisibilityType.Hidden,VisibilityType.Visible)}}","type":"text","disableUpdates":false}}],"slideId":"637750113834257356","enableDocumentContentUpdater":true,"version":"2.0"}]]></TemplafySlideTemplateConfiguration>
-</file>
-
-<file path=customXml/item52.xml><?xml version="1.0" encoding="utf-8"?>
-<TemplafySlideTemplateConfiguration><![CDATA[{"slideVersion":1,"isValidatorEnabled":false,"isLocked":false,"elementsMetadata":[{"type":"shape","elementConfiguration":{"width":"{{UserProfile.Department.REFDepartmentLogo.WidthPNGPPT}}","height":"{{UserProfile.Department.REFDepartmentLogo.HeightPNGPPT}}","image":"{{UserProfile.Department.REFDepartmentLogo.ImagePNG}}","type":"image","disableUpdates":false}}],"slideId":"637750113834107008","enableDocumentContentUpdater":true,"version":"2.0"}]]></TemplafySlideTemplateConfiguration>
-</file>
-
-<file path=customXml/item53.xml><?xml version="1.0" encoding="utf-8"?>
-<TemplafySlideTemplateConfiguration><![CDATA[{"slideVersion":1,"isValidatorEnabled":false,"isLocked":false,"elementsMetadata":[{"type":"shape","elementConfiguration":{"binding":"{{FormatDateTime(Form.Date,Translate(\"DateFormat\"),DocumentLanguage)}}","type":"text","disableUpdates":false}},{"type":"shape","elementConfiguration":{"width":"{{UserProfile.Department.REFDepartmentLogo.WidthPNGPPTFooter}}","height":"{{UserProfile.Department.REFDepartmentLogo.HeightPNGPPTFooter}}","image":"{{UserProfile.Department.REFDepartmentLogo.ImagePNG}}","visibility":"{{IfElse(Form.FooterLogo, VisibilityType.Visible,VisibilityType.Hidden)}}","type":"image","disableUpdates":false}},{"type":"shape","elementConfiguration":{"binding":"{{Form.Footer}}","type":"text","disableUpdates":false}},{"type":"shape","elementConfiguration":{"binding":"{{UserProfile.Department.DepartmentName}}","visibility":"{{IfElse(Form.FooterLogo, VisibilityType.Hidden,VisibilityType.Visible)}}","type":"text","disableUpdates":false}}],"slideId":"637750113834261908","enableDocumentContentUpdater":true,"version":"2.0"}]]></TemplafySlideTemplateConfiguration>
-</file>
-
 <file path=customXml/item54.xml><?xml version="1.0" encoding="utf-8"?>
-<TemplafySlideTemplateConfiguration><![CDATA[{"slideVersion":1,"isValidatorEnabled":false,"isLocked":false,"elementsMetadata":[],"slideId":"637750113834130535","enableDocumentContentUpdater":true,"version":"2.0"}]]></TemplafySlideTemplateConfiguration>
+<TemplafySlideTemplateConfiguration><![CDATA[{"slideVersion":1,"isValidatorEnabled":false,"isLocked":false,"elementsMetadata":[{"type":"shape","elementConfiguration":{"binding":"{{FormatDateTime(Form.Date,Translate(\"DateFormat\"),DocumentLanguage)}}","type":"text","disableUpdates":false}},{"type":"shape","elementConfiguration":{"width":"{{UserProfile.Department.REFDepartmentLogo.WidthPNGPPTFooter}}","height":"{{UserProfile.Department.REFDepartmentLogo.HeightPNGPPTFooter}}","image":"{{UserProfile.Department.REFDepartmentLogo.ImagePNG}}","visibility":"{{IfElse(Form.FooterLogo, VisibilityType.Visible,VisibilityType.Hidden)}}","type":"image","disableUpdates":false}},{"type":"shape","elementConfiguration":{"binding":"{{Form.Footer}}","type":"text","disableUpdates":false}},{"type":"shape","elementConfiguration":{"binding":"{{UserProfile.Department.DepartmentName}}","visibility":"{{IfElse(Form.FooterLogo, VisibilityType.Hidden,VisibilityType.Visible)}}","type":"text","disableUpdates":false}}],"slideId":"637750113834113416","enableDocumentContentUpdater":true,"version":"2.0"}]]></TemplafySlideTemplateConfiguration>
 </file>
 
 <file path=customXml/item55.xml><?xml version="1.0" encoding="utf-8"?>
-<TemplafySlideTemplateConfiguration><![CDATA[{"slideVersion":1,"isValidatorEnabled":false,"isLocked":false,"elementsMetadata":[{"type":"shape","elementConfiguration":{"binding":"{{FormatDateTime(Form.Date,Translate(\"DateFormat\"),DocumentLanguage)}}","type":"text","disableUpdates":false}},{"type":"shape","elementConfiguration":{"width":"{{UserProfile.Department.REFDepartmentLogo.WidthPNGPPTFooter}}","height":"{{UserProfile.Department.REFDepartmentLogo.HeightPNGPPTFooter}}","image":"{{UserProfile.Department.REFDepartmentLogo.ImagePNG}}","visibility":"{{IfElse(Form.FooterLogo, VisibilityType.Visible,VisibilityType.Hidden)}}","type":"image","disableUpdates":false}},{"type":"shape","elementConfiguration":{"binding":"{{Form.Footer}}","type":"text","disableUpdates":false}},{"type":"shape","elementConfiguration":{"binding":"{{UserProfile.Department.DepartmentName}}","visibility":"{{IfElse(Form.FooterLogo, VisibilityType.Hidden,VisibilityType.Visible)}}","type":"text","disableUpdates":false}}],"slideId":"637750113834113416","enableDocumentContentUpdater":true,"version":"2.0"}]]></TemplafySlideTemplateConfiguration>
+<TemplafySlideTemplateConfiguration><![CDATA[{"slideVersion":1,"isValidatorEnabled":false,"isLocked":false,"elementsMetadata":[{"type":"shape","elementConfiguration":{"binding":"{{FormatDateTime(Form.Date,Translate(\"DateFormat\"),DocumentLanguage)}}","type":"text","disableUpdates":false}},{"type":"shape","elementConfiguration":{"width":"{{UserProfile.Department.REFDepartmentLogo.WidthPNGPPTFooter}}","height":"{{UserProfile.Department.REFDepartmentLogo.HeightPNGPPTFooter}}","image":"{{UserProfile.Department.REFDepartmentLogo.ImagePNG}}","visibility":"{{IfElse(Form.FooterLogo, VisibilityType.Visible,VisibilityType.Hidden)}}","type":"image","disableUpdates":false}},{"type":"shape","elementConfiguration":{"binding":"{{Form.Footer}}","type":"text","disableUpdates":false}},{"type":"shape","elementConfiguration":{"binding":"{{UserProfile.Department.DepartmentName}}","visibility":"{{IfElse(Form.FooterLogo, VisibilityType.Hidden,VisibilityType.Visible)}}","type":"text","disableUpdates":false}}],"slideId":"637750113834269210","enableDocumentContentUpdater":true,"version":"2.0"}]]></TemplafySlideTemplateConfiguration>
 </file>
 
 <file path=customXml/item6.xml><?xml version="1.0" encoding="utf-8"?>
@@ -15092,54 +16523,145 @@
 </file>
 
 <file path=customXml/item7.xml><?xml version="1.0" encoding="utf-8"?>
-<TemplafySlideFormConfiguration><![CDATA[{"formFields":[],"formDataEntries":[]}]]></TemplafySlideFormConfiguration>
+<TemplafySlideTemplateConfiguration><![CDATA[{"slideVersion":1,"isValidatorEnabled":false,"isLocked":false,"elementsMetadata":[{"type":"shape","elementConfiguration":{"binding":"{{FormatDateTime(Form.Date,Translate(\"DateFormat\"),DocumentLanguage)}}","type":"text","disableUpdates":false}},{"type":"shape","elementConfiguration":{"binding":"{{Form.Footer}}","type":"text","disableUpdates":false}},{"type":"shape","elementConfiguration":{"width":"{{UserProfile.Department.REFDepartmentLogo.WidthPNGPPTFooter}}","height":"{{UserProfile.Department.REFDepartmentLogo.HeightPNGPPTFooter}}","image":"{{UserProfile.Department.REFDepartmentLogo.ImagePNG}}","visibility":"{{IfElse(Form.FooterLogo, VisibilityType.Visible,VisibilityType.Hidden)}}","type":"image","disableUpdates":false}},{"type":"shape","elementConfiguration":{"binding":"{{UserProfile.Department.DepartmentName}}","visibility":"{{IfElse(Form.FooterLogo, VisibilityType.Hidden,VisibilityType.Visible)}}","type":"text","disableUpdates":false}}],"slideId":"637750113834107890","enableDocumentContentUpdater":true,"version":"2.0"}]]></TemplafySlideTemplateConfiguration>
 </file>
 
 <file path=customXml/item8.xml><?xml version="1.0" encoding="utf-8"?>
-<TemplafySlideTemplateConfiguration><![CDATA[{"slideVersion":1,"isValidatorEnabled":false,"isLocked":false,"elementsMetadata":[{"type":"shape","elementConfiguration":{"width":"{{UserProfile.Department.REFDepartmentLogo.WidthPNGPPT}}","height":"{{UserProfile.Department.REFDepartmentLogo.HeightPNGPPT}}","image":"{{UserProfile.Department.REFDepartmentLogo.ImagePNG}}","type":"image","disableUpdates":false}}],"slideId":"637750113834107608","enableDocumentContentUpdater":true,"version":"2.0"}]]></TemplafySlideTemplateConfiguration>
+<TemplafySlideFormConfiguration><![CDATA[{"formFields":[{"required":true,"shareValue":false,"type":"datePicker","name":"Date","label":"Datum"},{"required":false,"placeholder":"","lines":1,"shareValue":false,"type":"textBox","name":"Footer","label":"Fusszeile"},{"defaultValue":{"fixedValue":true},"shareValue":false,"type":"checkBox","name":"FooterLogo","label":"mit Logo in der Fusszeile"}],"formDataEntries":[]}]]></TemplafySlideFormConfiguration>
 </file>
 
 <file path=customXml/item9.xml><?xml version="1.0" encoding="utf-8"?>
-<TemplafySlideFormConfiguration><![CDATA[{"formFields":[{"required":true,"shareValue":false,"type":"datePicker","name":"Date","label":"Datum"},{"required":false,"placeholder":"","lines":1,"shareValue":false,"type":"textBox","name":"Footer","label":"Fusszeile"},{"defaultValue":{"fixedValue":true},"shareValue":false,"type":"checkBox","name":"FooterLogo","label":"mit Logo in der Fusszeile"}],"formDataEntries":[]}]]></TemplafySlideFormConfiguration>
+<TemplafyFormConfiguration><![CDATA[{"formFields":[{"required":true,"shareValue":false,"type":"datePicker","name":"Date","label":"Datum"},{"required":false,"placeholder":"","lines":1,"shareValue":false,"type":"textBox","name":"Footer","label":"Fusszeile"},{"defaultValue":{"fixedValue":true},"shareValue":false,"type":"checkBox","name":"FooterLogo","label":"mit Logo in der Fusszeile"}],"formDataEntries":[{"name":"Date","value":"+Z5Mp3YA6oBTYCzRQ9X9ow=="},{"name":"FooterLogo","value":"iTzqZGj1P6MRGUQq8ahlhA=="}]}]]></TemplafyFormConfiguration>
 </file>
 
 <file path=customXml/itemProps1.xml><?xml version="1.0" encoding="utf-8"?>
+<ds:datastoreItem xmlns:ds="http://schemas.openxmlformats.org/officeDocument/2006/customXml" ds:itemID="{2754228B-0BD8-45C5-B5EB-94306059B5EC}">
+  <ds:schemaRefs/>
+</ds:datastoreItem>
+</file>
+
+<file path=customXml/itemProps10.xml><?xml version="1.0" encoding="utf-8"?>
+<ds:datastoreItem xmlns:ds="http://schemas.openxmlformats.org/officeDocument/2006/customXml" ds:itemID="{D4F2BED0-C414-46BA-AF63-E57A81C2B9FC}">
+  <ds:schemaRefs/>
+</ds:datastoreItem>
+</file>
+
+<file path=customXml/itemProps11.xml><?xml version="1.0" encoding="utf-8"?>
+<ds:datastoreItem xmlns:ds="http://schemas.openxmlformats.org/officeDocument/2006/customXml" ds:itemID="{10DF96B0-5AB8-4312-B635-364A70A3CD64}">
+  <ds:schemaRefs/>
+</ds:datastoreItem>
+</file>
+
+<file path=customXml/itemProps12.xml><?xml version="1.0" encoding="utf-8"?>
 <ds:datastoreItem xmlns:ds="http://schemas.openxmlformats.org/officeDocument/2006/customXml" ds:itemID="{4CA08EE0-6BFF-42CE-9AEB-A2BB1FFE120F}">
   <ds:schemaRefs/>
 </ds:datastoreItem>
 </file>
 
-<file path=customXml/itemProps10.xml><?xml version="1.0" encoding="utf-8"?>
-<ds:datastoreItem xmlns:ds="http://schemas.openxmlformats.org/officeDocument/2006/customXml" ds:itemID="{765EC35B-8AF2-40F0-BFE1-C19B71F66BB7}">
+<file path=customXml/itemProps13.xml><?xml version="1.0" encoding="utf-8"?>
+<ds:datastoreItem xmlns:ds="http://schemas.openxmlformats.org/officeDocument/2006/customXml" ds:itemID="{A1DE4887-2FA9-49BA-B8BF-E79FB8D56958}">
   <ds:schemaRefs/>
 </ds:datastoreItem>
 </file>
 
-<file path=customXml/itemProps11.xml><?xml version="1.0" encoding="utf-8"?>
-<ds:datastoreItem xmlns:ds="http://schemas.openxmlformats.org/officeDocument/2006/customXml" ds:itemID="{7F01121C-13E9-483A-B7E6-46DD03B75200}">
+<file path=customXml/itemProps14.xml><?xml version="1.0" encoding="utf-8"?>
+<ds:datastoreItem xmlns:ds="http://schemas.openxmlformats.org/officeDocument/2006/customXml" ds:itemID="{BA2D1F52-F0AD-4181-AA76-1D6F58ED2D3E}">
   <ds:schemaRefs/>
 </ds:datastoreItem>
 </file>
 
-<file path=customXml/itemProps12.xml><?xml version="1.0" encoding="utf-8"?>
-<ds:datastoreItem xmlns:ds="http://schemas.openxmlformats.org/officeDocument/2006/customXml" ds:itemID="{9BA6235D-7E1A-4B9C-ADE5-24E162A87D03}">
+<file path=customXml/itemProps15.xml><?xml version="1.0" encoding="utf-8"?>
+<ds:datastoreItem xmlns:ds="http://schemas.openxmlformats.org/officeDocument/2006/customXml" ds:itemID="{DC466C4A-550D-4144-830C-62BC000CB329}">
   <ds:schemaRefs/>
 </ds:datastoreItem>
 </file>
 
-<file path=customXml/itemProps13.xml><?xml version="1.0" encoding="utf-8"?>
-<ds:datastoreItem xmlns:ds="http://schemas.openxmlformats.org/officeDocument/2006/customXml" ds:itemID="{BE973802-FCC6-412D-B906-CC95D3BA7379}">
+<file path=customXml/itemProps16.xml><?xml version="1.0" encoding="utf-8"?>
+<ds:datastoreItem xmlns:ds="http://schemas.openxmlformats.org/officeDocument/2006/customXml" ds:itemID="{329B48A9-5067-463C-80F4-7C90FDDEC242}">
+  <ds:schemaRefs>
+    <ds:schemaRef ds:uri="http://schemas.microsoft.com/office/2006/metadata/contentType"/>
+    <ds:schemaRef ds:uri="http://schemas.microsoft.com/office/2006/metadata/properties/metaAttributes"/>
+    <ds:schemaRef ds:uri="http://www.w3.org/2001/XMLSchema"/>
+    <ds:schemaRef ds:uri="http://schemas.microsoft.com/office/2006/metadata/properties"/>
+    <ds:schemaRef ds:uri="07c8a24f-8b40-44ca-950f-ae5db2c4fa23"/>
+    <ds:schemaRef ds:uri="71d337dc-809a-4269-a690-d6cd31b4acd0"/>
+    <ds:schemaRef ds:uri="http://schemas.microsoft.com/office/2006/documentManagement/types"/>
+    <ds:schemaRef ds:uri="http://schemas.microsoft.com/office/infopath/2007/PartnerControls"/>
+    <ds:schemaRef ds:uri="http://schemas.openxmlformats.org/package/2006/metadata/core-properties"/>
+    <ds:schemaRef ds:uri="http://purl.org/dc/elements/1.1/"/>
+    <ds:schemaRef ds:uri="http://purl.org/dc/terms/"/>
+    <ds:schemaRef ds:uri="http://schemas.microsoft.com/internal/obd"/>
+  </ds:schemaRefs>
+</ds:datastoreItem>
+</file>
+
+<file path=customXml/itemProps17.xml><?xml version="1.0" encoding="utf-8"?>
+<ds:datastoreItem xmlns:ds="http://schemas.openxmlformats.org/officeDocument/2006/customXml" ds:itemID="{600482A4-E9CD-4DA2-AD6D-ED3DAAC7A90E}">
   <ds:schemaRefs/>
 </ds:datastoreItem>
 </file>
 
-<file path=customXml/itemProps14.xml><?xml version="1.0" encoding="utf-8"?>
-<ds:datastoreItem xmlns:ds="http://schemas.openxmlformats.org/officeDocument/2006/customXml" ds:itemID="{DCC1EDEA-6109-42CD-9115-6BD85EF38642}">
+<file path=customXml/itemProps18.xml><?xml version="1.0" encoding="utf-8"?>
+<ds:datastoreItem xmlns:ds="http://schemas.openxmlformats.org/officeDocument/2006/customXml" ds:itemID="{A35AE265-4942-487E-9782-B0313E5BE5BA}">
   <ds:schemaRefs/>
 </ds:datastoreItem>
 </file>
 
-<file path=customXml/itemProps15.xml><?xml version="1.0" encoding="utf-8"?>
+<file path=customXml/itemProps19.xml><?xml version="1.0" encoding="utf-8"?>
+<ds:datastoreItem xmlns:ds="http://schemas.openxmlformats.org/officeDocument/2006/customXml" ds:itemID="{708F14FE-66F6-4744-AD1D-7632167C0D90}">
+  <ds:schemaRefs/>
+</ds:datastoreItem>
+</file>
+
+<file path=customXml/itemProps2.xml><?xml version="1.0" encoding="utf-8"?>
+<ds:datastoreItem xmlns:ds="http://schemas.openxmlformats.org/officeDocument/2006/customXml" ds:itemID="{3DAEF0AC-8F99-434C-A5E8-5F51192FBC2E}">
+  <ds:schemaRefs/>
+</ds:datastoreItem>
+</file>
+
+<file path=customXml/itemProps20.xml><?xml version="1.0" encoding="utf-8"?>
+<ds:datastoreItem xmlns:ds="http://schemas.openxmlformats.org/officeDocument/2006/customXml" ds:itemID="{DD23DDCC-ABAF-42D1-9CB2-07E72D883C32}">
+  <ds:schemaRefs/>
+</ds:datastoreItem>
+</file>
+
+<file path=customXml/itemProps21.xml><?xml version="1.0" encoding="utf-8"?>
+<ds:datastoreItem xmlns:ds="http://schemas.openxmlformats.org/officeDocument/2006/customXml" ds:itemID="{57D5D086-3D49-4363-99E9-93FB10F7001F}">
+  <ds:schemaRefs/>
+</ds:datastoreItem>
+</file>
+
+<file path=customXml/itemProps22.xml><?xml version="1.0" encoding="utf-8"?>
+<ds:datastoreItem xmlns:ds="http://schemas.openxmlformats.org/officeDocument/2006/customXml" ds:itemID="{B0437DFC-C606-441B-B8FC-7769CEA71C34}">
+  <ds:schemaRefs/>
+</ds:datastoreItem>
+</file>
+
+<file path=customXml/itemProps23.xml><?xml version="1.0" encoding="utf-8"?>
+<ds:datastoreItem xmlns:ds="http://schemas.openxmlformats.org/officeDocument/2006/customXml" ds:itemID="{5CDA3866-4191-4ABE-B434-81C70850BD71}">
+  <ds:schemaRefs/>
+</ds:datastoreItem>
+</file>
+
+<file path=customXml/itemProps24.xml><?xml version="1.0" encoding="utf-8"?>
+<ds:datastoreItem xmlns:ds="http://schemas.openxmlformats.org/officeDocument/2006/customXml" ds:itemID="{664F7CED-B0DA-429D-9A7F-4CBF61D24C26}">
+  <ds:schemaRefs/>
+</ds:datastoreItem>
+</file>
+
+<file path=customXml/itemProps25.xml><?xml version="1.0" encoding="utf-8"?>
+<ds:datastoreItem xmlns:ds="http://schemas.openxmlformats.org/officeDocument/2006/customXml" ds:itemID="{1EEB1A81-9962-42B8-BE89-F24FBB4418EA}">
+  <ds:schemaRefs/>
+</ds:datastoreItem>
+</file>
+
+<file path=customXml/itemProps26.xml><?xml version="1.0" encoding="utf-8"?>
+<ds:datastoreItem xmlns:ds="http://schemas.openxmlformats.org/officeDocument/2006/customXml" ds:itemID="{10CA47D5-62BF-412C-82C9-AD9C9628E81D}">
+  <ds:schemaRefs/>
+</ds:datastoreItem>
+</file>
+
+<file path=customXml/itemProps27.xml><?xml version="1.0" encoding="utf-8"?>
 <ds:datastoreItem xmlns:ds="http://schemas.openxmlformats.org/officeDocument/2006/customXml" ds:itemID="{ED2A37DE-9640-4BAD-87EB-02349D3561C8}">
   <ds:schemaRefs>
     <ds:schemaRef ds:uri="http://schemas.microsoft.com/sharepoint/v3/contenttype/forms"/>
@@ -15147,290 +16669,199 @@
 </ds:datastoreItem>
 </file>
 
-<file path=customXml/itemProps16.xml><?xml version="1.0" encoding="utf-8"?>
+<file path=customXml/itemProps28.xml><?xml version="1.0" encoding="utf-8"?>
+<ds:datastoreItem xmlns:ds="http://schemas.openxmlformats.org/officeDocument/2006/customXml" ds:itemID="{765EC35B-8AF2-40F0-BFE1-C19B71F66BB7}">
+  <ds:schemaRefs/>
+</ds:datastoreItem>
+</file>
+
+<file path=customXml/itemProps29.xml><?xml version="1.0" encoding="utf-8"?>
+<ds:datastoreItem xmlns:ds="http://schemas.openxmlformats.org/officeDocument/2006/customXml" ds:itemID="{357320CA-212D-4182-9447-766838BC3644}">
+  <ds:schemaRefs/>
+</ds:datastoreItem>
+</file>
+
+<file path=customXml/itemProps3.xml><?xml version="1.0" encoding="utf-8"?>
+<ds:datastoreItem xmlns:ds="http://schemas.openxmlformats.org/officeDocument/2006/customXml" ds:itemID="{9B272F4A-5C95-4892-AAD9-D7AEF7A26919}">
+  <ds:schemaRefs/>
+</ds:datastoreItem>
+</file>
+
+<file path=customXml/itemProps30.xml><?xml version="1.0" encoding="utf-8"?>
+<ds:datastoreItem xmlns:ds="http://schemas.openxmlformats.org/officeDocument/2006/customXml" ds:itemID="{BE973802-FCC6-412D-B906-CC95D3BA7379}">
+  <ds:schemaRefs/>
+</ds:datastoreItem>
+</file>
+
+<file path=customXml/itemProps31.xml><?xml version="1.0" encoding="utf-8"?>
+<ds:datastoreItem xmlns:ds="http://schemas.openxmlformats.org/officeDocument/2006/customXml" ds:itemID="{B77E3FB8-6B77-4C09-82A2-9AF5ACD3601A}">
+  <ds:schemaRefs/>
+</ds:datastoreItem>
+</file>
+
+<file path=customXml/itemProps32.xml><?xml version="1.0" encoding="utf-8"?>
+<ds:datastoreItem xmlns:ds="http://schemas.openxmlformats.org/officeDocument/2006/customXml" ds:itemID="{7D15E2AB-9AA3-4994-B62A-3E2F5C1A2EC4}">
+  <ds:schemaRefs/>
+</ds:datastoreItem>
+</file>
+
+<file path=customXml/itemProps33.xml><?xml version="1.0" encoding="utf-8"?>
+<ds:datastoreItem xmlns:ds="http://schemas.openxmlformats.org/officeDocument/2006/customXml" ds:itemID="{6567BD5C-CC0C-4648-BED2-6CE28F06E5A9}">
+  <ds:schemaRefs>
+    <ds:schemaRef ds:uri="http://schemas.microsoft.com/office/2006/metadata/properties"/>
+    <ds:schemaRef ds:uri="http://purl.org/dc/elements/1.1/"/>
+    <ds:schemaRef ds:uri="http://www.w3.org/XML/1998/namespace"/>
+    <ds:schemaRef ds:uri="http://purl.org/dc/terms/"/>
+    <ds:schemaRef ds:uri="http://schemas.microsoft.com/office/2006/documentManagement/types"/>
+    <ds:schemaRef ds:uri="http://schemas.openxmlformats.org/package/2006/metadata/core-properties"/>
+    <ds:schemaRef ds:uri="http://purl.org/dc/dcmitype/"/>
+    <ds:schemaRef ds:uri="07c8a24f-8b40-44ca-950f-ae5db2c4fa23"/>
+    <ds:schemaRef ds:uri="http://schemas.microsoft.com/office/infopath/2007/PartnerControls"/>
+    <ds:schemaRef ds:uri="71d337dc-809a-4269-a690-d6cd31b4acd0"/>
+  </ds:schemaRefs>
+</ds:datastoreItem>
+</file>
+
+<file path=customXml/itemProps34.xml><?xml version="1.0" encoding="utf-8"?>
+<ds:datastoreItem xmlns:ds="http://schemas.openxmlformats.org/officeDocument/2006/customXml" ds:itemID="{AB24DB1C-E169-480A-9390-B8AAE56F6957}">
+  <ds:schemaRefs/>
+</ds:datastoreItem>
+</file>
+
+<file path=customXml/itemProps35.xml><?xml version="1.0" encoding="utf-8"?>
 <ds:datastoreItem xmlns:ds="http://schemas.openxmlformats.org/officeDocument/2006/customXml" ds:itemID="{22F15940-6A24-4FEF-A717-C5EC22A291A1}">
   <ds:schemaRefs/>
 </ds:datastoreItem>
 </file>
 
-<file path=customXml/itemProps17.xml><?xml version="1.0" encoding="utf-8"?>
-<ds:datastoreItem xmlns:ds="http://schemas.openxmlformats.org/officeDocument/2006/customXml" ds:itemID="{10CA47D5-62BF-412C-82C9-AD9C9628E81D}">
+<file path=customXml/itemProps36.xml><?xml version="1.0" encoding="utf-8"?>
+<ds:datastoreItem xmlns:ds="http://schemas.openxmlformats.org/officeDocument/2006/customXml" ds:itemID="{45B06F8E-AA4D-4F38-9B8B-099300ECC694}">
   <ds:schemaRefs/>
 </ds:datastoreItem>
 </file>
 
-<file path=customXml/itemProps18.xml><?xml version="1.0" encoding="utf-8"?>
-<ds:datastoreItem xmlns:ds="http://schemas.openxmlformats.org/officeDocument/2006/customXml" ds:itemID="{3DAEF0AC-8F99-434C-A5E8-5F51192FBC2E}">
+<file path=customXml/itemProps37.xml><?xml version="1.0" encoding="utf-8"?>
+<ds:datastoreItem xmlns:ds="http://schemas.openxmlformats.org/officeDocument/2006/customXml" ds:itemID="{55868A80-4CEC-40D9-B298-8CDA543EF6B4}">
   <ds:schemaRefs/>
 </ds:datastoreItem>
 </file>
 
-<file path=customXml/itemProps19.xml><?xml version="1.0" encoding="utf-8"?>
+<file path=customXml/itemProps38.xml><?xml version="1.0" encoding="utf-8"?>
+<ds:datastoreItem xmlns:ds="http://schemas.openxmlformats.org/officeDocument/2006/customXml" ds:itemID="{90BBE109-2328-4050-BC2C-A7208F976826}">
+  <ds:schemaRefs/>
+</ds:datastoreItem>
+</file>
+
+<file path=customXml/itemProps39.xml><?xml version="1.0" encoding="utf-8"?>
+<ds:datastoreItem xmlns:ds="http://schemas.openxmlformats.org/officeDocument/2006/customXml" ds:itemID="{66FA18C0-85E2-48F7-961D-7BE01285C862}">
+  <ds:schemaRefs/>
+</ds:datastoreItem>
+</file>
+
+<file path=customXml/itemProps4.xml><?xml version="1.0" encoding="utf-8"?>
+<ds:datastoreItem xmlns:ds="http://schemas.openxmlformats.org/officeDocument/2006/customXml" ds:itemID="{187CDBC8-4301-CA40-9C1E-C2AAF09F8BBD}">
+  <ds:schemaRefs/>
+</ds:datastoreItem>
+</file>
+
+<file path=customXml/itemProps40.xml><?xml version="1.0" encoding="utf-8"?>
+<ds:datastoreItem xmlns:ds="http://schemas.openxmlformats.org/officeDocument/2006/customXml" ds:itemID="{4907208B-9EFE-4124-A198-13AD782B858C}">
+  <ds:schemaRefs/>
+</ds:datastoreItem>
+</file>
+
+<file path=customXml/itemProps41.xml><?xml version="1.0" encoding="utf-8"?>
+<ds:datastoreItem xmlns:ds="http://schemas.openxmlformats.org/officeDocument/2006/customXml" ds:itemID="{7F01121C-13E9-483A-B7E6-46DD03B75200}">
+  <ds:schemaRefs/>
+</ds:datastoreItem>
+</file>
+
+<file path=customXml/itemProps42.xml><?xml version="1.0" encoding="utf-8"?>
+<ds:datastoreItem xmlns:ds="http://schemas.openxmlformats.org/officeDocument/2006/customXml" ds:itemID="{FFAB5E35-3CC7-4E36-92C6-6DCD3F34D8CF}">
+  <ds:schemaRefs/>
+</ds:datastoreItem>
+</file>
+
+<file path=customXml/itemProps43.xml><?xml version="1.0" encoding="utf-8"?>
+<ds:datastoreItem xmlns:ds="http://schemas.openxmlformats.org/officeDocument/2006/customXml" ds:itemID="{0AF5DDBE-5E75-48FC-BA21-32ACE2374F30}">
+  <ds:schemaRefs/>
+</ds:datastoreItem>
+</file>
+
+<file path=customXml/itemProps44.xml><?xml version="1.0" encoding="utf-8"?>
+<ds:datastoreItem xmlns:ds="http://schemas.openxmlformats.org/officeDocument/2006/customXml" ds:itemID="{FCB61E48-E0AD-4F83-9AA4-8AC901918564}">
+  <ds:schemaRefs/>
+</ds:datastoreItem>
+</file>
+
+<file path=customXml/itemProps45.xml><?xml version="1.0" encoding="utf-8"?>
 <ds:datastoreItem xmlns:ds="http://schemas.openxmlformats.org/officeDocument/2006/customXml" ds:itemID="{552033E5-1422-443A-ABA7-A9FA421D7629}">
   <ds:schemaRefs/>
 </ds:datastoreItem>
 </file>
 
-<file path=customXml/itemProps2.xml><?xml version="1.0" encoding="utf-8"?>
-<ds:datastoreItem xmlns:ds="http://schemas.openxmlformats.org/officeDocument/2006/customXml" ds:itemID="{357320CA-212D-4182-9447-766838BC3644}">
+<file path=customXml/itemProps46.xml><?xml version="1.0" encoding="utf-8"?>
+<ds:datastoreItem xmlns:ds="http://schemas.openxmlformats.org/officeDocument/2006/customXml" ds:itemID="{46D5571C-37EA-4B1A-965C-D1FF428CABBA}">
   <ds:schemaRefs/>
 </ds:datastoreItem>
 </file>
 
-<file path=customXml/itemProps20.xml><?xml version="1.0" encoding="utf-8"?>
-<ds:datastoreItem xmlns:ds="http://schemas.openxmlformats.org/officeDocument/2006/customXml" ds:itemID="{66FA18C0-85E2-48F7-961D-7BE01285C862}">
+<file path=customXml/itemProps47.xml><?xml version="1.0" encoding="utf-8"?>
+<ds:datastoreItem xmlns:ds="http://schemas.openxmlformats.org/officeDocument/2006/customXml" ds:itemID="{F0F415B7-3B60-D646-8E61-195FAF28F2E9}">
   <ds:schemaRefs/>
 </ds:datastoreItem>
 </file>
 
-<file path=customXml/itemProps21.xml><?xml version="1.0" encoding="utf-8"?>
-<ds:datastoreItem xmlns:ds="http://schemas.openxmlformats.org/officeDocument/2006/customXml" ds:itemID="{90BBE109-2328-4050-BC2C-A7208F976826}">
+<file path=customXml/itemProps48.xml><?xml version="1.0" encoding="utf-8"?>
+<ds:datastoreItem xmlns:ds="http://schemas.openxmlformats.org/officeDocument/2006/customXml" ds:itemID="{84926F0E-4CF9-4868-9C6A-F4B02CC81AC4}">
   <ds:schemaRefs/>
 </ds:datastoreItem>
 </file>
 
-<file path=customXml/itemProps22.xml><?xml version="1.0" encoding="utf-8"?>
-<ds:datastoreItem xmlns:ds="http://schemas.openxmlformats.org/officeDocument/2006/customXml" ds:itemID="{A435609F-4C76-4415-A5FC-BB21AE5C4FD2}">
+<file path=customXml/itemProps49.xml><?xml version="1.0" encoding="utf-8"?>
+<ds:datastoreItem xmlns:ds="http://schemas.openxmlformats.org/officeDocument/2006/customXml" ds:itemID="{5F64DE57-8A63-47CA-A8AA-FC8E23CF697A}">
   <ds:schemaRefs/>
 </ds:datastoreItem>
 </file>
 
-<file path=customXml/itemProps23.xml><?xml version="1.0" encoding="utf-8"?>
-<ds:datastoreItem xmlns:ds="http://schemas.openxmlformats.org/officeDocument/2006/customXml" ds:itemID="{DC466C4A-550D-4144-830C-62BC000CB329}">
+<file path=customXml/itemProps5.xml><?xml version="1.0" encoding="utf-8"?>
+<ds:datastoreItem xmlns:ds="http://schemas.openxmlformats.org/officeDocument/2006/customXml" ds:itemID="{C9933F99-DED2-42B9-8123-10C71C06D0F5}">
   <ds:schemaRefs/>
 </ds:datastoreItem>
 </file>
 
-<file path=customXml/itemProps24.xml><?xml version="1.0" encoding="utf-8"?>
-<ds:datastoreItem xmlns:ds="http://schemas.openxmlformats.org/officeDocument/2006/customXml" ds:itemID="{5CDA3866-4191-4ABE-B434-81C70850BD71}">
-  <ds:schemaRefs/>
-</ds:datastoreItem>
-</file>
-
-<file path=customXml/itemProps25.xml><?xml version="1.0" encoding="utf-8"?>
-<ds:datastoreItem xmlns:ds="http://schemas.openxmlformats.org/officeDocument/2006/customXml" ds:itemID="{B77E3FB8-6B77-4C09-82A2-9AF5ACD3601A}">
-  <ds:schemaRefs/>
-</ds:datastoreItem>
-</file>
-
-<file path=customXml/itemProps26.xml><?xml version="1.0" encoding="utf-8"?>
-<ds:datastoreItem xmlns:ds="http://schemas.openxmlformats.org/officeDocument/2006/customXml" ds:itemID="{FCB61E48-E0AD-4F83-9AA4-8AC901918564}">
-  <ds:schemaRefs/>
-</ds:datastoreItem>
-</file>
-
-<file path=customXml/itemProps27.xml><?xml version="1.0" encoding="utf-8"?>
-<ds:datastoreItem xmlns:ds="http://schemas.openxmlformats.org/officeDocument/2006/customXml" ds:itemID="{0AF5DDBE-5E75-48FC-BA21-32ACE2374F30}">
-  <ds:schemaRefs/>
-</ds:datastoreItem>
-</file>
-
-<file path=customXml/itemProps28.xml><?xml version="1.0" encoding="utf-8"?>
-<ds:datastoreItem xmlns:ds="http://schemas.openxmlformats.org/officeDocument/2006/customXml" ds:itemID="{187CDBC8-4301-CA40-9C1E-C2AAF09F8BBD}">
-  <ds:schemaRefs/>
-</ds:datastoreItem>
-</file>
-
-<file path=customXml/itemProps29.xml><?xml version="1.0" encoding="utf-8"?>
-<ds:datastoreItem xmlns:ds="http://schemas.openxmlformats.org/officeDocument/2006/customXml" ds:itemID="{4907208B-9EFE-4124-A198-13AD782B858C}">
-  <ds:schemaRefs/>
-</ds:datastoreItem>
-</file>
-
-<file path=customXml/itemProps3.xml><?xml version="1.0" encoding="utf-8"?>
+<file path=customXml/itemProps50.xml><?xml version="1.0" encoding="utf-8"?>
 <ds:datastoreItem xmlns:ds="http://schemas.openxmlformats.org/officeDocument/2006/customXml" ds:itemID="{8AA700CF-41AC-4CCC-923C-17ED3F632772}">
   <ds:schemaRefs/>
 </ds:datastoreItem>
 </file>
 
-<file path=customXml/itemProps30.xml><?xml version="1.0" encoding="utf-8"?>
-<ds:datastoreItem xmlns:ds="http://schemas.openxmlformats.org/officeDocument/2006/customXml" ds:itemID="{6567BD5C-CC0C-4648-BED2-6CE28F06E5A9}">
-  <ds:schemaRefs>
-    <ds:schemaRef ds:uri="07c8a24f-8b40-44ca-950f-ae5db2c4fa23"/>
-    <ds:schemaRef ds:uri="71d337dc-809a-4269-a690-d6cd31b4acd0"/>
-    <ds:schemaRef ds:uri="http://purl.org/dc/dcmitype/"/>
-    <ds:schemaRef ds:uri="http://purl.org/dc/elements/1.1/"/>
-    <ds:schemaRef ds:uri="http://purl.org/dc/terms/"/>
-    <ds:schemaRef ds:uri="http://schemas.microsoft.com/office/2006/documentManagement/types"/>
-    <ds:schemaRef ds:uri="http://schemas.microsoft.com/office/2006/metadata/properties"/>
-    <ds:schemaRef ds:uri="http://schemas.microsoft.com/office/infopath/2007/PartnerControls"/>
-    <ds:schemaRef ds:uri="http://schemas.openxmlformats.org/package/2006/metadata/core-properties"/>
-    <ds:schemaRef ds:uri="http://www.w3.org/XML/1998/namespace"/>
-  </ds:schemaRefs>
-</ds:datastoreItem>
-</file>
-
-<file path=customXml/itemProps31.xml><?xml version="1.0" encoding="utf-8"?>
-<ds:datastoreItem xmlns:ds="http://schemas.openxmlformats.org/officeDocument/2006/customXml" ds:itemID="{7D15E2AB-9AA3-4994-B62A-3E2F5C1A2EC4}">
+<file path=customXml/itemProps51.xml><?xml version="1.0" encoding="utf-8"?>
+<ds:datastoreItem xmlns:ds="http://schemas.openxmlformats.org/officeDocument/2006/customXml" ds:itemID="{7DDF22D5-378F-4B43-9E2C-6011B6850318}">
   <ds:schemaRefs/>
 </ds:datastoreItem>
 </file>
 
-<file path=customXml/itemProps32.xml><?xml version="1.0" encoding="utf-8"?>
-<ds:datastoreItem xmlns:ds="http://schemas.openxmlformats.org/officeDocument/2006/customXml" ds:itemID="{A1DE4887-2FA9-49BA-B8BF-E79FB8D56958}">
-  <ds:schemaRefs/>
-</ds:datastoreItem>
-</file>
-
-<file path=customXml/itemProps33.xml><?xml version="1.0" encoding="utf-8"?>
-<ds:datastoreItem xmlns:ds="http://schemas.openxmlformats.org/officeDocument/2006/customXml" ds:itemID="{DD23DDCC-ABAF-42D1-9CB2-07E72D883C32}">
-  <ds:schemaRefs/>
-</ds:datastoreItem>
-</file>
-
-<file path=customXml/itemProps34.xml><?xml version="1.0" encoding="utf-8"?>
-<ds:datastoreItem xmlns:ds="http://schemas.openxmlformats.org/officeDocument/2006/customXml" ds:itemID="{329B48A9-5067-463C-80F4-7C90FDDEC242}">
-  <ds:schemaRefs>
-    <ds:schemaRef ds:uri="07c8a24f-8b40-44ca-950f-ae5db2c4fa23"/>
-    <ds:schemaRef ds:uri="71d337dc-809a-4269-a690-d6cd31b4acd0"/>
-    <ds:schemaRef ds:uri="http://purl.org/dc/elements/1.1/"/>
-    <ds:schemaRef ds:uri="http://purl.org/dc/terms/"/>
-    <ds:schemaRef ds:uri="http://schemas.microsoft.com/internal/obd"/>
-    <ds:schemaRef ds:uri="http://schemas.microsoft.com/office/2006/documentManagement/types"/>
-    <ds:schemaRef ds:uri="http://schemas.microsoft.com/office/2006/metadata/contentType"/>
-    <ds:schemaRef ds:uri="http://schemas.microsoft.com/office/2006/metadata/properties"/>
-    <ds:schemaRef ds:uri="http://schemas.microsoft.com/office/2006/metadata/properties/metaAttributes"/>
-    <ds:schemaRef ds:uri="http://schemas.microsoft.com/office/infopath/2007/PartnerControls"/>
-    <ds:schemaRef ds:uri="http://schemas.openxmlformats.org/package/2006/metadata/core-properties"/>
-    <ds:schemaRef ds:uri="http://www.w3.org/2001/XMLSchema"/>
-  </ds:schemaRefs>
-</ds:datastoreItem>
-</file>
-
-<file path=customXml/itemProps35.xml><?xml version="1.0" encoding="utf-8"?>
-<ds:datastoreItem xmlns:ds="http://schemas.openxmlformats.org/officeDocument/2006/customXml" ds:itemID="{84926F0E-4CF9-4868-9C6A-F4B02CC81AC4}">
-  <ds:schemaRefs/>
-</ds:datastoreItem>
-</file>
-
-<file path=customXml/itemProps36.xml><?xml version="1.0" encoding="utf-8"?>
-<ds:datastoreItem xmlns:ds="http://schemas.openxmlformats.org/officeDocument/2006/customXml" ds:itemID="{C9933F99-DED2-42B9-8123-10C71C06D0F5}">
-  <ds:schemaRefs/>
-</ds:datastoreItem>
-</file>
-
-<file path=customXml/itemProps37.xml><?xml version="1.0" encoding="utf-8"?>
-<ds:datastoreItem xmlns:ds="http://schemas.openxmlformats.org/officeDocument/2006/customXml" ds:itemID="{EF9A843C-DEE1-4221-96D6-063228FC0A5C}">
-  <ds:schemaRefs/>
-</ds:datastoreItem>
-</file>
-
-<file path=customXml/itemProps38.xml><?xml version="1.0" encoding="utf-8"?>
-<ds:datastoreItem xmlns:ds="http://schemas.openxmlformats.org/officeDocument/2006/customXml" ds:itemID="{10DF96B0-5AB8-4312-B635-364A70A3CD64}">
-  <ds:schemaRefs/>
-</ds:datastoreItem>
-</file>
-
-<file path=customXml/itemProps39.xml><?xml version="1.0" encoding="utf-8"?>
-<ds:datastoreItem xmlns:ds="http://schemas.openxmlformats.org/officeDocument/2006/customXml" ds:itemID="{2754228B-0BD8-45C5-B5EB-94306059B5EC}">
-  <ds:schemaRefs/>
-</ds:datastoreItem>
-</file>
-
-<file path=customXml/itemProps4.xml><?xml version="1.0" encoding="utf-8"?>
-<ds:datastoreItem xmlns:ds="http://schemas.openxmlformats.org/officeDocument/2006/customXml" ds:itemID="{A35AE265-4942-487E-9782-B0313E5BE5BA}">
-  <ds:schemaRefs/>
-</ds:datastoreItem>
-</file>
-
-<file path=customXml/itemProps40.xml><?xml version="1.0" encoding="utf-8"?>
-<ds:datastoreItem xmlns:ds="http://schemas.openxmlformats.org/officeDocument/2006/customXml" ds:itemID="{45B06F8E-AA4D-4F38-9B8B-099300ECC694}">
-  <ds:schemaRefs/>
-</ds:datastoreItem>
-</file>
-
-<file path=customXml/itemProps41.xml><?xml version="1.0" encoding="utf-8"?>
-<ds:datastoreItem xmlns:ds="http://schemas.openxmlformats.org/officeDocument/2006/customXml" ds:itemID="{55868A80-4CEC-40D9-B298-8CDA543EF6B4}">
-  <ds:schemaRefs/>
-</ds:datastoreItem>
-</file>
-
-<file path=customXml/itemProps42.xml><?xml version="1.0" encoding="utf-8"?>
-<ds:datastoreItem xmlns:ds="http://schemas.openxmlformats.org/officeDocument/2006/customXml" ds:itemID="{AB24DB1C-E169-480A-9390-B8AAE56F6957}">
-  <ds:schemaRefs/>
-</ds:datastoreItem>
-</file>
-
-<file path=customXml/itemProps43.xml><?xml version="1.0" encoding="utf-8"?>
-<ds:datastoreItem xmlns:ds="http://schemas.openxmlformats.org/officeDocument/2006/customXml" ds:itemID="{9B272F4A-5C95-4892-AAD9-D7AEF7A26919}">
-  <ds:schemaRefs/>
-</ds:datastoreItem>
-</file>
-
-<file path=customXml/itemProps44.xml><?xml version="1.0" encoding="utf-8"?>
+<file path=customXml/itemProps52.xml><?xml version="1.0" encoding="utf-8"?>
 <ds:datastoreItem xmlns:ds="http://schemas.openxmlformats.org/officeDocument/2006/customXml" ds:itemID="{DE9A5BE9-B208-45C2-93C1-997B1E18C5E8}">
   <ds:schemaRefs/>
 </ds:datastoreItem>
 </file>
 
-<file path=customXml/itemProps45.xml><?xml version="1.0" encoding="utf-8"?>
-<ds:datastoreItem xmlns:ds="http://schemas.openxmlformats.org/officeDocument/2006/customXml" ds:itemID="{FFAB5E35-3CC7-4E36-92C6-6DCD3F34D8CF}">
-  <ds:schemaRefs/>
-</ds:datastoreItem>
-</file>
-
-<file path=customXml/itemProps46.xml><?xml version="1.0" encoding="utf-8"?>
-<ds:datastoreItem xmlns:ds="http://schemas.openxmlformats.org/officeDocument/2006/customXml" ds:itemID="{1EEB1A81-9962-42B8-BE89-F24FBB4418EA}">
-  <ds:schemaRefs/>
-</ds:datastoreItem>
-</file>
-
-<file path=customXml/itemProps47.xml><?xml version="1.0" encoding="utf-8"?>
+<file path=customXml/itemProps53.xml><?xml version="1.0" encoding="utf-8"?>
 <ds:datastoreItem xmlns:ds="http://schemas.openxmlformats.org/officeDocument/2006/customXml" ds:itemID="{0D0AC32F-64CA-4FED-863B-4E0877612F21}">
   <ds:schemaRefs/>
 </ds:datastoreItem>
 </file>
 
-<file path=customXml/itemProps48.xml><?xml version="1.0" encoding="utf-8"?>
-<ds:datastoreItem xmlns:ds="http://schemas.openxmlformats.org/officeDocument/2006/customXml" ds:itemID="{7DDF22D5-378F-4B43-9E2C-6011B6850318}">
+<file path=customXml/itemProps54.xml><?xml version="1.0" encoding="utf-8"?>
+<ds:datastoreItem xmlns:ds="http://schemas.openxmlformats.org/officeDocument/2006/customXml" ds:itemID="{DCBF58FE-EC78-4FA4-A4AD-8EA1AF6C427F}">
   <ds:schemaRefs/>
 </ds:datastoreItem>
 </file>
 
-<file path=customXml/itemProps49.xml><?xml version="1.0" encoding="utf-8"?>
-<ds:datastoreItem xmlns:ds="http://schemas.openxmlformats.org/officeDocument/2006/customXml" ds:itemID="{664F7CED-B0DA-429D-9A7F-4CBF61D24C26}">
-  <ds:schemaRefs/>
-</ds:datastoreItem>
-</file>
-
-<file path=customXml/itemProps5.xml><?xml version="1.0" encoding="utf-8"?>
-<ds:datastoreItem xmlns:ds="http://schemas.openxmlformats.org/officeDocument/2006/customXml" ds:itemID="{F0F415B7-3B60-D646-8E61-195FAF28F2E9}">
-  <ds:schemaRefs/>
-</ds:datastoreItem>
-</file>
-
-<file path=customXml/itemProps50.xml><?xml version="1.0" encoding="utf-8"?>
-<ds:datastoreItem xmlns:ds="http://schemas.openxmlformats.org/officeDocument/2006/customXml" ds:itemID="{B0437DFC-C606-441B-B8FC-7769CEA71C34}">
-  <ds:schemaRefs/>
-</ds:datastoreItem>
-</file>
-
-<file path=customXml/itemProps51.xml><?xml version="1.0" encoding="utf-8"?>
-<ds:datastoreItem xmlns:ds="http://schemas.openxmlformats.org/officeDocument/2006/customXml" ds:itemID="{D4F2BED0-C414-46BA-AF63-E57A81C2B9FC}">
-  <ds:schemaRefs/>
-</ds:datastoreItem>
-</file>
-
-<file path=customXml/itemProps52.xml><?xml version="1.0" encoding="utf-8"?>
-<ds:datastoreItem xmlns:ds="http://schemas.openxmlformats.org/officeDocument/2006/customXml" ds:itemID="{708F14FE-66F6-4744-AD1D-7632167C0D90}">
-  <ds:schemaRefs/>
-</ds:datastoreItem>
-</file>
-
-<file path=customXml/itemProps53.xml><?xml version="1.0" encoding="utf-8"?>
-<ds:datastoreItem xmlns:ds="http://schemas.openxmlformats.org/officeDocument/2006/customXml" ds:itemID="{5F64DE57-8A63-47CA-A8AA-FC8E23CF697A}">
-  <ds:schemaRefs/>
-</ds:datastoreItem>
-</file>
-
-<file path=customXml/itemProps54.xml><?xml version="1.0" encoding="utf-8"?>
-<ds:datastoreItem xmlns:ds="http://schemas.openxmlformats.org/officeDocument/2006/customXml" ds:itemID="{BA2D1F52-F0AD-4181-AA76-1D6F58ED2D3E}">
-  <ds:schemaRefs/>
-</ds:datastoreItem>
-</file>
-
 <file path=customXml/itemProps55.xml><?xml version="1.0" encoding="utf-8"?>
-<ds:datastoreItem xmlns:ds="http://schemas.openxmlformats.org/officeDocument/2006/customXml" ds:itemID="{DCBF58FE-EC78-4FA4-A4AD-8EA1AF6C427F}">
+<ds:datastoreItem xmlns:ds="http://schemas.openxmlformats.org/officeDocument/2006/customXml" ds:itemID="{DCC1EDEA-6109-42CD-9115-6BD85EF38642}">
   <ds:schemaRefs/>
 </ds:datastoreItem>
 </file>
@@ -15442,19 +16873,19 @@
 </file>
 
 <file path=customXml/itemProps7.xml><?xml version="1.0" encoding="utf-8"?>
-<ds:datastoreItem xmlns:ds="http://schemas.openxmlformats.org/officeDocument/2006/customXml" ds:itemID="{57D5D086-3D49-4363-99E9-93FB10F7001F}">
+<ds:datastoreItem xmlns:ds="http://schemas.openxmlformats.org/officeDocument/2006/customXml" ds:itemID="{EF9A843C-DEE1-4221-96D6-063228FC0A5C}">
   <ds:schemaRefs/>
 </ds:datastoreItem>
 </file>
 
 <file path=customXml/itemProps8.xml><?xml version="1.0" encoding="utf-8"?>
-<ds:datastoreItem xmlns:ds="http://schemas.openxmlformats.org/officeDocument/2006/customXml" ds:itemID="{46D5571C-37EA-4B1A-965C-D1FF428CABBA}">
+<ds:datastoreItem xmlns:ds="http://schemas.openxmlformats.org/officeDocument/2006/customXml" ds:itemID="{A435609F-4C76-4415-A5FC-BB21AE5C4FD2}">
   <ds:schemaRefs/>
 </ds:datastoreItem>
 </file>
 
 <file path=customXml/itemProps9.xml><?xml version="1.0" encoding="utf-8"?>
-<ds:datastoreItem xmlns:ds="http://schemas.openxmlformats.org/officeDocument/2006/customXml" ds:itemID="{600482A4-E9CD-4DA2-AD6D-ED3DAAC7A90E}">
+<ds:datastoreItem xmlns:ds="http://schemas.openxmlformats.org/officeDocument/2006/customXml" ds:itemID="{9BA6235D-7E1A-4B9C-ADE5-24E162A87D03}">
   <ds:schemaRefs/>
 </ds:datastoreItem>
 </file>
